--- a/Fase 1/Evidencias Grupales/MediTriage.pptx
+++ b/Fase 1/Evidencias Grupales/MediTriage.pptx
@@ -5,7 +5,7 @@
     <p:sldMasterId id="2147483726" r:id="rId1"/>
   </p:sldMasterIdLst>
   <p:notesMasterIdLst>
-    <p:notesMasterId r:id="rId15"/>
+    <p:notesMasterId r:id="rId17"/>
   </p:notesMasterIdLst>
   <p:sldIdLst>
     <p:sldId id="256" r:id="rId2"/>
@@ -18,27 +18,36 @@
     <p:sldId id="263" r:id="rId9"/>
     <p:sldId id="264" r:id="rId10"/>
     <p:sldId id="265" r:id="rId11"/>
-    <p:sldId id="268" r:id="rId12"/>
-    <p:sldId id="270" r:id="rId13"/>
-    <p:sldId id="269" r:id="rId14"/>
+    <p:sldId id="270" r:id="rId12"/>
+    <p:sldId id="271" r:id="rId13"/>
+    <p:sldId id="273" r:id="rId14"/>
+    <p:sldId id="269" r:id="rId15"/>
+    <p:sldId id="274" r:id="rId16"/>
   </p:sldIdLst>
   <p:sldSz cx="14630400" cy="8229600"/>
   <p:notesSz cx="8229600" cy="14630400"/>
   <p:embeddedFontLst>
     <p:embeddedFont>
+      <p:font typeface="Aptos Narrow" panose="020B0004020202020204" pitchFamily="34" charset="0"/>
+      <p:regular r:id="rId18"/>
+      <p:bold r:id="rId19"/>
+      <p:italic r:id="rId20"/>
+      <p:boldItalic r:id="rId21"/>
+    </p:embeddedFont>
+    <p:embeddedFont>
       <p:font typeface="Gill Sans MT" panose="020B0502020104020203" pitchFamily="34" charset="0"/>
-      <p:regular r:id="rId16"/>
-      <p:bold r:id="rId17"/>
-      <p:italic r:id="rId18"/>
-      <p:boldItalic r:id="rId19"/>
+      <p:regular r:id="rId22"/>
+      <p:bold r:id="rId23"/>
+      <p:italic r:id="rId24"/>
+      <p:boldItalic r:id="rId25"/>
     </p:embeddedFont>
     <p:embeddedFont>
       <p:font typeface="Source Sans 3" panose="020B0604020202020204" charset="0"/>
-      <p:regular r:id="rId20"/>
+      <p:regular r:id="rId26"/>
     </p:embeddedFont>
     <p:embeddedFont>
       <p:font typeface="Source Serif 4 Semi Bold" panose="020B0604020202020204" charset="0"/>
-      <p:regular r:id="rId21"/>
+      <p:regular r:id="rId27"/>
     </p:embeddedFont>
   </p:embeddedFontLst>
   <p:defaultTextStyle>
@@ -445,7 +454,7 @@
         <p:cNvPr id="1" name="">
           <a:extLst>
             <a:ext uri="{FF2B5EF4-FFF2-40B4-BE49-F238E27FC236}">
-              <a16:creationId xmlns:a16="http://schemas.microsoft.com/office/drawing/2014/main" id="{7A2D5DCD-EDC5-5361-1BD1-82930F4110C8}"/>
+              <a16:creationId xmlns:a16="http://schemas.microsoft.com/office/drawing/2014/main" id="{5ED5E7A7-B918-69BF-9879-FCA16BD9B34F}"/>
             </a:ext>
           </a:extLst>
         </p:cNvPr>
@@ -465,7 +474,7 @@
           <p:cNvPr id="2" name="Slide Image Placeholder 1">
             <a:extLst>
               <a:ext uri="{FF2B5EF4-FFF2-40B4-BE49-F238E27FC236}">
-                <a16:creationId xmlns:a16="http://schemas.microsoft.com/office/drawing/2014/main" id="{98F415CB-8BEB-2D66-FE36-6B16B8A1F3FF}"/>
+                <a16:creationId xmlns:a16="http://schemas.microsoft.com/office/drawing/2014/main" id="{3FD38C74-7FE6-F75C-E4C8-FF69D368025C}"/>
               </a:ext>
             </a:extLst>
           </p:cNvPr>
@@ -483,7 +492,7 @@
           <p:cNvPr id="3" name="Notes Placeholder 2">
             <a:extLst>
               <a:ext uri="{FF2B5EF4-FFF2-40B4-BE49-F238E27FC236}">
-                <a16:creationId xmlns:a16="http://schemas.microsoft.com/office/drawing/2014/main" id="{8EE0074E-E3C8-A8F0-1B3F-3A56A459903F}"/>
+                <a16:creationId xmlns:a16="http://schemas.microsoft.com/office/drawing/2014/main" id="{2D720593-E417-C270-198E-0234F3221554}"/>
               </a:ext>
             </a:extLst>
           </p:cNvPr>
@@ -508,7 +517,7 @@
           <p:cNvPr id="4" name="Slide Number Placeholder 3">
             <a:extLst>
               <a:ext uri="{FF2B5EF4-FFF2-40B4-BE49-F238E27FC236}">
-                <a16:creationId xmlns:a16="http://schemas.microsoft.com/office/drawing/2014/main" id="{6C384372-659C-C73C-09D1-8A6CA6AE1C97}"/>
+                <a16:creationId xmlns:a16="http://schemas.microsoft.com/office/drawing/2014/main" id="{E0C8F4EB-CF2D-4769-6321-4B0E1943765B}"/>
               </a:ext>
             </a:extLst>
           </p:cNvPr>
@@ -535,7 +544,7 @@
     </p:spTree>
     <p:extLst>
       <p:ext uri="{BB962C8B-B14F-4D97-AF65-F5344CB8AC3E}">
-        <p14:creationId xmlns:p14="http://schemas.microsoft.com/office/powerpoint/2010/main" val="3633924258"/>
+        <p14:creationId xmlns:p14="http://schemas.microsoft.com/office/powerpoint/2010/main" val="2708854887"/>
       </p:ext>
     </p:extLst>
   </p:cSld>
@@ -553,7 +562,7 @@
         <p:cNvPr id="1" name="">
           <a:extLst>
             <a:ext uri="{FF2B5EF4-FFF2-40B4-BE49-F238E27FC236}">
-              <a16:creationId xmlns:a16="http://schemas.microsoft.com/office/drawing/2014/main" id="{5ED5E7A7-B918-69BF-9879-FCA16BD9B34F}"/>
+              <a16:creationId xmlns:a16="http://schemas.microsoft.com/office/drawing/2014/main" id="{261123FC-9869-C4D8-C28D-74E9A56A516E}"/>
             </a:ext>
           </a:extLst>
         </p:cNvPr>
@@ -573,7 +582,7 @@
           <p:cNvPr id="2" name="Slide Image Placeholder 1">
             <a:extLst>
               <a:ext uri="{FF2B5EF4-FFF2-40B4-BE49-F238E27FC236}">
-                <a16:creationId xmlns:a16="http://schemas.microsoft.com/office/drawing/2014/main" id="{3FD38C74-7FE6-F75C-E4C8-FF69D368025C}"/>
+                <a16:creationId xmlns:a16="http://schemas.microsoft.com/office/drawing/2014/main" id="{7A808E3F-C1C2-96FF-FBF9-193618DCC31C}"/>
               </a:ext>
             </a:extLst>
           </p:cNvPr>
@@ -591,7 +600,7 @@
           <p:cNvPr id="3" name="Notes Placeholder 2">
             <a:extLst>
               <a:ext uri="{FF2B5EF4-FFF2-40B4-BE49-F238E27FC236}">
-                <a16:creationId xmlns:a16="http://schemas.microsoft.com/office/drawing/2014/main" id="{2D720593-E417-C270-198E-0234F3221554}"/>
+                <a16:creationId xmlns:a16="http://schemas.microsoft.com/office/drawing/2014/main" id="{804DB80F-194C-74CA-580F-344D60FC2F6F}"/>
               </a:ext>
             </a:extLst>
           </p:cNvPr>
@@ -616,7 +625,7 @@
           <p:cNvPr id="4" name="Slide Number Placeholder 3">
             <a:extLst>
               <a:ext uri="{FF2B5EF4-FFF2-40B4-BE49-F238E27FC236}">
-                <a16:creationId xmlns:a16="http://schemas.microsoft.com/office/drawing/2014/main" id="{E0C8F4EB-CF2D-4769-6321-4B0E1943765B}"/>
+                <a16:creationId xmlns:a16="http://schemas.microsoft.com/office/drawing/2014/main" id="{2F2CA20B-D460-B49D-B980-9236970C2E28}"/>
               </a:ext>
             </a:extLst>
           </p:cNvPr>
@@ -643,7 +652,7 @@
     </p:spTree>
     <p:extLst>
       <p:ext uri="{BB962C8B-B14F-4D97-AF65-F5344CB8AC3E}">
-        <p14:creationId xmlns:p14="http://schemas.microsoft.com/office/powerpoint/2010/main" val="2708854887"/>
+        <p14:creationId xmlns:p14="http://schemas.microsoft.com/office/powerpoint/2010/main" val="2231007273"/>
       </p:ext>
     </p:extLst>
   </p:cSld>
@@ -654,6 +663,114 @@
 </file>
 
 <file path=ppt/notesSlides/notesSlide13.xml><?xml version="1.0" encoding="utf-8"?>
+<p:notes xmlns:a="http://schemas.openxmlformats.org/drawingml/2006/main" xmlns:r="http://schemas.openxmlformats.org/officeDocument/2006/relationships" xmlns:p="http://schemas.openxmlformats.org/presentationml/2006/main">
+  <p:cSld>
+    <p:spTree>
+      <p:nvGrpSpPr>
+        <p:cNvPr id="1" name="">
+          <a:extLst>
+            <a:ext uri="{FF2B5EF4-FFF2-40B4-BE49-F238E27FC236}">
+              <a16:creationId xmlns:a16="http://schemas.microsoft.com/office/drawing/2014/main" id="{B823CF9F-B496-1049-8236-E1F216F587F5}"/>
+            </a:ext>
+          </a:extLst>
+        </p:cNvPr>
+        <p:cNvGrpSpPr/>
+        <p:nvPr/>
+      </p:nvGrpSpPr>
+      <p:grpSpPr>
+        <a:xfrm>
+          <a:off x="0" y="0"/>
+          <a:ext cx="0" cy="0"/>
+          <a:chOff x="0" y="0"/>
+          <a:chExt cx="0" cy="0"/>
+        </a:xfrm>
+      </p:grpSpPr>
+      <p:sp>
+        <p:nvSpPr>
+          <p:cNvPr id="2" name="Slide Image Placeholder 1">
+            <a:extLst>
+              <a:ext uri="{FF2B5EF4-FFF2-40B4-BE49-F238E27FC236}">
+                <a16:creationId xmlns:a16="http://schemas.microsoft.com/office/drawing/2014/main" id="{AFADA388-15E8-4827-EE54-6D499F79486B}"/>
+              </a:ext>
+            </a:extLst>
+          </p:cNvPr>
+          <p:cNvSpPr>
+            <a:spLocks noGrp="1" noRot="1" noChangeAspect="1"/>
+          </p:cNvSpPr>
+          <p:nvPr>
+            <p:ph type="sldImg"/>
+          </p:nvPr>
+        </p:nvSpPr>
+        <p:spPr/>
+      </p:sp>
+      <p:sp>
+        <p:nvSpPr>
+          <p:cNvPr id="3" name="Notes Placeholder 2">
+            <a:extLst>
+              <a:ext uri="{FF2B5EF4-FFF2-40B4-BE49-F238E27FC236}">
+                <a16:creationId xmlns:a16="http://schemas.microsoft.com/office/drawing/2014/main" id="{41F5183C-F598-EA00-085C-CC8812B4CBB5}"/>
+              </a:ext>
+            </a:extLst>
+          </p:cNvPr>
+          <p:cNvSpPr>
+            <a:spLocks noGrp="1"/>
+          </p:cNvSpPr>
+          <p:nvPr>
+            <p:ph type="body" idx="1"/>
+          </p:nvPr>
+        </p:nvSpPr>
+        <p:spPr/>
+        <p:txBody>
+          <a:bodyPr/>
+          <a:lstStyle/>
+          <a:p>
+            <a:endParaRPr lang="en-US" dirty="0"/>
+          </a:p>
+        </p:txBody>
+      </p:sp>
+      <p:sp>
+        <p:nvSpPr>
+          <p:cNvPr id="4" name="Slide Number Placeholder 3">
+            <a:extLst>
+              <a:ext uri="{FF2B5EF4-FFF2-40B4-BE49-F238E27FC236}">
+                <a16:creationId xmlns:a16="http://schemas.microsoft.com/office/drawing/2014/main" id="{98CFE232-92A2-DAB2-7FEC-63C49F4E3A7E}"/>
+              </a:ext>
+            </a:extLst>
+          </p:cNvPr>
+          <p:cNvSpPr>
+            <a:spLocks noGrp="1"/>
+          </p:cNvSpPr>
+          <p:nvPr>
+            <p:ph type="sldNum" sz="quarter" idx="10"/>
+          </p:nvPr>
+        </p:nvSpPr>
+        <p:spPr/>
+        <p:txBody>
+          <a:bodyPr/>
+          <a:lstStyle/>
+          <a:p>
+            <a:fld id="{F7021451-1387-4CA6-816F-3879F97B5CBC}" type="slidenum">
+              <a:rPr lang="en-US"/>
+              <a:t>13</a:t>
+            </a:fld>
+            <a:endParaRPr lang="en-US"/>
+          </a:p>
+        </p:txBody>
+      </p:sp>
+    </p:spTree>
+    <p:extLst>
+      <p:ext uri="{BB962C8B-B14F-4D97-AF65-F5344CB8AC3E}">
+        <p14:creationId xmlns:p14="http://schemas.microsoft.com/office/powerpoint/2010/main" val="3112221012"/>
+      </p:ext>
+    </p:extLst>
+  </p:cSld>
+  <p:clrMapOvr>
+    <a:masterClrMapping/>
+  </p:clrMapOvr>
+</p:notes>
+</file>
+
+<file path=ppt/notesSlides/notesSlide14.xml><?xml version="1.0" encoding="utf-8"?>
 <p:notes xmlns:a="http://schemas.openxmlformats.org/drawingml/2006/main" xmlns:r="http://schemas.openxmlformats.org/officeDocument/2006/relationships" xmlns:p="http://schemas.openxmlformats.org/presentationml/2006/main">
   <p:cSld>
     <p:spTree>
@@ -742,7 +859,7 @@
           <a:p>
             <a:fld id="{F7021451-1387-4CA6-816F-3879F97B5CBC}" type="slidenum">
               <a:rPr lang="en-US"/>
-              <a:t>13</a:t>
+              <a:t>14</a:t>
             </a:fld>
             <a:endParaRPr lang="en-US"/>
           </a:p>
@@ -752,6 +869,114 @@
     <p:extLst>
       <p:ext uri="{BB962C8B-B14F-4D97-AF65-F5344CB8AC3E}">
         <p14:creationId xmlns:p14="http://schemas.microsoft.com/office/powerpoint/2010/main" val="1694833441"/>
+      </p:ext>
+    </p:extLst>
+  </p:cSld>
+  <p:clrMapOvr>
+    <a:masterClrMapping/>
+  </p:clrMapOvr>
+</p:notes>
+</file>
+
+<file path=ppt/notesSlides/notesSlide15.xml><?xml version="1.0" encoding="utf-8"?>
+<p:notes xmlns:a="http://schemas.openxmlformats.org/drawingml/2006/main" xmlns:r="http://schemas.openxmlformats.org/officeDocument/2006/relationships" xmlns:p="http://schemas.openxmlformats.org/presentationml/2006/main">
+  <p:cSld>
+    <p:spTree>
+      <p:nvGrpSpPr>
+        <p:cNvPr id="1" name="">
+          <a:extLst>
+            <a:ext uri="{FF2B5EF4-FFF2-40B4-BE49-F238E27FC236}">
+              <a16:creationId xmlns:a16="http://schemas.microsoft.com/office/drawing/2014/main" id="{32783B39-1B24-EA80-035C-F03DBB7D16D4}"/>
+            </a:ext>
+          </a:extLst>
+        </p:cNvPr>
+        <p:cNvGrpSpPr/>
+        <p:nvPr/>
+      </p:nvGrpSpPr>
+      <p:grpSpPr>
+        <a:xfrm>
+          <a:off x="0" y="0"/>
+          <a:ext cx="0" cy="0"/>
+          <a:chOff x="0" y="0"/>
+          <a:chExt cx="0" cy="0"/>
+        </a:xfrm>
+      </p:grpSpPr>
+      <p:sp>
+        <p:nvSpPr>
+          <p:cNvPr id="2" name="Slide Image Placeholder 1">
+            <a:extLst>
+              <a:ext uri="{FF2B5EF4-FFF2-40B4-BE49-F238E27FC236}">
+                <a16:creationId xmlns:a16="http://schemas.microsoft.com/office/drawing/2014/main" id="{F078FB31-F90F-A214-8D93-CBFDE06C0938}"/>
+              </a:ext>
+            </a:extLst>
+          </p:cNvPr>
+          <p:cNvSpPr>
+            <a:spLocks noGrp="1" noRot="1" noChangeAspect="1"/>
+          </p:cNvSpPr>
+          <p:nvPr>
+            <p:ph type="sldImg"/>
+          </p:nvPr>
+        </p:nvSpPr>
+        <p:spPr/>
+      </p:sp>
+      <p:sp>
+        <p:nvSpPr>
+          <p:cNvPr id="3" name="Notes Placeholder 2">
+            <a:extLst>
+              <a:ext uri="{FF2B5EF4-FFF2-40B4-BE49-F238E27FC236}">
+                <a16:creationId xmlns:a16="http://schemas.microsoft.com/office/drawing/2014/main" id="{4D686B29-ECD3-A788-E401-352BDB02FEDF}"/>
+              </a:ext>
+            </a:extLst>
+          </p:cNvPr>
+          <p:cNvSpPr>
+            <a:spLocks noGrp="1"/>
+          </p:cNvSpPr>
+          <p:nvPr>
+            <p:ph type="body" idx="1"/>
+          </p:nvPr>
+        </p:nvSpPr>
+        <p:spPr/>
+        <p:txBody>
+          <a:bodyPr/>
+          <a:lstStyle/>
+          <a:p>
+            <a:endParaRPr lang="en-US" dirty="0"/>
+          </a:p>
+        </p:txBody>
+      </p:sp>
+      <p:sp>
+        <p:nvSpPr>
+          <p:cNvPr id="4" name="Slide Number Placeholder 3">
+            <a:extLst>
+              <a:ext uri="{FF2B5EF4-FFF2-40B4-BE49-F238E27FC236}">
+                <a16:creationId xmlns:a16="http://schemas.microsoft.com/office/drawing/2014/main" id="{DF7D256B-DA5E-15EA-579A-1FFD24CF2D8B}"/>
+              </a:ext>
+            </a:extLst>
+          </p:cNvPr>
+          <p:cNvSpPr>
+            <a:spLocks noGrp="1"/>
+          </p:cNvSpPr>
+          <p:nvPr>
+            <p:ph type="sldNum" sz="quarter" idx="10"/>
+          </p:nvPr>
+        </p:nvSpPr>
+        <p:spPr/>
+        <p:txBody>
+          <a:bodyPr/>
+          <a:lstStyle/>
+          <a:p>
+            <a:fld id="{F7021451-1387-4CA6-816F-3879F97B5CBC}" type="slidenum">
+              <a:rPr lang="en-US"/>
+              <a:t>15</a:t>
+            </a:fld>
+            <a:endParaRPr lang="en-US"/>
+          </a:p>
+        </p:txBody>
+      </p:sp>
+    </p:spTree>
+    <p:extLst>
+      <p:ext uri="{BB962C8B-B14F-4D97-AF65-F5344CB8AC3E}">
+        <p14:creationId xmlns:p14="http://schemas.microsoft.com/office/powerpoint/2010/main" val="2740356989"/>
       </p:ext>
     </p:extLst>
   </p:cSld>
@@ -1572,7 +1797,7 @@
           <a:p>
             <a:fld id="{48A87A34-81AB-432B-8DAE-1953F412C126}" type="datetimeFigureOut">
               <a:rPr lang="en-US" smtClean="0"/>
-              <a:t>9/1/2025</a:t>
+              <a:t>9/2/2025</a:t>
             </a:fld>
             <a:endParaRPr lang="en-US" dirty="0"/>
           </a:p>
@@ -1784,7 +2009,7 @@
           <a:p>
             <a:fld id="{48A87A34-81AB-432B-8DAE-1953F412C126}" type="datetimeFigureOut">
               <a:rPr lang="en-US" smtClean="0"/>
-              <a:t>9/1/2025</a:t>
+              <a:t>9/2/2025</a:t>
             </a:fld>
             <a:endParaRPr lang="en-US" dirty="0"/>
           </a:p>
@@ -2000,7 +2225,7 @@
           <a:p>
             <a:fld id="{48A87A34-81AB-432B-8DAE-1953F412C126}" type="datetimeFigureOut">
               <a:rPr lang="en-US" smtClean="0"/>
-              <a:t>9/1/2025</a:t>
+              <a:t>9/2/2025</a:t>
             </a:fld>
             <a:endParaRPr lang="en-US" dirty="0"/>
           </a:p>
@@ -2442,7 +2667,7 @@
           <a:p>
             <a:fld id="{48A87A34-81AB-432B-8DAE-1953F412C126}" type="datetimeFigureOut">
               <a:rPr lang="en-US" smtClean="0"/>
-              <a:t>9/1/2025</a:t>
+              <a:t>9/2/2025</a:t>
             </a:fld>
             <a:endParaRPr lang="en-US" dirty="0"/>
           </a:p>
@@ -2782,7 +3007,7 @@
           <a:p>
             <a:fld id="{48A87A34-81AB-432B-8DAE-1953F412C126}" type="datetimeFigureOut">
               <a:rPr lang="en-US" smtClean="0"/>
-              <a:t>9/1/2025</a:t>
+              <a:t>9/2/2025</a:t>
             </a:fld>
             <a:endParaRPr lang="en-US" dirty="0"/>
           </a:p>
@@ -3051,7 +3276,7 @@
           <a:p>
             <a:fld id="{48A87A34-81AB-432B-8DAE-1953F412C126}" type="datetimeFigureOut">
               <a:rPr lang="en-US" smtClean="0"/>
-              <a:t>9/1/2025</a:t>
+              <a:t>9/2/2025</a:t>
             </a:fld>
             <a:endParaRPr lang="en-US" dirty="0"/>
           </a:p>
@@ -3468,7 +3693,7 @@
           <a:p>
             <a:fld id="{48A87A34-81AB-432B-8DAE-1953F412C126}" type="datetimeFigureOut">
               <a:rPr lang="en-US" smtClean="0"/>
-              <a:t>9/1/2025</a:t>
+              <a:t>9/2/2025</a:t>
             </a:fld>
             <a:endParaRPr lang="en-US" dirty="0"/>
           </a:p>
@@ -3618,7 +3843,7 @@
           <a:p>
             <a:fld id="{48A87A34-81AB-432B-8DAE-1953F412C126}" type="datetimeFigureOut">
               <a:rPr lang="en-US" smtClean="0"/>
-              <a:t>9/1/2025</a:t>
+              <a:t>9/2/2025</a:t>
             </a:fld>
             <a:endParaRPr lang="en-US" dirty="0"/>
           </a:p>
@@ -3745,7 +3970,7 @@
           <a:p>
             <a:fld id="{48A87A34-81AB-432B-8DAE-1953F412C126}" type="datetimeFigureOut">
               <a:rPr lang="en-US" smtClean="0"/>
-              <a:t>9/1/2025</a:t>
+              <a:t>9/2/2025</a:t>
             </a:fld>
             <a:endParaRPr lang="en-US" dirty="0"/>
           </a:p>
@@ -3997,7 +4222,7 @@
           <a:p>
             <a:fld id="{48A87A34-81AB-432B-8DAE-1953F412C126}" type="datetimeFigureOut">
               <a:rPr lang="en-US" smtClean="0"/>
-              <a:t>9/1/2025</a:t>
+              <a:t>9/2/2025</a:t>
             </a:fld>
             <a:endParaRPr lang="en-US" dirty="0"/>
           </a:p>
@@ -4444,7 +4669,7 @@
             <a:fld id="{48A87A34-81AB-432B-8DAE-1953F412C126}" type="datetimeFigureOut">
               <a:rPr lang="en-US" smtClean="0"/>
               <a:pPr/>
-              <a:t>9/1/2025</a:t>
+              <a:t>9/2/2025</a:t>
             </a:fld>
             <a:endParaRPr lang="en-US" dirty="0"/>
           </a:p>
@@ -4773,7 +4998,7 @@
             <a:fld id="{48A87A34-81AB-432B-8DAE-1953F412C126}" type="datetimeFigureOut">
               <a:rPr lang="en-US" smtClean="0"/>
               <a:pPr/>
-              <a:t>9/1/2025</a:t>
+              <a:t>9/2/2025</a:t>
             </a:fld>
             <a:endParaRPr lang="en-US" dirty="0"/>
           </a:p>
@@ -5347,7 +5572,7 @@
               <a:buNone/>
             </a:pPr>
             <a:r>
-              <a:rPr lang="en-US" sz="4400">
+              <a:rPr lang="es-419" sz="4400" noProof="0" dirty="0">
                 <a:solidFill>
                   <a:srgbClr val="D73AD7"/>
                 </a:solidFill>
@@ -5357,7 +5582,7 @@
               </a:rPr>
               <a:t>MediTriage – Plataforma de Citas Médicas con Triage IA</a:t>
             </a:r>
-            <a:endParaRPr lang="en-US" sz="4400" dirty="0"/>
+            <a:endParaRPr lang="es-419" sz="4400" noProof="0" dirty="0"/>
           </a:p>
         </p:txBody>
       </p:sp>
@@ -5389,7 +5614,7 @@
               <a:buNone/>
             </a:pPr>
             <a:r>
-              <a:rPr lang="en-US" sz="1850">
+              <a:rPr lang="es-419" sz="1850" noProof="0" dirty="0">
                 <a:solidFill>
                   <a:srgbClr val="272525"/>
                 </a:solidFill>
@@ -5399,7 +5624,110 @@
               </a:rPr>
               <a:t>Bienvenida a la presentación de MediTriage, un proyecto innovador en la gestión de citas médicas.</a:t>
             </a:r>
-            <a:endParaRPr lang="en-US" sz="1850" dirty="0"/>
+            <a:endParaRPr lang="es-419" sz="1850" noProof="0" dirty="0"/>
+          </a:p>
+        </p:txBody>
+      </p:sp>
+      <p:sp>
+        <p:nvSpPr>
+          <p:cNvPr id="6" name="Text 1">
+            <a:extLst>
+              <a:ext uri="{FF2B5EF4-FFF2-40B4-BE49-F238E27FC236}">
+                <a16:creationId xmlns:a16="http://schemas.microsoft.com/office/drawing/2014/main" id="{C21114AA-578E-C3BD-AD7C-3C23BC62B4EA}"/>
+              </a:ext>
+            </a:extLst>
+          </p:cNvPr>
+          <p:cNvSpPr/>
+          <p:nvPr/>
+        </p:nvSpPr>
+        <p:spPr>
+          <a:xfrm>
+            <a:off x="11405939" y="6099114"/>
+            <a:ext cx="3224461" cy="1248169"/>
+          </a:xfrm>
+          <a:prstGeom prst="rect">
+            <a:avLst/>
+          </a:prstGeom>
+          <a:noFill/>
+          <a:ln/>
+        </p:spPr>
+        <p:txBody>
+          <a:bodyPr wrap="square" lIns="0" tIns="0" rIns="0" bIns="0" rtlCol="0" anchor="t"/>
+          <a:lstStyle/>
+          <a:p>
+            <a:pPr marL="0" indent="0" algn="ctr">
+              <a:lnSpc>
+                <a:spcPts val="3000"/>
+              </a:lnSpc>
+              <a:buNone/>
+            </a:pPr>
+            <a:r>
+              <a:rPr lang="es-419" sz="1850" noProof="0" dirty="0">
+                <a:solidFill>
+                  <a:srgbClr val="272525"/>
+                </a:solidFill>
+                <a:latin typeface="Source Sans 3" pitchFamily="34" charset="0"/>
+              </a:rPr>
+              <a:t>Docente: Alex Zúñiga </a:t>
+            </a:r>
+          </a:p>
+          <a:p>
+            <a:pPr marL="0" indent="0" algn="ctr">
+              <a:lnSpc>
+                <a:spcPts val="3000"/>
+              </a:lnSpc>
+              <a:buNone/>
+            </a:pPr>
+            <a:r>
+              <a:rPr lang="es-419" sz="1850" noProof="0" dirty="0">
+                <a:solidFill>
+                  <a:srgbClr val="272525"/>
+                </a:solidFill>
+                <a:latin typeface="Source Sans 3" pitchFamily="34" charset="0"/>
+              </a:rPr>
+              <a:t>Integrantes</a:t>
+            </a:r>
+            <a:r>
+              <a:rPr lang="es-419" sz="1850" dirty="0">
+                <a:solidFill>
+                  <a:srgbClr val="272525"/>
+                </a:solidFill>
+                <a:latin typeface="Source Sans 3" pitchFamily="34" charset="0"/>
+              </a:rPr>
+              <a:t>: Matías cuevas </a:t>
+            </a:r>
+          </a:p>
+          <a:p>
+            <a:pPr marL="0" indent="0" algn="ctr">
+              <a:lnSpc>
+                <a:spcPts val="3000"/>
+              </a:lnSpc>
+              <a:buNone/>
+            </a:pPr>
+            <a:r>
+              <a:rPr lang="es-419" sz="1850" dirty="0">
+                <a:solidFill>
+                  <a:srgbClr val="272525"/>
+                </a:solidFill>
+                <a:latin typeface="Source Sans 3" pitchFamily="34" charset="0"/>
+              </a:rPr>
+              <a:t>Raúl Benavides</a:t>
+            </a:r>
+            <a:endParaRPr lang="es-419" sz="1850" noProof="0" dirty="0">
+              <a:solidFill>
+                <a:srgbClr val="272525"/>
+              </a:solidFill>
+              <a:latin typeface="Source Sans 3" pitchFamily="34" charset="0"/>
+            </a:endParaRPr>
+          </a:p>
+          <a:p>
+            <a:pPr marL="0" indent="0" algn="ctr">
+              <a:lnSpc>
+                <a:spcPts val="3000"/>
+              </a:lnSpc>
+              <a:buNone/>
+            </a:pPr>
+            <a:endParaRPr lang="es-419" sz="1850" noProof="0" dirty="0"/>
           </a:p>
         </p:txBody>
       </p:sp>
@@ -5456,7 +5784,7 @@
               <a:buNone/>
             </a:pPr>
             <a:r>
-              <a:rPr lang="en-US" sz="3500" dirty="0">
+              <a:rPr lang="es-419" sz="3500" noProof="0" dirty="0">
                 <a:solidFill>
                   <a:srgbClr val="D73AD7"/>
                 </a:solidFill>
@@ -5466,7 +5794,7 @@
               </a:rPr>
               <a:t>Expansión Futura de MediTriage</a:t>
             </a:r>
-            <a:endParaRPr lang="en-US" sz="3500" dirty="0"/>
+            <a:endParaRPr lang="es-419" sz="3500" noProof="0" dirty="0"/>
           </a:p>
         </p:txBody>
       </p:sp>
@@ -5524,7 +5852,7 @@
               <a:buNone/>
             </a:pPr>
             <a:r>
-              <a:rPr lang="en-US" sz="2800" dirty="0">
+              <a:rPr lang="es-419" sz="2800" noProof="0" dirty="0">
                 <a:solidFill>
                   <a:srgbClr val="272525"/>
                 </a:solidFill>
@@ -5534,7 +5862,7 @@
               </a:rPr>
               <a:t>Integración de Derivaciones</a:t>
             </a:r>
-            <a:endParaRPr lang="en-US" sz="2800" dirty="0"/>
+            <a:endParaRPr lang="es-419" sz="2800" noProof="0" dirty="0"/>
           </a:p>
         </p:txBody>
       </p:sp>
@@ -5568,7 +5896,7 @@
               <a:buNone/>
             </a:pPr>
             <a:r>
-              <a:rPr lang="en-US" sz="2400" dirty="0">
+              <a:rPr lang="es-419" sz="2400" noProof="0" dirty="0">
                 <a:solidFill>
                   <a:srgbClr val="272525"/>
                 </a:solidFill>
@@ -5579,7 +5907,7 @@
               <a:t>Conexión con sistemas de </a:t>
             </a:r>
             <a:r>
-              <a:rPr lang="en-US" sz="2400" b="1" dirty="0">
+              <a:rPr lang="es-419" sz="2400" b="1" noProof="0" dirty="0">
                 <a:solidFill>
                   <a:srgbClr val="272525"/>
                 </a:solidFill>
@@ -5590,7 +5918,7 @@
               <a:t>FONASA e ISAPRE</a:t>
             </a:r>
             <a:r>
-              <a:rPr lang="en-US" sz="2400" dirty="0">
+              <a:rPr lang="es-419" sz="2400" noProof="0" dirty="0">
                 <a:solidFill>
                   <a:srgbClr val="272525"/>
                 </a:solidFill>
@@ -5600,7 +5928,7 @@
               </a:rPr>
               <a:t> para simplificar las derivaciones y coordinaciones.</a:t>
             </a:r>
-            <a:endParaRPr lang="en-US" sz="2400" dirty="0"/>
+            <a:endParaRPr lang="es-419" sz="2400" noProof="0" dirty="0"/>
           </a:p>
         </p:txBody>
       </p:sp>
@@ -5658,7 +5986,7 @@
               <a:buNone/>
             </a:pPr>
             <a:r>
-              <a:rPr lang="en-US" sz="2800" dirty="0">
+              <a:rPr lang="es-419" sz="2800" noProof="0" dirty="0">
                 <a:solidFill>
                   <a:srgbClr val="272525"/>
                 </a:solidFill>
@@ -5668,7 +5996,7 @@
               </a:rPr>
               <a:t>Agenda Compartida</a:t>
             </a:r>
-            <a:endParaRPr lang="en-US" sz="2800" dirty="0"/>
+            <a:endParaRPr lang="es-419" sz="2800" noProof="0" dirty="0"/>
           </a:p>
         </p:txBody>
       </p:sp>
@@ -5702,7 +6030,7 @@
               <a:buNone/>
             </a:pPr>
             <a:r>
-              <a:rPr lang="en-US" sz="2400" dirty="0">
+              <a:rPr lang="es-419" sz="2400" noProof="0" dirty="0">
                 <a:solidFill>
                   <a:srgbClr val="272525"/>
                 </a:solidFill>
@@ -5713,7 +6041,7 @@
               <a:t>Funcionalidad que permitirá a médicos y centros de salud </a:t>
             </a:r>
             <a:r>
-              <a:rPr lang="en-US" sz="2400" b="1" dirty="0">
+              <a:rPr lang="es-419" sz="2400" b="1" noProof="0" dirty="0">
                 <a:solidFill>
                   <a:srgbClr val="272525"/>
                 </a:solidFill>
@@ -5724,7 +6052,7 @@
               <a:t>compartir sus agendas</a:t>
             </a:r>
             <a:r>
-              <a:rPr lang="en-US" sz="2400" dirty="0">
+              <a:rPr lang="es-419" sz="2400" noProof="0" dirty="0">
                 <a:solidFill>
                   <a:srgbClr val="272525"/>
                 </a:solidFill>
@@ -5734,7 +6062,7 @@
               </a:rPr>
               <a:t> de forma sincronizada.</a:t>
             </a:r>
-            <a:endParaRPr lang="en-US" sz="2400" dirty="0"/>
+            <a:endParaRPr lang="es-419" sz="2400" noProof="0" dirty="0"/>
           </a:p>
         </p:txBody>
       </p:sp>
@@ -5792,7 +6120,7 @@
               <a:buNone/>
             </a:pPr>
             <a:r>
-              <a:rPr lang="en-US" sz="2800" dirty="0">
+              <a:rPr lang="es-419" sz="2800" noProof="0" dirty="0">
                 <a:solidFill>
                   <a:srgbClr val="272525"/>
                 </a:solidFill>
@@ -5802,7 +6130,7 @@
               </a:rPr>
               <a:t>Telemedicina</a:t>
             </a:r>
-            <a:endParaRPr lang="en-US" sz="2800" dirty="0"/>
+            <a:endParaRPr lang="es-419" sz="2800" noProof="0" dirty="0"/>
           </a:p>
         </p:txBody>
       </p:sp>
@@ -5836,7 +6164,7 @@
               <a:buNone/>
             </a:pPr>
             <a:r>
-              <a:rPr lang="en-US" sz="2400" dirty="0">
+              <a:rPr lang="es-419" sz="2400" noProof="0" dirty="0">
                 <a:solidFill>
                   <a:srgbClr val="272525"/>
                 </a:solidFill>
@@ -5847,7 +6175,7 @@
               <a:t>Incorporación de un módulo de </a:t>
             </a:r>
             <a:r>
-              <a:rPr lang="en-US" sz="2400" b="1" dirty="0">
+              <a:rPr lang="es-419" sz="2400" b="1" noProof="0" dirty="0">
                 <a:solidFill>
                   <a:srgbClr val="272525"/>
                 </a:solidFill>
@@ -5855,10 +6183,10 @@
                 <a:ea typeface="Source Sans 3" pitchFamily="34" charset="-122"/>
                 <a:cs typeface="Source Sans 3" pitchFamily="34" charset="-120"/>
               </a:rPr>
-              <a:t>videoconsultas</a:t>
-            </a:r>
-            <a:r>
-              <a:rPr lang="en-US" sz="2400" dirty="0">
+              <a:t>video consultas</a:t>
+            </a:r>
+            <a:r>
+              <a:rPr lang="es-419" sz="2400" noProof="0" dirty="0">
                 <a:solidFill>
                   <a:srgbClr val="272525"/>
                 </a:solidFill>
@@ -5868,7 +6196,7 @@
               </a:rPr>
               <a:t> para ofrecer atención remota y accesible.</a:t>
             </a:r>
-            <a:endParaRPr lang="en-US" sz="2400" dirty="0"/>
+            <a:endParaRPr lang="es-419" sz="2400" noProof="0" dirty="0"/>
           </a:p>
         </p:txBody>
       </p:sp>
@@ -5926,7 +6254,7 @@
               <a:buNone/>
             </a:pPr>
             <a:r>
-              <a:rPr lang="en-US" sz="2800" dirty="0">
+              <a:rPr lang="es-419" sz="2800" noProof="0" dirty="0">
                 <a:solidFill>
                   <a:srgbClr val="272525"/>
                 </a:solidFill>
@@ -5936,7 +6264,7 @@
               </a:rPr>
               <a:t>Análisis de Tendencias</a:t>
             </a:r>
-            <a:endParaRPr lang="en-US" sz="2800" dirty="0"/>
+            <a:endParaRPr lang="es-419" sz="2800" noProof="0" dirty="0"/>
           </a:p>
         </p:txBody>
       </p:sp>
@@ -5970,7 +6298,7 @@
               <a:buNone/>
             </a:pPr>
             <a:r>
-              <a:rPr lang="en-US" sz="2400" dirty="0">
+              <a:rPr lang="es-419" sz="2400" noProof="0" dirty="0">
                 <a:solidFill>
                   <a:srgbClr val="272525"/>
                 </a:solidFill>
@@ -5981,7 +6309,7 @@
               <a:t>Implementación de herramientas para </a:t>
             </a:r>
             <a:r>
-              <a:rPr lang="en-US" sz="2400" b="1" dirty="0">
+              <a:rPr lang="es-419" sz="2400" b="1" noProof="0" dirty="0">
                 <a:solidFill>
                   <a:srgbClr val="272525"/>
                 </a:solidFill>
@@ -5992,7 +6320,7 @@
               <a:t>análisis estadístico de síntomas</a:t>
             </a:r>
             <a:r>
-              <a:rPr lang="en-US" sz="2400" dirty="0">
+              <a:rPr lang="es-419" sz="2400" noProof="0" dirty="0">
                 <a:solidFill>
                   <a:srgbClr val="272525"/>
                 </a:solidFill>
@@ -6002,7 +6330,7 @@
               </a:rPr>
               <a:t> y tendencias epidemiológicas.</a:t>
             </a:r>
-            <a:endParaRPr lang="en-US" sz="2400" dirty="0"/>
+            <a:endParaRPr lang="es-419" sz="2400" noProof="0" dirty="0"/>
           </a:p>
         </p:txBody>
       </p:sp>
@@ -6015,337 +6343,6 @@
 </file>
 
 <file path=ppt/slides/slide11.xml><?xml version="1.0" encoding="utf-8"?>
-<p:sld xmlns:a="http://schemas.openxmlformats.org/drawingml/2006/main" xmlns:r="http://schemas.openxmlformats.org/officeDocument/2006/relationships" xmlns:p="http://schemas.openxmlformats.org/presentationml/2006/main">
-  <p:cSld>
-    <p:spTree>
-      <p:nvGrpSpPr>
-        <p:cNvPr id="1" name="">
-          <a:extLst>
-            <a:ext uri="{FF2B5EF4-FFF2-40B4-BE49-F238E27FC236}">
-              <a16:creationId xmlns:a16="http://schemas.microsoft.com/office/drawing/2014/main" id="{4D0D62AD-6B4D-6946-EC61-BB81A583C5B3}"/>
-            </a:ext>
-          </a:extLst>
-        </p:cNvPr>
-        <p:cNvGrpSpPr/>
-        <p:nvPr/>
-      </p:nvGrpSpPr>
-      <p:grpSpPr>
-        <a:xfrm>
-          <a:off x="0" y="0"/>
-          <a:ext cx="0" cy="0"/>
-          <a:chOff x="0" y="0"/>
-          <a:chExt cx="0" cy="0"/>
-        </a:xfrm>
-      </p:grpSpPr>
-      <p:sp>
-        <p:nvSpPr>
-          <p:cNvPr id="2" name="Text 0">
-            <a:extLst>
-              <a:ext uri="{FF2B5EF4-FFF2-40B4-BE49-F238E27FC236}">
-                <a16:creationId xmlns:a16="http://schemas.microsoft.com/office/drawing/2014/main" id="{979C39F9-3902-4A3D-5739-2B0C2960A574}"/>
-              </a:ext>
-            </a:extLst>
-          </p:cNvPr>
-          <p:cNvSpPr/>
-          <p:nvPr/>
-        </p:nvSpPr>
-        <p:spPr>
-          <a:xfrm>
-            <a:off x="1207001" y="1332548"/>
-            <a:ext cx="7053143" cy="563285"/>
-          </a:xfrm>
-          <a:prstGeom prst="rect">
-            <a:avLst/>
-          </a:prstGeom>
-          <a:noFill/>
-          <a:ln/>
-        </p:spPr>
-        <p:txBody>
-          <a:bodyPr wrap="none" lIns="0" tIns="0" rIns="0" bIns="0" rtlCol="0" anchor="t"/>
-          <a:lstStyle/>
-          <a:p>
-            <a:pPr marL="0" indent="0" algn="l">
-              <a:lnSpc>
-                <a:spcPts val="4400"/>
-              </a:lnSpc>
-              <a:buNone/>
-            </a:pPr>
-            <a:r>
-              <a:rPr lang="en-US" sz="3500" dirty="0" err="1">
-                <a:solidFill>
-                  <a:srgbClr val="D73AD7"/>
-                </a:solidFill>
-                <a:latin typeface="Source Serif 4 Semi Bold" pitchFamily="34" charset="0"/>
-                <a:ea typeface="Source Serif 4 Semi Bold" pitchFamily="34" charset="-122"/>
-                <a:cs typeface="Source Serif 4 Semi Bold" pitchFamily="34" charset="-120"/>
-              </a:rPr>
-              <a:t>Resultados</a:t>
-            </a:r>
-            <a:r>
-              <a:rPr lang="en-US" sz="3500" dirty="0">
-                <a:solidFill>
-                  <a:srgbClr val="D73AD7"/>
-                </a:solidFill>
-                <a:latin typeface="Source Serif 4 Semi Bold" pitchFamily="34" charset="0"/>
-                <a:ea typeface="Source Serif 4 Semi Bold" pitchFamily="34" charset="-122"/>
-                <a:cs typeface="Source Serif 4 Semi Bold" pitchFamily="34" charset="-120"/>
-              </a:rPr>
-              <a:t> o </a:t>
-            </a:r>
-            <a:r>
-              <a:rPr lang="en-US" sz="3500" dirty="0" err="1">
-                <a:solidFill>
-                  <a:srgbClr val="D73AD7"/>
-                </a:solidFill>
-                <a:latin typeface="Source Serif 4 Semi Bold" pitchFamily="34" charset="0"/>
-                <a:ea typeface="Source Serif 4 Semi Bold" pitchFamily="34" charset="-122"/>
-                <a:cs typeface="Source Serif 4 Semi Bold" pitchFamily="34" charset="-120"/>
-              </a:rPr>
-              <a:t>Evidencia</a:t>
-            </a:r>
-            <a:endParaRPr lang="en-US" sz="3500" dirty="0">
-              <a:solidFill>
-                <a:srgbClr val="D73AD7"/>
-              </a:solidFill>
-              <a:latin typeface="Source Serif 4 Semi Bold" pitchFamily="34" charset="0"/>
-              <a:ea typeface="Source Serif 4 Semi Bold" pitchFamily="34" charset="-122"/>
-              <a:cs typeface="Source Serif 4 Semi Bold" pitchFamily="34" charset="-120"/>
-            </a:endParaRPr>
-          </a:p>
-        </p:txBody>
-      </p:sp>
-      <p:sp>
-        <p:nvSpPr>
-          <p:cNvPr id="20" name="Text 7">
-            <a:extLst>
-              <a:ext uri="{FF2B5EF4-FFF2-40B4-BE49-F238E27FC236}">
-                <a16:creationId xmlns:a16="http://schemas.microsoft.com/office/drawing/2014/main" id="{8416ECBB-7D91-6674-1561-75786E1A1CA6}"/>
-              </a:ext>
-            </a:extLst>
-          </p:cNvPr>
-          <p:cNvSpPr/>
-          <p:nvPr/>
-        </p:nvSpPr>
-        <p:spPr>
-          <a:xfrm>
-            <a:off x="773495" y="2261019"/>
-            <a:ext cx="12287250" cy="3829703"/>
-          </a:xfrm>
-          <a:prstGeom prst="rect">
-            <a:avLst/>
-          </a:prstGeom>
-          <a:noFill/>
-          <a:ln/>
-        </p:spPr>
-        <p:txBody>
-          <a:bodyPr vert="horz" wrap="square" lIns="0" tIns="0" rIns="0" bIns="0" rtlCol="0" anchor="t">
-            <a:spAutoFit/>
-          </a:bodyPr>
-          <a:lstStyle/>
-          <a:p>
-            <a:pPr marL="531813" lvl="1" indent="-285750" defTabSz="404813">
-              <a:lnSpc>
-                <a:spcPct val="150000"/>
-              </a:lnSpc>
-              <a:buFont typeface="Arial" panose="020B0604020202020204" pitchFamily="34" charset="0"/>
-              <a:buChar char="•"/>
-              <a:tabLst>
-                <a:tab pos="16225838" algn="l"/>
-                <a:tab pos="16592550" algn="l"/>
-                <a:tab pos="17124363" algn="l"/>
-              </a:tabLst>
-            </a:pPr>
-            <a:endParaRPr lang="es-419" sz="2400" dirty="0">
-              <a:solidFill>
-                <a:srgbClr val="272525"/>
-              </a:solidFill>
-              <a:latin typeface="Source Serif 4 Semi Bold" pitchFamily="34" charset="0"/>
-              <a:ea typeface="Source Serif 4 Semi Bold" pitchFamily="34" charset="-122"/>
-              <a:cs typeface="Source Serif 4 Semi Bold" pitchFamily="34" charset="-120"/>
-            </a:endParaRPr>
-          </a:p>
-          <a:p>
-            <a:pPr marL="531813" lvl="1" indent="-285750" defTabSz="404813">
-              <a:lnSpc>
-                <a:spcPct val="150000"/>
-              </a:lnSpc>
-              <a:buFont typeface="Arial" panose="020B0604020202020204" pitchFamily="34" charset="0"/>
-              <a:buChar char="•"/>
-              <a:tabLst>
-                <a:tab pos="16225838" algn="l"/>
-                <a:tab pos="16592550" algn="l"/>
-                <a:tab pos="17124363" algn="l"/>
-              </a:tabLst>
-            </a:pPr>
-            <a:r>
-              <a:rPr lang="es-419" sz="2400" dirty="0">
-                <a:solidFill>
-                  <a:srgbClr val="272525"/>
-                </a:solidFill>
-                <a:latin typeface="Source Serif 4 Semi Bold" pitchFamily="34" charset="0"/>
-                <a:ea typeface="Source Serif 4 Semi Bold" pitchFamily="34" charset="-122"/>
-                <a:cs typeface="Source Serif 4 Semi Bold" pitchFamily="34" charset="-120"/>
-              </a:rPr>
-              <a:t>⚙️ MVP funcional desarrollado (</a:t>
-            </a:r>
-            <a:r>
-              <a:rPr lang="es-419" sz="2400" dirty="0" err="1">
-                <a:solidFill>
-                  <a:srgbClr val="272525"/>
-                </a:solidFill>
-                <a:latin typeface="Source Serif 4 Semi Bold" pitchFamily="34" charset="0"/>
-                <a:ea typeface="Source Serif 4 Semi Bold" pitchFamily="34" charset="-122"/>
-                <a:cs typeface="Source Serif 4 Semi Bold" pitchFamily="34" charset="-120"/>
-              </a:rPr>
-              <a:t>Frontend</a:t>
-            </a:r>
-            <a:r>
-              <a:rPr lang="es-419" sz="2400" dirty="0">
-                <a:solidFill>
-                  <a:srgbClr val="272525"/>
-                </a:solidFill>
-                <a:latin typeface="Source Serif 4 Semi Bold" pitchFamily="34" charset="0"/>
-                <a:ea typeface="Source Serif 4 Semi Bold" pitchFamily="34" charset="-122"/>
-                <a:cs typeface="Source Serif 4 Semi Bold" pitchFamily="34" charset="-120"/>
-              </a:rPr>
-              <a:t> Angular/</a:t>
-            </a:r>
-            <a:r>
-              <a:rPr lang="es-419" sz="2400" dirty="0" err="1">
-                <a:solidFill>
-                  <a:srgbClr val="272525"/>
-                </a:solidFill>
-                <a:latin typeface="Source Serif 4 Semi Bold" pitchFamily="34" charset="0"/>
-                <a:ea typeface="Source Serif 4 Semi Bold" pitchFamily="34" charset="-122"/>
-                <a:cs typeface="Source Serif 4 Semi Bold" pitchFamily="34" charset="-120"/>
-              </a:rPr>
-              <a:t>Ionic</a:t>
-            </a:r>
-            <a:r>
-              <a:rPr lang="es-419" sz="2400" dirty="0">
-                <a:solidFill>
-                  <a:srgbClr val="272525"/>
-                </a:solidFill>
-                <a:latin typeface="Source Serif 4 Semi Bold" pitchFamily="34" charset="0"/>
-                <a:ea typeface="Source Serif 4 Semi Bold" pitchFamily="34" charset="-122"/>
-                <a:cs typeface="Source Serif 4 Semi Bold" pitchFamily="34" charset="-120"/>
-              </a:rPr>
-              <a:t>, </a:t>
-            </a:r>
-            <a:r>
-              <a:rPr lang="es-419" sz="2400" dirty="0" err="1">
-                <a:solidFill>
-                  <a:srgbClr val="272525"/>
-                </a:solidFill>
-                <a:latin typeface="Source Serif 4 Semi Bold" pitchFamily="34" charset="0"/>
-                <a:ea typeface="Source Serif 4 Semi Bold" pitchFamily="34" charset="-122"/>
-                <a:cs typeface="Source Serif 4 Semi Bold" pitchFamily="34" charset="-120"/>
-              </a:rPr>
-              <a:t>Backend</a:t>
-            </a:r>
-            <a:r>
-              <a:rPr lang="es-419" sz="2400" dirty="0">
-                <a:solidFill>
-                  <a:srgbClr val="272525"/>
-                </a:solidFill>
-                <a:latin typeface="Source Serif 4 Semi Bold" pitchFamily="34" charset="0"/>
-                <a:ea typeface="Source Serif 4 Semi Bold" pitchFamily="34" charset="-122"/>
-                <a:cs typeface="Source Serif 4 Semi Bold" pitchFamily="34" charset="-120"/>
-              </a:rPr>
-              <a:t> Node.js, BD PostgreSQL).</a:t>
-            </a:r>
-          </a:p>
-          <a:p>
-            <a:pPr marL="531813" lvl="1" indent="-285750" defTabSz="404813">
-              <a:lnSpc>
-                <a:spcPct val="150000"/>
-              </a:lnSpc>
-              <a:buFont typeface="Arial" panose="020B0604020202020204" pitchFamily="34" charset="0"/>
-              <a:buChar char="•"/>
-              <a:tabLst>
-                <a:tab pos="16225838" algn="l"/>
-                <a:tab pos="16592550" algn="l"/>
-                <a:tab pos="17124363" algn="l"/>
-              </a:tabLst>
-            </a:pPr>
-            <a:r>
-              <a:rPr lang="es-419" sz="2400" dirty="0">
-                <a:solidFill>
-                  <a:srgbClr val="272525"/>
-                </a:solidFill>
-                <a:latin typeface="Source Serif 4 Semi Bold" pitchFamily="34" charset="0"/>
-                <a:ea typeface="Source Serif 4 Semi Bold" pitchFamily="34" charset="-122"/>
-                <a:cs typeface="Source Serif 4 Semi Bold" pitchFamily="34" charset="-120"/>
-              </a:rPr>
-              <a:t>✅ Validación inicial: simulación de 5 casos, 80% de acierto en orientación.</a:t>
-            </a:r>
-          </a:p>
-          <a:p>
-            <a:pPr marL="531813" lvl="1" indent="-285750" defTabSz="404813">
-              <a:lnSpc>
-                <a:spcPct val="150000"/>
-              </a:lnSpc>
-              <a:buFont typeface="Arial" panose="020B0604020202020204" pitchFamily="34" charset="0"/>
-              <a:buChar char="•"/>
-              <a:tabLst>
-                <a:tab pos="16225838" algn="l"/>
-                <a:tab pos="16592550" algn="l"/>
-                <a:tab pos="17124363" algn="l"/>
-              </a:tabLst>
-            </a:pPr>
-            <a:r>
-              <a:rPr lang="es-419" sz="2400" dirty="0">
-                <a:solidFill>
-                  <a:srgbClr val="272525"/>
-                </a:solidFill>
-                <a:latin typeface="Source Serif 4 Semi Bold" pitchFamily="34" charset="0"/>
-                <a:ea typeface="Source Serif 4 Semi Bold" pitchFamily="34" charset="-122"/>
-                <a:cs typeface="Source Serif 4 Semi Bold" pitchFamily="34" charset="-120"/>
-              </a:rPr>
-              <a:t>🧑‍🤝‍🧑 Encuesta a 10 usuarios: 90% considera útil la orientación previa a la cita.</a:t>
-            </a:r>
-          </a:p>
-          <a:p>
-            <a:pPr marL="531813" lvl="1" indent="-285750" defTabSz="404813">
-              <a:lnSpc>
-                <a:spcPct val="150000"/>
-              </a:lnSpc>
-              <a:buFont typeface="Arial" panose="020B0604020202020204" pitchFamily="34" charset="0"/>
-              <a:buChar char="•"/>
-              <a:tabLst>
-                <a:tab pos="16225838" algn="l"/>
-                <a:tab pos="16592550" algn="l"/>
-                <a:tab pos="17124363" algn="l"/>
-              </a:tabLst>
-            </a:pPr>
-            <a:r>
-              <a:rPr lang="es-419" sz="2400" dirty="0">
-                <a:solidFill>
-                  <a:srgbClr val="272525"/>
-                </a:solidFill>
-                <a:latin typeface="Source Serif 4 Semi Bold" pitchFamily="34" charset="0"/>
-                <a:ea typeface="Source Serif 4 Semi Bold" pitchFamily="34" charset="-122"/>
-                <a:cs typeface="Source Serif 4 Semi Bold" pitchFamily="34" charset="-120"/>
-              </a:rPr>
-              <a:t>🧪 Pruebas técnicas: autenticación y gestión de usuarios verificadas; cuestionario dinámico en pruebas.</a:t>
-            </a:r>
-          </a:p>
-        </p:txBody>
-      </p:sp>
-    </p:spTree>
-    <p:extLst>
-      <p:ext uri="{BB962C8B-B14F-4D97-AF65-F5344CB8AC3E}">
-        <p14:creationId xmlns:p14="http://schemas.microsoft.com/office/powerpoint/2010/main" val="3324267660"/>
-      </p:ext>
-    </p:extLst>
-  </p:cSld>
-  <p:clrMapOvr>
-    <a:masterClrMapping/>
-  </p:clrMapOvr>
-</p:sld>
-</file>
-
-<file path=ppt/slides/slide12.xml><?xml version="1.0" encoding="utf-8"?>
 <p:sld xmlns:a="http://schemas.openxmlformats.org/drawingml/2006/main" xmlns:r="http://schemas.openxmlformats.org/officeDocument/2006/relationships" xmlns:p="http://schemas.openxmlformats.org/presentationml/2006/main">
   <p:cSld>
     <p:spTree>
@@ -6402,7 +6399,7 @@
               <a:buNone/>
             </a:pPr>
             <a:r>
-              <a:rPr lang="en-US" sz="3500" dirty="0" err="1">
+              <a:rPr lang="es-419" sz="3500" noProof="0" dirty="0">
                 <a:solidFill>
                   <a:srgbClr val="D73AD7"/>
                 </a:solidFill>
@@ -6410,38 +6407,8 @@
                 <a:ea typeface="Source Serif 4 Semi Bold" pitchFamily="34" charset="-122"/>
                 <a:cs typeface="Source Serif 4 Semi Bold" pitchFamily="34" charset="-120"/>
               </a:rPr>
-              <a:t>Resultados</a:t>
-            </a:r>
-            <a:r>
-              <a:rPr lang="en-US" sz="3500" dirty="0">
-                <a:solidFill>
-                  <a:srgbClr val="D73AD7"/>
-                </a:solidFill>
-                <a:latin typeface="Source Serif 4 Semi Bold" pitchFamily="34" charset="0"/>
-                <a:ea typeface="Source Serif 4 Semi Bold" pitchFamily="34" charset="-122"/>
-                <a:cs typeface="Source Serif 4 Semi Bold" pitchFamily="34" charset="-120"/>
-              </a:rPr>
-              <a:t> o </a:t>
-            </a:r>
-            <a:r>
-              <a:rPr lang="en-US" sz="3500" dirty="0" err="1">
-                <a:solidFill>
-                  <a:srgbClr val="D73AD7"/>
-                </a:solidFill>
-                <a:latin typeface="Source Serif 4 Semi Bold" pitchFamily="34" charset="0"/>
-                <a:ea typeface="Source Serif 4 Semi Bold" pitchFamily="34" charset="-122"/>
-                <a:cs typeface="Source Serif 4 Semi Bold" pitchFamily="34" charset="-120"/>
-              </a:rPr>
-              <a:t>Evidencia</a:t>
-            </a:r>
-            <a:endParaRPr lang="en-US" sz="3500" dirty="0">
-              <a:solidFill>
-                <a:srgbClr val="D73AD7"/>
-              </a:solidFill>
-              <a:latin typeface="Source Serif 4 Semi Bold" pitchFamily="34" charset="0"/>
-              <a:ea typeface="Source Serif 4 Semi Bold" pitchFamily="34" charset="-122"/>
-              <a:cs typeface="Source Serif 4 Semi Bold" pitchFamily="34" charset="-120"/>
-            </a:endParaRPr>
+              <a:t>Resultados o Evidencia</a:t>
+            </a:r>
           </a:p>
         </p:txBody>
       </p:sp>
@@ -6459,8 +6426,8 @@
         </p:nvSpPr>
         <p:spPr>
           <a:xfrm>
-            <a:off x="773495" y="2261019"/>
-            <a:ext cx="12287250" cy="3829703"/>
+            <a:off x="773495" y="1332548"/>
+            <a:ext cx="12287250" cy="4101957"/>
           </a:xfrm>
           <a:prstGeom prst="rect">
             <a:avLst/>
@@ -6474,9 +6441,29 @@
           </a:bodyPr>
           <a:lstStyle/>
           <a:p>
+            <a:pPr marL="246063" lvl="1" defTabSz="404813">
+              <a:lnSpc>
+                <a:spcPct val="150000"/>
+              </a:lnSpc>
+              <a:tabLst>
+                <a:tab pos="16225838" algn="l"/>
+                <a:tab pos="16592550" algn="l"/>
+                <a:tab pos="17124363" algn="l"/>
+              </a:tabLst>
+            </a:pPr>
+            <a:endParaRPr lang="es-419" sz="2400" noProof="0" dirty="0">
+              <a:solidFill>
+                <a:srgbClr val="272525"/>
+              </a:solidFill>
+              <a:latin typeface="Source Serif 4 Semi Bold" pitchFamily="34" charset="0"/>
+              <a:ea typeface="Source Serif 4 Semi Bold" pitchFamily="34" charset="-122"/>
+              <a:cs typeface="Source Serif 4 Semi Bold" pitchFamily="34" charset="-120"/>
+            </a:endParaRPr>
+          </a:p>
+          <a:p>
             <a:pPr marL="531813" lvl="1" indent="-285750" defTabSz="404813">
               <a:lnSpc>
-                <a:spcPct val="150000"/>
+                <a:spcPct val="250000"/>
               </a:lnSpc>
               <a:buFont typeface="Arial" panose="020B0604020202020204" pitchFamily="34" charset="0"/>
               <a:buChar char="•"/>
@@ -6486,19 +6473,22 @@
                 <a:tab pos="17124363" algn="l"/>
               </a:tabLst>
             </a:pPr>
-            <a:endParaRPr lang="es-419" sz="2400" dirty="0">
-              <a:solidFill>
-                <a:srgbClr val="272525"/>
-              </a:solidFill>
-              <a:latin typeface="Source Serif 4 Semi Bold" pitchFamily="34" charset="0"/>
-              <a:ea typeface="Source Serif 4 Semi Bold" pitchFamily="34" charset="-122"/>
-              <a:cs typeface="Source Serif 4 Semi Bold" pitchFamily="34" charset="-120"/>
-            </a:endParaRPr>
+            <a:r>
+              <a:rPr lang="es-419" sz="2400" noProof="0" dirty="0">
+                <a:solidFill>
+                  <a:srgbClr val="272525"/>
+                </a:solidFill>
+                <a:latin typeface="Source Serif 4 Semi Bold" pitchFamily="34" charset="0"/>
+                <a:ea typeface="Source Serif 4 Semi Bold" pitchFamily="34" charset="-122"/>
+                <a:cs typeface="Source Serif 4 Semi Bold" pitchFamily="34" charset="-120"/>
+              </a:rPr>
+              <a:t> MVP funcional(MediTriage).</a:t>
+            </a:r>
           </a:p>
           <a:p>
             <a:pPr marL="531813" lvl="1" indent="-285750" defTabSz="404813">
               <a:lnSpc>
-                <a:spcPct val="150000"/>
+                <a:spcPct val="250000"/>
               </a:lnSpc>
               <a:buFont typeface="Arial" panose="020B0604020202020204" pitchFamily="34" charset="0"/>
               <a:buChar char="•"/>
@@ -6509,7 +6499,7 @@
               </a:tabLst>
             </a:pPr>
             <a:r>
-              <a:rPr lang="es-419" sz="2400" dirty="0">
+              <a:rPr lang="es-419" sz="2400" noProof="0" dirty="0">
                 <a:solidFill>
                   <a:srgbClr val="272525"/>
                 </a:solidFill>
@@ -6517,79 +6507,13 @@
                 <a:ea typeface="Source Serif 4 Semi Bold" pitchFamily="34" charset="-122"/>
                 <a:cs typeface="Source Serif 4 Semi Bold" pitchFamily="34" charset="-120"/>
               </a:rPr>
-              <a:t>⚙️ MVP funcional desarrollado (</a:t>
-            </a:r>
-            <a:r>
-              <a:rPr lang="es-419" sz="2400" dirty="0" err="1">
-                <a:solidFill>
-                  <a:srgbClr val="272525"/>
-                </a:solidFill>
-                <a:latin typeface="Source Serif 4 Semi Bold" pitchFamily="34" charset="0"/>
-                <a:ea typeface="Source Serif 4 Semi Bold" pitchFamily="34" charset="-122"/>
-                <a:cs typeface="Source Serif 4 Semi Bold" pitchFamily="34" charset="-120"/>
-              </a:rPr>
-              <a:t>Frontend</a:t>
-            </a:r>
-            <a:r>
-              <a:rPr lang="es-419" sz="2400" dirty="0">
-                <a:solidFill>
-                  <a:srgbClr val="272525"/>
-                </a:solidFill>
-                <a:latin typeface="Source Serif 4 Semi Bold" pitchFamily="34" charset="0"/>
-                <a:ea typeface="Source Serif 4 Semi Bold" pitchFamily="34" charset="-122"/>
-                <a:cs typeface="Source Serif 4 Semi Bold" pitchFamily="34" charset="-120"/>
-              </a:rPr>
-              <a:t> Angular/</a:t>
-            </a:r>
-            <a:r>
-              <a:rPr lang="es-419" sz="2400" dirty="0" err="1">
-                <a:solidFill>
-                  <a:srgbClr val="272525"/>
-                </a:solidFill>
-                <a:latin typeface="Source Serif 4 Semi Bold" pitchFamily="34" charset="0"/>
-                <a:ea typeface="Source Serif 4 Semi Bold" pitchFamily="34" charset="-122"/>
-                <a:cs typeface="Source Serif 4 Semi Bold" pitchFamily="34" charset="-120"/>
-              </a:rPr>
-              <a:t>Ionic</a:t>
-            </a:r>
-            <a:r>
-              <a:rPr lang="es-419" sz="2400" dirty="0">
-                <a:solidFill>
-                  <a:srgbClr val="272525"/>
-                </a:solidFill>
-                <a:latin typeface="Source Serif 4 Semi Bold" pitchFamily="34" charset="0"/>
-                <a:ea typeface="Source Serif 4 Semi Bold" pitchFamily="34" charset="-122"/>
-                <a:cs typeface="Source Serif 4 Semi Bold" pitchFamily="34" charset="-120"/>
-              </a:rPr>
-              <a:t>, </a:t>
-            </a:r>
-            <a:r>
-              <a:rPr lang="es-419" sz="2400" dirty="0" err="1">
-                <a:solidFill>
-                  <a:srgbClr val="272525"/>
-                </a:solidFill>
-                <a:latin typeface="Source Serif 4 Semi Bold" pitchFamily="34" charset="0"/>
-                <a:ea typeface="Source Serif 4 Semi Bold" pitchFamily="34" charset="-122"/>
-                <a:cs typeface="Source Serif 4 Semi Bold" pitchFamily="34" charset="-120"/>
-              </a:rPr>
-              <a:t>Backend</a:t>
-            </a:r>
-            <a:r>
-              <a:rPr lang="es-419" sz="2400" dirty="0">
-                <a:solidFill>
-                  <a:srgbClr val="272525"/>
-                </a:solidFill>
-                <a:latin typeface="Source Serif 4 Semi Bold" pitchFamily="34" charset="0"/>
-                <a:ea typeface="Source Serif 4 Semi Bold" pitchFamily="34" charset="-122"/>
-                <a:cs typeface="Source Serif 4 Semi Bold" pitchFamily="34" charset="-120"/>
-              </a:rPr>
-              <a:t> Node.js, BD PostgreSQL).</a:t>
+              <a:t>Informe de avance (acta, requerimientos, prototipo inicial).</a:t>
             </a:r>
           </a:p>
           <a:p>
             <a:pPr marL="531813" lvl="1" indent="-285750" defTabSz="404813">
               <a:lnSpc>
-                <a:spcPct val="150000"/>
+                <a:spcPct val="250000"/>
               </a:lnSpc>
               <a:buFont typeface="Arial" panose="020B0604020202020204" pitchFamily="34" charset="0"/>
               <a:buChar char="•"/>
@@ -6600,7 +6524,7 @@
               </a:tabLst>
             </a:pPr>
             <a:r>
-              <a:rPr lang="es-419" sz="2400" dirty="0">
+              <a:rPr lang="es-419" sz="2400" noProof="0" dirty="0">
                 <a:solidFill>
                   <a:srgbClr val="272525"/>
                 </a:solidFill>
@@ -6608,13 +6532,13 @@
                 <a:ea typeface="Source Serif 4 Semi Bold" pitchFamily="34" charset="-122"/>
                 <a:cs typeface="Source Serif 4 Semi Bold" pitchFamily="34" charset="-120"/>
               </a:rPr>
-              <a:t>✅ Validación inicial: simulación de 5 casos, 80% de acierto en orientación.</a:t>
+              <a:t>🧑‍🤝‍🧑 Documentación técnica y de usuario.</a:t>
             </a:r>
           </a:p>
           <a:p>
             <a:pPr marL="531813" lvl="1" indent="-285750" defTabSz="404813">
               <a:lnSpc>
-                <a:spcPct val="150000"/>
+                <a:spcPct val="250000"/>
               </a:lnSpc>
               <a:buFont typeface="Arial" panose="020B0604020202020204" pitchFamily="34" charset="0"/>
               <a:buChar char="•"/>
@@ -6625,7 +6549,7 @@
               </a:tabLst>
             </a:pPr>
             <a:r>
-              <a:rPr lang="es-419" sz="2400" dirty="0">
+              <a:rPr lang="es-419" sz="2400" noProof="0" dirty="0">
                 <a:solidFill>
                   <a:srgbClr val="272525"/>
                 </a:solidFill>
@@ -6633,32 +6557,7 @@
                 <a:ea typeface="Source Serif 4 Semi Bold" pitchFamily="34" charset="-122"/>
                 <a:cs typeface="Source Serif 4 Semi Bold" pitchFamily="34" charset="-120"/>
               </a:rPr>
-              <a:t>🧑‍🤝‍🧑 Encuesta a 10 usuarios: 90% considera útil la orientación previa a la cita.</a:t>
-            </a:r>
-          </a:p>
-          <a:p>
-            <a:pPr marL="531813" lvl="1" indent="-285750" defTabSz="404813">
-              <a:lnSpc>
-                <a:spcPct val="150000"/>
-              </a:lnSpc>
-              <a:buFont typeface="Arial" panose="020B0604020202020204" pitchFamily="34" charset="0"/>
-              <a:buChar char="•"/>
-              <a:tabLst>
-                <a:tab pos="16225838" algn="l"/>
-                <a:tab pos="16592550" algn="l"/>
-                <a:tab pos="17124363" algn="l"/>
-              </a:tabLst>
-            </a:pPr>
-            <a:r>
-              <a:rPr lang="es-419" sz="2400" dirty="0">
-                <a:solidFill>
-                  <a:srgbClr val="272525"/>
-                </a:solidFill>
-                <a:latin typeface="Source Serif 4 Semi Bold" pitchFamily="34" charset="0"/>
-                <a:ea typeface="Source Serif 4 Semi Bold" pitchFamily="34" charset="-122"/>
-                <a:cs typeface="Source Serif 4 Semi Bold" pitchFamily="34" charset="-120"/>
-              </a:rPr>
-              <a:t>🧪 Pruebas técnicas: autenticación y gestión de usuarios verificadas; cuestionario dinámico en pruebas.</a:t>
+              <a:t>🧪 Presentación final y demo.</a:t>
             </a:r>
           </a:p>
         </p:txBody>
@@ -6676,7 +6575,333 @@
 </p:sld>
 </file>
 
+<file path=ppt/slides/slide12.xml><?xml version="1.0" encoding="utf-8"?>
+<p:sld xmlns:a="http://schemas.openxmlformats.org/drawingml/2006/main" xmlns:r="http://schemas.openxmlformats.org/officeDocument/2006/relationships" xmlns:p="http://schemas.openxmlformats.org/presentationml/2006/main">
+  <p:cSld>
+    <p:spTree>
+      <p:nvGrpSpPr>
+        <p:cNvPr id="1" name="">
+          <a:extLst>
+            <a:ext uri="{FF2B5EF4-FFF2-40B4-BE49-F238E27FC236}">
+              <a16:creationId xmlns:a16="http://schemas.microsoft.com/office/drawing/2014/main" id="{F97363FC-338F-8BA7-086C-3F0AA6BF979C}"/>
+            </a:ext>
+          </a:extLst>
+        </p:cNvPr>
+        <p:cNvGrpSpPr/>
+        <p:nvPr/>
+      </p:nvGrpSpPr>
+      <p:grpSpPr>
+        <a:xfrm>
+          <a:off x="0" y="0"/>
+          <a:ext cx="0" cy="0"/>
+          <a:chOff x="0" y="0"/>
+          <a:chExt cx="0" cy="0"/>
+        </a:xfrm>
+      </p:grpSpPr>
+      <p:sp>
+        <p:nvSpPr>
+          <p:cNvPr id="2" name="Text 0">
+            <a:extLst>
+              <a:ext uri="{FF2B5EF4-FFF2-40B4-BE49-F238E27FC236}">
+                <a16:creationId xmlns:a16="http://schemas.microsoft.com/office/drawing/2014/main" id="{C70FC1BE-E458-B41F-5631-E73A7F515600}"/>
+              </a:ext>
+            </a:extLst>
+          </p:cNvPr>
+          <p:cNvSpPr/>
+          <p:nvPr/>
+        </p:nvSpPr>
+        <p:spPr>
+          <a:xfrm>
+            <a:off x="213185" y="1628800"/>
+            <a:ext cx="2885314" cy="563285"/>
+          </a:xfrm>
+          <a:prstGeom prst="rect">
+            <a:avLst/>
+          </a:prstGeom>
+          <a:noFill/>
+          <a:ln/>
+        </p:spPr>
+        <p:txBody>
+          <a:bodyPr wrap="none" lIns="0" tIns="0" rIns="0" bIns="0" rtlCol="0" anchor="t"/>
+          <a:lstStyle/>
+          <a:p>
+            <a:pPr marL="0" indent="0" algn="l">
+              <a:lnSpc>
+                <a:spcPts val="4400"/>
+              </a:lnSpc>
+              <a:buNone/>
+            </a:pPr>
+            <a:r>
+              <a:rPr lang="es-419" sz="3500" noProof="0" dirty="0">
+                <a:solidFill>
+                  <a:srgbClr val="D73AD7"/>
+                </a:solidFill>
+                <a:latin typeface="Source Serif 4 Semi Bold" pitchFamily="34" charset="0"/>
+                <a:ea typeface="Source Serif 4 Semi Bold" pitchFamily="34" charset="-122"/>
+                <a:cs typeface="Source Serif 4 Semi Bold" pitchFamily="34" charset="-120"/>
+              </a:rPr>
+              <a:t>Resultados o Evidencia</a:t>
+            </a:r>
+          </a:p>
+        </p:txBody>
+      </p:sp>
+      <p:sp>
+        <p:nvSpPr>
+          <p:cNvPr id="20" name="Text 7">
+            <a:extLst>
+              <a:ext uri="{FF2B5EF4-FFF2-40B4-BE49-F238E27FC236}">
+                <a16:creationId xmlns:a16="http://schemas.microsoft.com/office/drawing/2014/main" id="{97005A27-9227-5C76-26CD-4016CD49BA64}"/>
+              </a:ext>
+            </a:extLst>
+          </p:cNvPr>
+          <p:cNvSpPr/>
+          <p:nvPr/>
+        </p:nvSpPr>
+        <p:spPr>
+          <a:xfrm>
+            <a:off x="773495" y="1332548"/>
+            <a:ext cx="12287250" cy="505716"/>
+          </a:xfrm>
+          <a:prstGeom prst="rect">
+            <a:avLst/>
+          </a:prstGeom>
+          <a:noFill/>
+          <a:ln/>
+        </p:spPr>
+        <p:txBody>
+          <a:bodyPr vert="horz" wrap="square" lIns="0" tIns="0" rIns="0" bIns="0" rtlCol="0" anchor="t">
+            <a:spAutoFit/>
+          </a:bodyPr>
+          <a:lstStyle/>
+          <a:p>
+            <a:pPr marL="246063" lvl="1" defTabSz="404813">
+              <a:lnSpc>
+                <a:spcPct val="150000"/>
+              </a:lnSpc>
+              <a:tabLst>
+                <a:tab pos="16225838" algn="l"/>
+                <a:tab pos="16592550" algn="l"/>
+                <a:tab pos="17124363" algn="l"/>
+              </a:tabLst>
+            </a:pPr>
+            <a:endParaRPr lang="es-419" sz="2400" noProof="0" dirty="0">
+              <a:solidFill>
+                <a:srgbClr val="272525"/>
+              </a:solidFill>
+              <a:latin typeface="Source Serif 4 Semi Bold" pitchFamily="34" charset="0"/>
+              <a:ea typeface="Source Serif 4 Semi Bold" pitchFamily="34" charset="-122"/>
+              <a:cs typeface="Source Serif 4 Semi Bold" pitchFamily="34" charset="-120"/>
+            </a:endParaRPr>
+          </a:p>
+        </p:txBody>
+      </p:sp>
+      <p:pic>
+        <p:nvPicPr>
+          <p:cNvPr id="4" name="Imagen 3" descr="Texto&#10;&#10;El contenido generado por IA puede ser incorrecto.">
+            <a:extLst>
+              <a:ext uri="{FF2B5EF4-FFF2-40B4-BE49-F238E27FC236}">
+                <a16:creationId xmlns:a16="http://schemas.microsoft.com/office/drawing/2014/main" id="{27621E45-A967-3D9C-4F7C-49CBADDCC214}"/>
+              </a:ext>
+            </a:extLst>
+          </p:cNvPr>
+          <p:cNvPicPr>
+            <a:picLocks noChangeAspect="1"/>
+          </p:cNvPicPr>
+          <p:nvPr/>
+        </p:nvPicPr>
+        <p:blipFill>
+          <a:blip r:embed="rId3"/>
+          <a:stretch>
+            <a:fillRect/>
+          </a:stretch>
+        </p:blipFill>
+        <p:spPr>
+          <a:xfrm>
+            <a:off x="5673916" y="372593"/>
+            <a:ext cx="7607369" cy="7857007"/>
+          </a:xfrm>
+          <a:prstGeom prst="rect">
+            <a:avLst/>
+          </a:prstGeom>
+        </p:spPr>
+      </p:pic>
+    </p:spTree>
+    <p:extLst>
+      <p:ext uri="{BB962C8B-B14F-4D97-AF65-F5344CB8AC3E}">
+        <p14:creationId xmlns:p14="http://schemas.microsoft.com/office/powerpoint/2010/main" val="774565834"/>
+      </p:ext>
+    </p:extLst>
+  </p:cSld>
+  <p:clrMapOvr>
+    <a:masterClrMapping/>
+  </p:clrMapOvr>
+</p:sld>
+</file>
+
 <file path=ppt/slides/slide13.xml><?xml version="1.0" encoding="utf-8"?>
+<p:sld xmlns:a="http://schemas.openxmlformats.org/drawingml/2006/main" xmlns:r="http://schemas.openxmlformats.org/officeDocument/2006/relationships" xmlns:p="http://schemas.openxmlformats.org/presentationml/2006/main">
+  <p:cSld>
+    <p:spTree>
+      <p:nvGrpSpPr>
+        <p:cNvPr id="1" name="">
+          <a:extLst>
+            <a:ext uri="{FF2B5EF4-FFF2-40B4-BE49-F238E27FC236}">
+              <a16:creationId xmlns:a16="http://schemas.microsoft.com/office/drawing/2014/main" id="{CE64F858-8FB1-82CF-7120-C6AC96B63A5A}"/>
+            </a:ext>
+          </a:extLst>
+        </p:cNvPr>
+        <p:cNvGrpSpPr/>
+        <p:nvPr/>
+      </p:nvGrpSpPr>
+      <p:grpSpPr>
+        <a:xfrm>
+          <a:off x="0" y="0"/>
+          <a:ext cx="0" cy="0"/>
+          <a:chOff x="0" y="0"/>
+          <a:chExt cx="0" cy="0"/>
+        </a:xfrm>
+      </p:grpSpPr>
+      <p:sp>
+        <p:nvSpPr>
+          <p:cNvPr id="2" name="Text 0">
+            <a:extLst>
+              <a:ext uri="{FF2B5EF4-FFF2-40B4-BE49-F238E27FC236}">
+                <a16:creationId xmlns:a16="http://schemas.microsoft.com/office/drawing/2014/main" id="{0D1DE157-D2C1-6BE3-CA10-4561C9D8FC47}"/>
+              </a:ext>
+            </a:extLst>
+          </p:cNvPr>
+          <p:cNvSpPr/>
+          <p:nvPr/>
+        </p:nvSpPr>
+        <p:spPr>
+          <a:xfrm>
+            <a:off x="1382417" y="320289"/>
+            <a:ext cx="5063353" cy="505716"/>
+          </a:xfrm>
+          <a:prstGeom prst="rect">
+            <a:avLst/>
+          </a:prstGeom>
+          <a:noFill/>
+          <a:ln/>
+        </p:spPr>
+        <p:txBody>
+          <a:bodyPr wrap="none" lIns="0" tIns="0" rIns="0" bIns="0" rtlCol="0" anchor="t"/>
+          <a:lstStyle/>
+          <a:p>
+            <a:pPr marL="0" indent="0" algn="l">
+              <a:lnSpc>
+                <a:spcPts val="4400"/>
+              </a:lnSpc>
+              <a:buNone/>
+            </a:pPr>
+            <a:r>
+              <a:rPr lang="es-419" sz="3500" noProof="0" dirty="0">
+                <a:solidFill>
+                  <a:srgbClr val="D73AD7"/>
+                </a:solidFill>
+                <a:latin typeface="Source Serif 4 Semi Bold" pitchFamily="34" charset="0"/>
+                <a:ea typeface="Source Serif 4 Semi Bold" pitchFamily="34" charset="-122"/>
+                <a:cs typeface="Source Serif 4 Semi Bold" pitchFamily="34" charset="-120"/>
+              </a:rPr>
+              <a:t>Resultados o Evidencia</a:t>
+            </a:r>
+          </a:p>
+        </p:txBody>
+      </p:sp>
+      <p:sp>
+        <p:nvSpPr>
+          <p:cNvPr id="20" name="Text 7">
+            <a:extLst>
+              <a:ext uri="{FF2B5EF4-FFF2-40B4-BE49-F238E27FC236}">
+                <a16:creationId xmlns:a16="http://schemas.microsoft.com/office/drawing/2014/main" id="{90BF5C02-8F93-5EB5-E038-3E7AED091402}"/>
+              </a:ext>
+            </a:extLst>
+          </p:cNvPr>
+          <p:cNvSpPr/>
+          <p:nvPr/>
+        </p:nvSpPr>
+        <p:spPr>
+          <a:xfrm>
+            <a:off x="773495" y="1332548"/>
+            <a:ext cx="12287250" cy="505716"/>
+          </a:xfrm>
+          <a:prstGeom prst="rect">
+            <a:avLst/>
+          </a:prstGeom>
+          <a:noFill/>
+          <a:ln/>
+        </p:spPr>
+        <p:txBody>
+          <a:bodyPr vert="horz" wrap="square" lIns="0" tIns="0" rIns="0" bIns="0" rtlCol="0" anchor="t">
+            <a:spAutoFit/>
+          </a:bodyPr>
+          <a:lstStyle/>
+          <a:p>
+            <a:pPr marL="246063" lvl="1" defTabSz="404813">
+              <a:lnSpc>
+                <a:spcPct val="150000"/>
+              </a:lnSpc>
+              <a:tabLst>
+                <a:tab pos="16225838" algn="l"/>
+                <a:tab pos="16592550" algn="l"/>
+                <a:tab pos="17124363" algn="l"/>
+              </a:tabLst>
+            </a:pPr>
+            <a:endParaRPr lang="es-419" sz="2400" noProof="0" dirty="0">
+              <a:solidFill>
+                <a:srgbClr val="272525"/>
+              </a:solidFill>
+              <a:latin typeface="Source Serif 4 Semi Bold" pitchFamily="34" charset="0"/>
+              <a:ea typeface="Source Serif 4 Semi Bold" pitchFamily="34" charset="-122"/>
+              <a:cs typeface="Source Serif 4 Semi Bold" pitchFamily="34" charset="-120"/>
+            </a:endParaRPr>
+          </a:p>
+        </p:txBody>
+      </p:sp>
+      <p:pic>
+        <p:nvPicPr>
+          <p:cNvPr id="5" name="Imagen 4" descr="Interfaz de usuario gráfica, Aplicación&#10;&#10;El contenido generado por IA puede ser incorrecto.">
+            <a:extLst>
+              <a:ext uri="{FF2B5EF4-FFF2-40B4-BE49-F238E27FC236}">
+                <a16:creationId xmlns:a16="http://schemas.microsoft.com/office/drawing/2014/main" id="{2DCE60E7-9F7E-9774-14BA-B10CC6905749}"/>
+              </a:ext>
+            </a:extLst>
+          </p:cNvPr>
+          <p:cNvPicPr>
+            <a:picLocks noChangeAspect="1"/>
+          </p:cNvPicPr>
+          <p:nvPr/>
+        </p:nvPicPr>
+        <p:blipFill>
+          <a:blip r:embed="rId3"/>
+          <a:stretch>
+            <a:fillRect/>
+          </a:stretch>
+        </p:blipFill>
+        <p:spPr>
+          <a:xfrm>
+            <a:off x="232347" y="1026826"/>
+            <a:ext cx="14165705" cy="5312139"/>
+          </a:xfrm>
+          <a:prstGeom prst="rect">
+            <a:avLst/>
+          </a:prstGeom>
+        </p:spPr>
+      </p:pic>
+    </p:spTree>
+    <p:extLst>
+      <p:ext uri="{BB962C8B-B14F-4D97-AF65-F5344CB8AC3E}">
+        <p14:creationId xmlns:p14="http://schemas.microsoft.com/office/powerpoint/2010/main" val="1836931169"/>
+      </p:ext>
+    </p:extLst>
+  </p:cSld>
+  <p:clrMapOvr>
+    <a:masterClrMapping/>
+  </p:clrMapOvr>
+</p:sld>
+</file>
+
+<file path=ppt/slides/slide14.xml><?xml version="1.0" encoding="utf-8"?>
 <p:sld xmlns:a="http://schemas.openxmlformats.org/drawingml/2006/main" xmlns:r="http://schemas.openxmlformats.org/officeDocument/2006/relationships" xmlns:p="http://schemas.openxmlformats.org/presentationml/2006/main">
   <p:cSld>
     <p:spTree>
@@ -6733,7 +6958,7 @@
               <a:buNone/>
             </a:pPr>
             <a:r>
-              <a:rPr lang="en-US" sz="3500" dirty="0" err="1">
+              <a:rPr lang="es-419" sz="3500" noProof="0" dirty="0">
                 <a:solidFill>
                   <a:srgbClr val="D73AD7"/>
                 </a:solidFill>
@@ -6743,14 +6968,6 @@
               </a:rPr>
               <a:t>Conclusión</a:t>
             </a:r>
-            <a:endParaRPr lang="en-US" sz="3500" dirty="0">
-              <a:solidFill>
-                <a:srgbClr val="D73AD7"/>
-              </a:solidFill>
-              <a:latin typeface="Source Serif 4 Semi Bold" pitchFamily="34" charset="0"/>
-              <a:ea typeface="Source Serif 4 Semi Bold" pitchFamily="34" charset="-122"/>
-              <a:cs typeface="Source Serif 4 Semi Bold" pitchFamily="34" charset="-120"/>
-            </a:endParaRPr>
           </a:p>
         </p:txBody>
       </p:sp>
@@ -6796,7 +7013,7 @@
               </a:tabLst>
             </a:pPr>
             <a:r>
-              <a:rPr lang="es-419" sz="2400" dirty="0">
+              <a:rPr lang="es-419" sz="2400" noProof="0" dirty="0">
                 <a:solidFill>
                   <a:srgbClr val="272525"/>
                 </a:solidFill>
@@ -6804,29 +7021,7 @@
                 <a:ea typeface="Source Serif 4 Semi Bold" pitchFamily="34" charset="-122"/>
                 <a:cs typeface="Source Serif 4 Semi Bold" pitchFamily="34" charset="-120"/>
               </a:rPr>
-              <a:t>✅ </a:t>
-            </a:r>
-            <a:r>
-              <a:rPr lang="es-419" sz="2400" dirty="0" err="1">
-                <a:solidFill>
-                  <a:srgbClr val="272525"/>
-                </a:solidFill>
-                <a:latin typeface="Source Serif 4 Semi Bold" pitchFamily="34" charset="0"/>
-                <a:ea typeface="Source Serif 4 Semi Bold" pitchFamily="34" charset="-122"/>
-                <a:cs typeface="Source Serif 4 Semi Bold" pitchFamily="34" charset="-120"/>
-              </a:rPr>
-              <a:t>MediTriage</a:t>
-            </a:r>
-            <a:r>
-              <a:rPr lang="es-419" sz="2400" dirty="0">
-                <a:solidFill>
-                  <a:srgbClr val="272525"/>
-                </a:solidFill>
-                <a:latin typeface="Source Serif 4 Semi Bold" pitchFamily="34" charset="0"/>
-                <a:ea typeface="Source Serif 4 Semi Bold" pitchFamily="34" charset="-122"/>
-                <a:cs typeface="Source Serif 4 Semi Bold" pitchFamily="34" charset="-120"/>
-              </a:rPr>
-              <a:t> responde a un problema real en salud, optimizando tiempos y mejorando la experiencia del paciente.</a:t>
+              <a:t>✅ MediTriage responde a un problema real en salud, optimizando tiempos y mejorando la experiencia del paciente.</a:t>
             </a:r>
           </a:p>
           <a:p>
@@ -6843,7 +7038,7 @@
               </a:tabLst>
             </a:pPr>
             <a:r>
-              <a:rPr lang="es-419" sz="2400" dirty="0">
+              <a:rPr lang="es-419" sz="2400" noProof="0" dirty="0">
                 <a:solidFill>
                   <a:srgbClr val="272525"/>
                 </a:solidFill>
@@ -6868,7 +7063,7 @@
               </a:tabLst>
             </a:pPr>
             <a:r>
-              <a:rPr lang="es-419" sz="2400" dirty="0">
+              <a:rPr lang="es-419" sz="2400" noProof="0" dirty="0">
                 <a:solidFill>
                   <a:srgbClr val="272525"/>
                 </a:solidFill>
@@ -6893,7 +7088,7 @@
               </a:tabLst>
             </a:pPr>
             <a:r>
-              <a:rPr lang="es-419" sz="2400" dirty="0">
+              <a:rPr lang="es-419" sz="2400" noProof="0" dirty="0">
                 <a:solidFill>
                   <a:srgbClr val="272525"/>
                 </a:solidFill>
@@ -6918,7 +7113,7 @@
               </a:tabLst>
             </a:pPr>
             <a:r>
-              <a:rPr lang="es-419" sz="2400" dirty="0">
+              <a:rPr lang="es-419" sz="2400" noProof="0" dirty="0">
                 <a:solidFill>
                   <a:srgbClr val="272525"/>
                 </a:solidFill>
@@ -6928,7 +7123,7 @@
               </a:rPr>
               <a:t>🌐 Proyección: telemedicina, integraciones nacionales y análisis de tendencias epidemiológicas</a:t>
             </a:r>
-            <a:endParaRPr lang="en-US" sz="2400" dirty="0"/>
+            <a:endParaRPr lang="es-419" sz="2400" noProof="0" dirty="0"/>
           </a:p>
         </p:txBody>
       </p:sp>
@@ -6936,6 +7131,89 @@
     <p:extLst>
       <p:ext uri="{BB962C8B-B14F-4D97-AF65-F5344CB8AC3E}">
         <p14:creationId xmlns:p14="http://schemas.microsoft.com/office/powerpoint/2010/main" val="2795812136"/>
+      </p:ext>
+    </p:extLst>
+  </p:cSld>
+  <p:clrMapOvr>
+    <a:masterClrMapping/>
+  </p:clrMapOvr>
+</p:sld>
+</file>
+
+<file path=ppt/slides/slide15.xml><?xml version="1.0" encoding="utf-8"?>
+<p:sld xmlns:a="http://schemas.openxmlformats.org/drawingml/2006/main" xmlns:r="http://schemas.openxmlformats.org/officeDocument/2006/relationships" xmlns:p="http://schemas.openxmlformats.org/presentationml/2006/main">
+  <p:cSld>
+    <p:spTree>
+      <p:nvGrpSpPr>
+        <p:cNvPr id="1" name="">
+          <a:extLst>
+            <a:ext uri="{FF2B5EF4-FFF2-40B4-BE49-F238E27FC236}">
+              <a16:creationId xmlns:a16="http://schemas.microsoft.com/office/drawing/2014/main" id="{8686BD5C-45C9-F1FE-5B2B-29665E9830B2}"/>
+            </a:ext>
+          </a:extLst>
+        </p:cNvPr>
+        <p:cNvGrpSpPr/>
+        <p:nvPr/>
+      </p:nvGrpSpPr>
+      <p:grpSpPr>
+        <a:xfrm>
+          <a:off x="0" y="0"/>
+          <a:ext cx="0" cy="0"/>
+          <a:chOff x="0" y="0"/>
+          <a:chExt cx="0" cy="0"/>
+        </a:xfrm>
+      </p:grpSpPr>
+      <p:sp>
+        <p:nvSpPr>
+          <p:cNvPr id="2" name="Text 0">
+            <a:extLst>
+              <a:ext uri="{FF2B5EF4-FFF2-40B4-BE49-F238E27FC236}">
+                <a16:creationId xmlns:a16="http://schemas.microsoft.com/office/drawing/2014/main" id="{23B898BD-CD4C-C20E-DD22-C201D3AA7B0E}"/>
+              </a:ext>
+            </a:extLst>
+          </p:cNvPr>
+          <p:cNvSpPr/>
+          <p:nvPr/>
+        </p:nvSpPr>
+        <p:spPr>
+          <a:xfrm>
+            <a:off x="2637986" y="3057993"/>
+            <a:ext cx="8604918" cy="1850863"/>
+          </a:xfrm>
+          <a:prstGeom prst="rect">
+            <a:avLst/>
+          </a:prstGeom>
+          <a:noFill/>
+          <a:ln/>
+        </p:spPr>
+        <p:txBody>
+          <a:bodyPr wrap="none" lIns="0" tIns="0" rIns="0" bIns="0" rtlCol="0" anchor="t"/>
+          <a:lstStyle/>
+          <a:p>
+            <a:pPr marL="0" indent="0" algn="ctr">
+              <a:lnSpc>
+                <a:spcPts val="4400"/>
+              </a:lnSpc>
+              <a:buNone/>
+            </a:pPr>
+            <a:r>
+              <a:rPr lang="es-419" sz="8000" noProof="0" dirty="0">
+                <a:solidFill>
+                  <a:srgbClr val="D73AD7"/>
+                </a:solidFill>
+                <a:latin typeface="Source Serif 4 Semi Bold" pitchFamily="34" charset="0"/>
+                <a:ea typeface="Source Serif 4 Semi Bold" pitchFamily="34" charset="-122"/>
+                <a:cs typeface="Source Serif 4 Semi Bold" pitchFamily="34" charset="-120"/>
+              </a:rPr>
+              <a:t>¿Preguntas?</a:t>
+            </a:r>
+          </a:p>
+        </p:txBody>
+      </p:sp>
+    </p:spTree>
+    <p:extLst>
+      <p:ext uri="{BB962C8B-B14F-4D97-AF65-F5344CB8AC3E}">
+        <p14:creationId xmlns:p14="http://schemas.microsoft.com/office/powerpoint/2010/main" val="2588198695"/>
       </p:ext>
     </p:extLst>
   </p:cSld>
@@ -6990,7 +7268,7 @@
               <a:buNone/>
             </a:pPr>
             <a:r>
-              <a:rPr lang="en-US" sz="3950" dirty="0">
+              <a:rPr lang="es-419" sz="3950" noProof="0" dirty="0">
                 <a:solidFill>
                   <a:srgbClr val="D73AD7"/>
                 </a:solidFill>
@@ -7000,7 +7278,7 @@
               </a:rPr>
               <a:t>El Desafío Actual en la Gestión Sanitaria</a:t>
             </a:r>
-            <a:endParaRPr lang="en-US" sz="3950" dirty="0"/>
+            <a:endParaRPr lang="es-419" sz="3950" noProof="0" dirty="0"/>
           </a:p>
         </p:txBody>
       </p:sp>
@@ -7056,7 +7334,7 @@
               <a:buNone/>
             </a:pPr>
             <a:r>
-              <a:rPr lang="en-US" sz="3150" dirty="0">
+              <a:rPr lang="es-419" sz="3150" noProof="0" dirty="0">
                 <a:solidFill>
                   <a:srgbClr val="D73AD7"/>
                 </a:solidFill>
@@ -7066,7 +7344,7 @@
               </a:rPr>
               <a:t>Contexto y Problema</a:t>
             </a:r>
-            <a:endParaRPr lang="en-US" sz="3150" dirty="0"/>
+            <a:endParaRPr lang="es-419" sz="3150" noProof="0" dirty="0"/>
           </a:p>
         </p:txBody>
       </p:sp>
@@ -7098,7 +7376,7 @@
               <a:buNone/>
             </a:pPr>
             <a:r>
-              <a:rPr lang="en-US" sz="1650" dirty="0">
+              <a:rPr lang="es-419" sz="1650" noProof="0" dirty="0">
                 <a:solidFill>
                   <a:srgbClr val="D75BE2"/>
                 </a:solidFill>
@@ -7109,7 +7387,7 @@
               <a:t>Sobrecarga y mala orientación</a:t>
             </a:r>
             <a:r>
-              <a:rPr lang="en-US" sz="1650" dirty="0">
+              <a:rPr lang="es-419" sz="1650" noProof="0" dirty="0">
                 <a:solidFill>
                   <a:srgbClr val="272525"/>
                 </a:solidFill>
@@ -7119,7 +7397,7 @@
               </a:rPr>
               <a:t> en agendas médicas: un problema generalizado que afecta a pacientes y profesionales.</a:t>
             </a:r>
-            <a:endParaRPr lang="en-US" sz="1650" dirty="0"/>
+            <a:endParaRPr lang="es-419" sz="1650" noProof="0" dirty="0"/>
           </a:p>
         </p:txBody>
       </p:sp>
@@ -7152,7 +7430,7 @@
               <a:buChar char="•"/>
             </a:pPr>
             <a:r>
-              <a:rPr lang="en-US" sz="1650" dirty="0">
+              <a:rPr lang="es-419" sz="1650" noProof="0" dirty="0">
                 <a:solidFill>
                   <a:srgbClr val="272525"/>
                 </a:solidFill>
@@ -7162,7 +7440,7 @@
               </a:rPr>
               <a:t>Pacientes que reservan citas en especialidades incorrectas, retrasando diagnósticos.</a:t>
             </a:r>
-            <a:endParaRPr lang="en-US" sz="1650" dirty="0"/>
+            <a:endParaRPr lang="es-419" sz="1650" noProof="0" dirty="0"/>
           </a:p>
         </p:txBody>
       </p:sp>
@@ -7195,7 +7473,7 @@
               <a:buChar char="•"/>
             </a:pPr>
             <a:r>
-              <a:rPr lang="en-US" sz="1650" dirty="0">
+              <a:rPr lang="es-419" sz="1650" noProof="0" dirty="0">
                 <a:solidFill>
                   <a:srgbClr val="272525"/>
                 </a:solidFill>
@@ -7205,7 +7483,7 @@
               </a:rPr>
               <a:t>Ineficiencia en la gestión de recursos médicos, generando esperas innecesarias.</a:t>
             </a:r>
-            <a:endParaRPr lang="en-US" sz="1650" dirty="0"/>
+            <a:endParaRPr lang="es-419" sz="1650" noProof="0" dirty="0"/>
           </a:p>
         </p:txBody>
       </p:sp>
@@ -7262,7 +7540,7 @@
               <a:buNone/>
             </a:pPr>
             <a:r>
-              <a:rPr lang="en-US" sz="4400" dirty="0">
+              <a:rPr lang="es-419" sz="4400" noProof="0" dirty="0">
                 <a:solidFill>
                   <a:srgbClr val="D73AD7"/>
                 </a:solidFill>
@@ -7272,7 +7550,7 @@
               </a:rPr>
               <a:t>Impacto y Oportunidad</a:t>
             </a:r>
-            <a:endParaRPr lang="en-US" sz="4400" dirty="0"/>
+            <a:endParaRPr lang="es-419" sz="4400" noProof="0" dirty="0"/>
           </a:p>
         </p:txBody>
       </p:sp>
@@ -7304,7 +7582,7 @@
               <a:buNone/>
             </a:pPr>
             <a:r>
-              <a:rPr lang="en-US" sz="3500" dirty="0">
+              <a:rPr lang="es-419" sz="3500" noProof="0" dirty="0">
                 <a:solidFill>
                   <a:srgbClr val="D73AD7"/>
                 </a:solidFill>
@@ -7314,7 +7592,7 @@
               </a:rPr>
               <a:t>Relevancia del Proyecto</a:t>
             </a:r>
-            <a:endParaRPr lang="en-US" sz="3500" dirty="0"/>
+            <a:endParaRPr lang="es-419" sz="3500" noProof="0" dirty="0"/>
           </a:p>
         </p:txBody>
       </p:sp>
@@ -7347,7 +7625,7 @@
               <a:buChar char="•"/>
             </a:pPr>
             <a:r>
-              <a:rPr lang="en-US" sz="1850" dirty="0">
+              <a:rPr lang="es-419" sz="1850" noProof="0" dirty="0">
                 <a:solidFill>
                   <a:srgbClr val="D75BE2"/>
                 </a:solidFill>
@@ -7358,7 +7636,7 @@
               <a:t>Optimiza</a:t>
             </a:r>
             <a:r>
-              <a:rPr lang="en-US" sz="1850" dirty="0">
+              <a:rPr lang="es-419" sz="1850" noProof="0" dirty="0">
                 <a:solidFill>
                   <a:srgbClr val="272525"/>
                 </a:solidFill>
@@ -7368,7 +7646,7 @@
               </a:rPr>
               <a:t> la asignación de citas médicas, dirigiendo a cada paciente al especialista adecuado.</a:t>
             </a:r>
-            <a:endParaRPr lang="en-US" sz="1850" dirty="0"/>
+            <a:endParaRPr lang="es-419" sz="1850" noProof="0" dirty="0"/>
           </a:p>
         </p:txBody>
       </p:sp>
@@ -7401,7 +7679,7 @@
               <a:buChar char="•"/>
             </a:pPr>
             <a:r>
-              <a:rPr lang="en-US" sz="1850" dirty="0">
+              <a:rPr lang="es-419" sz="1850" noProof="0" dirty="0">
                 <a:solidFill>
                   <a:srgbClr val="D75BE2"/>
                 </a:solidFill>
@@ -7412,7 +7690,7 @@
               <a:t>Mejora</a:t>
             </a:r>
             <a:r>
-              <a:rPr lang="en-US" sz="1850" dirty="0">
+              <a:rPr lang="es-419" sz="1850" noProof="0" dirty="0">
                 <a:solidFill>
                   <a:srgbClr val="272525"/>
                 </a:solidFill>
@@ -7422,7 +7700,7 @@
               </a:rPr>
               <a:t> la experiencia del paciente, reduciendo tiempos de espera y frustraciones.</a:t>
             </a:r>
-            <a:endParaRPr lang="en-US" sz="1850" dirty="0"/>
+            <a:endParaRPr lang="es-419" sz="1850" noProof="0" dirty="0"/>
           </a:p>
         </p:txBody>
       </p:sp>
@@ -7455,7 +7733,7 @@
               <a:buChar char="•"/>
             </a:pPr>
             <a:r>
-              <a:rPr lang="en-US" sz="1850" dirty="0">
+              <a:rPr lang="es-419" sz="1850" noProof="0" dirty="0">
                 <a:solidFill>
                   <a:srgbClr val="D75BE2"/>
                 </a:solidFill>
@@ -7466,7 +7744,7 @@
               <a:t>Aporta valor</a:t>
             </a:r>
             <a:r>
-              <a:rPr lang="en-US" sz="1850" dirty="0">
+              <a:rPr lang="es-419" sz="1850" noProof="0" dirty="0">
                 <a:solidFill>
                   <a:srgbClr val="272525"/>
                 </a:solidFill>
@@ -7476,7 +7754,7 @@
               </a:rPr>
               <a:t> al campo de la informática aplicando IA en un entorno crítico como la salud, abriendo nuevas vías de eficiencia.</a:t>
             </a:r>
-            <a:endParaRPr lang="en-US" sz="1850" dirty="0"/>
+            <a:endParaRPr lang="es-419" sz="1850" noProof="0" dirty="0"/>
           </a:p>
         </p:txBody>
       </p:sp>
@@ -7557,7 +7835,7 @@
               <a:buNone/>
             </a:pPr>
             <a:r>
-              <a:rPr lang="en-US" sz="4400" dirty="0">
+              <a:rPr lang="es-419" sz="4400" noProof="0" dirty="0">
                 <a:solidFill>
                   <a:srgbClr val="D73AD7"/>
                 </a:solidFill>
@@ -7567,7 +7845,7 @@
               </a:rPr>
               <a:t>MediTriage: La Solución Inteligente</a:t>
             </a:r>
-            <a:endParaRPr lang="en-US" sz="4400" dirty="0"/>
+            <a:endParaRPr lang="es-419" sz="4400" noProof="0" dirty="0"/>
           </a:p>
         </p:txBody>
       </p:sp>
@@ -7603,7 +7881,7 @@
         </p:nvSpPr>
         <p:spPr>
           <a:xfrm>
-            <a:off x="7614761" y="2174438"/>
+            <a:off x="7315200" y="1641038"/>
             <a:ext cx="4505920" cy="563285"/>
           </a:xfrm>
           <a:prstGeom prst="rect">
@@ -7623,7 +7901,7 @@
               <a:buNone/>
             </a:pPr>
             <a:r>
-              <a:rPr lang="en-US" sz="3500" dirty="0">
+              <a:rPr lang="es-419" sz="3500" noProof="0" dirty="0">
                 <a:solidFill>
                   <a:srgbClr val="D73AD7"/>
                 </a:solidFill>
@@ -7633,7 +7911,7 @@
               </a:rPr>
               <a:t>¿Qué es MediTriage?</a:t>
             </a:r>
-            <a:endParaRPr lang="en-US" sz="3500" dirty="0"/>
+            <a:endParaRPr lang="es-419" sz="3500" noProof="0" dirty="0"/>
           </a:p>
         </p:txBody>
       </p:sp>
@@ -7645,7 +7923,7 @@
         </p:nvSpPr>
         <p:spPr>
           <a:xfrm>
-            <a:off x="7614761" y="2977039"/>
+            <a:off x="7315200" y="2443639"/>
             <a:ext cx="6185535" cy="766048"/>
           </a:xfrm>
           <a:prstGeom prst="rect">
@@ -7665,7 +7943,7 @@
               <a:buNone/>
             </a:pPr>
             <a:r>
-              <a:rPr lang="en-US" sz="1850" dirty="0">
+              <a:rPr lang="es-419" sz="1850" noProof="0" dirty="0">
                 <a:solidFill>
                   <a:srgbClr val="272525"/>
                 </a:solidFill>
@@ -7676,7 +7954,7 @@
               <a:t>Una </a:t>
             </a:r>
             <a:r>
-              <a:rPr lang="en-US" sz="1850" dirty="0">
+              <a:rPr lang="es-419" sz="1850" noProof="0" dirty="0">
                 <a:solidFill>
                   <a:srgbClr val="D75BE2"/>
                 </a:solidFill>
@@ -7687,7 +7965,7 @@
               <a:t>plataforma web integral</a:t>
             </a:r>
             <a:r>
-              <a:rPr lang="en-US" sz="1850" dirty="0">
+              <a:rPr lang="es-419" sz="1850" noProof="0" dirty="0">
                 <a:solidFill>
                   <a:srgbClr val="272525"/>
                 </a:solidFill>
@@ -7697,7 +7975,7 @@
               </a:rPr>
               <a:t> diseñada para optimizar el agendamiento y la gestión de citas médicas mediante:</a:t>
             </a:r>
-            <a:endParaRPr lang="en-US" sz="1850" dirty="0"/>
+            <a:endParaRPr lang="es-419" sz="1850" noProof="0" dirty="0"/>
           </a:p>
         </p:txBody>
       </p:sp>
@@ -7709,7 +7987,7 @@
         </p:nvSpPr>
         <p:spPr>
           <a:xfrm>
-            <a:off x="7614761" y="3958471"/>
+            <a:off x="7315200" y="3425071"/>
             <a:ext cx="6185535" cy="766048"/>
           </a:xfrm>
           <a:prstGeom prst="rect">
@@ -7730,7 +8008,7 @@
               <a:buChar char="•"/>
             </a:pPr>
             <a:r>
-              <a:rPr lang="en-US" sz="1850" dirty="0">
+              <a:rPr lang="es-419" sz="1850" noProof="0" dirty="0">
                 <a:solidFill>
                   <a:srgbClr val="272525"/>
                 </a:solidFill>
@@ -7740,7 +8018,7 @@
               </a:rPr>
               <a:t>Cuestionario dinámico de síntomas para una evaluación inicial.</a:t>
             </a:r>
-            <a:endParaRPr lang="en-US" sz="1850" dirty="0"/>
+            <a:endParaRPr lang="es-419" sz="1850" noProof="0" dirty="0"/>
           </a:p>
         </p:txBody>
       </p:sp>
@@ -7752,7 +8030,7 @@
         </p:nvSpPr>
         <p:spPr>
           <a:xfrm>
-            <a:off x="7614761" y="4808220"/>
+            <a:off x="7315200" y="4274820"/>
             <a:ext cx="6185535" cy="766048"/>
           </a:xfrm>
           <a:prstGeom prst="rect">
@@ -7773,7 +8051,7 @@
               <a:buChar char="•"/>
             </a:pPr>
             <a:r>
-              <a:rPr lang="en-US" sz="1850" dirty="0">
+              <a:rPr lang="es-419" sz="1850" noProof="0" dirty="0">
                 <a:solidFill>
                   <a:srgbClr val="272525"/>
                 </a:solidFill>
@@ -7783,7 +8061,7 @@
               </a:rPr>
               <a:t>Motor de reglas para detectar "banderas rojas" y casos de urgencia.</a:t>
             </a:r>
-            <a:endParaRPr lang="en-US" sz="1850" dirty="0"/>
+            <a:endParaRPr lang="es-419" sz="1850" noProof="0" dirty="0"/>
           </a:p>
         </p:txBody>
       </p:sp>
@@ -7795,7 +8073,7 @@
         </p:nvSpPr>
         <p:spPr>
           <a:xfrm>
-            <a:off x="7614761" y="5657969"/>
+            <a:off x="7315200" y="5124569"/>
             <a:ext cx="6185535" cy="766048"/>
           </a:xfrm>
           <a:prstGeom prst="rect">
@@ -7816,7 +8094,7 @@
               <a:buChar char="•"/>
             </a:pPr>
             <a:r>
-              <a:rPr lang="en-US" sz="1850" dirty="0">
+              <a:rPr lang="es-419" sz="1850" noProof="0" dirty="0">
                 <a:solidFill>
                   <a:srgbClr val="272525"/>
                 </a:solidFill>
@@ -7826,7 +8104,7 @@
               </a:rPr>
               <a:t>Módulo de IA para orientar el nivel de urgencia y la especialidad más adecuada.</a:t>
             </a:r>
-            <a:endParaRPr lang="en-US" sz="1850" dirty="0"/>
+            <a:endParaRPr lang="es-419" sz="1850" noProof="0" dirty="0"/>
           </a:p>
         </p:txBody>
       </p:sp>
@@ -7838,7 +8116,7 @@
         </p:nvSpPr>
         <p:spPr>
           <a:xfrm>
-            <a:off x="7614761" y="6507718"/>
+            <a:off x="7315199" y="6025278"/>
             <a:ext cx="6185535" cy="766048"/>
           </a:xfrm>
           <a:prstGeom prst="rect">
@@ -7859,7 +8137,7 @@
               <a:buChar char="•"/>
             </a:pPr>
             <a:r>
-              <a:rPr lang="en-US" sz="1850" dirty="0">
+              <a:rPr lang="es-419" sz="1850" noProof="0" dirty="0">
                 <a:solidFill>
                   <a:srgbClr val="272525"/>
                 </a:solidFill>
@@ -7869,7 +8147,7 @@
               </a:rPr>
               <a:t>Panel de médicos para una gestión eficiente y visualización del triage previo.</a:t>
             </a:r>
-            <a:endParaRPr lang="en-US" sz="1850" dirty="0"/>
+            <a:endParaRPr lang="es-419" sz="1850" noProof="0" dirty="0"/>
           </a:p>
         </p:txBody>
       </p:sp>
@@ -7926,7 +8204,7 @@
               <a:buNone/>
             </a:pPr>
             <a:r>
-              <a:rPr lang="en-US" sz="4400" dirty="0">
+              <a:rPr lang="es-419" sz="4400" noProof="0" dirty="0">
                 <a:solidFill>
                   <a:srgbClr val="D73AD7"/>
                 </a:solidFill>
@@ -7936,7 +8214,7 @@
               </a:rPr>
               <a:t>Hoja de Ruta del Proyecto</a:t>
             </a:r>
-            <a:endParaRPr lang="en-US" sz="4400" dirty="0"/>
+            <a:endParaRPr lang="es-419" sz="4400" noProof="0" dirty="0"/>
           </a:p>
         </p:txBody>
       </p:sp>
@@ -7972,7 +8250,7 @@
         </p:nvSpPr>
         <p:spPr>
           <a:xfrm>
-            <a:off x="7614761" y="2140267"/>
+            <a:off x="7210026" y="1843858"/>
             <a:ext cx="4843701" cy="563285"/>
           </a:xfrm>
           <a:prstGeom prst="rect">
@@ -7992,7 +8270,7 @@
               <a:buNone/>
             </a:pPr>
             <a:r>
-              <a:rPr lang="en-US" sz="3500" dirty="0">
+              <a:rPr lang="es-419" sz="3500" noProof="0" dirty="0">
                 <a:solidFill>
                   <a:srgbClr val="D73AD7"/>
                 </a:solidFill>
@@ -8002,7 +8280,7 @@
               </a:rPr>
               <a:t>Objetivos del Proyecto</a:t>
             </a:r>
-            <a:endParaRPr lang="en-US" sz="3500" dirty="0"/>
+            <a:endParaRPr lang="es-419" sz="3500" noProof="0" dirty="0"/>
           </a:p>
         </p:txBody>
       </p:sp>
@@ -8014,7 +8292,7 @@
         </p:nvSpPr>
         <p:spPr>
           <a:xfrm>
-            <a:off x="7614761" y="2942868"/>
+            <a:off x="7210026" y="2646459"/>
             <a:ext cx="6185535" cy="383024"/>
           </a:xfrm>
           <a:prstGeom prst="rect">
@@ -8034,7 +8312,7 @@
               <a:buNone/>
             </a:pPr>
             <a:r>
-              <a:rPr lang="en-US" sz="1850" b="1" dirty="0">
+              <a:rPr lang="es-419" sz="1850" b="1" noProof="0" dirty="0">
                 <a:solidFill>
                   <a:srgbClr val="272525"/>
                 </a:solidFill>
@@ -8044,7 +8322,7 @@
               </a:rPr>
               <a:t>Objetivo General:</a:t>
             </a:r>
-            <a:endParaRPr lang="en-US" sz="1850" dirty="0"/>
+            <a:endParaRPr lang="es-419" sz="1850" noProof="0" dirty="0"/>
           </a:p>
         </p:txBody>
       </p:sp>
@@ -8056,7 +8334,7 @@
         </p:nvSpPr>
         <p:spPr>
           <a:xfrm>
-            <a:off x="7614761" y="3541276"/>
+            <a:off x="7210026" y="3244867"/>
             <a:ext cx="6185535" cy="766048"/>
           </a:xfrm>
           <a:prstGeom prst="rect">
@@ -8077,7 +8355,7 @@
               <a:buChar char="•"/>
             </a:pPr>
             <a:r>
-              <a:rPr lang="en-US" sz="1850" dirty="0">
+              <a:rPr lang="es-419" sz="1850" noProof="0" dirty="0">
                 <a:solidFill>
                   <a:srgbClr val="272525"/>
                 </a:solidFill>
@@ -8087,7 +8365,7 @@
               </a:rPr>
               <a:t>Desarrollar una plataforma web para la gestión de citas médicas con triage IA y motor de reglas integrado.</a:t>
             </a:r>
-            <a:endParaRPr lang="en-US" sz="1850" dirty="0"/>
+            <a:endParaRPr lang="es-419" sz="1850" noProof="0" dirty="0"/>
           </a:p>
         </p:txBody>
       </p:sp>
@@ -8099,7 +8377,7 @@
         </p:nvSpPr>
         <p:spPr>
           <a:xfrm>
-            <a:off x="7614761" y="4522708"/>
+            <a:off x="7210026" y="4226299"/>
             <a:ext cx="6185535" cy="383024"/>
           </a:xfrm>
           <a:prstGeom prst="rect">
@@ -8119,7 +8397,7 @@
               <a:buNone/>
             </a:pPr>
             <a:r>
-              <a:rPr lang="en-US" sz="1850" b="1" dirty="0">
+              <a:rPr lang="es-419" sz="1850" b="1" noProof="0" dirty="0">
                 <a:solidFill>
                   <a:srgbClr val="272525"/>
                 </a:solidFill>
@@ -8129,7 +8407,7 @@
               </a:rPr>
               <a:t>Objetivos Específicos:</a:t>
             </a:r>
-            <a:endParaRPr lang="en-US" sz="1850" dirty="0"/>
+            <a:endParaRPr lang="es-419" sz="1850" noProof="0" dirty="0"/>
           </a:p>
         </p:txBody>
       </p:sp>
@@ -8141,7 +8419,7 @@
         </p:nvSpPr>
         <p:spPr>
           <a:xfrm>
-            <a:off x="7614761" y="5121116"/>
+            <a:off x="7210026" y="4824707"/>
             <a:ext cx="6185535" cy="383024"/>
           </a:xfrm>
           <a:prstGeom prst="rect">
@@ -8162,7 +8440,7 @@
               <a:buChar char="•"/>
             </a:pPr>
             <a:r>
-              <a:rPr lang="en-US" sz="1850" dirty="0">
+              <a:rPr lang="es-419" sz="1850" noProof="0" dirty="0">
                 <a:solidFill>
                   <a:srgbClr val="272525"/>
                 </a:solidFill>
@@ -8172,7 +8450,7 @@
               </a:rPr>
               <a:t>Implementar autenticación y gestión de usuarios robusta.</a:t>
             </a:r>
-            <a:endParaRPr lang="en-US" sz="1850" dirty="0"/>
+            <a:endParaRPr lang="es-419" sz="1850" noProof="0" dirty="0"/>
           </a:p>
         </p:txBody>
       </p:sp>
@@ -8184,7 +8462,7 @@
         </p:nvSpPr>
         <p:spPr>
           <a:xfrm>
-            <a:off x="7614761" y="5587841"/>
+            <a:off x="7210026" y="5291432"/>
             <a:ext cx="6185535" cy="383024"/>
           </a:xfrm>
           <a:prstGeom prst="rect">
@@ -8205,7 +8483,7 @@
               <a:buChar char="•"/>
             </a:pPr>
             <a:r>
-              <a:rPr lang="en-US" sz="1850" dirty="0">
+              <a:rPr lang="es-419" sz="1850" noProof="0" dirty="0">
                 <a:solidFill>
                   <a:srgbClr val="272525"/>
                 </a:solidFill>
@@ -8213,53 +8491,9 @@
                 <a:ea typeface="Source Sans 3" pitchFamily="34" charset="-122"/>
                 <a:cs typeface="Source Sans 3" pitchFamily="34" charset="-120"/>
               </a:rPr>
-              <a:t>Diseñar un modelo de </a:t>
-            </a:r>
-            <a:r>
-              <a:rPr lang="en-US" sz="1850" dirty="0" err="1">
-                <a:solidFill>
-                  <a:srgbClr val="272525"/>
-                </a:solidFill>
-                <a:latin typeface="Source Sans 3" pitchFamily="34" charset="0"/>
-                <a:ea typeface="Source Sans 3" pitchFamily="34" charset="-122"/>
-                <a:cs typeface="Source Sans 3" pitchFamily="34" charset="-120"/>
-              </a:rPr>
-              <a:t>datos</a:t>
-            </a:r>
-            <a:r>
-              <a:rPr lang="en-US" sz="1850" dirty="0">
-                <a:solidFill>
-                  <a:srgbClr val="272525"/>
-                </a:solidFill>
-                <a:latin typeface="Source Sans 3" pitchFamily="34" charset="0"/>
-                <a:ea typeface="Source Sans 3" pitchFamily="34" charset="-122"/>
-                <a:cs typeface="Source Sans 3" pitchFamily="34" charset="-120"/>
-              </a:rPr>
-              <a:t> </a:t>
-            </a:r>
-            <a:r>
-              <a:rPr lang="es-419" sz="1850" noProof="0" dirty="0">
-                <a:solidFill>
-                  <a:srgbClr val="272525"/>
-                </a:solidFill>
-                <a:latin typeface="Source Sans 3" pitchFamily="34" charset="0"/>
-                <a:ea typeface="Source Sans 3" pitchFamily="34" charset="-122"/>
-                <a:cs typeface="Source Sans 3" pitchFamily="34" charset="-120"/>
-              </a:rPr>
-              <a:t>escalable</a:t>
-            </a:r>
-            <a:r>
-              <a:rPr lang="en-US" sz="1850" dirty="0">
-                <a:solidFill>
-                  <a:srgbClr val="272525"/>
-                </a:solidFill>
-                <a:latin typeface="Source Sans 3" pitchFamily="34" charset="0"/>
-                <a:ea typeface="Source Sans 3" pitchFamily="34" charset="-122"/>
-                <a:cs typeface="Source Sans 3" pitchFamily="34" charset="-120"/>
-              </a:rPr>
-              <a:t> para agenda y citas.</a:t>
-            </a:r>
-            <a:endParaRPr lang="en-US" sz="1850" dirty="0"/>
+              <a:t>Diseñar un modelo de datos escalable para agenda y citas.</a:t>
+            </a:r>
+            <a:endParaRPr lang="es-419" sz="1850" noProof="0" dirty="0"/>
           </a:p>
         </p:txBody>
       </p:sp>
@@ -8271,7 +8505,7 @@
         </p:nvSpPr>
         <p:spPr>
           <a:xfrm>
-            <a:off x="7614761" y="6054566"/>
+            <a:off x="7210026" y="5758157"/>
             <a:ext cx="6185535" cy="766048"/>
           </a:xfrm>
           <a:prstGeom prst="rect">
@@ -8292,7 +8526,7 @@
               <a:buChar char="•"/>
             </a:pPr>
             <a:r>
-              <a:rPr lang="en-US" sz="1850" dirty="0">
+              <a:rPr lang="es-419" sz="1850" noProof="0" dirty="0">
                 <a:solidFill>
                   <a:srgbClr val="272525"/>
                 </a:solidFill>
@@ -8302,7 +8536,7 @@
               </a:rPr>
               <a:t>Integrar un servicio de IA para orientación precisa de urgencia y especialidad.</a:t>
             </a:r>
-            <a:endParaRPr lang="en-US" sz="1850" dirty="0"/>
+            <a:endParaRPr lang="es-419" sz="1850" noProof="0" dirty="0"/>
           </a:p>
         </p:txBody>
       </p:sp>
@@ -8314,7 +8548,7 @@
         </p:nvSpPr>
         <p:spPr>
           <a:xfrm>
-            <a:off x="7614761" y="6904315"/>
+            <a:off x="7202406" y="6442886"/>
             <a:ext cx="6185535" cy="383024"/>
           </a:xfrm>
           <a:prstGeom prst="rect">
@@ -8335,7 +8569,7 @@
               <a:buChar char="•"/>
             </a:pPr>
             <a:r>
-              <a:rPr lang="en-US" sz="1850" dirty="0">
+              <a:rPr lang="es-419" sz="1850" noProof="0" dirty="0">
                 <a:solidFill>
                   <a:srgbClr val="272525"/>
                 </a:solidFill>
@@ -8345,7 +8579,7 @@
               </a:rPr>
               <a:t>Crear reportes básicos y un panel de médicos intuitivo.</a:t>
             </a:r>
-            <a:endParaRPr lang="en-US" sz="1850" dirty="0"/>
+            <a:endParaRPr lang="es-419" sz="1850" noProof="0" dirty="0"/>
           </a:p>
         </p:txBody>
       </p:sp>
@@ -8402,7 +8636,7 @@
               <a:buNone/>
             </a:pPr>
             <a:r>
-              <a:rPr lang="en-US" sz="4400" dirty="0">
+              <a:rPr lang="es-419" sz="4400" noProof="0" dirty="0">
                 <a:solidFill>
                   <a:srgbClr val="D73AD7"/>
                 </a:solidFill>
@@ -8412,7 +8646,7 @@
               </a:rPr>
               <a:t>Metodología y Equipo</a:t>
             </a:r>
-            <a:endParaRPr lang="en-US" sz="4400" dirty="0"/>
+            <a:endParaRPr lang="es-419" sz="4400" noProof="0" dirty="0"/>
           </a:p>
         </p:txBody>
       </p:sp>
@@ -8443,7 +8677,7 @@
           <a:bodyPr/>
           <a:lstStyle/>
           <a:p>
-            <a:endParaRPr lang="es-CL"/>
+            <a:endParaRPr lang="es-419" noProof="0" dirty="0"/>
           </a:p>
         </p:txBody>
       </p:sp>
@@ -8547,7 +8781,7 @@
               <a:buNone/>
             </a:pPr>
             <a:r>
-              <a:rPr lang="en-US" sz="2200" dirty="0">
+              <a:rPr lang="es-419" sz="2200" noProof="0" dirty="0">
                 <a:solidFill>
                   <a:srgbClr val="272525"/>
                 </a:solidFill>
@@ -8557,7 +8791,7 @@
               </a:rPr>
               <a:t>Enfoque Ágil (Scrum)</a:t>
             </a:r>
-            <a:endParaRPr lang="en-US" sz="2200" dirty="0"/>
+            <a:endParaRPr lang="es-419" sz="2200" noProof="0" dirty="0"/>
           </a:p>
         </p:txBody>
       </p:sp>
@@ -8589,7 +8823,7 @@
               <a:buNone/>
             </a:pPr>
             <a:r>
-              <a:rPr lang="en-US" sz="1850" dirty="0">
+              <a:rPr lang="es-419" sz="1850" noProof="0" dirty="0">
                 <a:solidFill>
                   <a:srgbClr val="272525"/>
                 </a:solidFill>
@@ -8600,7 +8834,7 @@
               <a:t>Trabajaremos con </a:t>
             </a:r>
             <a:r>
-              <a:rPr lang="en-US" sz="1850" b="1" dirty="0">
+              <a:rPr lang="es-419" sz="1850" b="1" noProof="0" dirty="0" err="1">
                 <a:solidFill>
                   <a:srgbClr val="272525"/>
                 </a:solidFill>
@@ -8608,10 +8842,21 @@
                 <a:ea typeface="Source Sans 3" pitchFamily="34" charset="-122"/>
                 <a:cs typeface="Source Sans 3" pitchFamily="34" charset="-120"/>
               </a:rPr>
-              <a:t>sprints de dos semanas</a:t>
-            </a:r>
-            <a:r>
-              <a:rPr lang="en-US" sz="1850" dirty="0">
+              <a:t>sprints</a:t>
+            </a:r>
+            <a:r>
+              <a:rPr lang="es-419" sz="1850" b="1" noProof="0" dirty="0">
+                <a:solidFill>
+                  <a:srgbClr val="272525"/>
+                </a:solidFill>
+                <a:latin typeface="Source Sans 3" pitchFamily="34" charset="0"/>
+                <a:ea typeface="Source Sans 3" pitchFamily="34" charset="-122"/>
+                <a:cs typeface="Source Sans 3" pitchFamily="34" charset="-120"/>
+              </a:rPr>
+              <a:t> de 2 semanas</a:t>
+            </a:r>
+            <a:r>
+              <a:rPr lang="es-419" sz="1850" noProof="0" dirty="0">
                 <a:solidFill>
                   <a:srgbClr val="272525"/>
                 </a:solidFill>
@@ -8621,7 +8866,7 @@
               </a:rPr>
               <a:t>, garantizando iteraciones rápidas y entregas continuas. Cada sprint incluirá planificación, diseño, desarrollo, pruebas y documentación.</a:t>
             </a:r>
-            <a:endParaRPr lang="en-US" sz="1850" dirty="0"/>
+            <a:endParaRPr lang="es-419" sz="1850" noProof="0" dirty="0"/>
           </a:p>
         </p:txBody>
       </p:sp>
@@ -8652,7 +8897,7 @@
           <a:bodyPr/>
           <a:lstStyle/>
           <a:p>
-            <a:endParaRPr lang="es-CL"/>
+            <a:endParaRPr lang="es-419" noProof="0" dirty="0"/>
           </a:p>
         </p:txBody>
       </p:sp>
@@ -8756,7 +9001,7 @@
               <a:buNone/>
             </a:pPr>
             <a:r>
-              <a:rPr lang="en-US" sz="2200" dirty="0">
+              <a:rPr lang="es-419" sz="2200" noProof="0" dirty="0">
                 <a:solidFill>
                   <a:srgbClr val="272525"/>
                 </a:solidFill>
@@ -8766,7 +9011,7 @@
               </a:rPr>
               <a:t>Roles del Equipo</a:t>
             </a:r>
-            <a:endParaRPr lang="en-US" sz="2200" dirty="0"/>
+            <a:endParaRPr lang="es-419" sz="2200" noProof="0" dirty="0"/>
           </a:p>
         </p:txBody>
       </p:sp>
@@ -8798,7 +9043,7 @@
               <a:buNone/>
             </a:pPr>
             <a:r>
-              <a:rPr lang="en-US" sz="1850" b="1" dirty="0">
+              <a:rPr lang="es-419" sz="1850" b="1" noProof="0" dirty="0">
                 <a:solidFill>
                   <a:srgbClr val="272525"/>
                 </a:solidFill>
@@ -8809,7 +9054,7 @@
               <a:t>Matías:</a:t>
             </a:r>
             <a:r>
-              <a:rPr lang="en-US" sz="1850" dirty="0">
+              <a:rPr lang="es-419" sz="1850" noProof="0" dirty="0">
                 <a:solidFill>
                   <a:srgbClr val="272525"/>
                 </a:solidFill>
@@ -8817,9 +9062,31 @@
                 <a:ea typeface="Source Sans 3" pitchFamily="34" charset="-122"/>
                 <a:cs typeface="Source Sans 3" pitchFamily="34" charset="-120"/>
               </a:rPr>
-              <a:t> Líder técnico, encargado del backend y la documentación crucial del proyecto.</a:t>
-            </a:r>
-            <a:endParaRPr lang="en-US" sz="1850" dirty="0"/>
+              <a:t> Líder técnico, encargado del </a:t>
+            </a:r>
+            <a:r>
+              <a:rPr lang="es-419" sz="1850" noProof="0" dirty="0" err="1">
+                <a:solidFill>
+                  <a:srgbClr val="272525"/>
+                </a:solidFill>
+                <a:latin typeface="Source Sans 3" pitchFamily="34" charset="0"/>
+                <a:ea typeface="Source Sans 3" pitchFamily="34" charset="-122"/>
+                <a:cs typeface="Source Sans 3" pitchFamily="34" charset="-120"/>
+              </a:rPr>
+              <a:t>backend</a:t>
+            </a:r>
+            <a:r>
+              <a:rPr lang="es-419" sz="1850" noProof="0" dirty="0">
+                <a:solidFill>
+                  <a:srgbClr val="272525"/>
+                </a:solidFill>
+                <a:latin typeface="Source Sans 3" pitchFamily="34" charset="0"/>
+                <a:ea typeface="Source Sans 3" pitchFamily="34" charset="-122"/>
+                <a:cs typeface="Source Sans 3" pitchFamily="34" charset="-120"/>
+              </a:rPr>
+              <a:t> y la documentación crucial del proyecto.</a:t>
+            </a:r>
+            <a:endParaRPr lang="es-419" sz="1850" noProof="0" dirty="0"/>
           </a:p>
         </p:txBody>
       </p:sp>
@@ -8851,7 +9118,7 @@
               <a:buNone/>
             </a:pPr>
             <a:r>
-              <a:rPr lang="en-US" sz="1850" b="1" dirty="0">
+              <a:rPr lang="es-419" sz="1850" b="1" noProof="0" dirty="0">
                 <a:solidFill>
                   <a:srgbClr val="272525"/>
                 </a:solidFill>
@@ -8862,7 +9129,7 @@
               <a:t>Raúl:</a:t>
             </a:r>
             <a:r>
-              <a:rPr lang="en-US" sz="1850" dirty="0">
+              <a:rPr lang="es-419" sz="1850" noProof="0" dirty="0">
                 <a:solidFill>
                   <a:srgbClr val="272525"/>
                 </a:solidFill>
@@ -8870,9 +9137,31 @@
                 <a:ea typeface="Source Sans 3" pitchFamily="34" charset="-122"/>
                 <a:cs typeface="Source Sans 3" pitchFamily="34" charset="-120"/>
               </a:rPr>
-              <a:t> Responsable del frontend, pruebas de calidad y el diseño de la interfaz de usuario para una experiencia óptima.</a:t>
-            </a:r>
-            <a:endParaRPr lang="en-US" sz="1850" dirty="0"/>
+              <a:t> Responsable del </a:t>
+            </a:r>
+            <a:r>
+              <a:rPr lang="es-419" sz="1850" noProof="0" dirty="0" err="1">
+                <a:solidFill>
+                  <a:srgbClr val="272525"/>
+                </a:solidFill>
+                <a:latin typeface="Source Sans 3" pitchFamily="34" charset="0"/>
+                <a:ea typeface="Source Sans 3" pitchFamily="34" charset="-122"/>
+                <a:cs typeface="Source Sans 3" pitchFamily="34" charset="-120"/>
+              </a:rPr>
+              <a:t>frontend</a:t>
+            </a:r>
+            <a:r>
+              <a:rPr lang="es-419" sz="1850" noProof="0" dirty="0">
+                <a:solidFill>
+                  <a:srgbClr val="272525"/>
+                </a:solidFill>
+                <a:latin typeface="Source Sans 3" pitchFamily="34" charset="0"/>
+                <a:ea typeface="Source Sans 3" pitchFamily="34" charset="-122"/>
+                <a:cs typeface="Source Sans 3" pitchFamily="34" charset="-120"/>
+              </a:rPr>
+              <a:t>, pruebas de calidad y el diseño de la interfaz de usuario para una experiencia óptima.</a:t>
+            </a:r>
+            <a:endParaRPr lang="es-419" sz="1850" noProof="0" dirty="0"/>
           </a:p>
         </p:txBody>
       </p:sp>
@@ -8909,7 +9198,7 @@
         </p:nvSpPr>
         <p:spPr>
           <a:xfrm>
-            <a:off x="837724" y="1116687"/>
+            <a:off x="1317409" y="405095"/>
             <a:ext cx="6151007" cy="704017"/>
           </a:xfrm>
           <a:prstGeom prst="rect">
@@ -8929,7 +9218,7 @@
               <a:buNone/>
             </a:pPr>
             <a:r>
-              <a:rPr lang="en-US" sz="4400" dirty="0">
+              <a:rPr lang="es-419" sz="4400" noProof="0" dirty="0">
                 <a:solidFill>
                   <a:srgbClr val="D73AD7"/>
                 </a:solidFill>
@@ -8939,53 +9228,19 @@
               </a:rPr>
               <a:t>Cronograma Detallado</a:t>
             </a:r>
-            <a:endParaRPr lang="en-US" sz="4400" dirty="0"/>
-          </a:p>
-        </p:txBody>
-      </p:sp>
-      <p:sp>
-        <p:nvSpPr>
-          <p:cNvPr id="3" name="Shape 1"/>
+            <a:endParaRPr lang="es-419" sz="4400" noProof="0" dirty="0"/>
+          </a:p>
+        </p:txBody>
+      </p:sp>
+      <p:sp>
+        <p:nvSpPr>
+          <p:cNvPr id="10" name="Shape 8"/>
           <p:cNvSpPr/>
           <p:nvPr/>
         </p:nvSpPr>
         <p:spPr>
           <a:xfrm>
-            <a:off x="837724" y="2299454"/>
-            <a:ext cx="12954952" cy="4813340"/>
-          </a:xfrm>
-          <a:prstGeom prst="roundRect">
-            <a:avLst>
-              <a:gd name="adj" fmla="val 2089"/>
-            </a:avLst>
-          </a:prstGeom>
-          <a:noFill/>
-          <a:ln w="7620">
-            <a:solidFill>
-              <a:srgbClr val="000000">
-                <a:alpha val="8000"/>
-              </a:srgbClr>
-            </a:solidFill>
-            <a:prstDash val="solid"/>
-          </a:ln>
-        </p:spPr>
-        <p:txBody>
-          <a:bodyPr/>
-          <a:lstStyle/>
-          <a:p>
-            <a:endParaRPr lang="es-CL"/>
-          </a:p>
-        </p:txBody>
-      </p:sp>
-      <p:sp>
-        <p:nvSpPr>
-          <p:cNvPr id="4" name="Shape 2"/>
-          <p:cNvSpPr/>
-          <p:nvPr/>
-        </p:nvSpPr>
-        <p:spPr>
-          <a:xfrm>
-            <a:off x="845344" y="2307074"/>
+            <a:off x="845344" y="3677960"/>
             <a:ext cx="12939713" cy="685443"/>
           </a:xfrm>
           <a:prstGeom prst="rect">
@@ -9002,772 +9257,1297 @@
           <a:bodyPr/>
           <a:lstStyle/>
           <a:p>
-            <a:endParaRPr lang="es-CL"/>
-          </a:p>
-        </p:txBody>
-      </p:sp>
-      <p:sp>
-        <p:nvSpPr>
-          <p:cNvPr id="5" name="Text 3"/>
-          <p:cNvSpPr/>
-          <p:nvPr/>
-        </p:nvSpPr>
-        <p:spPr>
-          <a:xfrm>
-            <a:off x="1084659" y="2458283"/>
-            <a:ext cx="5987415" cy="383024"/>
-          </a:xfrm>
-          <a:prstGeom prst="rect">
-            <a:avLst/>
-          </a:prstGeom>
-          <a:noFill/>
-          <a:ln/>
-        </p:spPr>
-        <p:txBody>
-          <a:bodyPr wrap="none" lIns="0" tIns="0" rIns="0" bIns="0" rtlCol="0" anchor="t"/>
-          <a:lstStyle/>
-          <a:p>
-            <a:pPr marL="0" indent="0" algn="l">
-              <a:lnSpc>
-                <a:spcPts val="3000"/>
-              </a:lnSpc>
-              <a:buNone/>
-            </a:pPr>
-            <a:r>
-              <a:rPr lang="en-US" sz="1850" dirty="0">
-                <a:solidFill>
-                  <a:srgbClr val="272525"/>
-                </a:solidFill>
-                <a:latin typeface="Source Sans 3" pitchFamily="34" charset="0"/>
-                <a:ea typeface="Source Sans 3" pitchFamily="34" charset="-122"/>
-                <a:cs typeface="Source Sans 3" pitchFamily="34" charset="-120"/>
-              </a:rPr>
-              <a:t>Levantamiento de requerimientos</a:t>
-            </a:r>
-            <a:endParaRPr lang="en-US" sz="1850" dirty="0"/>
-          </a:p>
-        </p:txBody>
-      </p:sp>
-      <p:sp>
-        <p:nvSpPr>
-          <p:cNvPr id="6" name="Text 4"/>
-          <p:cNvSpPr/>
-          <p:nvPr/>
-        </p:nvSpPr>
-        <p:spPr>
-          <a:xfrm>
-            <a:off x="7558326" y="2458283"/>
-            <a:ext cx="5987415" cy="383024"/>
-          </a:xfrm>
-          <a:prstGeom prst="rect">
-            <a:avLst/>
-          </a:prstGeom>
-          <a:noFill/>
-          <a:ln/>
-        </p:spPr>
-        <p:txBody>
-          <a:bodyPr wrap="none" lIns="0" tIns="0" rIns="0" bIns="0" rtlCol="0" anchor="t"/>
-          <a:lstStyle/>
-          <a:p>
-            <a:pPr marL="0" indent="0" algn="l">
-              <a:lnSpc>
-                <a:spcPts val="3000"/>
-              </a:lnSpc>
-              <a:buNone/>
-            </a:pPr>
-            <a:r>
-              <a:rPr lang="en-US" sz="1850" dirty="0">
-                <a:solidFill>
-                  <a:srgbClr val="D75BE2"/>
-                </a:solidFill>
-                <a:latin typeface="Source Sans 3" pitchFamily="34" charset="0"/>
-                <a:ea typeface="Source Sans 3" pitchFamily="34" charset="-122"/>
-                <a:cs typeface="Source Sans 3" pitchFamily="34" charset="-120"/>
-              </a:rPr>
-              <a:t>Semanas 1-2</a:t>
-            </a:r>
-            <a:endParaRPr lang="en-US" sz="1850" dirty="0"/>
-          </a:p>
-        </p:txBody>
-      </p:sp>
-      <p:sp>
-        <p:nvSpPr>
-          <p:cNvPr id="7" name="Shape 5"/>
-          <p:cNvSpPr/>
-          <p:nvPr/>
-        </p:nvSpPr>
-        <p:spPr>
-          <a:xfrm>
-            <a:off x="845344" y="2992517"/>
-            <a:ext cx="12939713" cy="685443"/>
-          </a:xfrm>
-          <a:prstGeom prst="rect">
-            <a:avLst/>
-          </a:prstGeom>
-          <a:solidFill>
-            <a:srgbClr val="000000">
-              <a:alpha val="4000"/>
-            </a:srgbClr>
-          </a:solidFill>
-          <a:ln/>
-        </p:spPr>
-        <p:txBody>
-          <a:bodyPr/>
-          <a:lstStyle/>
-          <a:p>
-            <a:endParaRPr lang="es-CL"/>
-          </a:p>
-        </p:txBody>
-      </p:sp>
-      <p:sp>
-        <p:nvSpPr>
-          <p:cNvPr id="8" name="Text 6"/>
-          <p:cNvSpPr/>
-          <p:nvPr/>
-        </p:nvSpPr>
-        <p:spPr>
-          <a:xfrm>
-            <a:off x="1084659" y="3143726"/>
-            <a:ext cx="5987415" cy="383024"/>
-          </a:xfrm>
-          <a:prstGeom prst="rect">
-            <a:avLst/>
-          </a:prstGeom>
-          <a:noFill/>
-          <a:ln/>
-        </p:spPr>
-        <p:txBody>
-          <a:bodyPr wrap="none" lIns="0" tIns="0" rIns="0" bIns="0" rtlCol="0" anchor="t"/>
-          <a:lstStyle/>
-          <a:p>
-            <a:pPr marL="0" indent="0" algn="l">
-              <a:lnSpc>
-                <a:spcPts val="3000"/>
-              </a:lnSpc>
-              <a:buNone/>
-            </a:pPr>
-            <a:r>
-              <a:rPr lang="en-US" sz="1850" dirty="0">
-                <a:solidFill>
-                  <a:srgbClr val="272525"/>
-                </a:solidFill>
-                <a:latin typeface="Source Sans 3" pitchFamily="34" charset="0"/>
-                <a:ea typeface="Source Sans 3" pitchFamily="34" charset="-122"/>
-                <a:cs typeface="Source Sans 3" pitchFamily="34" charset="-120"/>
-              </a:rPr>
-              <a:t>Diseño de arquitectura y BBDD</a:t>
-            </a:r>
-            <a:endParaRPr lang="en-US" sz="1850" dirty="0"/>
-          </a:p>
-        </p:txBody>
-      </p:sp>
-      <p:sp>
-        <p:nvSpPr>
-          <p:cNvPr id="9" name="Text 7"/>
-          <p:cNvSpPr/>
-          <p:nvPr/>
-        </p:nvSpPr>
-        <p:spPr>
-          <a:xfrm>
-            <a:off x="7558326" y="3143726"/>
-            <a:ext cx="5987415" cy="383024"/>
-          </a:xfrm>
-          <a:prstGeom prst="rect">
-            <a:avLst/>
-          </a:prstGeom>
-          <a:noFill/>
-          <a:ln/>
-        </p:spPr>
-        <p:txBody>
-          <a:bodyPr wrap="none" lIns="0" tIns="0" rIns="0" bIns="0" rtlCol="0" anchor="t"/>
-          <a:lstStyle/>
-          <a:p>
-            <a:pPr marL="0" indent="0" algn="l">
-              <a:lnSpc>
-                <a:spcPts val="3000"/>
-              </a:lnSpc>
-              <a:buNone/>
-            </a:pPr>
-            <a:r>
-              <a:rPr lang="en-US" sz="1850" dirty="0">
-                <a:solidFill>
-                  <a:srgbClr val="D75BE2"/>
-                </a:solidFill>
-                <a:latin typeface="Source Sans 3" pitchFamily="34" charset="0"/>
-                <a:ea typeface="Source Sans 3" pitchFamily="34" charset="-122"/>
-                <a:cs typeface="Source Sans 3" pitchFamily="34" charset="-120"/>
-              </a:rPr>
-              <a:t>Semanas 3-4</a:t>
-            </a:r>
-            <a:endParaRPr lang="en-US" sz="1850" dirty="0"/>
-          </a:p>
-        </p:txBody>
-      </p:sp>
-      <p:sp>
-        <p:nvSpPr>
-          <p:cNvPr id="10" name="Shape 8"/>
-          <p:cNvSpPr/>
-          <p:nvPr/>
-        </p:nvSpPr>
-        <p:spPr>
-          <a:xfrm>
-            <a:off x="845344" y="3677960"/>
-            <a:ext cx="12939713" cy="685443"/>
-          </a:xfrm>
-          <a:prstGeom prst="rect">
-            <a:avLst/>
-          </a:prstGeom>
-          <a:solidFill>
-            <a:srgbClr val="FFFFFF">
-              <a:alpha val="4000"/>
-            </a:srgbClr>
-          </a:solidFill>
-          <a:ln/>
-        </p:spPr>
-        <p:txBody>
-          <a:bodyPr/>
-          <a:lstStyle/>
-          <a:p>
-            <a:endParaRPr lang="es-CL"/>
-          </a:p>
-        </p:txBody>
-      </p:sp>
-      <p:sp>
-        <p:nvSpPr>
-          <p:cNvPr id="11" name="Text 9"/>
-          <p:cNvSpPr/>
-          <p:nvPr/>
-        </p:nvSpPr>
-        <p:spPr>
-          <a:xfrm>
-            <a:off x="1084659" y="3829169"/>
-            <a:ext cx="5987415" cy="383024"/>
-          </a:xfrm>
-          <a:prstGeom prst="rect">
-            <a:avLst/>
-          </a:prstGeom>
-          <a:noFill/>
-          <a:ln/>
-        </p:spPr>
-        <p:txBody>
-          <a:bodyPr wrap="none" lIns="0" tIns="0" rIns="0" bIns="0" rtlCol="0" anchor="t"/>
-          <a:lstStyle/>
-          <a:p>
-            <a:pPr marL="0" indent="0" algn="l">
-              <a:lnSpc>
-                <a:spcPts val="3000"/>
-              </a:lnSpc>
-              <a:buNone/>
-            </a:pPr>
-            <a:r>
-              <a:rPr lang="en-US" sz="1850" dirty="0">
-                <a:solidFill>
-                  <a:srgbClr val="272525"/>
-                </a:solidFill>
-                <a:latin typeface="Source Sans 3" pitchFamily="34" charset="0"/>
-                <a:ea typeface="Source Sans 3" pitchFamily="34" charset="-122"/>
-                <a:cs typeface="Source Sans 3" pitchFamily="34" charset="-120"/>
-              </a:rPr>
-              <a:t>Desarrollo backend (API REST .NET)</a:t>
-            </a:r>
-            <a:endParaRPr lang="en-US" sz="1850" dirty="0"/>
-          </a:p>
-        </p:txBody>
-      </p:sp>
-      <p:sp>
-        <p:nvSpPr>
-          <p:cNvPr id="12" name="Text 10"/>
-          <p:cNvSpPr/>
-          <p:nvPr/>
-        </p:nvSpPr>
-        <p:spPr>
-          <a:xfrm>
-            <a:off x="7558326" y="3829169"/>
-            <a:ext cx="5987415" cy="383024"/>
-          </a:xfrm>
-          <a:prstGeom prst="rect">
-            <a:avLst/>
-          </a:prstGeom>
-          <a:noFill/>
-          <a:ln/>
-        </p:spPr>
-        <p:txBody>
-          <a:bodyPr wrap="none" lIns="0" tIns="0" rIns="0" bIns="0" rtlCol="0" anchor="t"/>
-          <a:lstStyle/>
-          <a:p>
-            <a:pPr marL="0" indent="0" algn="l">
-              <a:lnSpc>
-                <a:spcPts val="3000"/>
-              </a:lnSpc>
-              <a:buNone/>
-            </a:pPr>
-            <a:r>
-              <a:rPr lang="en-US" sz="1850" dirty="0">
-                <a:solidFill>
-                  <a:srgbClr val="D75BE2"/>
-                </a:solidFill>
-                <a:latin typeface="Source Sans 3" pitchFamily="34" charset="0"/>
-                <a:ea typeface="Source Sans 3" pitchFamily="34" charset="-122"/>
-                <a:cs typeface="Source Sans 3" pitchFamily="34" charset="-120"/>
-              </a:rPr>
-              <a:t>Semanas 5-8</a:t>
-            </a:r>
-            <a:endParaRPr lang="en-US" sz="1850" dirty="0"/>
-          </a:p>
-        </p:txBody>
-      </p:sp>
-      <p:sp>
-        <p:nvSpPr>
-          <p:cNvPr id="13" name="Shape 11"/>
-          <p:cNvSpPr/>
-          <p:nvPr/>
-        </p:nvSpPr>
-        <p:spPr>
-          <a:xfrm>
-            <a:off x="845344" y="4363403"/>
-            <a:ext cx="12939713" cy="685443"/>
-          </a:xfrm>
-          <a:prstGeom prst="rect">
-            <a:avLst/>
-          </a:prstGeom>
-          <a:solidFill>
-            <a:srgbClr val="000000">
-              <a:alpha val="4000"/>
-            </a:srgbClr>
-          </a:solidFill>
-          <a:ln/>
-        </p:spPr>
-        <p:txBody>
-          <a:bodyPr/>
-          <a:lstStyle/>
-          <a:p>
-            <a:endParaRPr lang="es-CL"/>
-          </a:p>
-        </p:txBody>
-      </p:sp>
-      <p:sp>
-        <p:nvSpPr>
-          <p:cNvPr id="14" name="Text 12"/>
-          <p:cNvSpPr/>
-          <p:nvPr/>
-        </p:nvSpPr>
-        <p:spPr>
-          <a:xfrm>
-            <a:off x="1084659" y="4514612"/>
-            <a:ext cx="5987415" cy="383024"/>
-          </a:xfrm>
-          <a:prstGeom prst="rect">
-            <a:avLst/>
-          </a:prstGeom>
-          <a:noFill/>
-          <a:ln/>
-        </p:spPr>
-        <p:txBody>
-          <a:bodyPr wrap="none" lIns="0" tIns="0" rIns="0" bIns="0" rtlCol="0" anchor="t"/>
-          <a:lstStyle/>
-          <a:p>
-            <a:pPr marL="0" indent="0" algn="l">
-              <a:lnSpc>
-                <a:spcPts val="3000"/>
-              </a:lnSpc>
-              <a:buNone/>
-            </a:pPr>
-            <a:r>
-              <a:rPr lang="en-US" sz="1850" dirty="0">
-                <a:solidFill>
-                  <a:srgbClr val="272525"/>
-                </a:solidFill>
-                <a:latin typeface="Source Sans 3" pitchFamily="34" charset="0"/>
-                <a:ea typeface="Source Sans 3" pitchFamily="34" charset="-122"/>
-                <a:cs typeface="Source Sans 3" pitchFamily="34" charset="-120"/>
-              </a:rPr>
-              <a:t>Desarrollo frontend (UI prototipo)</a:t>
-            </a:r>
-            <a:endParaRPr lang="en-US" sz="1850" dirty="0"/>
-          </a:p>
-        </p:txBody>
-      </p:sp>
-      <p:sp>
-        <p:nvSpPr>
-          <p:cNvPr id="15" name="Text 13"/>
-          <p:cNvSpPr/>
-          <p:nvPr/>
-        </p:nvSpPr>
-        <p:spPr>
-          <a:xfrm>
-            <a:off x="7558326" y="4514612"/>
-            <a:ext cx="5987415" cy="383024"/>
-          </a:xfrm>
-          <a:prstGeom prst="rect">
-            <a:avLst/>
-          </a:prstGeom>
-          <a:noFill/>
-          <a:ln/>
-        </p:spPr>
-        <p:txBody>
-          <a:bodyPr wrap="none" lIns="0" tIns="0" rIns="0" bIns="0" rtlCol="0" anchor="t"/>
-          <a:lstStyle/>
-          <a:p>
-            <a:pPr marL="0" indent="0" algn="l">
-              <a:lnSpc>
-                <a:spcPts val="3000"/>
-              </a:lnSpc>
-              <a:buNone/>
-            </a:pPr>
-            <a:r>
-              <a:rPr lang="en-US" sz="1850" dirty="0">
-                <a:solidFill>
-                  <a:srgbClr val="D75BE2"/>
-                </a:solidFill>
-                <a:latin typeface="Source Sans 3" pitchFamily="34" charset="0"/>
-                <a:ea typeface="Source Sans 3" pitchFamily="34" charset="-122"/>
-                <a:cs typeface="Source Sans 3" pitchFamily="34" charset="-120"/>
-              </a:rPr>
-              <a:t>Semanas 6-9</a:t>
-            </a:r>
-            <a:endParaRPr lang="en-US" sz="1850" dirty="0"/>
-          </a:p>
-        </p:txBody>
-      </p:sp>
-      <p:sp>
-        <p:nvSpPr>
-          <p:cNvPr id="16" name="Shape 14"/>
-          <p:cNvSpPr/>
-          <p:nvPr/>
-        </p:nvSpPr>
-        <p:spPr>
-          <a:xfrm>
-            <a:off x="845344" y="5048845"/>
-            <a:ext cx="12939713" cy="685443"/>
-          </a:xfrm>
-          <a:prstGeom prst="rect">
-            <a:avLst/>
-          </a:prstGeom>
-          <a:solidFill>
-            <a:srgbClr val="FFFFFF">
-              <a:alpha val="4000"/>
-            </a:srgbClr>
-          </a:solidFill>
-          <a:ln/>
-        </p:spPr>
-        <p:txBody>
-          <a:bodyPr/>
-          <a:lstStyle/>
-          <a:p>
-            <a:endParaRPr lang="es-CL"/>
-          </a:p>
-        </p:txBody>
-      </p:sp>
-      <p:sp>
-        <p:nvSpPr>
-          <p:cNvPr id="17" name="Text 15"/>
-          <p:cNvSpPr/>
-          <p:nvPr/>
-        </p:nvSpPr>
-        <p:spPr>
-          <a:xfrm>
-            <a:off x="1084659" y="5200055"/>
-            <a:ext cx="5987415" cy="383024"/>
-          </a:xfrm>
-          <a:prstGeom prst="rect">
-            <a:avLst/>
-          </a:prstGeom>
-          <a:noFill/>
-          <a:ln/>
-        </p:spPr>
-        <p:txBody>
-          <a:bodyPr wrap="none" lIns="0" tIns="0" rIns="0" bIns="0" rtlCol="0" anchor="t"/>
-          <a:lstStyle/>
-          <a:p>
-            <a:pPr marL="0" indent="0" algn="l">
-              <a:lnSpc>
-                <a:spcPts val="3000"/>
-              </a:lnSpc>
-              <a:buNone/>
-            </a:pPr>
-            <a:r>
-              <a:rPr lang="en-US" sz="1850" dirty="0">
-                <a:solidFill>
-                  <a:srgbClr val="272525"/>
-                </a:solidFill>
-                <a:latin typeface="Source Sans 3" pitchFamily="34" charset="0"/>
-                <a:ea typeface="Source Sans 3" pitchFamily="34" charset="-122"/>
-                <a:cs typeface="Source Sans 3" pitchFamily="34" charset="-120"/>
-              </a:rPr>
-              <a:t>Integración frontend-backend</a:t>
-            </a:r>
-            <a:endParaRPr lang="en-US" sz="1850" dirty="0"/>
-          </a:p>
-        </p:txBody>
-      </p:sp>
-      <p:sp>
-        <p:nvSpPr>
-          <p:cNvPr id="18" name="Text 16"/>
-          <p:cNvSpPr/>
-          <p:nvPr/>
-        </p:nvSpPr>
-        <p:spPr>
-          <a:xfrm>
-            <a:off x="7558326" y="5200055"/>
-            <a:ext cx="5987415" cy="383024"/>
-          </a:xfrm>
-          <a:prstGeom prst="rect">
-            <a:avLst/>
-          </a:prstGeom>
-          <a:noFill/>
-          <a:ln/>
-        </p:spPr>
-        <p:txBody>
-          <a:bodyPr wrap="none" lIns="0" tIns="0" rIns="0" bIns="0" rtlCol="0" anchor="t"/>
-          <a:lstStyle/>
-          <a:p>
-            <a:pPr marL="0" indent="0" algn="l">
-              <a:lnSpc>
-                <a:spcPts val="3000"/>
-              </a:lnSpc>
-              <a:buNone/>
-            </a:pPr>
-            <a:r>
-              <a:rPr lang="en-US" sz="1850" dirty="0">
-                <a:solidFill>
-                  <a:srgbClr val="D75BE2"/>
-                </a:solidFill>
-                <a:latin typeface="Source Sans 3" pitchFamily="34" charset="0"/>
-                <a:ea typeface="Source Sans 3" pitchFamily="34" charset="-122"/>
-                <a:cs typeface="Source Sans 3" pitchFamily="34" charset="-120"/>
-              </a:rPr>
-              <a:t>Semanas 9-10</a:t>
-            </a:r>
-            <a:endParaRPr lang="en-US" sz="1850" dirty="0"/>
-          </a:p>
-        </p:txBody>
-      </p:sp>
-      <p:sp>
-        <p:nvSpPr>
-          <p:cNvPr id="19" name="Shape 17"/>
-          <p:cNvSpPr/>
-          <p:nvPr/>
-        </p:nvSpPr>
-        <p:spPr>
-          <a:xfrm>
-            <a:off x="845344" y="5734288"/>
-            <a:ext cx="12939713" cy="685443"/>
-          </a:xfrm>
-          <a:prstGeom prst="rect">
-            <a:avLst/>
-          </a:prstGeom>
-          <a:solidFill>
-            <a:srgbClr val="000000">
-              <a:alpha val="4000"/>
-            </a:srgbClr>
-          </a:solidFill>
-          <a:ln/>
-        </p:spPr>
-        <p:txBody>
-          <a:bodyPr/>
-          <a:lstStyle/>
-          <a:p>
-            <a:endParaRPr lang="es-CL"/>
-          </a:p>
-        </p:txBody>
-      </p:sp>
-      <p:sp>
-        <p:nvSpPr>
-          <p:cNvPr id="20" name="Text 18"/>
-          <p:cNvSpPr/>
-          <p:nvPr/>
-        </p:nvSpPr>
-        <p:spPr>
-          <a:xfrm>
-            <a:off x="1084659" y="5885498"/>
-            <a:ext cx="5987415" cy="383024"/>
-          </a:xfrm>
-          <a:prstGeom prst="rect">
-            <a:avLst/>
-          </a:prstGeom>
-          <a:noFill/>
-          <a:ln/>
-        </p:spPr>
-        <p:txBody>
-          <a:bodyPr wrap="none" lIns="0" tIns="0" rIns="0" bIns="0" rtlCol="0" anchor="t"/>
-          <a:lstStyle/>
-          <a:p>
-            <a:pPr marL="0" indent="0" algn="l">
-              <a:lnSpc>
-                <a:spcPts val="3000"/>
-              </a:lnSpc>
-              <a:buNone/>
-            </a:pPr>
-            <a:r>
-              <a:rPr lang="en-US" sz="1850" dirty="0">
-                <a:solidFill>
-                  <a:srgbClr val="272525"/>
-                </a:solidFill>
-                <a:latin typeface="Source Sans 3" pitchFamily="34" charset="0"/>
-                <a:ea typeface="Source Sans 3" pitchFamily="34" charset="-122"/>
-                <a:cs typeface="Source Sans 3" pitchFamily="34" charset="-120"/>
-              </a:rPr>
-              <a:t>Pruebas (unidad, integración, E2E)</a:t>
-            </a:r>
-            <a:endParaRPr lang="en-US" sz="1850" dirty="0"/>
-          </a:p>
-        </p:txBody>
-      </p:sp>
-      <p:sp>
-        <p:nvSpPr>
-          <p:cNvPr id="21" name="Text 19"/>
-          <p:cNvSpPr/>
-          <p:nvPr/>
-        </p:nvSpPr>
-        <p:spPr>
-          <a:xfrm>
-            <a:off x="7558326" y="5885498"/>
-            <a:ext cx="5987415" cy="383024"/>
-          </a:xfrm>
-          <a:prstGeom prst="rect">
-            <a:avLst/>
-          </a:prstGeom>
-          <a:noFill/>
-          <a:ln/>
-        </p:spPr>
-        <p:txBody>
-          <a:bodyPr wrap="none" lIns="0" tIns="0" rIns="0" bIns="0" rtlCol="0" anchor="t"/>
-          <a:lstStyle/>
-          <a:p>
-            <a:pPr marL="0" indent="0" algn="l">
-              <a:lnSpc>
-                <a:spcPts val="3000"/>
-              </a:lnSpc>
-              <a:buNone/>
-            </a:pPr>
-            <a:r>
-              <a:rPr lang="en-US" sz="1850" dirty="0">
-                <a:solidFill>
-                  <a:srgbClr val="D75BE2"/>
-                </a:solidFill>
-                <a:latin typeface="Source Sans 3" pitchFamily="34" charset="0"/>
-                <a:ea typeface="Source Sans 3" pitchFamily="34" charset="-122"/>
-                <a:cs typeface="Source Sans 3" pitchFamily="34" charset="-120"/>
-              </a:rPr>
-              <a:t>Semanas 10-11</a:t>
-            </a:r>
-            <a:endParaRPr lang="en-US" sz="1850" dirty="0"/>
-          </a:p>
-        </p:txBody>
-      </p:sp>
-      <p:sp>
-        <p:nvSpPr>
-          <p:cNvPr id="22" name="Shape 20"/>
-          <p:cNvSpPr/>
-          <p:nvPr/>
-        </p:nvSpPr>
-        <p:spPr>
-          <a:xfrm>
-            <a:off x="845344" y="6419731"/>
-            <a:ext cx="12939713" cy="685443"/>
-          </a:xfrm>
-          <a:prstGeom prst="rect">
-            <a:avLst/>
-          </a:prstGeom>
-          <a:solidFill>
-            <a:srgbClr val="FFFFFF">
-              <a:alpha val="4000"/>
-            </a:srgbClr>
-          </a:solidFill>
-          <a:ln/>
-        </p:spPr>
-        <p:txBody>
-          <a:bodyPr/>
-          <a:lstStyle/>
-          <a:p>
-            <a:endParaRPr lang="es-CL"/>
-          </a:p>
-        </p:txBody>
-      </p:sp>
-      <p:sp>
-        <p:nvSpPr>
-          <p:cNvPr id="23" name="Text 21"/>
-          <p:cNvSpPr/>
-          <p:nvPr/>
-        </p:nvSpPr>
-        <p:spPr>
-          <a:xfrm>
-            <a:off x="1084659" y="6570940"/>
-            <a:ext cx="5987415" cy="383024"/>
-          </a:xfrm>
-          <a:prstGeom prst="rect">
-            <a:avLst/>
-          </a:prstGeom>
-          <a:noFill/>
-          <a:ln/>
-        </p:spPr>
-        <p:txBody>
-          <a:bodyPr wrap="none" lIns="0" tIns="0" rIns="0" bIns="0" rtlCol="0" anchor="t"/>
-          <a:lstStyle/>
-          <a:p>
-            <a:pPr marL="0" indent="0" algn="l">
-              <a:lnSpc>
-                <a:spcPts val="3000"/>
-              </a:lnSpc>
-              <a:buNone/>
-            </a:pPr>
-            <a:r>
-              <a:rPr lang="en-US" sz="1850" dirty="0">
-                <a:solidFill>
-                  <a:srgbClr val="272525"/>
-                </a:solidFill>
-                <a:latin typeface="Source Sans 3" pitchFamily="34" charset="0"/>
-                <a:ea typeface="Source Sans 3" pitchFamily="34" charset="-122"/>
-                <a:cs typeface="Source Sans 3" pitchFamily="34" charset="-120"/>
-              </a:rPr>
-              <a:t>Preparación y entrega final</a:t>
-            </a:r>
-            <a:endParaRPr lang="en-US" sz="1850" dirty="0"/>
-          </a:p>
-        </p:txBody>
-      </p:sp>
-      <p:sp>
-        <p:nvSpPr>
-          <p:cNvPr id="24" name="Text 22"/>
-          <p:cNvSpPr/>
-          <p:nvPr/>
-        </p:nvSpPr>
-        <p:spPr>
-          <a:xfrm>
-            <a:off x="7558326" y="6570940"/>
-            <a:ext cx="5987415" cy="383024"/>
-          </a:xfrm>
-          <a:prstGeom prst="rect">
-            <a:avLst/>
-          </a:prstGeom>
-          <a:noFill/>
-          <a:ln/>
-        </p:spPr>
-        <p:txBody>
-          <a:bodyPr wrap="none" lIns="0" tIns="0" rIns="0" bIns="0" rtlCol="0" anchor="t"/>
-          <a:lstStyle/>
-          <a:p>
-            <a:pPr marL="0" indent="0" algn="l">
-              <a:lnSpc>
-                <a:spcPts val="3000"/>
-              </a:lnSpc>
-              <a:buNone/>
-            </a:pPr>
-            <a:r>
-              <a:rPr lang="en-US" sz="1850" dirty="0">
-                <a:solidFill>
-                  <a:srgbClr val="272525"/>
-                </a:solidFill>
-                <a:latin typeface="Source Sans 3" pitchFamily="34" charset="0"/>
-                <a:ea typeface="Source Sans 3" pitchFamily="34" charset="-122"/>
-                <a:cs typeface="Source Sans 3" pitchFamily="34" charset="-120"/>
-              </a:rPr>
-              <a:t>Semana 12</a:t>
-            </a:r>
-            <a:endParaRPr lang="en-US" sz="1850" dirty="0"/>
-          </a:p>
-        </p:txBody>
-      </p:sp>
+            <a:endParaRPr lang="es-419" noProof="0" dirty="0"/>
+          </a:p>
+        </p:txBody>
+      </p:sp>
+      <p:graphicFrame>
+        <p:nvGraphicFramePr>
+          <p:cNvPr id="25" name="Tabla 24">
+            <a:extLst>
+              <a:ext uri="{FF2B5EF4-FFF2-40B4-BE49-F238E27FC236}">
+                <a16:creationId xmlns:a16="http://schemas.microsoft.com/office/drawing/2014/main" id="{0DBEA00C-B57F-5373-0E33-43301C412EB5}"/>
+              </a:ext>
+            </a:extLst>
+          </p:cNvPr>
+          <p:cNvGraphicFramePr>
+            <a:graphicFrameLocks noGrp="1"/>
+          </p:cNvGraphicFramePr>
+          <p:nvPr>
+            <p:extLst>
+              <p:ext uri="{D42A27DB-BD31-4B8C-83A1-F6EECF244321}">
+                <p14:modId xmlns:p14="http://schemas.microsoft.com/office/powerpoint/2010/main" val="1558104067"/>
+              </p:ext>
+            </p:extLst>
+          </p:nvPr>
+        </p:nvGraphicFramePr>
+        <p:xfrm>
+          <a:off x="1798819" y="1199212"/>
+          <a:ext cx="10538085" cy="5831175"/>
+        </p:xfrm>
+        <a:graphic>
+          <a:graphicData uri="http://schemas.openxmlformats.org/drawingml/2006/table">
+            <a:tbl>
+              <a:tblPr>
+                <a:tableStyleId>{5C22544A-7EE6-4342-B048-85BDC9FD1C3A}</a:tableStyleId>
+              </a:tblPr>
+              <a:tblGrid>
+                <a:gridCol w="5265522">
+                  <a:extLst>
+                    <a:ext uri="{9D8B030D-6E8A-4147-A177-3AD203B41FA5}">
+                      <a16:colId xmlns:a16="http://schemas.microsoft.com/office/drawing/2014/main" val="750545529"/>
+                    </a:ext>
+                  </a:extLst>
+                </a:gridCol>
+                <a:gridCol w="2168157">
+                  <a:extLst>
+                    <a:ext uri="{9D8B030D-6E8A-4147-A177-3AD203B41FA5}">
+                      <a16:colId xmlns:a16="http://schemas.microsoft.com/office/drawing/2014/main" val="3219625123"/>
+                    </a:ext>
+                  </a:extLst>
+                </a:gridCol>
+                <a:gridCol w="3104406">
+                  <a:extLst>
+                    <a:ext uri="{9D8B030D-6E8A-4147-A177-3AD203B41FA5}">
+                      <a16:colId xmlns:a16="http://schemas.microsoft.com/office/drawing/2014/main" val="3213484307"/>
+                    </a:ext>
+                  </a:extLst>
+                </a:gridCol>
+              </a:tblGrid>
+              <a:tr h="388745">
+                <a:tc>
+                  <a:txBody>
+                    <a:bodyPr/>
+                    <a:lstStyle/>
+                    <a:p>
+                      <a:pPr algn="l" fontAlgn="b">
+                        <a:buNone/>
+                      </a:pPr>
+                      <a:r>
+                        <a:rPr lang="es-419" sz="2000" u="none" strike="noStrike">
+                          <a:effectLst/>
+                        </a:rPr>
+                        <a:t>Actividad</a:t>
+                      </a:r>
+                      <a:endParaRPr lang="es-419" sz="2000" b="1" i="0" u="none" strike="noStrike">
+                        <a:solidFill>
+                          <a:srgbClr val="000000"/>
+                        </a:solidFill>
+                        <a:effectLst/>
+                        <a:latin typeface="Aptos Narrow" panose="020B0004020202020204" pitchFamily="34" charset="0"/>
+                      </a:endParaRPr>
+                    </a:p>
+                  </a:txBody>
+                  <a:tcPr marL="9525" marR="9525" marT="9525" marB="0" anchor="b"/>
+                </a:tc>
+                <a:tc>
+                  <a:txBody>
+                    <a:bodyPr/>
+                    <a:lstStyle/>
+                    <a:p>
+                      <a:pPr algn="l" fontAlgn="b">
+                        <a:buNone/>
+                      </a:pPr>
+                      <a:r>
+                        <a:rPr lang="es-419" sz="2000" u="none" strike="noStrike">
+                          <a:effectLst/>
+                        </a:rPr>
+                        <a:t>Responsable</a:t>
+                      </a:r>
+                      <a:endParaRPr lang="es-419" sz="2000" b="1" i="0" u="none" strike="noStrike">
+                        <a:solidFill>
+                          <a:srgbClr val="000000"/>
+                        </a:solidFill>
+                        <a:effectLst/>
+                        <a:latin typeface="Aptos Narrow" panose="020B0004020202020204" pitchFamily="34" charset="0"/>
+                      </a:endParaRPr>
+                    </a:p>
+                  </a:txBody>
+                  <a:tcPr marL="9525" marR="9525" marT="9525" marB="0" anchor="b"/>
+                </a:tc>
+                <a:tc>
+                  <a:txBody>
+                    <a:bodyPr/>
+                    <a:lstStyle/>
+                    <a:p>
+                      <a:pPr algn="l" fontAlgn="b">
+                        <a:buNone/>
+                      </a:pPr>
+                      <a:r>
+                        <a:rPr lang="es-419" sz="2000" u="none" strike="noStrike">
+                          <a:effectLst/>
+                        </a:rPr>
+                        <a:t>Semanas asociadas</a:t>
+                      </a:r>
+                      <a:endParaRPr lang="es-419" sz="2000" b="1" i="0" u="none" strike="noStrike">
+                        <a:solidFill>
+                          <a:srgbClr val="000000"/>
+                        </a:solidFill>
+                        <a:effectLst/>
+                        <a:latin typeface="Aptos Narrow" panose="020B0004020202020204" pitchFamily="34" charset="0"/>
+                      </a:endParaRPr>
+                    </a:p>
+                  </a:txBody>
+                  <a:tcPr marL="9525" marR="9525" marT="9525" marB="0" anchor="b"/>
+                </a:tc>
+                <a:extLst>
+                  <a:ext uri="{0D108BD9-81ED-4DB2-BD59-A6C34878D82A}">
+                    <a16:rowId xmlns:a16="http://schemas.microsoft.com/office/drawing/2014/main" val="408352861"/>
+                  </a:ext>
+                </a:extLst>
+              </a:tr>
+              <a:tr h="388745">
+                <a:tc>
+                  <a:txBody>
+                    <a:bodyPr/>
+                    <a:lstStyle/>
+                    <a:p>
+                      <a:pPr algn="l" fontAlgn="b">
+                        <a:buNone/>
+                      </a:pPr>
+                      <a:r>
+                        <a:rPr lang="es-419" sz="2000" u="none" strike="noStrike">
+                          <a:effectLst/>
+                        </a:rPr>
+                        <a:t>Levantamiento de requerimientos</a:t>
+                      </a:r>
+                      <a:endParaRPr lang="es-419" sz="2000" b="0" i="0" u="none" strike="noStrike">
+                        <a:solidFill>
+                          <a:srgbClr val="000000"/>
+                        </a:solidFill>
+                        <a:effectLst/>
+                        <a:latin typeface="Aptos Narrow" panose="020B0004020202020204" pitchFamily="34" charset="0"/>
+                      </a:endParaRPr>
+                    </a:p>
+                  </a:txBody>
+                  <a:tcPr marL="9525" marR="9525" marT="9525" marB="0" anchor="b"/>
+                </a:tc>
+                <a:tc>
+                  <a:txBody>
+                    <a:bodyPr/>
+                    <a:lstStyle/>
+                    <a:p>
+                      <a:pPr algn="l" fontAlgn="b">
+                        <a:buNone/>
+                      </a:pPr>
+                      <a:r>
+                        <a:rPr lang="es-419" sz="2000" u="none" strike="noStrike">
+                          <a:effectLst/>
+                        </a:rPr>
+                        <a:t>Matías</a:t>
+                      </a:r>
+                      <a:endParaRPr lang="es-419" sz="2000" b="0" i="0" u="none" strike="noStrike">
+                        <a:solidFill>
+                          <a:srgbClr val="000000"/>
+                        </a:solidFill>
+                        <a:effectLst/>
+                        <a:latin typeface="Aptos Narrow" panose="020B0004020202020204" pitchFamily="34" charset="0"/>
+                      </a:endParaRPr>
+                    </a:p>
+                  </a:txBody>
+                  <a:tcPr marL="9525" marR="9525" marT="9525" marB="0" anchor="b"/>
+                </a:tc>
+                <a:tc>
+                  <a:txBody>
+                    <a:bodyPr/>
+                    <a:lstStyle/>
+                    <a:p>
+                      <a:pPr algn="l" fontAlgn="b">
+                        <a:buNone/>
+                      </a:pPr>
+                      <a:r>
+                        <a:rPr lang="es-419" sz="2000" u="none" strike="noStrike">
+                          <a:effectLst/>
+                        </a:rPr>
+                        <a:t>Semana 1</a:t>
+                      </a:r>
+                      <a:endParaRPr lang="es-419" sz="2000" b="0" i="0" u="none" strike="noStrike">
+                        <a:solidFill>
+                          <a:srgbClr val="000000"/>
+                        </a:solidFill>
+                        <a:effectLst/>
+                        <a:latin typeface="Aptos Narrow" panose="020B0004020202020204" pitchFamily="34" charset="0"/>
+                      </a:endParaRPr>
+                    </a:p>
+                  </a:txBody>
+                  <a:tcPr marL="9525" marR="9525" marT="9525" marB="0" anchor="b"/>
+                </a:tc>
+                <a:extLst>
+                  <a:ext uri="{0D108BD9-81ED-4DB2-BD59-A6C34878D82A}">
+                    <a16:rowId xmlns:a16="http://schemas.microsoft.com/office/drawing/2014/main" val="2774444475"/>
+                  </a:ext>
+                </a:extLst>
+              </a:tr>
+              <a:tr h="388745">
+                <a:tc>
+                  <a:txBody>
+                    <a:bodyPr/>
+                    <a:lstStyle/>
+                    <a:p>
+                      <a:pPr algn="l" fontAlgn="b">
+                        <a:buNone/>
+                      </a:pPr>
+                      <a:r>
+                        <a:rPr lang="es-419" sz="2000" u="none" strike="noStrike">
+                          <a:effectLst/>
+                        </a:rPr>
+                        <a:t>Análisis de factibilidad</a:t>
+                      </a:r>
+                      <a:endParaRPr lang="es-419" sz="2000" b="0" i="0" u="none" strike="noStrike">
+                        <a:solidFill>
+                          <a:srgbClr val="000000"/>
+                        </a:solidFill>
+                        <a:effectLst/>
+                        <a:latin typeface="Aptos Narrow" panose="020B0004020202020204" pitchFamily="34" charset="0"/>
+                      </a:endParaRPr>
+                    </a:p>
+                  </a:txBody>
+                  <a:tcPr marL="9525" marR="9525" marT="9525" marB="0" anchor="b"/>
+                </a:tc>
+                <a:tc>
+                  <a:txBody>
+                    <a:bodyPr/>
+                    <a:lstStyle/>
+                    <a:p>
+                      <a:pPr algn="l" fontAlgn="b">
+                        <a:buNone/>
+                      </a:pPr>
+                      <a:r>
+                        <a:rPr lang="es-419" sz="2000" u="none" strike="noStrike">
+                          <a:effectLst/>
+                        </a:rPr>
+                        <a:t>Matías</a:t>
+                      </a:r>
+                      <a:endParaRPr lang="es-419" sz="2000" b="0" i="0" u="none" strike="noStrike">
+                        <a:solidFill>
+                          <a:srgbClr val="000000"/>
+                        </a:solidFill>
+                        <a:effectLst/>
+                        <a:latin typeface="Aptos Narrow" panose="020B0004020202020204" pitchFamily="34" charset="0"/>
+                      </a:endParaRPr>
+                    </a:p>
+                  </a:txBody>
+                  <a:tcPr marL="9525" marR="9525" marT="9525" marB="0" anchor="b"/>
+                </a:tc>
+                <a:tc>
+                  <a:txBody>
+                    <a:bodyPr/>
+                    <a:lstStyle/>
+                    <a:p>
+                      <a:pPr algn="l" fontAlgn="b">
+                        <a:buNone/>
+                      </a:pPr>
+                      <a:r>
+                        <a:rPr lang="es-419" sz="2000" u="none" strike="noStrike">
+                          <a:effectLst/>
+                        </a:rPr>
+                        <a:t>Semana 2</a:t>
+                      </a:r>
+                      <a:endParaRPr lang="es-419" sz="2000" b="0" i="0" u="none" strike="noStrike">
+                        <a:solidFill>
+                          <a:srgbClr val="000000"/>
+                        </a:solidFill>
+                        <a:effectLst/>
+                        <a:latin typeface="Aptos Narrow" panose="020B0004020202020204" pitchFamily="34" charset="0"/>
+                      </a:endParaRPr>
+                    </a:p>
+                  </a:txBody>
+                  <a:tcPr marL="9525" marR="9525" marT="9525" marB="0" anchor="b"/>
+                </a:tc>
+                <a:extLst>
+                  <a:ext uri="{0D108BD9-81ED-4DB2-BD59-A6C34878D82A}">
+                    <a16:rowId xmlns:a16="http://schemas.microsoft.com/office/drawing/2014/main" val="142077108"/>
+                  </a:ext>
+                </a:extLst>
+              </a:tr>
+              <a:tr h="388745">
+                <a:tc>
+                  <a:txBody>
+                    <a:bodyPr/>
+                    <a:lstStyle/>
+                    <a:p>
+                      <a:pPr algn="l" fontAlgn="b">
+                        <a:buNone/>
+                      </a:pPr>
+                      <a:r>
+                        <a:rPr lang="es-419" sz="2000" u="none" strike="noStrike">
+                          <a:effectLst/>
+                        </a:rPr>
+                        <a:t>Diseño base de datos</a:t>
+                      </a:r>
+                      <a:endParaRPr lang="es-419" sz="2000" b="0" i="0" u="none" strike="noStrike">
+                        <a:solidFill>
+                          <a:srgbClr val="000000"/>
+                        </a:solidFill>
+                        <a:effectLst/>
+                        <a:latin typeface="Aptos Narrow" panose="020B0004020202020204" pitchFamily="34" charset="0"/>
+                      </a:endParaRPr>
+                    </a:p>
+                  </a:txBody>
+                  <a:tcPr marL="9525" marR="9525" marT="9525" marB="0" anchor="b"/>
+                </a:tc>
+                <a:tc>
+                  <a:txBody>
+                    <a:bodyPr/>
+                    <a:lstStyle/>
+                    <a:p>
+                      <a:pPr algn="l" fontAlgn="b">
+                        <a:buNone/>
+                      </a:pPr>
+                      <a:r>
+                        <a:rPr lang="es-419" sz="2000" u="none" strike="noStrike">
+                          <a:effectLst/>
+                        </a:rPr>
+                        <a:t>Raúl</a:t>
+                      </a:r>
+                      <a:endParaRPr lang="es-419" sz="2000" b="0" i="0" u="none" strike="noStrike">
+                        <a:solidFill>
+                          <a:srgbClr val="000000"/>
+                        </a:solidFill>
+                        <a:effectLst/>
+                        <a:latin typeface="Aptos Narrow" panose="020B0004020202020204" pitchFamily="34" charset="0"/>
+                      </a:endParaRPr>
+                    </a:p>
+                  </a:txBody>
+                  <a:tcPr marL="9525" marR="9525" marT="9525" marB="0" anchor="b"/>
+                </a:tc>
+                <a:tc>
+                  <a:txBody>
+                    <a:bodyPr/>
+                    <a:lstStyle/>
+                    <a:p>
+                      <a:pPr algn="l" fontAlgn="b">
+                        <a:buNone/>
+                      </a:pPr>
+                      <a:r>
+                        <a:rPr lang="es-419" sz="2000" u="none" strike="noStrike">
+                          <a:effectLst/>
+                        </a:rPr>
+                        <a:t>Semanas 3, 4</a:t>
+                      </a:r>
+                      <a:endParaRPr lang="es-419" sz="2000" b="0" i="0" u="none" strike="noStrike">
+                        <a:solidFill>
+                          <a:srgbClr val="000000"/>
+                        </a:solidFill>
+                        <a:effectLst/>
+                        <a:latin typeface="Aptos Narrow" panose="020B0004020202020204" pitchFamily="34" charset="0"/>
+                      </a:endParaRPr>
+                    </a:p>
+                  </a:txBody>
+                  <a:tcPr marL="9525" marR="9525" marT="9525" marB="0" anchor="b"/>
+                </a:tc>
+                <a:extLst>
+                  <a:ext uri="{0D108BD9-81ED-4DB2-BD59-A6C34878D82A}">
+                    <a16:rowId xmlns:a16="http://schemas.microsoft.com/office/drawing/2014/main" val="2470016872"/>
+                  </a:ext>
+                </a:extLst>
+              </a:tr>
+              <a:tr h="388745">
+                <a:tc>
+                  <a:txBody>
+                    <a:bodyPr/>
+                    <a:lstStyle/>
+                    <a:p>
+                      <a:pPr algn="l" fontAlgn="b">
+                        <a:buNone/>
+                      </a:pPr>
+                      <a:r>
+                        <a:rPr lang="es-419" sz="2000" u="none" strike="noStrike">
+                          <a:effectLst/>
+                        </a:rPr>
+                        <a:t>Diseño de arquitectura</a:t>
+                      </a:r>
+                      <a:endParaRPr lang="es-419" sz="2000" b="0" i="0" u="none" strike="noStrike">
+                        <a:solidFill>
+                          <a:srgbClr val="000000"/>
+                        </a:solidFill>
+                        <a:effectLst/>
+                        <a:latin typeface="Aptos Narrow" panose="020B0004020202020204" pitchFamily="34" charset="0"/>
+                      </a:endParaRPr>
+                    </a:p>
+                  </a:txBody>
+                  <a:tcPr marL="9525" marR="9525" marT="9525" marB="0" anchor="b"/>
+                </a:tc>
+                <a:tc>
+                  <a:txBody>
+                    <a:bodyPr/>
+                    <a:lstStyle/>
+                    <a:p>
+                      <a:pPr algn="l" fontAlgn="b">
+                        <a:buNone/>
+                      </a:pPr>
+                      <a:r>
+                        <a:rPr lang="es-419" sz="2000" u="none" strike="noStrike">
+                          <a:effectLst/>
+                        </a:rPr>
+                        <a:t>Matías</a:t>
+                      </a:r>
+                      <a:endParaRPr lang="es-419" sz="2000" b="0" i="0" u="none" strike="noStrike">
+                        <a:solidFill>
+                          <a:srgbClr val="000000"/>
+                        </a:solidFill>
+                        <a:effectLst/>
+                        <a:latin typeface="Aptos Narrow" panose="020B0004020202020204" pitchFamily="34" charset="0"/>
+                      </a:endParaRPr>
+                    </a:p>
+                  </a:txBody>
+                  <a:tcPr marL="9525" marR="9525" marT="9525" marB="0" anchor="b"/>
+                </a:tc>
+                <a:tc>
+                  <a:txBody>
+                    <a:bodyPr/>
+                    <a:lstStyle/>
+                    <a:p>
+                      <a:pPr algn="l" fontAlgn="b">
+                        <a:buNone/>
+                      </a:pPr>
+                      <a:r>
+                        <a:rPr lang="es-419" sz="2000" u="none" strike="noStrike">
+                          <a:effectLst/>
+                        </a:rPr>
+                        <a:t>Semanas 4, 5</a:t>
+                      </a:r>
+                      <a:endParaRPr lang="es-419" sz="2000" b="0" i="0" u="none" strike="noStrike">
+                        <a:solidFill>
+                          <a:srgbClr val="000000"/>
+                        </a:solidFill>
+                        <a:effectLst/>
+                        <a:latin typeface="Aptos Narrow" panose="020B0004020202020204" pitchFamily="34" charset="0"/>
+                      </a:endParaRPr>
+                    </a:p>
+                  </a:txBody>
+                  <a:tcPr marL="9525" marR="9525" marT="9525" marB="0" anchor="b"/>
+                </a:tc>
+                <a:extLst>
+                  <a:ext uri="{0D108BD9-81ED-4DB2-BD59-A6C34878D82A}">
+                    <a16:rowId xmlns:a16="http://schemas.microsoft.com/office/drawing/2014/main" val="4266124480"/>
+                  </a:ext>
+                </a:extLst>
+              </a:tr>
+              <a:tr h="388745">
+                <a:tc>
+                  <a:txBody>
+                    <a:bodyPr/>
+                    <a:lstStyle/>
+                    <a:p>
+                      <a:pPr algn="l" fontAlgn="b">
+                        <a:buNone/>
+                      </a:pPr>
+                      <a:r>
+                        <a:rPr lang="es-419" sz="2000" u="none" strike="noStrike">
+                          <a:effectLst/>
+                        </a:rPr>
+                        <a:t>Desarrollo backend (API REST .NET)</a:t>
+                      </a:r>
+                      <a:endParaRPr lang="es-419" sz="2000" b="0" i="0" u="none" strike="noStrike">
+                        <a:solidFill>
+                          <a:srgbClr val="000000"/>
+                        </a:solidFill>
+                        <a:effectLst/>
+                        <a:latin typeface="Aptos Narrow" panose="020B0004020202020204" pitchFamily="34" charset="0"/>
+                      </a:endParaRPr>
+                    </a:p>
+                  </a:txBody>
+                  <a:tcPr marL="9525" marR="9525" marT="9525" marB="0" anchor="b"/>
+                </a:tc>
+                <a:tc>
+                  <a:txBody>
+                    <a:bodyPr/>
+                    <a:lstStyle/>
+                    <a:p>
+                      <a:pPr algn="l" fontAlgn="b">
+                        <a:buNone/>
+                      </a:pPr>
+                      <a:r>
+                        <a:rPr lang="es-419" sz="2000" u="none" strike="noStrike">
+                          <a:effectLst/>
+                        </a:rPr>
+                        <a:t>Matías</a:t>
+                      </a:r>
+                      <a:endParaRPr lang="es-419" sz="2000" b="0" i="0" u="none" strike="noStrike">
+                        <a:solidFill>
+                          <a:srgbClr val="000000"/>
+                        </a:solidFill>
+                        <a:effectLst/>
+                        <a:latin typeface="Aptos Narrow" panose="020B0004020202020204" pitchFamily="34" charset="0"/>
+                      </a:endParaRPr>
+                    </a:p>
+                  </a:txBody>
+                  <a:tcPr marL="9525" marR="9525" marT="9525" marB="0" anchor="b"/>
+                </a:tc>
+                <a:tc>
+                  <a:txBody>
+                    <a:bodyPr/>
+                    <a:lstStyle/>
+                    <a:p>
+                      <a:pPr algn="l" fontAlgn="b">
+                        <a:buNone/>
+                      </a:pPr>
+                      <a:r>
+                        <a:rPr lang="es-419" sz="2000" u="none" strike="noStrike">
+                          <a:effectLst/>
+                        </a:rPr>
+                        <a:t>Semanas 5, 6, 7</a:t>
+                      </a:r>
+                      <a:endParaRPr lang="es-419" sz="2000" b="0" i="0" u="none" strike="noStrike">
+                        <a:solidFill>
+                          <a:srgbClr val="000000"/>
+                        </a:solidFill>
+                        <a:effectLst/>
+                        <a:latin typeface="Aptos Narrow" panose="020B0004020202020204" pitchFamily="34" charset="0"/>
+                      </a:endParaRPr>
+                    </a:p>
+                  </a:txBody>
+                  <a:tcPr marL="9525" marR="9525" marT="9525" marB="0" anchor="b"/>
+                </a:tc>
+                <a:extLst>
+                  <a:ext uri="{0D108BD9-81ED-4DB2-BD59-A6C34878D82A}">
+                    <a16:rowId xmlns:a16="http://schemas.microsoft.com/office/drawing/2014/main" val="1940110590"/>
+                  </a:ext>
+                </a:extLst>
+              </a:tr>
+              <a:tr h="388745">
+                <a:tc>
+                  <a:txBody>
+                    <a:bodyPr/>
+                    <a:lstStyle/>
+                    <a:p>
+                      <a:pPr algn="l" fontAlgn="b">
+                        <a:buNone/>
+                      </a:pPr>
+                      <a:r>
+                        <a:rPr lang="es-419" sz="2000" u="none" strike="noStrike">
+                          <a:effectLst/>
+                        </a:rPr>
+                        <a:t>Desarrollo frontend (UI prototipo)</a:t>
+                      </a:r>
+                      <a:endParaRPr lang="es-419" sz="2000" b="0" i="0" u="none" strike="noStrike">
+                        <a:solidFill>
+                          <a:srgbClr val="000000"/>
+                        </a:solidFill>
+                        <a:effectLst/>
+                        <a:latin typeface="Aptos Narrow" panose="020B0004020202020204" pitchFamily="34" charset="0"/>
+                      </a:endParaRPr>
+                    </a:p>
+                  </a:txBody>
+                  <a:tcPr marL="9525" marR="9525" marT="9525" marB="0" anchor="b"/>
+                </a:tc>
+                <a:tc>
+                  <a:txBody>
+                    <a:bodyPr/>
+                    <a:lstStyle/>
+                    <a:p>
+                      <a:pPr algn="l" fontAlgn="b">
+                        <a:buNone/>
+                      </a:pPr>
+                      <a:r>
+                        <a:rPr lang="es-419" sz="2000" u="none" strike="noStrike">
+                          <a:effectLst/>
+                        </a:rPr>
+                        <a:t>Raúl</a:t>
+                      </a:r>
+                      <a:endParaRPr lang="es-419" sz="2000" b="0" i="0" u="none" strike="noStrike">
+                        <a:solidFill>
+                          <a:srgbClr val="000000"/>
+                        </a:solidFill>
+                        <a:effectLst/>
+                        <a:latin typeface="Aptos Narrow" panose="020B0004020202020204" pitchFamily="34" charset="0"/>
+                      </a:endParaRPr>
+                    </a:p>
+                  </a:txBody>
+                  <a:tcPr marL="9525" marR="9525" marT="9525" marB="0" anchor="b"/>
+                </a:tc>
+                <a:tc>
+                  <a:txBody>
+                    <a:bodyPr/>
+                    <a:lstStyle/>
+                    <a:p>
+                      <a:pPr algn="l" fontAlgn="b">
+                        <a:buNone/>
+                      </a:pPr>
+                      <a:r>
+                        <a:rPr lang="es-419" sz="2000" u="none" strike="noStrike">
+                          <a:effectLst/>
+                        </a:rPr>
+                        <a:t>Semanas 6, 7</a:t>
+                      </a:r>
+                      <a:endParaRPr lang="es-419" sz="2000" b="0" i="0" u="none" strike="noStrike">
+                        <a:solidFill>
+                          <a:srgbClr val="000000"/>
+                        </a:solidFill>
+                        <a:effectLst/>
+                        <a:latin typeface="Aptos Narrow" panose="020B0004020202020204" pitchFamily="34" charset="0"/>
+                      </a:endParaRPr>
+                    </a:p>
+                  </a:txBody>
+                  <a:tcPr marL="9525" marR="9525" marT="9525" marB="0" anchor="b"/>
+                </a:tc>
+                <a:extLst>
+                  <a:ext uri="{0D108BD9-81ED-4DB2-BD59-A6C34878D82A}">
+                    <a16:rowId xmlns:a16="http://schemas.microsoft.com/office/drawing/2014/main" val="3387164607"/>
+                  </a:ext>
+                </a:extLst>
+              </a:tr>
+              <a:tr h="388745">
+                <a:tc>
+                  <a:txBody>
+                    <a:bodyPr/>
+                    <a:lstStyle/>
+                    <a:p>
+                      <a:pPr algn="l" fontAlgn="b">
+                        <a:buNone/>
+                      </a:pPr>
+                      <a:r>
+                        <a:rPr lang="es-419" sz="2000" u="none" strike="noStrike">
+                          <a:effectLst/>
+                        </a:rPr>
+                        <a:t>Integración frontend-backend</a:t>
+                      </a:r>
+                      <a:endParaRPr lang="es-419" sz="2000" b="0" i="0" u="none" strike="noStrike">
+                        <a:solidFill>
+                          <a:srgbClr val="000000"/>
+                        </a:solidFill>
+                        <a:effectLst/>
+                        <a:latin typeface="Aptos Narrow" panose="020B0004020202020204" pitchFamily="34" charset="0"/>
+                      </a:endParaRPr>
+                    </a:p>
+                  </a:txBody>
+                  <a:tcPr marL="9525" marR="9525" marT="9525" marB="0" anchor="b"/>
+                </a:tc>
+                <a:tc>
+                  <a:txBody>
+                    <a:bodyPr/>
+                    <a:lstStyle/>
+                    <a:p>
+                      <a:pPr algn="l" fontAlgn="b">
+                        <a:buNone/>
+                      </a:pPr>
+                      <a:r>
+                        <a:rPr lang="es-419" sz="2000" u="none" strike="noStrike">
+                          <a:effectLst/>
+                        </a:rPr>
+                        <a:t>Matías</a:t>
+                      </a:r>
+                      <a:endParaRPr lang="es-419" sz="2000" b="0" i="0" u="none" strike="noStrike">
+                        <a:solidFill>
+                          <a:srgbClr val="000000"/>
+                        </a:solidFill>
+                        <a:effectLst/>
+                        <a:latin typeface="Aptos Narrow" panose="020B0004020202020204" pitchFamily="34" charset="0"/>
+                      </a:endParaRPr>
+                    </a:p>
+                  </a:txBody>
+                  <a:tcPr marL="9525" marR="9525" marT="9525" marB="0" anchor="b"/>
+                </a:tc>
+                <a:tc>
+                  <a:txBody>
+                    <a:bodyPr/>
+                    <a:lstStyle/>
+                    <a:p>
+                      <a:pPr algn="l" fontAlgn="b">
+                        <a:buNone/>
+                      </a:pPr>
+                      <a:r>
+                        <a:rPr lang="es-419" sz="2000" u="none" strike="noStrike">
+                          <a:effectLst/>
+                        </a:rPr>
+                        <a:t>Semanas 8, 9</a:t>
+                      </a:r>
+                      <a:endParaRPr lang="es-419" sz="2000" b="0" i="0" u="none" strike="noStrike">
+                        <a:solidFill>
+                          <a:srgbClr val="000000"/>
+                        </a:solidFill>
+                        <a:effectLst/>
+                        <a:latin typeface="Aptos Narrow" panose="020B0004020202020204" pitchFamily="34" charset="0"/>
+                      </a:endParaRPr>
+                    </a:p>
+                  </a:txBody>
+                  <a:tcPr marL="9525" marR="9525" marT="9525" marB="0" anchor="b"/>
+                </a:tc>
+                <a:extLst>
+                  <a:ext uri="{0D108BD9-81ED-4DB2-BD59-A6C34878D82A}">
+                    <a16:rowId xmlns:a16="http://schemas.microsoft.com/office/drawing/2014/main" val="564256197"/>
+                  </a:ext>
+                </a:extLst>
+              </a:tr>
+              <a:tr h="388745">
+                <a:tc>
+                  <a:txBody>
+                    <a:bodyPr/>
+                    <a:lstStyle/>
+                    <a:p>
+                      <a:pPr algn="l" fontAlgn="b">
+                        <a:buNone/>
+                      </a:pPr>
+                      <a:r>
+                        <a:rPr lang="es-419" sz="2000" u="none" strike="noStrike">
+                          <a:effectLst/>
+                        </a:rPr>
+                        <a:t>Pruebas unitarias</a:t>
+                      </a:r>
+                      <a:endParaRPr lang="es-419" sz="2000" b="0" i="0" u="none" strike="noStrike">
+                        <a:solidFill>
+                          <a:srgbClr val="000000"/>
+                        </a:solidFill>
+                        <a:effectLst/>
+                        <a:latin typeface="Aptos Narrow" panose="020B0004020202020204" pitchFamily="34" charset="0"/>
+                      </a:endParaRPr>
+                    </a:p>
+                  </a:txBody>
+                  <a:tcPr marL="9525" marR="9525" marT="9525" marB="0" anchor="b"/>
+                </a:tc>
+                <a:tc>
+                  <a:txBody>
+                    <a:bodyPr/>
+                    <a:lstStyle/>
+                    <a:p>
+                      <a:pPr algn="l" fontAlgn="b">
+                        <a:buNone/>
+                      </a:pPr>
+                      <a:r>
+                        <a:rPr lang="es-419" sz="2000" u="none" strike="noStrike">
+                          <a:effectLst/>
+                        </a:rPr>
+                        <a:t>Matías</a:t>
+                      </a:r>
+                      <a:endParaRPr lang="es-419" sz="2000" b="0" i="0" u="none" strike="noStrike">
+                        <a:solidFill>
+                          <a:srgbClr val="000000"/>
+                        </a:solidFill>
+                        <a:effectLst/>
+                        <a:latin typeface="Aptos Narrow" panose="020B0004020202020204" pitchFamily="34" charset="0"/>
+                      </a:endParaRPr>
+                    </a:p>
+                  </a:txBody>
+                  <a:tcPr marL="9525" marR="9525" marT="9525" marB="0" anchor="b"/>
+                </a:tc>
+                <a:tc>
+                  <a:txBody>
+                    <a:bodyPr/>
+                    <a:lstStyle/>
+                    <a:p>
+                      <a:pPr algn="l" fontAlgn="b">
+                        <a:buNone/>
+                      </a:pPr>
+                      <a:r>
+                        <a:rPr lang="es-419" sz="2000" u="none" strike="noStrike">
+                          <a:effectLst/>
+                        </a:rPr>
+                        <a:t>Semanas 9, 10</a:t>
+                      </a:r>
+                      <a:endParaRPr lang="es-419" sz="2000" b="0" i="0" u="none" strike="noStrike">
+                        <a:solidFill>
+                          <a:srgbClr val="000000"/>
+                        </a:solidFill>
+                        <a:effectLst/>
+                        <a:latin typeface="Aptos Narrow" panose="020B0004020202020204" pitchFamily="34" charset="0"/>
+                      </a:endParaRPr>
+                    </a:p>
+                  </a:txBody>
+                  <a:tcPr marL="9525" marR="9525" marT="9525" marB="0" anchor="b"/>
+                </a:tc>
+                <a:extLst>
+                  <a:ext uri="{0D108BD9-81ED-4DB2-BD59-A6C34878D82A}">
+                    <a16:rowId xmlns:a16="http://schemas.microsoft.com/office/drawing/2014/main" val="1487335839"/>
+                  </a:ext>
+                </a:extLst>
+              </a:tr>
+              <a:tr h="388745">
+                <a:tc>
+                  <a:txBody>
+                    <a:bodyPr/>
+                    <a:lstStyle/>
+                    <a:p>
+                      <a:pPr algn="l" fontAlgn="b">
+                        <a:buNone/>
+                      </a:pPr>
+                      <a:r>
+                        <a:rPr lang="es-419" sz="2000" u="none" strike="noStrike">
+                          <a:effectLst/>
+                        </a:rPr>
+                        <a:t>Pruebas de integración (E2E)</a:t>
+                      </a:r>
+                      <a:endParaRPr lang="es-419" sz="2000" b="0" i="0" u="none" strike="noStrike">
+                        <a:solidFill>
+                          <a:srgbClr val="000000"/>
+                        </a:solidFill>
+                        <a:effectLst/>
+                        <a:latin typeface="Aptos Narrow" panose="020B0004020202020204" pitchFamily="34" charset="0"/>
+                      </a:endParaRPr>
+                    </a:p>
+                  </a:txBody>
+                  <a:tcPr marL="9525" marR="9525" marT="9525" marB="0" anchor="b"/>
+                </a:tc>
+                <a:tc>
+                  <a:txBody>
+                    <a:bodyPr/>
+                    <a:lstStyle/>
+                    <a:p>
+                      <a:pPr algn="l" fontAlgn="b">
+                        <a:buNone/>
+                      </a:pPr>
+                      <a:r>
+                        <a:rPr lang="es-419" sz="2000" u="none" strike="noStrike">
+                          <a:effectLst/>
+                        </a:rPr>
+                        <a:t>Matías</a:t>
+                      </a:r>
+                      <a:endParaRPr lang="es-419" sz="2000" b="0" i="0" u="none" strike="noStrike">
+                        <a:solidFill>
+                          <a:srgbClr val="000000"/>
+                        </a:solidFill>
+                        <a:effectLst/>
+                        <a:latin typeface="Aptos Narrow" panose="020B0004020202020204" pitchFamily="34" charset="0"/>
+                      </a:endParaRPr>
+                    </a:p>
+                  </a:txBody>
+                  <a:tcPr marL="9525" marR="9525" marT="9525" marB="0" anchor="b"/>
+                </a:tc>
+                <a:tc>
+                  <a:txBody>
+                    <a:bodyPr/>
+                    <a:lstStyle/>
+                    <a:p>
+                      <a:pPr algn="l" fontAlgn="b">
+                        <a:buNone/>
+                      </a:pPr>
+                      <a:r>
+                        <a:rPr lang="es-419" sz="2000" u="none" strike="noStrike">
+                          <a:effectLst/>
+                        </a:rPr>
+                        <a:t>Semanas 10, 11</a:t>
+                      </a:r>
+                      <a:endParaRPr lang="es-419" sz="2000" b="0" i="0" u="none" strike="noStrike">
+                        <a:solidFill>
+                          <a:srgbClr val="000000"/>
+                        </a:solidFill>
+                        <a:effectLst/>
+                        <a:latin typeface="Aptos Narrow" panose="020B0004020202020204" pitchFamily="34" charset="0"/>
+                      </a:endParaRPr>
+                    </a:p>
+                  </a:txBody>
+                  <a:tcPr marL="9525" marR="9525" marT="9525" marB="0" anchor="b"/>
+                </a:tc>
+                <a:extLst>
+                  <a:ext uri="{0D108BD9-81ED-4DB2-BD59-A6C34878D82A}">
+                    <a16:rowId xmlns:a16="http://schemas.microsoft.com/office/drawing/2014/main" val="1640619728"/>
+                  </a:ext>
+                </a:extLst>
+              </a:tr>
+              <a:tr h="388745">
+                <a:tc>
+                  <a:txBody>
+                    <a:bodyPr/>
+                    <a:lstStyle/>
+                    <a:p>
+                      <a:pPr algn="l" fontAlgn="b">
+                        <a:buNone/>
+                      </a:pPr>
+                      <a:r>
+                        <a:rPr lang="es-419" sz="2000" u="none" strike="noStrike">
+                          <a:effectLst/>
+                        </a:rPr>
+                        <a:t>Ajustes y correcciones</a:t>
+                      </a:r>
+                      <a:endParaRPr lang="es-419" sz="2000" b="0" i="0" u="none" strike="noStrike">
+                        <a:solidFill>
+                          <a:srgbClr val="000000"/>
+                        </a:solidFill>
+                        <a:effectLst/>
+                        <a:latin typeface="Aptos Narrow" panose="020B0004020202020204" pitchFamily="34" charset="0"/>
+                      </a:endParaRPr>
+                    </a:p>
+                  </a:txBody>
+                  <a:tcPr marL="9525" marR="9525" marT="9525" marB="0" anchor="b"/>
+                </a:tc>
+                <a:tc>
+                  <a:txBody>
+                    <a:bodyPr/>
+                    <a:lstStyle/>
+                    <a:p>
+                      <a:pPr algn="l" fontAlgn="b">
+                        <a:buNone/>
+                      </a:pPr>
+                      <a:r>
+                        <a:rPr lang="es-419" sz="2000" u="none" strike="noStrike">
+                          <a:effectLst/>
+                        </a:rPr>
+                        <a:t>Ambos</a:t>
+                      </a:r>
+                      <a:endParaRPr lang="es-419" sz="2000" b="0" i="0" u="none" strike="noStrike">
+                        <a:solidFill>
+                          <a:srgbClr val="000000"/>
+                        </a:solidFill>
+                        <a:effectLst/>
+                        <a:latin typeface="Aptos Narrow" panose="020B0004020202020204" pitchFamily="34" charset="0"/>
+                      </a:endParaRPr>
+                    </a:p>
+                  </a:txBody>
+                  <a:tcPr marL="9525" marR="9525" marT="9525" marB="0" anchor="b"/>
+                </a:tc>
+                <a:tc>
+                  <a:txBody>
+                    <a:bodyPr/>
+                    <a:lstStyle/>
+                    <a:p>
+                      <a:pPr algn="l" fontAlgn="b">
+                        <a:buNone/>
+                      </a:pPr>
+                      <a:r>
+                        <a:rPr lang="es-419" sz="2000" u="none" strike="noStrike">
+                          <a:effectLst/>
+                        </a:rPr>
+                        <a:t>Semanas 11, 12</a:t>
+                      </a:r>
+                      <a:endParaRPr lang="es-419" sz="2000" b="0" i="0" u="none" strike="noStrike">
+                        <a:solidFill>
+                          <a:srgbClr val="000000"/>
+                        </a:solidFill>
+                        <a:effectLst/>
+                        <a:latin typeface="Aptos Narrow" panose="020B0004020202020204" pitchFamily="34" charset="0"/>
+                      </a:endParaRPr>
+                    </a:p>
+                  </a:txBody>
+                  <a:tcPr marL="9525" marR="9525" marT="9525" marB="0" anchor="b"/>
+                </a:tc>
+                <a:extLst>
+                  <a:ext uri="{0D108BD9-81ED-4DB2-BD59-A6C34878D82A}">
+                    <a16:rowId xmlns:a16="http://schemas.microsoft.com/office/drawing/2014/main" val="940794129"/>
+                  </a:ext>
+                </a:extLst>
+              </a:tr>
+              <a:tr h="388745">
+                <a:tc>
+                  <a:txBody>
+                    <a:bodyPr/>
+                    <a:lstStyle/>
+                    <a:p>
+                      <a:pPr algn="l" fontAlgn="b">
+                        <a:buNone/>
+                      </a:pPr>
+                      <a:r>
+                        <a:rPr lang="es-419" sz="2000" u="none" strike="noStrike" dirty="0">
+                          <a:effectLst/>
+                        </a:rPr>
+                        <a:t>Pruebas finales + despliegue simulado</a:t>
+                      </a:r>
+                      <a:endParaRPr lang="es-419" sz="2000" b="0" i="0" u="none" strike="noStrike" dirty="0">
+                        <a:solidFill>
+                          <a:srgbClr val="000000"/>
+                        </a:solidFill>
+                        <a:effectLst/>
+                        <a:latin typeface="Aptos Narrow" panose="020B0004020202020204" pitchFamily="34" charset="0"/>
+                      </a:endParaRPr>
+                    </a:p>
+                  </a:txBody>
+                  <a:tcPr marL="9525" marR="9525" marT="9525" marB="0" anchor="b"/>
+                </a:tc>
+                <a:tc>
+                  <a:txBody>
+                    <a:bodyPr/>
+                    <a:lstStyle/>
+                    <a:p>
+                      <a:pPr algn="l" fontAlgn="b">
+                        <a:buNone/>
+                      </a:pPr>
+                      <a:r>
+                        <a:rPr lang="es-419" sz="2000" u="none" strike="noStrike">
+                          <a:effectLst/>
+                        </a:rPr>
+                        <a:t>Ambos</a:t>
+                      </a:r>
+                      <a:endParaRPr lang="es-419" sz="2000" b="0" i="0" u="none" strike="noStrike">
+                        <a:solidFill>
+                          <a:srgbClr val="000000"/>
+                        </a:solidFill>
+                        <a:effectLst/>
+                        <a:latin typeface="Aptos Narrow" panose="020B0004020202020204" pitchFamily="34" charset="0"/>
+                      </a:endParaRPr>
+                    </a:p>
+                  </a:txBody>
+                  <a:tcPr marL="9525" marR="9525" marT="9525" marB="0" anchor="b"/>
+                </a:tc>
+                <a:tc>
+                  <a:txBody>
+                    <a:bodyPr/>
+                    <a:lstStyle/>
+                    <a:p>
+                      <a:pPr algn="l" fontAlgn="b">
+                        <a:buNone/>
+                      </a:pPr>
+                      <a:r>
+                        <a:rPr lang="es-419" sz="2000" u="none" strike="noStrike">
+                          <a:effectLst/>
+                        </a:rPr>
+                        <a:t>Semanas 13, 14</a:t>
+                      </a:r>
+                      <a:endParaRPr lang="es-419" sz="2000" b="0" i="0" u="none" strike="noStrike">
+                        <a:solidFill>
+                          <a:srgbClr val="000000"/>
+                        </a:solidFill>
+                        <a:effectLst/>
+                        <a:latin typeface="Aptos Narrow" panose="020B0004020202020204" pitchFamily="34" charset="0"/>
+                      </a:endParaRPr>
+                    </a:p>
+                  </a:txBody>
+                  <a:tcPr marL="9525" marR="9525" marT="9525" marB="0" anchor="b"/>
+                </a:tc>
+                <a:extLst>
+                  <a:ext uri="{0D108BD9-81ED-4DB2-BD59-A6C34878D82A}">
+                    <a16:rowId xmlns:a16="http://schemas.microsoft.com/office/drawing/2014/main" val="21824652"/>
+                  </a:ext>
+                </a:extLst>
+              </a:tr>
+              <a:tr h="388745">
+                <a:tc>
+                  <a:txBody>
+                    <a:bodyPr/>
+                    <a:lstStyle/>
+                    <a:p>
+                      <a:pPr algn="l" fontAlgn="b">
+                        <a:buNone/>
+                      </a:pPr>
+                      <a:r>
+                        <a:rPr lang="es-419" sz="2000" u="none" strike="noStrike">
+                          <a:effectLst/>
+                        </a:rPr>
+                        <a:t>Preparación presentación final</a:t>
+                      </a:r>
+                      <a:endParaRPr lang="es-419" sz="2000" b="0" i="0" u="none" strike="noStrike">
+                        <a:solidFill>
+                          <a:srgbClr val="000000"/>
+                        </a:solidFill>
+                        <a:effectLst/>
+                        <a:latin typeface="Aptos Narrow" panose="020B0004020202020204" pitchFamily="34" charset="0"/>
+                      </a:endParaRPr>
+                    </a:p>
+                  </a:txBody>
+                  <a:tcPr marL="9525" marR="9525" marT="9525" marB="0" anchor="b"/>
+                </a:tc>
+                <a:tc>
+                  <a:txBody>
+                    <a:bodyPr/>
+                    <a:lstStyle/>
+                    <a:p>
+                      <a:pPr algn="l" fontAlgn="b">
+                        <a:buNone/>
+                      </a:pPr>
+                      <a:r>
+                        <a:rPr lang="es-419" sz="2000" u="none" strike="noStrike">
+                          <a:effectLst/>
+                        </a:rPr>
+                        <a:t>Ambos</a:t>
+                      </a:r>
+                      <a:endParaRPr lang="es-419" sz="2000" b="0" i="0" u="none" strike="noStrike">
+                        <a:solidFill>
+                          <a:srgbClr val="000000"/>
+                        </a:solidFill>
+                        <a:effectLst/>
+                        <a:latin typeface="Aptos Narrow" panose="020B0004020202020204" pitchFamily="34" charset="0"/>
+                      </a:endParaRPr>
+                    </a:p>
+                  </a:txBody>
+                  <a:tcPr marL="9525" marR="9525" marT="9525" marB="0" anchor="b"/>
+                </a:tc>
+                <a:tc>
+                  <a:txBody>
+                    <a:bodyPr/>
+                    <a:lstStyle/>
+                    <a:p>
+                      <a:pPr algn="l" fontAlgn="b">
+                        <a:buNone/>
+                      </a:pPr>
+                      <a:r>
+                        <a:rPr lang="es-419" sz="2000" u="none" strike="noStrike">
+                          <a:effectLst/>
+                        </a:rPr>
+                        <a:t>Semana 15</a:t>
+                      </a:r>
+                      <a:endParaRPr lang="es-419" sz="2000" b="0" i="0" u="none" strike="noStrike">
+                        <a:solidFill>
+                          <a:srgbClr val="000000"/>
+                        </a:solidFill>
+                        <a:effectLst/>
+                        <a:latin typeface="Aptos Narrow" panose="020B0004020202020204" pitchFamily="34" charset="0"/>
+                      </a:endParaRPr>
+                    </a:p>
+                  </a:txBody>
+                  <a:tcPr marL="9525" marR="9525" marT="9525" marB="0" anchor="b"/>
+                </a:tc>
+                <a:extLst>
+                  <a:ext uri="{0D108BD9-81ED-4DB2-BD59-A6C34878D82A}">
+                    <a16:rowId xmlns:a16="http://schemas.microsoft.com/office/drawing/2014/main" val="2135243974"/>
+                  </a:ext>
+                </a:extLst>
+              </a:tr>
+              <a:tr h="388745">
+                <a:tc>
+                  <a:txBody>
+                    <a:bodyPr/>
+                    <a:lstStyle/>
+                    <a:p>
+                      <a:pPr algn="l" fontAlgn="b">
+                        <a:buNone/>
+                      </a:pPr>
+                      <a:r>
+                        <a:rPr lang="es-419" sz="2000" u="none" strike="noStrike">
+                          <a:effectLst/>
+                        </a:rPr>
+                        <a:t>Entrega final + exposición</a:t>
+                      </a:r>
+                      <a:endParaRPr lang="es-419" sz="2000" b="0" i="0" u="none" strike="noStrike">
+                        <a:solidFill>
+                          <a:srgbClr val="000000"/>
+                        </a:solidFill>
+                        <a:effectLst/>
+                        <a:latin typeface="Aptos Narrow" panose="020B0004020202020204" pitchFamily="34" charset="0"/>
+                      </a:endParaRPr>
+                    </a:p>
+                  </a:txBody>
+                  <a:tcPr marL="9525" marR="9525" marT="9525" marB="0" anchor="b"/>
+                </a:tc>
+                <a:tc>
+                  <a:txBody>
+                    <a:bodyPr/>
+                    <a:lstStyle/>
+                    <a:p>
+                      <a:pPr algn="l" fontAlgn="b">
+                        <a:buNone/>
+                      </a:pPr>
+                      <a:r>
+                        <a:rPr lang="es-419" sz="2000" u="none" strike="noStrike">
+                          <a:effectLst/>
+                        </a:rPr>
+                        <a:t>Ambos</a:t>
+                      </a:r>
+                      <a:endParaRPr lang="es-419" sz="2000" b="0" i="0" u="none" strike="noStrike">
+                        <a:solidFill>
+                          <a:srgbClr val="000000"/>
+                        </a:solidFill>
+                        <a:effectLst/>
+                        <a:latin typeface="Aptos Narrow" panose="020B0004020202020204" pitchFamily="34" charset="0"/>
+                      </a:endParaRPr>
+                    </a:p>
+                  </a:txBody>
+                  <a:tcPr marL="9525" marR="9525" marT="9525" marB="0" anchor="b"/>
+                </a:tc>
+                <a:tc>
+                  <a:txBody>
+                    <a:bodyPr/>
+                    <a:lstStyle/>
+                    <a:p>
+                      <a:pPr algn="l" fontAlgn="b">
+                        <a:buNone/>
+                      </a:pPr>
+                      <a:r>
+                        <a:rPr lang="es-419" sz="2000" u="none" strike="noStrike">
+                          <a:effectLst/>
+                        </a:rPr>
+                        <a:t>Semana 16</a:t>
+                      </a:r>
+                      <a:endParaRPr lang="es-419" sz="2000" b="0" i="0" u="none" strike="noStrike">
+                        <a:solidFill>
+                          <a:srgbClr val="000000"/>
+                        </a:solidFill>
+                        <a:effectLst/>
+                        <a:latin typeface="Aptos Narrow" panose="020B0004020202020204" pitchFamily="34" charset="0"/>
+                      </a:endParaRPr>
+                    </a:p>
+                  </a:txBody>
+                  <a:tcPr marL="9525" marR="9525" marT="9525" marB="0" anchor="b"/>
+                </a:tc>
+                <a:extLst>
+                  <a:ext uri="{0D108BD9-81ED-4DB2-BD59-A6C34878D82A}">
+                    <a16:rowId xmlns:a16="http://schemas.microsoft.com/office/drawing/2014/main" val="556122012"/>
+                  </a:ext>
+                </a:extLst>
+              </a:tr>
+              <a:tr h="388745">
+                <a:tc>
+                  <a:txBody>
+                    <a:bodyPr/>
+                    <a:lstStyle/>
+                    <a:p>
+                      <a:pPr algn="l" fontAlgn="b">
+                        <a:buNone/>
+                      </a:pPr>
+                      <a:r>
+                        <a:rPr lang="es-419" sz="2000" u="none" strike="noStrike">
+                          <a:effectLst/>
+                        </a:rPr>
+                        <a:t>Semanas buffer</a:t>
+                      </a:r>
+                      <a:endParaRPr lang="es-419" sz="2000" b="0" i="0" u="none" strike="noStrike">
+                        <a:solidFill>
+                          <a:srgbClr val="000000"/>
+                        </a:solidFill>
+                        <a:effectLst/>
+                        <a:latin typeface="Aptos Narrow" panose="020B0004020202020204" pitchFamily="34" charset="0"/>
+                      </a:endParaRPr>
+                    </a:p>
+                  </a:txBody>
+                  <a:tcPr marL="9525" marR="9525" marT="9525" marB="0" anchor="b"/>
+                </a:tc>
+                <a:tc>
+                  <a:txBody>
+                    <a:bodyPr/>
+                    <a:lstStyle/>
+                    <a:p>
+                      <a:pPr algn="l" fontAlgn="b">
+                        <a:buNone/>
+                      </a:pPr>
+                      <a:r>
+                        <a:rPr lang="es-419" sz="2000" u="none" strike="noStrike">
+                          <a:effectLst/>
+                        </a:rPr>
+                        <a:t>Ambos</a:t>
+                      </a:r>
+                      <a:endParaRPr lang="es-419" sz="2000" b="0" i="0" u="none" strike="noStrike">
+                        <a:solidFill>
+                          <a:srgbClr val="000000"/>
+                        </a:solidFill>
+                        <a:effectLst/>
+                        <a:latin typeface="Aptos Narrow" panose="020B0004020202020204" pitchFamily="34" charset="0"/>
+                      </a:endParaRPr>
+                    </a:p>
+                  </a:txBody>
+                  <a:tcPr marL="9525" marR="9525" marT="9525" marB="0" anchor="b"/>
+                </a:tc>
+                <a:tc>
+                  <a:txBody>
+                    <a:bodyPr/>
+                    <a:lstStyle/>
+                    <a:p>
+                      <a:pPr algn="l" fontAlgn="b">
+                        <a:buNone/>
+                      </a:pPr>
+                      <a:r>
+                        <a:rPr lang="es-419" sz="2000" u="none" strike="noStrike" dirty="0">
+                          <a:effectLst/>
+                        </a:rPr>
+                        <a:t>Semanas 17, 18</a:t>
+                      </a:r>
+                      <a:endParaRPr lang="es-419" sz="2000" b="0" i="0" u="none" strike="noStrike" dirty="0">
+                        <a:solidFill>
+                          <a:srgbClr val="000000"/>
+                        </a:solidFill>
+                        <a:effectLst/>
+                        <a:latin typeface="Aptos Narrow" panose="020B0004020202020204" pitchFamily="34" charset="0"/>
+                      </a:endParaRPr>
+                    </a:p>
+                  </a:txBody>
+                  <a:tcPr marL="9525" marR="9525" marT="9525" marB="0" anchor="b"/>
+                </a:tc>
+                <a:extLst>
+                  <a:ext uri="{0D108BD9-81ED-4DB2-BD59-A6C34878D82A}">
+                    <a16:rowId xmlns:a16="http://schemas.microsoft.com/office/drawing/2014/main" val="2874714941"/>
+                  </a:ext>
+                </a:extLst>
+              </a:tr>
+            </a:tbl>
+          </a:graphicData>
+        </a:graphic>
+      </p:graphicFrame>
     </p:spTree>
   </p:cSld>
   <p:clrMapOvr>
@@ -9821,7 +10601,7 @@
               <a:buNone/>
             </a:pPr>
             <a:r>
-              <a:rPr lang="en-US" sz="4400" dirty="0">
+              <a:rPr lang="es-419" sz="4400" noProof="0" dirty="0">
                 <a:solidFill>
                   <a:srgbClr val="D73AD7"/>
                 </a:solidFill>
@@ -9829,9 +10609,20 @@
                 <a:ea typeface="Source Serif 4 Semi Bold" pitchFamily="34" charset="-122"/>
                 <a:cs typeface="Source Serif 4 Semi Bold" pitchFamily="34" charset="-120"/>
               </a:rPr>
-              <a:t>Avance por Sprints</a:t>
-            </a:r>
-            <a:endParaRPr lang="en-US" sz="4400" dirty="0"/>
+              <a:t>Avance por </a:t>
+            </a:r>
+            <a:r>
+              <a:rPr lang="es-419" sz="4400" noProof="0" dirty="0" err="1">
+                <a:solidFill>
+                  <a:srgbClr val="D73AD7"/>
+                </a:solidFill>
+                <a:latin typeface="Source Serif 4 Semi Bold" pitchFamily="34" charset="0"/>
+                <a:ea typeface="Source Serif 4 Semi Bold" pitchFamily="34" charset="-122"/>
+                <a:cs typeface="Source Serif 4 Semi Bold" pitchFamily="34" charset="-120"/>
+              </a:rPr>
+              <a:t>Sprints</a:t>
+            </a:r>
+            <a:endParaRPr lang="es-419" sz="4400" noProof="0" dirty="0"/>
           </a:p>
         </p:txBody>
       </p:sp>
@@ -9863,7 +10654,7 @@
               <a:buNone/>
             </a:pPr>
             <a:r>
-              <a:rPr lang="en-US" sz="1850" dirty="0">
+              <a:rPr lang="es-419" sz="1850" noProof="0" dirty="0">
                 <a:solidFill>
                   <a:srgbClr val="272525"/>
                 </a:solidFill>
@@ -9871,9 +10662,31 @@
                 <a:ea typeface="Source Sans 3" pitchFamily="34" charset="-122"/>
                 <a:cs typeface="Source Sans 3" pitchFamily="34" charset="-120"/>
               </a:rPr>
-              <a:t>Nuestro plan de trabajo se estructura en sprints quincenales, asegurando un desarrollo modular y eficiente.</a:t>
-            </a:r>
-            <a:endParaRPr lang="en-US" sz="1850" dirty="0"/>
+              <a:t>Nuestro plan de trabajo se estructura en </a:t>
+            </a:r>
+            <a:r>
+              <a:rPr lang="es-419" sz="1850" noProof="0" dirty="0" err="1">
+                <a:solidFill>
+                  <a:srgbClr val="272525"/>
+                </a:solidFill>
+                <a:latin typeface="Source Sans 3" pitchFamily="34" charset="0"/>
+                <a:ea typeface="Source Sans 3" pitchFamily="34" charset="-122"/>
+                <a:cs typeface="Source Sans 3" pitchFamily="34" charset="-120"/>
+              </a:rPr>
+              <a:t>sprints</a:t>
+            </a:r>
+            <a:r>
+              <a:rPr lang="es-419" sz="1850" noProof="0" dirty="0">
+                <a:solidFill>
+                  <a:srgbClr val="272525"/>
+                </a:solidFill>
+                <a:latin typeface="Source Sans 3" pitchFamily="34" charset="0"/>
+                <a:ea typeface="Source Sans 3" pitchFamily="34" charset="-122"/>
+                <a:cs typeface="Source Sans 3" pitchFamily="34" charset="-120"/>
+              </a:rPr>
+              <a:t> quincenales, asegurando un desarrollo modular y eficiente.</a:t>
+            </a:r>
+            <a:endParaRPr lang="es-419" sz="1850" noProof="0" dirty="0"/>
           </a:p>
         </p:txBody>
       </p:sp>
@@ -9907,7 +10720,7 @@
           <a:bodyPr/>
           <a:lstStyle/>
           <a:p>
-            <a:endParaRPr lang="es-CL"/>
+            <a:endParaRPr lang="es-419" noProof="0" dirty="0"/>
           </a:p>
         </p:txBody>
       </p:sp>
@@ -9939,7 +10752,7 @@
               <a:buNone/>
             </a:pPr>
             <a:r>
-              <a:rPr lang="en-US" sz="2200" dirty="0">
+              <a:rPr lang="es-419" sz="2200" noProof="0" dirty="0">
                 <a:solidFill>
                   <a:srgbClr val="272525"/>
                 </a:solidFill>
@@ -9949,7 +10762,7 @@
               </a:rPr>
               <a:t>Sprint 1 (Semanas 1-2)</a:t>
             </a:r>
-            <a:endParaRPr lang="en-US" sz="2200" dirty="0"/>
+            <a:endParaRPr lang="es-419" sz="2200" noProof="0" dirty="0"/>
           </a:p>
         </p:txBody>
       </p:sp>
@@ -9981,7 +10794,7 @@
               <a:buNone/>
             </a:pPr>
             <a:r>
-              <a:rPr lang="en-US" sz="1850" dirty="0">
+              <a:rPr lang="es-419" sz="1850" noProof="0" dirty="0">
                 <a:solidFill>
                   <a:srgbClr val="272525"/>
                 </a:solidFill>
@@ -9991,7 +10804,7 @@
               </a:rPr>
               <a:t>Planificación inicial, levantamiento de requerimientos y prototipo conceptual.</a:t>
             </a:r>
-            <a:endParaRPr lang="en-US" sz="1850" dirty="0"/>
+            <a:endParaRPr lang="es-419" sz="1850" noProof="0" dirty="0"/>
           </a:p>
         </p:txBody>
       </p:sp>
@@ -10025,7 +10838,7 @@
           <a:bodyPr/>
           <a:lstStyle/>
           <a:p>
-            <a:endParaRPr lang="es-CL"/>
+            <a:endParaRPr lang="es-419" noProof="0" dirty="0"/>
           </a:p>
         </p:txBody>
       </p:sp>
@@ -10057,7 +10870,7 @@
               <a:buNone/>
             </a:pPr>
             <a:r>
-              <a:rPr lang="en-US" sz="2200" dirty="0">
+              <a:rPr lang="es-419" sz="2200" noProof="0" dirty="0">
                 <a:solidFill>
                   <a:srgbClr val="272525"/>
                 </a:solidFill>
@@ -10067,7 +10880,7 @@
               </a:rPr>
               <a:t>Sprint 2 (Semanas 3-4)</a:t>
             </a:r>
-            <a:endParaRPr lang="en-US" sz="2200" dirty="0"/>
+            <a:endParaRPr lang="es-419" sz="2200" noProof="0" dirty="0"/>
           </a:p>
         </p:txBody>
       </p:sp>
@@ -10099,7 +10912,7 @@
               <a:buNone/>
             </a:pPr>
             <a:r>
-              <a:rPr lang="en-US" sz="1850" dirty="0">
+              <a:rPr lang="es-419" sz="1850" noProof="0" dirty="0">
                 <a:solidFill>
                   <a:srgbClr val="272525"/>
                 </a:solidFill>
@@ -10109,7 +10922,7 @@
               </a:rPr>
               <a:t>Implementación de la autenticación de usuarios y módulos de gestión.</a:t>
             </a:r>
-            <a:endParaRPr lang="en-US" sz="1850" dirty="0"/>
+            <a:endParaRPr lang="es-419" sz="1850" noProof="0" dirty="0"/>
           </a:p>
         </p:txBody>
       </p:sp>
@@ -10143,7 +10956,7 @@
           <a:bodyPr/>
           <a:lstStyle/>
           <a:p>
-            <a:endParaRPr lang="es-CL"/>
+            <a:endParaRPr lang="es-419" noProof="0" dirty="0"/>
           </a:p>
         </p:txBody>
       </p:sp>
@@ -10175,7 +10988,7 @@
               <a:buNone/>
             </a:pPr>
             <a:r>
-              <a:rPr lang="en-US" sz="2200" dirty="0">
+              <a:rPr lang="es-419" sz="2200" noProof="0" dirty="0">
                 <a:solidFill>
                   <a:srgbClr val="272525"/>
                 </a:solidFill>
@@ -10185,7 +10998,7 @@
               </a:rPr>
               <a:t>Sprint 3 (Semanas 5-6)</a:t>
             </a:r>
-            <a:endParaRPr lang="en-US" sz="2200" dirty="0"/>
+            <a:endParaRPr lang="es-419" sz="2200" noProof="0" dirty="0"/>
           </a:p>
         </p:txBody>
       </p:sp>
@@ -10217,7 +11030,7 @@
               <a:buNone/>
             </a:pPr>
             <a:r>
-              <a:rPr lang="en-US" sz="1850" dirty="0">
+              <a:rPr lang="es-419" sz="1850" noProof="0" dirty="0">
                 <a:solidFill>
                   <a:srgbClr val="272525"/>
                 </a:solidFill>
@@ -10227,7 +11040,7 @@
               </a:rPr>
               <a:t>Desarrollo del cuestionario de síntomas y el motor de reglas para el triage.</a:t>
             </a:r>
-            <a:endParaRPr lang="en-US" sz="1850" dirty="0"/>
+            <a:endParaRPr lang="es-419" sz="1850" noProof="0" dirty="0"/>
           </a:p>
         </p:txBody>
       </p:sp>
@@ -10261,7 +11074,7 @@
           <a:bodyPr/>
           <a:lstStyle/>
           <a:p>
-            <a:endParaRPr lang="es-CL"/>
+            <a:endParaRPr lang="es-419" noProof="0" dirty="0"/>
           </a:p>
         </p:txBody>
       </p:sp>
@@ -10293,7 +11106,7 @@
               <a:buNone/>
             </a:pPr>
             <a:r>
-              <a:rPr lang="en-US" sz="2200" dirty="0">
+              <a:rPr lang="es-419" sz="2200" noProof="0" dirty="0">
                 <a:solidFill>
                   <a:srgbClr val="272525"/>
                 </a:solidFill>
@@ -10303,7 +11116,7 @@
               </a:rPr>
               <a:t>Sprint 4 (Semanas 7-8)</a:t>
             </a:r>
-            <a:endParaRPr lang="en-US" sz="2200" dirty="0"/>
+            <a:endParaRPr lang="es-419" sz="2200" noProof="0" dirty="0"/>
           </a:p>
         </p:txBody>
       </p:sp>
@@ -10335,7 +11148,7 @@
               <a:buNone/>
             </a:pPr>
             <a:r>
-              <a:rPr lang="en-US" sz="1850" dirty="0">
+              <a:rPr lang="es-419" sz="1850" noProof="0" dirty="0">
                 <a:solidFill>
                   <a:srgbClr val="272525"/>
                 </a:solidFill>
@@ -10345,7 +11158,7 @@
               </a:rPr>
               <a:t>Integración del módulo de IA y diseño del panel médico para una gestión eficaz.</a:t>
             </a:r>
-            <a:endParaRPr lang="en-US" sz="1850" dirty="0"/>
+            <a:endParaRPr lang="es-419" sz="1850" noProof="0" dirty="0"/>
           </a:p>
         </p:txBody>
       </p:sp>
@@ -10379,7 +11192,7 @@
           <a:bodyPr/>
           <a:lstStyle/>
           <a:p>
-            <a:endParaRPr lang="es-CL"/>
+            <a:endParaRPr lang="es-419" noProof="0" dirty="0"/>
           </a:p>
         </p:txBody>
       </p:sp>
@@ -10411,7 +11224,7 @@
               <a:buNone/>
             </a:pPr>
             <a:r>
-              <a:rPr lang="en-US" sz="2200" dirty="0">
+              <a:rPr lang="es-419" sz="2200" noProof="0" dirty="0">
                 <a:solidFill>
                   <a:srgbClr val="272525"/>
                 </a:solidFill>
@@ -10421,7 +11234,7 @@
               </a:rPr>
               <a:t>Sprint 5 (Semanas 9-10)</a:t>
             </a:r>
-            <a:endParaRPr lang="en-US" sz="2200" dirty="0"/>
+            <a:endParaRPr lang="es-419" sz="2200" noProof="0" dirty="0"/>
           </a:p>
         </p:txBody>
       </p:sp>
@@ -10453,7 +11266,7 @@
               <a:buNone/>
             </a:pPr>
             <a:r>
-              <a:rPr lang="en-US" sz="1850" dirty="0">
+              <a:rPr lang="es-419" sz="1850" noProof="0" dirty="0">
                 <a:solidFill>
                   <a:srgbClr val="272525"/>
                 </a:solidFill>
@@ -10463,7 +11276,7 @@
               </a:rPr>
               <a:t>Fase de pruebas exhaustivas, ajustes finales, documentación y la demo de MediTriage.</a:t>
             </a:r>
-            <a:endParaRPr lang="en-US" sz="1850" dirty="0"/>
+            <a:endParaRPr lang="es-419" sz="1850" noProof="0" dirty="0"/>
           </a:p>
         </p:txBody>
       </p:sp>
@@ -10544,7 +11357,7 @@
               <a:buNone/>
             </a:pPr>
             <a:r>
-              <a:rPr lang="en-US" sz="4400" dirty="0">
+              <a:rPr lang="es-419" sz="4400" noProof="0" dirty="0">
                 <a:solidFill>
                   <a:srgbClr val="D73AD7"/>
                 </a:solidFill>
@@ -10554,7 +11367,7 @@
               </a:rPr>
               <a:t>Tecnologías que Impulsan MediTriage</a:t>
             </a:r>
-            <a:endParaRPr lang="en-US" sz="4400" dirty="0"/>
+            <a:endParaRPr lang="es-419" sz="4400" noProof="0" dirty="0"/>
           </a:p>
         </p:txBody>
       </p:sp>
@@ -10567,7 +11380,7 @@
         <p:spPr>
           <a:xfrm>
             <a:off x="5866924" y="2107883"/>
-            <a:ext cx="7468553" cy="766048"/>
+            <a:ext cx="8463673" cy="5132366"/>
           </a:xfrm>
           <a:prstGeom prst="rect">
             <a:avLst/>
@@ -10581,13 +11394,14 @@
           <a:p>
             <a:pPr marL="342900" indent="-342900" algn="l">
               <a:lnSpc>
-                <a:spcPts val="3000"/>
+                <a:spcPct val="200000"/>
               </a:lnSpc>
               <a:buSzPct val="100000"/>
+              <a:buFont typeface="Arial" panose="020B0604020202020204" pitchFamily="34" charset="0"/>
               <a:buChar char="•"/>
             </a:pPr>
             <a:r>
-              <a:rPr lang="en-US" sz="2400" b="1" dirty="0">
+              <a:rPr lang="es-419" sz="2400" noProof="0" dirty="0" err="1">
                 <a:solidFill>
                   <a:srgbClr val="272525"/>
                 </a:solidFill>
@@ -10595,10 +11409,10 @@
                 <a:ea typeface="Source Sans 3" pitchFamily="34" charset="-122"/>
                 <a:cs typeface="Source Sans 3" pitchFamily="34" charset="-120"/>
               </a:rPr>
-              <a:t>Frontend:</a:t>
-            </a:r>
-            <a:r>
-              <a:rPr lang="en-US" sz="2400" dirty="0">
+              <a:t>Backend</a:t>
+            </a:r>
+            <a:r>
+              <a:rPr lang="es-419" sz="2400" noProof="0" dirty="0">
                 <a:solidFill>
                   <a:srgbClr val="272525"/>
                 </a:solidFill>
@@ -10606,21 +11420,21 @@
                 <a:ea typeface="Source Sans 3" pitchFamily="34" charset="-122"/>
                 <a:cs typeface="Source Sans 3" pitchFamily="34" charset="-120"/>
               </a:rPr>
-              <a:t> </a:t>
-            </a:r>
-            <a:r>
-              <a:rPr lang="en-US" sz="2400" dirty="0">
-                <a:solidFill>
-                  <a:srgbClr val="D75BE2"/>
+              <a:t>: .NET 8 Web API (C#), </a:t>
+            </a:r>
+            <a:r>
+              <a:rPr lang="es-419" sz="2400" noProof="0" dirty="0" err="1">
+                <a:solidFill>
+                  <a:srgbClr val="272525"/>
                 </a:solidFill>
                 <a:latin typeface="Source Sans 3" pitchFamily="34" charset="0"/>
                 <a:ea typeface="Source Sans 3" pitchFamily="34" charset="-122"/>
                 <a:cs typeface="Source Sans 3" pitchFamily="34" charset="-120"/>
               </a:rPr>
-              <a:t>Angular / Ionic</a:t>
-            </a:r>
-            <a:r>
-              <a:rPr lang="en-US" sz="2400" dirty="0">
+              <a:t>Entity</a:t>
+            </a:r>
+            <a:r>
+              <a:rPr lang="es-419" sz="2400" noProof="0" dirty="0">
                 <a:solidFill>
                   <a:srgbClr val="272525"/>
                 </a:solidFill>
@@ -10628,42 +11442,20 @@
                 <a:ea typeface="Source Sans 3" pitchFamily="34" charset="-122"/>
                 <a:cs typeface="Source Sans 3" pitchFamily="34" charset="-120"/>
               </a:rPr>
-              <a:t> para una interfaz web responsiva y una experiencia de usuario fluida.</a:t>
-            </a:r>
-            <a:endParaRPr lang="en-US" sz="2400" dirty="0"/>
-          </a:p>
-        </p:txBody>
-      </p:sp>
-      <p:sp>
-        <p:nvSpPr>
-          <p:cNvPr id="5" name="Text 2"/>
-          <p:cNvSpPr/>
-          <p:nvPr/>
-        </p:nvSpPr>
-        <p:spPr>
-          <a:xfrm>
-            <a:off x="5866925" y="2957632"/>
-            <a:ext cx="7468552" cy="766048"/>
-          </a:xfrm>
-          <a:prstGeom prst="rect">
-            <a:avLst/>
-          </a:prstGeom>
-          <a:noFill/>
-          <a:ln/>
-        </p:spPr>
-        <p:txBody>
-          <a:bodyPr wrap="square" lIns="0" tIns="0" rIns="0" bIns="0" rtlCol="0" anchor="t"/>
-          <a:lstStyle/>
+              <a:t> Framework Core, SQL Server</a:t>
+            </a:r>
+          </a:p>
           <a:p>
             <a:pPr marL="342900" indent="-342900" algn="l">
               <a:lnSpc>
-                <a:spcPts val="3000"/>
+                <a:spcPct val="200000"/>
               </a:lnSpc>
               <a:buSzPct val="100000"/>
+              <a:buFont typeface="Arial" panose="020B0604020202020204" pitchFamily="34" charset="0"/>
               <a:buChar char="•"/>
             </a:pPr>
             <a:r>
-              <a:rPr lang="en-US" sz="2400" b="1" dirty="0">
+              <a:rPr lang="es-419" sz="2400" noProof="0" dirty="0" err="1">
                 <a:solidFill>
                   <a:srgbClr val="272525"/>
                 </a:solidFill>
@@ -10671,10 +11463,10 @@
                 <a:ea typeface="Source Sans 3" pitchFamily="34" charset="-122"/>
                 <a:cs typeface="Source Sans 3" pitchFamily="34" charset="-120"/>
               </a:rPr>
-              <a:t>Backend:</a:t>
-            </a:r>
-            <a:r>
-              <a:rPr lang="en-US" sz="2400" dirty="0">
+              <a:t>Frontend</a:t>
+            </a:r>
+            <a:r>
+              <a:rPr lang="es-419" sz="2400" noProof="0" dirty="0">
                 <a:solidFill>
                   <a:srgbClr val="272525"/>
                 </a:solidFill>
@@ -10682,21 +11474,21 @@
                 <a:ea typeface="Source Sans 3" pitchFamily="34" charset="-122"/>
                 <a:cs typeface="Source Sans 3" pitchFamily="34" charset="-120"/>
               </a:rPr>
-              <a:t> </a:t>
-            </a:r>
-            <a:r>
-              <a:rPr lang="en-US" sz="2400" dirty="0">
-                <a:solidFill>
-                  <a:srgbClr val="D75BE2"/>
+              <a:t>: </a:t>
+            </a:r>
+            <a:r>
+              <a:rPr lang="es-419" sz="2400" noProof="0" dirty="0" err="1">
+                <a:solidFill>
+                  <a:srgbClr val="272525"/>
                 </a:solidFill>
                 <a:latin typeface="Source Sans 3" pitchFamily="34" charset="0"/>
                 <a:ea typeface="Source Sans 3" pitchFamily="34" charset="-122"/>
                 <a:cs typeface="Source Sans 3" pitchFamily="34" charset="-120"/>
               </a:rPr>
-              <a:t>Node.js con Express</a:t>
-            </a:r>
-            <a:r>
-              <a:rPr lang="en-US" sz="2400" dirty="0">
+              <a:t>React</a:t>
+            </a:r>
+            <a:r>
+              <a:rPr lang="es-419" sz="2400" noProof="0" dirty="0">
                 <a:solidFill>
                   <a:srgbClr val="272525"/>
                 </a:solidFill>
@@ -10704,42 +11496,10 @@
                 <a:ea typeface="Source Sans 3" pitchFamily="34" charset="-122"/>
                 <a:cs typeface="Source Sans 3" pitchFamily="34" charset="-120"/>
               </a:rPr>
-              <a:t>, garantizando un rendimiento robusto y escalabilidad.</a:t>
-            </a:r>
-            <a:endParaRPr lang="en-US" sz="2400" dirty="0"/>
-          </a:p>
-        </p:txBody>
-      </p:sp>
-      <p:sp>
-        <p:nvSpPr>
-          <p:cNvPr id="6" name="Text 3"/>
-          <p:cNvSpPr/>
-          <p:nvPr/>
-        </p:nvSpPr>
-        <p:spPr>
-          <a:xfrm>
-            <a:off x="5866924" y="3807381"/>
-            <a:ext cx="7468553" cy="766048"/>
-          </a:xfrm>
-          <a:prstGeom prst="rect">
-            <a:avLst/>
-          </a:prstGeom>
-          <a:noFill/>
-          <a:ln/>
-        </p:spPr>
-        <p:txBody>
-          <a:bodyPr wrap="square" lIns="0" tIns="0" rIns="0" bIns="0" rtlCol="0" anchor="t"/>
-          <a:lstStyle/>
-          <a:p>
-            <a:pPr marL="342900" indent="-342900" algn="l">
-              <a:lnSpc>
-                <a:spcPts val="3000"/>
-              </a:lnSpc>
-              <a:buSzPct val="100000"/>
-              <a:buChar char="•"/>
-            </a:pPr>
-            <a:r>
-              <a:rPr lang="en-US" sz="2400" b="1" dirty="0">
+              <a:t> + Vite + </a:t>
+            </a:r>
+            <a:r>
+              <a:rPr lang="es-419" sz="2400" noProof="0" dirty="0" err="1">
                 <a:solidFill>
                   <a:srgbClr val="272525"/>
                 </a:solidFill>
@@ -10747,10 +11507,10 @@
                 <a:ea typeface="Source Sans 3" pitchFamily="34" charset="-122"/>
                 <a:cs typeface="Source Sans 3" pitchFamily="34" charset="-120"/>
               </a:rPr>
-              <a:t>Base de Datos:</a:t>
-            </a:r>
-            <a:r>
-              <a:rPr lang="en-US" sz="2400" dirty="0">
+              <a:t>TypeScript</a:t>
+            </a:r>
+            <a:r>
+              <a:rPr lang="es-419" sz="2400" noProof="0" dirty="0">
                 <a:solidFill>
                   <a:srgbClr val="272525"/>
                 </a:solidFill>
@@ -10758,21 +11518,21 @@
                 <a:ea typeface="Source Sans 3" pitchFamily="34" charset="-122"/>
                 <a:cs typeface="Source Sans 3" pitchFamily="34" charset="-120"/>
               </a:rPr>
-              <a:t> </a:t>
-            </a:r>
-            <a:r>
-              <a:rPr lang="en-US" sz="2400" dirty="0">
-                <a:solidFill>
-                  <a:srgbClr val="D75BE2"/>
+              <a:t> + </a:t>
+            </a:r>
+            <a:r>
+              <a:rPr lang="es-419" sz="2400" noProof="0" dirty="0" err="1">
+                <a:solidFill>
+                  <a:srgbClr val="272525"/>
                 </a:solidFill>
                 <a:latin typeface="Source Sans 3" pitchFamily="34" charset="0"/>
                 <a:ea typeface="Source Sans 3" pitchFamily="34" charset="-122"/>
                 <a:cs typeface="Source Sans 3" pitchFamily="34" charset="-120"/>
               </a:rPr>
-              <a:t>PostgreSQL</a:t>
-            </a:r>
-            <a:r>
-              <a:rPr lang="en-US" sz="2400" dirty="0">
+              <a:t>Tailwind</a:t>
+            </a:r>
+            <a:r>
+              <a:rPr lang="es-419" sz="2400" noProof="0" dirty="0">
                 <a:solidFill>
                   <a:srgbClr val="272525"/>
                 </a:solidFill>
@@ -10780,42 +11540,20 @@
                 <a:ea typeface="Source Sans 3" pitchFamily="34" charset="-122"/>
                 <a:cs typeface="Source Sans 3" pitchFamily="34" charset="-120"/>
               </a:rPr>
-              <a:t> para un almacenamiento de datos seguro y eficiente.</a:t>
-            </a:r>
-            <a:endParaRPr lang="en-US" sz="2400" dirty="0"/>
-          </a:p>
-        </p:txBody>
-      </p:sp>
-      <p:sp>
-        <p:nvSpPr>
-          <p:cNvPr id="7" name="Text 4"/>
-          <p:cNvSpPr/>
-          <p:nvPr/>
-        </p:nvSpPr>
-        <p:spPr>
-          <a:xfrm>
-            <a:off x="5866924" y="4657130"/>
-            <a:ext cx="7468553" cy="766048"/>
-          </a:xfrm>
-          <a:prstGeom prst="rect">
-            <a:avLst/>
-          </a:prstGeom>
-          <a:noFill/>
-          <a:ln/>
-        </p:spPr>
-        <p:txBody>
-          <a:bodyPr wrap="square" lIns="0" tIns="0" rIns="0" bIns="0" rtlCol="0" anchor="t"/>
-          <a:lstStyle/>
+              <a:t> CSS</a:t>
+            </a:r>
+          </a:p>
           <a:p>
             <a:pPr marL="342900" indent="-342900" algn="l">
               <a:lnSpc>
-                <a:spcPts val="3000"/>
+                <a:spcPct val="200000"/>
               </a:lnSpc>
               <a:buSzPct val="100000"/>
+              <a:buFont typeface="Arial" panose="020B0604020202020204" pitchFamily="34" charset="0"/>
               <a:buChar char="•"/>
             </a:pPr>
             <a:r>
-              <a:rPr lang="en-US" sz="2400" b="1" dirty="0">
+              <a:rPr lang="es-419" sz="2400" noProof="0" dirty="0">
                 <a:solidFill>
                   <a:srgbClr val="272525"/>
                 </a:solidFill>
@@ -10823,10 +11561,10 @@
                 <a:ea typeface="Source Sans 3" pitchFamily="34" charset="-122"/>
                 <a:cs typeface="Source Sans 3" pitchFamily="34" charset="-120"/>
               </a:rPr>
-              <a:t>IA / ML:</a:t>
-            </a:r>
-            <a:r>
-              <a:rPr lang="en-US" sz="2400" dirty="0">
+              <a:t>IA: </a:t>
+            </a:r>
+            <a:r>
+              <a:rPr lang="es-419" sz="2400" noProof="0" dirty="0" err="1">
                 <a:solidFill>
                   <a:srgbClr val="272525"/>
                 </a:solidFill>
@@ -10834,21 +11572,31 @@
                 <a:ea typeface="Source Sans 3" pitchFamily="34" charset="-122"/>
                 <a:cs typeface="Source Sans 3" pitchFamily="34" charset="-120"/>
               </a:rPr>
-              <a:t> Modelo de clasificación de síntomas basado en </a:t>
-            </a:r>
-            <a:r>
-              <a:rPr lang="en-US" sz="2400" dirty="0">
-                <a:solidFill>
-                  <a:srgbClr val="D75BE2"/>
+              <a:t>OpenAI</a:t>
+            </a:r>
+            <a:r>
+              <a:rPr lang="es-419" sz="2400" noProof="0" dirty="0">
+                <a:solidFill>
+                  <a:srgbClr val="272525"/>
                 </a:solidFill>
                 <a:latin typeface="Source Sans 3" pitchFamily="34" charset="0"/>
                 <a:ea typeface="Source Sans 3" pitchFamily="34" charset="-122"/>
                 <a:cs typeface="Source Sans 3" pitchFamily="34" charset="-120"/>
               </a:rPr>
-              <a:t>Python</a:t>
-            </a:r>
-            <a:r>
-              <a:rPr lang="en-US" sz="2400" dirty="0">
+              <a:t> API (modelo GPT‑4o o GPT‑5, a definir en configuración)</a:t>
+            </a:r>
+          </a:p>
+          <a:p>
+            <a:pPr marL="342900" indent="-342900" algn="l">
+              <a:lnSpc>
+                <a:spcPct val="200000"/>
+              </a:lnSpc>
+              <a:buSzPct val="100000"/>
+              <a:buFont typeface="Arial" panose="020B0604020202020204" pitchFamily="34" charset="0"/>
+              <a:buChar char="•"/>
+            </a:pPr>
+            <a:r>
+              <a:rPr lang="es-419" sz="2400" noProof="0" dirty="0">
                 <a:solidFill>
                   <a:srgbClr val="272525"/>
                 </a:solidFill>
@@ -10856,42 +11604,20 @@
                 <a:ea typeface="Source Sans 3" pitchFamily="34" charset="-122"/>
                 <a:cs typeface="Source Sans 3" pitchFamily="34" charset="-120"/>
               </a:rPr>
-              <a:t>, integrado vía API.</a:t>
-            </a:r>
-            <a:endParaRPr lang="en-US" sz="2400" dirty="0"/>
-          </a:p>
-        </p:txBody>
-      </p:sp>
-      <p:sp>
-        <p:nvSpPr>
-          <p:cNvPr id="8" name="Text 5"/>
-          <p:cNvSpPr/>
-          <p:nvPr/>
-        </p:nvSpPr>
-        <p:spPr>
-          <a:xfrm>
-            <a:off x="5866924" y="5506879"/>
-            <a:ext cx="7468553" cy="766048"/>
-          </a:xfrm>
-          <a:prstGeom prst="rect">
-            <a:avLst/>
-          </a:prstGeom>
-          <a:noFill/>
-          <a:ln/>
-        </p:spPr>
-        <p:txBody>
-          <a:bodyPr wrap="square" lIns="0" tIns="0" rIns="0" bIns="0" rtlCol="0" anchor="t"/>
-          <a:lstStyle/>
+              <a:t> Autenticación: JWT con roles (Paciente, Médico, Administrador)</a:t>
+            </a:r>
+          </a:p>
           <a:p>
             <a:pPr marL="342900" indent="-342900" algn="l">
               <a:lnSpc>
-                <a:spcPts val="3000"/>
+                <a:spcPct val="200000"/>
               </a:lnSpc>
               <a:buSzPct val="100000"/>
+              <a:buFont typeface="Arial" panose="020B0604020202020204" pitchFamily="34" charset="0"/>
               <a:buChar char="•"/>
             </a:pPr>
             <a:r>
-              <a:rPr lang="en-US" sz="2400" b="1" dirty="0">
+              <a:rPr lang="es-419" sz="2400" noProof="0" dirty="0" err="1">
                 <a:solidFill>
                   <a:srgbClr val="272525"/>
                 </a:solidFill>
@@ -10899,10 +11625,10 @@
                 <a:ea typeface="Source Sans 3" pitchFamily="34" charset="-122"/>
                 <a:cs typeface="Source Sans 3" pitchFamily="34" charset="-120"/>
               </a:rPr>
-              <a:t>Integraciones:</a:t>
-            </a:r>
-            <a:r>
-              <a:rPr lang="en-US" sz="2400" dirty="0">
+              <a:t>Observabilidad</a:t>
+            </a:r>
+            <a:r>
+              <a:rPr lang="es-419" sz="2400" noProof="0" dirty="0">
                 <a:solidFill>
                   <a:srgbClr val="272525"/>
                 </a:solidFill>
@@ -10910,42 +11636,10 @@
                 <a:ea typeface="Source Sans 3" pitchFamily="34" charset="-122"/>
                 <a:cs typeface="Source Sans 3" pitchFamily="34" charset="-120"/>
               </a:rPr>
-              <a:t> API de reglas de seguridad para la detección de "banderas rojas".</a:t>
-            </a:r>
-            <a:endParaRPr lang="en-US" sz="2400" dirty="0"/>
-          </a:p>
-        </p:txBody>
-      </p:sp>
-      <p:sp>
-        <p:nvSpPr>
-          <p:cNvPr id="9" name="Text 6"/>
-          <p:cNvSpPr/>
-          <p:nvPr/>
-        </p:nvSpPr>
-        <p:spPr>
-          <a:xfrm>
-            <a:off x="5866924" y="6356628"/>
-            <a:ext cx="7468553" cy="766048"/>
-          </a:xfrm>
-          <a:prstGeom prst="rect">
-            <a:avLst/>
-          </a:prstGeom>
-          <a:noFill/>
-          <a:ln/>
-        </p:spPr>
-        <p:txBody>
-          <a:bodyPr wrap="square" lIns="0" tIns="0" rIns="0" bIns="0" rtlCol="0" anchor="t"/>
-          <a:lstStyle/>
-          <a:p>
-            <a:pPr marL="342900" indent="-342900" algn="l">
-              <a:lnSpc>
-                <a:spcPts val="3000"/>
-              </a:lnSpc>
-              <a:buSzPct val="100000"/>
-              <a:buChar char="•"/>
-            </a:pPr>
-            <a:r>
-              <a:rPr lang="en-US" sz="2400" b="1" dirty="0">
+              <a:t>: logs estructurados y métricas básicas</a:t>
+            </a:r>
+            <a:r>
+              <a:rPr lang="es-419" sz="2400" dirty="0">
                 <a:solidFill>
                   <a:srgbClr val="272525"/>
                 </a:solidFill>
@@ -10953,42 +11647,16 @@
                 <a:ea typeface="Source Sans 3" pitchFamily="34" charset="-122"/>
                 <a:cs typeface="Source Sans 3" pitchFamily="34" charset="-120"/>
               </a:rPr>
-              <a:t>Infraestructura:</a:t>
-            </a:r>
-            <a:r>
-              <a:rPr lang="en-US" sz="2400" dirty="0">
-                <a:solidFill>
-                  <a:srgbClr val="272525"/>
-                </a:solidFill>
-                <a:latin typeface="Source Sans 3" pitchFamily="34" charset="0"/>
-                <a:ea typeface="Source Sans 3" pitchFamily="34" charset="-122"/>
-                <a:cs typeface="Source Sans 3" pitchFamily="34" charset="-120"/>
-              </a:rPr>
-              <a:t> </a:t>
-            </a:r>
-            <a:r>
-              <a:rPr lang="en-US" sz="2400" dirty="0">
-                <a:solidFill>
-                  <a:srgbClr val="D75BE2"/>
-                </a:solidFill>
-                <a:latin typeface="Source Sans 3" pitchFamily="34" charset="0"/>
-                <a:ea typeface="Source Sans 3" pitchFamily="34" charset="-122"/>
-                <a:cs typeface="Source Sans 3" pitchFamily="34" charset="-120"/>
-              </a:rPr>
-              <a:t>Google Cloud</a:t>
-            </a:r>
-            <a:r>
-              <a:rPr lang="en-US" sz="2400" dirty="0">
-                <a:solidFill>
-                  <a:srgbClr val="272525"/>
-                </a:solidFill>
-                <a:latin typeface="Source Sans 3" pitchFamily="34" charset="0"/>
-                <a:ea typeface="Source Sans 3" pitchFamily="34" charset="-122"/>
-                <a:cs typeface="Source Sans 3" pitchFamily="34" charset="-120"/>
-              </a:rPr>
-              <a:t> (App Engine / Cloud Run) para una implementación fiable y escalable.</a:t>
-            </a:r>
-            <a:endParaRPr lang="en-US" sz="2400" dirty="0"/>
+              <a:t>.</a:t>
+            </a:r>
+            <a:endParaRPr lang="es-419" sz="2400" noProof="0" dirty="0">
+              <a:solidFill>
+                <a:srgbClr val="272525"/>
+              </a:solidFill>
+              <a:latin typeface="Source Sans 3" pitchFamily="34" charset="0"/>
+              <a:ea typeface="Source Sans 3" pitchFamily="34" charset="-122"/>
+              <a:cs typeface="Source Sans 3" pitchFamily="34" charset="-120"/>
+            </a:endParaRPr>
           </a:p>
         </p:txBody>
       </p:sp>

--- a/Fase 1/Evidencias Grupales/MediTriage.pptx
+++ b/Fase 1/Evidencias Grupales/MediTriage.pptx
@@ -5,7 +5,7 @@
     <p:sldMasterId id="2147483726" r:id="rId1"/>
   </p:sldMasterIdLst>
   <p:notesMasterIdLst>
-    <p:notesMasterId r:id="rId17"/>
+    <p:notesMasterId r:id="rId22"/>
   </p:notesMasterIdLst>
   <p:sldIdLst>
     <p:sldId id="256" r:id="rId2"/>
@@ -20,34 +20,39 @@
     <p:sldId id="265" r:id="rId11"/>
     <p:sldId id="270" r:id="rId12"/>
     <p:sldId id="271" r:id="rId13"/>
-    <p:sldId id="273" r:id="rId14"/>
-    <p:sldId id="269" r:id="rId15"/>
-    <p:sldId id="274" r:id="rId16"/>
+    <p:sldId id="276" r:id="rId14"/>
+    <p:sldId id="273" r:id="rId15"/>
+    <p:sldId id="277" r:id="rId16"/>
+    <p:sldId id="275" r:id="rId17"/>
+    <p:sldId id="278" r:id="rId18"/>
+    <p:sldId id="279" r:id="rId19"/>
+    <p:sldId id="269" r:id="rId20"/>
+    <p:sldId id="274" r:id="rId21"/>
   </p:sldIdLst>
   <p:sldSz cx="14630400" cy="8229600"/>
   <p:notesSz cx="8229600" cy="14630400"/>
   <p:embeddedFontLst>
     <p:embeddedFont>
       <p:font typeface="Aptos Narrow" panose="020B0004020202020204" pitchFamily="34" charset="0"/>
-      <p:regular r:id="rId18"/>
-      <p:bold r:id="rId19"/>
-      <p:italic r:id="rId20"/>
-      <p:boldItalic r:id="rId21"/>
+      <p:regular r:id="rId23"/>
+      <p:bold r:id="rId24"/>
+      <p:italic r:id="rId25"/>
+      <p:boldItalic r:id="rId26"/>
     </p:embeddedFont>
     <p:embeddedFont>
       <p:font typeface="Gill Sans MT" panose="020B0502020104020203" pitchFamily="34" charset="0"/>
-      <p:regular r:id="rId22"/>
-      <p:bold r:id="rId23"/>
-      <p:italic r:id="rId24"/>
-      <p:boldItalic r:id="rId25"/>
+      <p:regular r:id="rId27"/>
+      <p:bold r:id="rId28"/>
+      <p:italic r:id="rId29"/>
+      <p:boldItalic r:id="rId30"/>
     </p:embeddedFont>
     <p:embeddedFont>
       <p:font typeface="Source Sans 3" panose="020B0604020202020204" charset="0"/>
-      <p:regular r:id="rId26"/>
+      <p:regular r:id="rId31"/>
     </p:embeddedFont>
     <p:embeddedFont>
       <p:font typeface="Source Serif 4 Semi Bold" panose="020B0604020202020204" charset="0"/>
-      <p:regular r:id="rId27"/>
+      <p:regular r:id="rId32"/>
     </p:embeddedFont>
   </p:embeddedFontLst>
   <p:defaultTextStyle>
@@ -670,6 +675,114 @@
         <p:cNvPr id="1" name="">
           <a:extLst>
             <a:ext uri="{FF2B5EF4-FFF2-40B4-BE49-F238E27FC236}">
+              <a16:creationId xmlns:a16="http://schemas.microsoft.com/office/drawing/2014/main" id="{64B28315-DA0B-CC79-1307-DA205E77FDB5}"/>
+            </a:ext>
+          </a:extLst>
+        </p:cNvPr>
+        <p:cNvGrpSpPr/>
+        <p:nvPr/>
+      </p:nvGrpSpPr>
+      <p:grpSpPr>
+        <a:xfrm>
+          <a:off x="0" y="0"/>
+          <a:ext cx="0" cy="0"/>
+          <a:chOff x="0" y="0"/>
+          <a:chExt cx="0" cy="0"/>
+        </a:xfrm>
+      </p:grpSpPr>
+      <p:sp>
+        <p:nvSpPr>
+          <p:cNvPr id="2" name="Slide Image Placeholder 1">
+            <a:extLst>
+              <a:ext uri="{FF2B5EF4-FFF2-40B4-BE49-F238E27FC236}">
+                <a16:creationId xmlns:a16="http://schemas.microsoft.com/office/drawing/2014/main" id="{E164199A-FED6-68AD-46E4-EAA4B1A122FE}"/>
+              </a:ext>
+            </a:extLst>
+          </p:cNvPr>
+          <p:cNvSpPr>
+            <a:spLocks noGrp="1" noRot="1" noChangeAspect="1"/>
+          </p:cNvSpPr>
+          <p:nvPr>
+            <p:ph type="sldImg"/>
+          </p:nvPr>
+        </p:nvSpPr>
+        <p:spPr/>
+      </p:sp>
+      <p:sp>
+        <p:nvSpPr>
+          <p:cNvPr id="3" name="Notes Placeholder 2">
+            <a:extLst>
+              <a:ext uri="{FF2B5EF4-FFF2-40B4-BE49-F238E27FC236}">
+                <a16:creationId xmlns:a16="http://schemas.microsoft.com/office/drawing/2014/main" id="{D05347C5-AC63-9791-441C-6A555B2CA862}"/>
+              </a:ext>
+            </a:extLst>
+          </p:cNvPr>
+          <p:cNvSpPr>
+            <a:spLocks noGrp="1"/>
+          </p:cNvSpPr>
+          <p:nvPr>
+            <p:ph type="body" idx="1"/>
+          </p:nvPr>
+        </p:nvSpPr>
+        <p:spPr/>
+        <p:txBody>
+          <a:bodyPr/>
+          <a:lstStyle/>
+          <a:p>
+            <a:endParaRPr lang="en-US" dirty="0"/>
+          </a:p>
+        </p:txBody>
+      </p:sp>
+      <p:sp>
+        <p:nvSpPr>
+          <p:cNvPr id="4" name="Slide Number Placeholder 3">
+            <a:extLst>
+              <a:ext uri="{FF2B5EF4-FFF2-40B4-BE49-F238E27FC236}">
+                <a16:creationId xmlns:a16="http://schemas.microsoft.com/office/drawing/2014/main" id="{CD9A820E-26D1-DF9F-C36A-9698FA229F91}"/>
+              </a:ext>
+            </a:extLst>
+          </p:cNvPr>
+          <p:cNvSpPr>
+            <a:spLocks noGrp="1"/>
+          </p:cNvSpPr>
+          <p:nvPr>
+            <p:ph type="sldNum" sz="quarter" idx="10"/>
+          </p:nvPr>
+        </p:nvSpPr>
+        <p:spPr/>
+        <p:txBody>
+          <a:bodyPr/>
+          <a:lstStyle/>
+          <a:p>
+            <a:fld id="{F7021451-1387-4CA6-816F-3879F97B5CBC}" type="slidenum">
+              <a:rPr lang="en-US"/>
+              <a:t>13</a:t>
+            </a:fld>
+            <a:endParaRPr lang="en-US"/>
+          </a:p>
+        </p:txBody>
+      </p:sp>
+    </p:spTree>
+    <p:extLst>
+      <p:ext uri="{BB962C8B-B14F-4D97-AF65-F5344CB8AC3E}">
+        <p14:creationId xmlns:p14="http://schemas.microsoft.com/office/powerpoint/2010/main" val="1532590222"/>
+      </p:ext>
+    </p:extLst>
+  </p:cSld>
+  <p:clrMapOvr>
+    <a:masterClrMapping/>
+  </p:clrMapOvr>
+</p:notes>
+</file>
+
+<file path=ppt/notesSlides/notesSlide14.xml><?xml version="1.0" encoding="utf-8"?>
+<p:notes xmlns:a="http://schemas.openxmlformats.org/drawingml/2006/main" xmlns:r="http://schemas.openxmlformats.org/officeDocument/2006/relationships" xmlns:p="http://schemas.openxmlformats.org/presentationml/2006/main">
+  <p:cSld>
+    <p:spTree>
+      <p:nvGrpSpPr>
+        <p:cNvPr id="1" name="">
+          <a:extLst>
+            <a:ext uri="{FF2B5EF4-FFF2-40B4-BE49-F238E27FC236}">
               <a16:creationId xmlns:a16="http://schemas.microsoft.com/office/drawing/2014/main" id="{B823CF9F-B496-1049-8236-E1F216F587F5}"/>
             </a:ext>
           </a:extLst>
@@ -751,7 +864,7 @@
           <a:p>
             <a:fld id="{F7021451-1387-4CA6-816F-3879F97B5CBC}" type="slidenum">
               <a:rPr lang="en-US"/>
-              <a:t>13</a:t>
+              <a:t>14</a:t>
             </a:fld>
             <a:endParaRPr lang="en-US"/>
           </a:p>
@@ -770,7 +883,439 @@
 </p:notes>
 </file>
 
-<file path=ppt/notesSlides/notesSlide14.xml><?xml version="1.0" encoding="utf-8"?>
+<file path=ppt/notesSlides/notesSlide15.xml><?xml version="1.0" encoding="utf-8"?>
+<p:notes xmlns:a="http://schemas.openxmlformats.org/drawingml/2006/main" xmlns:r="http://schemas.openxmlformats.org/officeDocument/2006/relationships" xmlns:p="http://schemas.openxmlformats.org/presentationml/2006/main">
+  <p:cSld>
+    <p:spTree>
+      <p:nvGrpSpPr>
+        <p:cNvPr id="1" name="">
+          <a:extLst>
+            <a:ext uri="{FF2B5EF4-FFF2-40B4-BE49-F238E27FC236}">
+              <a16:creationId xmlns:a16="http://schemas.microsoft.com/office/drawing/2014/main" id="{27A08C35-FC1D-F62D-E47B-2EA2C5AFDE6A}"/>
+            </a:ext>
+          </a:extLst>
+        </p:cNvPr>
+        <p:cNvGrpSpPr/>
+        <p:nvPr/>
+      </p:nvGrpSpPr>
+      <p:grpSpPr>
+        <a:xfrm>
+          <a:off x="0" y="0"/>
+          <a:ext cx="0" cy="0"/>
+          <a:chOff x="0" y="0"/>
+          <a:chExt cx="0" cy="0"/>
+        </a:xfrm>
+      </p:grpSpPr>
+      <p:sp>
+        <p:nvSpPr>
+          <p:cNvPr id="2" name="Slide Image Placeholder 1">
+            <a:extLst>
+              <a:ext uri="{FF2B5EF4-FFF2-40B4-BE49-F238E27FC236}">
+                <a16:creationId xmlns:a16="http://schemas.microsoft.com/office/drawing/2014/main" id="{FDAFAFD1-C1C1-AAC0-014D-5A77EDD91061}"/>
+              </a:ext>
+            </a:extLst>
+          </p:cNvPr>
+          <p:cNvSpPr>
+            <a:spLocks noGrp="1" noRot="1" noChangeAspect="1"/>
+          </p:cNvSpPr>
+          <p:nvPr>
+            <p:ph type="sldImg"/>
+          </p:nvPr>
+        </p:nvSpPr>
+        <p:spPr/>
+      </p:sp>
+      <p:sp>
+        <p:nvSpPr>
+          <p:cNvPr id="3" name="Notes Placeholder 2">
+            <a:extLst>
+              <a:ext uri="{FF2B5EF4-FFF2-40B4-BE49-F238E27FC236}">
+                <a16:creationId xmlns:a16="http://schemas.microsoft.com/office/drawing/2014/main" id="{BD02E5E9-E2CF-4AE5-2938-D14DCE96778A}"/>
+              </a:ext>
+            </a:extLst>
+          </p:cNvPr>
+          <p:cNvSpPr>
+            <a:spLocks noGrp="1"/>
+          </p:cNvSpPr>
+          <p:nvPr>
+            <p:ph type="body" idx="1"/>
+          </p:nvPr>
+        </p:nvSpPr>
+        <p:spPr/>
+        <p:txBody>
+          <a:bodyPr/>
+          <a:lstStyle/>
+          <a:p>
+            <a:endParaRPr lang="en-US" dirty="0"/>
+          </a:p>
+        </p:txBody>
+      </p:sp>
+      <p:sp>
+        <p:nvSpPr>
+          <p:cNvPr id="4" name="Slide Number Placeholder 3">
+            <a:extLst>
+              <a:ext uri="{FF2B5EF4-FFF2-40B4-BE49-F238E27FC236}">
+                <a16:creationId xmlns:a16="http://schemas.microsoft.com/office/drawing/2014/main" id="{EDB96E94-95C7-5319-E05F-D32F609EE69B}"/>
+              </a:ext>
+            </a:extLst>
+          </p:cNvPr>
+          <p:cNvSpPr>
+            <a:spLocks noGrp="1"/>
+          </p:cNvSpPr>
+          <p:nvPr>
+            <p:ph type="sldNum" sz="quarter" idx="10"/>
+          </p:nvPr>
+        </p:nvSpPr>
+        <p:spPr/>
+        <p:txBody>
+          <a:bodyPr/>
+          <a:lstStyle/>
+          <a:p>
+            <a:fld id="{F7021451-1387-4CA6-816F-3879F97B5CBC}" type="slidenum">
+              <a:rPr lang="en-US"/>
+              <a:t>15</a:t>
+            </a:fld>
+            <a:endParaRPr lang="en-US"/>
+          </a:p>
+        </p:txBody>
+      </p:sp>
+    </p:spTree>
+    <p:extLst>
+      <p:ext uri="{BB962C8B-B14F-4D97-AF65-F5344CB8AC3E}">
+        <p14:creationId xmlns:p14="http://schemas.microsoft.com/office/powerpoint/2010/main" val="1843160749"/>
+      </p:ext>
+    </p:extLst>
+  </p:cSld>
+  <p:clrMapOvr>
+    <a:masterClrMapping/>
+  </p:clrMapOvr>
+</p:notes>
+</file>
+
+<file path=ppt/notesSlides/notesSlide16.xml><?xml version="1.0" encoding="utf-8"?>
+<p:notes xmlns:a="http://schemas.openxmlformats.org/drawingml/2006/main" xmlns:r="http://schemas.openxmlformats.org/officeDocument/2006/relationships" xmlns:p="http://schemas.openxmlformats.org/presentationml/2006/main">
+  <p:cSld>
+    <p:spTree>
+      <p:nvGrpSpPr>
+        <p:cNvPr id="1" name="">
+          <a:extLst>
+            <a:ext uri="{FF2B5EF4-FFF2-40B4-BE49-F238E27FC236}">
+              <a16:creationId xmlns:a16="http://schemas.microsoft.com/office/drawing/2014/main" id="{D58D6645-C247-C52E-7832-714573EAAD87}"/>
+            </a:ext>
+          </a:extLst>
+        </p:cNvPr>
+        <p:cNvGrpSpPr/>
+        <p:nvPr/>
+      </p:nvGrpSpPr>
+      <p:grpSpPr>
+        <a:xfrm>
+          <a:off x="0" y="0"/>
+          <a:ext cx="0" cy="0"/>
+          <a:chOff x="0" y="0"/>
+          <a:chExt cx="0" cy="0"/>
+        </a:xfrm>
+      </p:grpSpPr>
+      <p:sp>
+        <p:nvSpPr>
+          <p:cNvPr id="2" name="Slide Image Placeholder 1">
+            <a:extLst>
+              <a:ext uri="{FF2B5EF4-FFF2-40B4-BE49-F238E27FC236}">
+                <a16:creationId xmlns:a16="http://schemas.microsoft.com/office/drawing/2014/main" id="{3C0B7F29-35E4-6619-B327-F95E19634A8F}"/>
+              </a:ext>
+            </a:extLst>
+          </p:cNvPr>
+          <p:cNvSpPr>
+            <a:spLocks noGrp="1" noRot="1" noChangeAspect="1"/>
+          </p:cNvSpPr>
+          <p:nvPr>
+            <p:ph type="sldImg"/>
+          </p:nvPr>
+        </p:nvSpPr>
+        <p:spPr/>
+      </p:sp>
+      <p:sp>
+        <p:nvSpPr>
+          <p:cNvPr id="3" name="Notes Placeholder 2">
+            <a:extLst>
+              <a:ext uri="{FF2B5EF4-FFF2-40B4-BE49-F238E27FC236}">
+                <a16:creationId xmlns:a16="http://schemas.microsoft.com/office/drawing/2014/main" id="{173F7619-012B-A313-5B4D-AB5C319E1006}"/>
+              </a:ext>
+            </a:extLst>
+          </p:cNvPr>
+          <p:cNvSpPr>
+            <a:spLocks noGrp="1"/>
+          </p:cNvSpPr>
+          <p:nvPr>
+            <p:ph type="body" idx="1"/>
+          </p:nvPr>
+        </p:nvSpPr>
+        <p:spPr/>
+        <p:txBody>
+          <a:bodyPr/>
+          <a:lstStyle/>
+          <a:p>
+            <a:endParaRPr lang="en-US" dirty="0"/>
+          </a:p>
+        </p:txBody>
+      </p:sp>
+      <p:sp>
+        <p:nvSpPr>
+          <p:cNvPr id="4" name="Slide Number Placeholder 3">
+            <a:extLst>
+              <a:ext uri="{FF2B5EF4-FFF2-40B4-BE49-F238E27FC236}">
+                <a16:creationId xmlns:a16="http://schemas.microsoft.com/office/drawing/2014/main" id="{2E5759EB-CF44-764B-1745-562FAC9297C3}"/>
+              </a:ext>
+            </a:extLst>
+          </p:cNvPr>
+          <p:cNvSpPr>
+            <a:spLocks noGrp="1"/>
+          </p:cNvSpPr>
+          <p:nvPr>
+            <p:ph type="sldNum" sz="quarter" idx="10"/>
+          </p:nvPr>
+        </p:nvSpPr>
+        <p:spPr/>
+        <p:txBody>
+          <a:bodyPr/>
+          <a:lstStyle/>
+          <a:p>
+            <a:fld id="{F7021451-1387-4CA6-816F-3879F97B5CBC}" type="slidenum">
+              <a:rPr lang="en-US"/>
+              <a:t>16</a:t>
+            </a:fld>
+            <a:endParaRPr lang="en-US"/>
+          </a:p>
+        </p:txBody>
+      </p:sp>
+    </p:spTree>
+    <p:extLst>
+      <p:ext uri="{BB962C8B-B14F-4D97-AF65-F5344CB8AC3E}">
+        <p14:creationId xmlns:p14="http://schemas.microsoft.com/office/powerpoint/2010/main" val="707824393"/>
+      </p:ext>
+    </p:extLst>
+  </p:cSld>
+  <p:clrMapOvr>
+    <a:masterClrMapping/>
+  </p:clrMapOvr>
+</p:notes>
+</file>
+
+<file path=ppt/notesSlides/notesSlide17.xml><?xml version="1.0" encoding="utf-8"?>
+<p:notes xmlns:a="http://schemas.openxmlformats.org/drawingml/2006/main" xmlns:r="http://schemas.openxmlformats.org/officeDocument/2006/relationships" xmlns:p="http://schemas.openxmlformats.org/presentationml/2006/main">
+  <p:cSld>
+    <p:spTree>
+      <p:nvGrpSpPr>
+        <p:cNvPr id="1" name="">
+          <a:extLst>
+            <a:ext uri="{FF2B5EF4-FFF2-40B4-BE49-F238E27FC236}">
+              <a16:creationId xmlns:a16="http://schemas.microsoft.com/office/drawing/2014/main" id="{33509077-8BD8-E8F5-525A-57DB78E1148D}"/>
+            </a:ext>
+          </a:extLst>
+        </p:cNvPr>
+        <p:cNvGrpSpPr/>
+        <p:nvPr/>
+      </p:nvGrpSpPr>
+      <p:grpSpPr>
+        <a:xfrm>
+          <a:off x="0" y="0"/>
+          <a:ext cx="0" cy="0"/>
+          <a:chOff x="0" y="0"/>
+          <a:chExt cx="0" cy="0"/>
+        </a:xfrm>
+      </p:grpSpPr>
+      <p:sp>
+        <p:nvSpPr>
+          <p:cNvPr id="2" name="Slide Image Placeholder 1">
+            <a:extLst>
+              <a:ext uri="{FF2B5EF4-FFF2-40B4-BE49-F238E27FC236}">
+                <a16:creationId xmlns:a16="http://schemas.microsoft.com/office/drawing/2014/main" id="{AF95D433-7BCD-5991-DA02-7827CA24E468}"/>
+              </a:ext>
+            </a:extLst>
+          </p:cNvPr>
+          <p:cNvSpPr>
+            <a:spLocks noGrp="1" noRot="1" noChangeAspect="1"/>
+          </p:cNvSpPr>
+          <p:nvPr>
+            <p:ph type="sldImg"/>
+          </p:nvPr>
+        </p:nvSpPr>
+        <p:spPr/>
+      </p:sp>
+      <p:sp>
+        <p:nvSpPr>
+          <p:cNvPr id="3" name="Notes Placeholder 2">
+            <a:extLst>
+              <a:ext uri="{FF2B5EF4-FFF2-40B4-BE49-F238E27FC236}">
+                <a16:creationId xmlns:a16="http://schemas.microsoft.com/office/drawing/2014/main" id="{1AAEACBA-F05D-8ACF-A19C-E6829AB0C2D4}"/>
+              </a:ext>
+            </a:extLst>
+          </p:cNvPr>
+          <p:cNvSpPr>
+            <a:spLocks noGrp="1"/>
+          </p:cNvSpPr>
+          <p:nvPr>
+            <p:ph type="body" idx="1"/>
+          </p:nvPr>
+        </p:nvSpPr>
+        <p:spPr/>
+        <p:txBody>
+          <a:bodyPr/>
+          <a:lstStyle/>
+          <a:p>
+            <a:endParaRPr lang="en-US" dirty="0"/>
+          </a:p>
+        </p:txBody>
+      </p:sp>
+      <p:sp>
+        <p:nvSpPr>
+          <p:cNvPr id="4" name="Slide Number Placeholder 3">
+            <a:extLst>
+              <a:ext uri="{FF2B5EF4-FFF2-40B4-BE49-F238E27FC236}">
+                <a16:creationId xmlns:a16="http://schemas.microsoft.com/office/drawing/2014/main" id="{21DEF734-1648-DF2F-61DD-EB4297CD7101}"/>
+              </a:ext>
+            </a:extLst>
+          </p:cNvPr>
+          <p:cNvSpPr>
+            <a:spLocks noGrp="1"/>
+          </p:cNvSpPr>
+          <p:nvPr>
+            <p:ph type="sldNum" sz="quarter" idx="10"/>
+          </p:nvPr>
+        </p:nvSpPr>
+        <p:spPr/>
+        <p:txBody>
+          <a:bodyPr/>
+          <a:lstStyle/>
+          <a:p>
+            <a:fld id="{F7021451-1387-4CA6-816F-3879F97B5CBC}" type="slidenum">
+              <a:rPr lang="en-US"/>
+              <a:t>17</a:t>
+            </a:fld>
+            <a:endParaRPr lang="en-US"/>
+          </a:p>
+        </p:txBody>
+      </p:sp>
+    </p:spTree>
+    <p:extLst>
+      <p:ext uri="{BB962C8B-B14F-4D97-AF65-F5344CB8AC3E}">
+        <p14:creationId xmlns:p14="http://schemas.microsoft.com/office/powerpoint/2010/main" val="1635612145"/>
+      </p:ext>
+    </p:extLst>
+  </p:cSld>
+  <p:clrMapOvr>
+    <a:masterClrMapping/>
+  </p:clrMapOvr>
+</p:notes>
+</file>
+
+<file path=ppt/notesSlides/notesSlide18.xml><?xml version="1.0" encoding="utf-8"?>
+<p:notes xmlns:a="http://schemas.openxmlformats.org/drawingml/2006/main" xmlns:r="http://schemas.openxmlformats.org/officeDocument/2006/relationships" xmlns:p="http://schemas.openxmlformats.org/presentationml/2006/main">
+  <p:cSld>
+    <p:spTree>
+      <p:nvGrpSpPr>
+        <p:cNvPr id="1" name="">
+          <a:extLst>
+            <a:ext uri="{FF2B5EF4-FFF2-40B4-BE49-F238E27FC236}">
+              <a16:creationId xmlns:a16="http://schemas.microsoft.com/office/drawing/2014/main" id="{31CF46B0-2ECC-4849-23B3-21B4C3FAFC2C}"/>
+            </a:ext>
+          </a:extLst>
+        </p:cNvPr>
+        <p:cNvGrpSpPr/>
+        <p:nvPr/>
+      </p:nvGrpSpPr>
+      <p:grpSpPr>
+        <a:xfrm>
+          <a:off x="0" y="0"/>
+          <a:ext cx="0" cy="0"/>
+          <a:chOff x="0" y="0"/>
+          <a:chExt cx="0" cy="0"/>
+        </a:xfrm>
+      </p:grpSpPr>
+      <p:sp>
+        <p:nvSpPr>
+          <p:cNvPr id="2" name="Slide Image Placeholder 1">
+            <a:extLst>
+              <a:ext uri="{FF2B5EF4-FFF2-40B4-BE49-F238E27FC236}">
+                <a16:creationId xmlns:a16="http://schemas.microsoft.com/office/drawing/2014/main" id="{F8F2EE48-4DE6-724B-6210-6BEA42237D11}"/>
+              </a:ext>
+            </a:extLst>
+          </p:cNvPr>
+          <p:cNvSpPr>
+            <a:spLocks noGrp="1" noRot="1" noChangeAspect="1"/>
+          </p:cNvSpPr>
+          <p:nvPr>
+            <p:ph type="sldImg"/>
+          </p:nvPr>
+        </p:nvSpPr>
+        <p:spPr/>
+      </p:sp>
+      <p:sp>
+        <p:nvSpPr>
+          <p:cNvPr id="3" name="Notes Placeholder 2">
+            <a:extLst>
+              <a:ext uri="{FF2B5EF4-FFF2-40B4-BE49-F238E27FC236}">
+                <a16:creationId xmlns:a16="http://schemas.microsoft.com/office/drawing/2014/main" id="{42CC43D7-1E6C-8B09-F58F-F9E18CCCC276}"/>
+              </a:ext>
+            </a:extLst>
+          </p:cNvPr>
+          <p:cNvSpPr>
+            <a:spLocks noGrp="1"/>
+          </p:cNvSpPr>
+          <p:nvPr>
+            <p:ph type="body" idx="1"/>
+          </p:nvPr>
+        </p:nvSpPr>
+        <p:spPr/>
+        <p:txBody>
+          <a:bodyPr/>
+          <a:lstStyle/>
+          <a:p>
+            <a:endParaRPr lang="en-US" dirty="0"/>
+          </a:p>
+        </p:txBody>
+      </p:sp>
+      <p:sp>
+        <p:nvSpPr>
+          <p:cNvPr id="4" name="Slide Number Placeholder 3">
+            <a:extLst>
+              <a:ext uri="{FF2B5EF4-FFF2-40B4-BE49-F238E27FC236}">
+                <a16:creationId xmlns:a16="http://schemas.microsoft.com/office/drawing/2014/main" id="{7879E442-9FAA-88D5-88E3-2EE9128A2DE6}"/>
+              </a:ext>
+            </a:extLst>
+          </p:cNvPr>
+          <p:cNvSpPr>
+            <a:spLocks noGrp="1"/>
+          </p:cNvSpPr>
+          <p:nvPr>
+            <p:ph type="sldNum" sz="quarter" idx="10"/>
+          </p:nvPr>
+        </p:nvSpPr>
+        <p:spPr/>
+        <p:txBody>
+          <a:bodyPr/>
+          <a:lstStyle/>
+          <a:p>
+            <a:fld id="{F7021451-1387-4CA6-816F-3879F97B5CBC}" type="slidenum">
+              <a:rPr lang="en-US"/>
+              <a:t>18</a:t>
+            </a:fld>
+            <a:endParaRPr lang="en-US"/>
+          </a:p>
+        </p:txBody>
+      </p:sp>
+    </p:spTree>
+    <p:extLst>
+      <p:ext uri="{BB962C8B-B14F-4D97-AF65-F5344CB8AC3E}">
+        <p14:creationId xmlns:p14="http://schemas.microsoft.com/office/powerpoint/2010/main" val="2209662812"/>
+      </p:ext>
+    </p:extLst>
+  </p:cSld>
+  <p:clrMapOvr>
+    <a:masterClrMapping/>
+  </p:clrMapOvr>
+</p:notes>
+</file>
+
+<file path=ppt/notesSlides/notesSlide19.xml><?xml version="1.0" encoding="utf-8"?>
 <p:notes xmlns:a="http://schemas.openxmlformats.org/drawingml/2006/main" xmlns:r="http://schemas.openxmlformats.org/officeDocument/2006/relationships" xmlns:p="http://schemas.openxmlformats.org/presentationml/2006/main">
   <p:cSld>
     <p:spTree>
@@ -859,7 +1404,7 @@
           <a:p>
             <a:fld id="{F7021451-1387-4CA6-816F-3879F97B5CBC}" type="slidenum">
               <a:rPr lang="en-US"/>
-              <a:t>14</a:t>
+              <a:t>19</a:t>
             </a:fld>
             <a:endParaRPr lang="en-US"/>
           </a:p>
@@ -869,114 +1414,6 @@
     <p:extLst>
       <p:ext uri="{BB962C8B-B14F-4D97-AF65-F5344CB8AC3E}">
         <p14:creationId xmlns:p14="http://schemas.microsoft.com/office/powerpoint/2010/main" val="1694833441"/>
-      </p:ext>
-    </p:extLst>
-  </p:cSld>
-  <p:clrMapOvr>
-    <a:masterClrMapping/>
-  </p:clrMapOvr>
-</p:notes>
-</file>
-
-<file path=ppt/notesSlides/notesSlide15.xml><?xml version="1.0" encoding="utf-8"?>
-<p:notes xmlns:a="http://schemas.openxmlformats.org/drawingml/2006/main" xmlns:r="http://schemas.openxmlformats.org/officeDocument/2006/relationships" xmlns:p="http://schemas.openxmlformats.org/presentationml/2006/main">
-  <p:cSld>
-    <p:spTree>
-      <p:nvGrpSpPr>
-        <p:cNvPr id="1" name="">
-          <a:extLst>
-            <a:ext uri="{FF2B5EF4-FFF2-40B4-BE49-F238E27FC236}">
-              <a16:creationId xmlns:a16="http://schemas.microsoft.com/office/drawing/2014/main" id="{32783B39-1B24-EA80-035C-F03DBB7D16D4}"/>
-            </a:ext>
-          </a:extLst>
-        </p:cNvPr>
-        <p:cNvGrpSpPr/>
-        <p:nvPr/>
-      </p:nvGrpSpPr>
-      <p:grpSpPr>
-        <a:xfrm>
-          <a:off x="0" y="0"/>
-          <a:ext cx="0" cy="0"/>
-          <a:chOff x="0" y="0"/>
-          <a:chExt cx="0" cy="0"/>
-        </a:xfrm>
-      </p:grpSpPr>
-      <p:sp>
-        <p:nvSpPr>
-          <p:cNvPr id="2" name="Slide Image Placeholder 1">
-            <a:extLst>
-              <a:ext uri="{FF2B5EF4-FFF2-40B4-BE49-F238E27FC236}">
-                <a16:creationId xmlns:a16="http://schemas.microsoft.com/office/drawing/2014/main" id="{F078FB31-F90F-A214-8D93-CBFDE06C0938}"/>
-              </a:ext>
-            </a:extLst>
-          </p:cNvPr>
-          <p:cNvSpPr>
-            <a:spLocks noGrp="1" noRot="1" noChangeAspect="1"/>
-          </p:cNvSpPr>
-          <p:nvPr>
-            <p:ph type="sldImg"/>
-          </p:nvPr>
-        </p:nvSpPr>
-        <p:spPr/>
-      </p:sp>
-      <p:sp>
-        <p:nvSpPr>
-          <p:cNvPr id="3" name="Notes Placeholder 2">
-            <a:extLst>
-              <a:ext uri="{FF2B5EF4-FFF2-40B4-BE49-F238E27FC236}">
-                <a16:creationId xmlns:a16="http://schemas.microsoft.com/office/drawing/2014/main" id="{4D686B29-ECD3-A788-E401-352BDB02FEDF}"/>
-              </a:ext>
-            </a:extLst>
-          </p:cNvPr>
-          <p:cNvSpPr>
-            <a:spLocks noGrp="1"/>
-          </p:cNvSpPr>
-          <p:nvPr>
-            <p:ph type="body" idx="1"/>
-          </p:nvPr>
-        </p:nvSpPr>
-        <p:spPr/>
-        <p:txBody>
-          <a:bodyPr/>
-          <a:lstStyle/>
-          <a:p>
-            <a:endParaRPr lang="en-US" dirty="0"/>
-          </a:p>
-        </p:txBody>
-      </p:sp>
-      <p:sp>
-        <p:nvSpPr>
-          <p:cNvPr id="4" name="Slide Number Placeholder 3">
-            <a:extLst>
-              <a:ext uri="{FF2B5EF4-FFF2-40B4-BE49-F238E27FC236}">
-                <a16:creationId xmlns:a16="http://schemas.microsoft.com/office/drawing/2014/main" id="{DF7D256B-DA5E-15EA-579A-1FFD24CF2D8B}"/>
-              </a:ext>
-            </a:extLst>
-          </p:cNvPr>
-          <p:cNvSpPr>
-            <a:spLocks noGrp="1"/>
-          </p:cNvSpPr>
-          <p:nvPr>
-            <p:ph type="sldNum" sz="quarter" idx="10"/>
-          </p:nvPr>
-        </p:nvSpPr>
-        <p:spPr/>
-        <p:txBody>
-          <a:bodyPr/>
-          <a:lstStyle/>
-          <a:p>
-            <a:fld id="{F7021451-1387-4CA6-816F-3879F97B5CBC}" type="slidenum">
-              <a:rPr lang="en-US"/>
-              <a:t>15</a:t>
-            </a:fld>
-            <a:endParaRPr lang="en-US"/>
-          </a:p>
-        </p:txBody>
-      </p:sp>
-    </p:spTree>
-    <p:extLst>
-      <p:ext uri="{BB962C8B-B14F-4D97-AF65-F5344CB8AC3E}">
-        <p14:creationId xmlns:p14="http://schemas.microsoft.com/office/powerpoint/2010/main" val="2740356989"/>
       </p:ext>
     </p:extLst>
   </p:cSld>
@@ -1061,6 +1498,114 @@
     <p:extLst>
       <p:ext uri="{BB962C8B-B14F-4D97-AF65-F5344CB8AC3E}">
         <p14:creationId xmlns:p14="http://schemas.microsoft.com/office/powerpoint/2010/main" val="1024086991"/>
+      </p:ext>
+    </p:extLst>
+  </p:cSld>
+  <p:clrMapOvr>
+    <a:masterClrMapping/>
+  </p:clrMapOvr>
+</p:notes>
+</file>
+
+<file path=ppt/notesSlides/notesSlide20.xml><?xml version="1.0" encoding="utf-8"?>
+<p:notes xmlns:a="http://schemas.openxmlformats.org/drawingml/2006/main" xmlns:r="http://schemas.openxmlformats.org/officeDocument/2006/relationships" xmlns:p="http://schemas.openxmlformats.org/presentationml/2006/main">
+  <p:cSld>
+    <p:spTree>
+      <p:nvGrpSpPr>
+        <p:cNvPr id="1" name="">
+          <a:extLst>
+            <a:ext uri="{FF2B5EF4-FFF2-40B4-BE49-F238E27FC236}">
+              <a16:creationId xmlns:a16="http://schemas.microsoft.com/office/drawing/2014/main" id="{32783B39-1B24-EA80-035C-F03DBB7D16D4}"/>
+            </a:ext>
+          </a:extLst>
+        </p:cNvPr>
+        <p:cNvGrpSpPr/>
+        <p:nvPr/>
+      </p:nvGrpSpPr>
+      <p:grpSpPr>
+        <a:xfrm>
+          <a:off x="0" y="0"/>
+          <a:ext cx="0" cy="0"/>
+          <a:chOff x="0" y="0"/>
+          <a:chExt cx="0" cy="0"/>
+        </a:xfrm>
+      </p:grpSpPr>
+      <p:sp>
+        <p:nvSpPr>
+          <p:cNvPr id="2" name="Slide Image Placeholder 1">
+            <a:extLst>
+              <a:ext uri="{FF2B5EF4-FFF2-40B4-BE49-F238E27FC236}">
+                <a16:creationId xmlns:a16="http://schemas.microsoft.com/office/drawing/2014/main" id="{F078FB31-F90F-A214-8D93-CBFDE06C0938}"/>
+              </a:ext>
+            </a:extLst>
+          </p:cNvPr>
+          <p:cNvSpPr>
+            <a:spLocks noGrp="1" noRot="1" noChangeAspect="1"/>
+          </p:cNvSpPr>
+          <p:nvPr>
+            <p:ph type="sldImg"/>
+          </p:nvPr>
+        </p:nvSpPr>
+        <p:spPr/>
+      </p:sp>
+      <p:sp>
+        <p:nvSpPr>
+          <p:cNvPr id="3" name="Notes Placeholder 2">
+            <a:extLst>
+              <a:ext uri="{FF2B5EF4-FFF2-40B4-BE49-F238E27FC236}">
+                <a16:creationId xmlns:a16="http://schemas.microsoft.com/office/drawing/2014/main" id="{4D686B29-ECD3-A788-E401-352BDB02FEDF}"/>
+              </a:ext>
+            </a:extLst>
+          </p:cNvPr>
+          <p:cNvSpPr>
+            <a:spLocks noGrp="1"/>
+          </p:cNvSpPr>
+          <p:nvPr>
+            <p:ph type="body" idx="1"/>
+          </p:nvPr>
+        </p:nvSpPr>
+        <p:spPr/>
+        <p:txBody>
+          <a:bodyPr/>
+          <a:lstStyle/>
+          <a:p>
+            <a:endParaRPr lang="en-US" dirty="0"/>
+          </a:p>
+        </p:txBody>
+      </p:sp>
+      <p:sp>
+        <p:nvSpPr>
+          <p:cNvPr id="4" name="Slide Number Placeholder 3">
+            <a:extLst>
+              <a:ext uri="{FF2B5EF4-FFF2-40B4-BE49-F238E27FC236}">
+                <a16:creationId xmlns:a16="http://schemas.microsoft.com/office/drawing/2014/main" id="{DF7D256B-DA5E-15EA-579A-1FFD24CF2D8B}"/>
+              </a:ext>
+            </a:extLst>
+          </p:cNvPr>
+          <p:cNvSpPr>
+            <a:spLocks noGrp="1"/>
+          </p:cNvSpPr>
+          <p:nvPr>
+            <p:ph type="sldNum" sz="quarter" idx="10"/>
+          </p:nvPr>
+        </p:nvSpPr>
+        <p:spPr/>
+        <p:txBody>
+          <a:bodyPr/>
+          <a:lstStyle/>
+          <a:p>
+            <a:fld id="{F7021451-1387-4CA6-816F-3879F97B5CBC}" type="slidenum">
+              <a:rPr lang="en-US"/>
+              <a:t>20</a:t>
+            </a:fld>
+            <a:endParaRPr lang="en-US"/>
+          </a:p>
+        </p:txBody>
+      </p:sp>
+    </p:spTree>
+    <p:extLst>
+      <p:ext uri="{BB962C8B-B14F-4D97-AF65-F5344CB8AC3E}">
+        <p14:creationId xmlns:p14="http://schemas.microsoft.com/office/powerpoint/2010/main" val="2740356989"/>
       </p:ext>
     </p:extLst>
   </p:cSld>
@@ -1797,7 +2342,7 @@
           <a:p>
             <a:fld id="{48A87A34-81AB-432B-8DAE-1953F412C126}" type="datetimeFigureOut">
               <a:rPr lang="en-US" smtClean="0"/>
-              <a:t>9/2/2025</a:t>
+              <a:t>9/4/2025</a:t>
             </a:fld>
             <a:endParaRPr lang="en-US" dirty="0"/>
           </a:p>
@@ -2009,7 +2554,7 @@
           <a:p>
             <a:fld id="{48A87A34-81AB-432B-8DAE-1953F412C126}" type="datetimeFigureOut">
               <a:rPr lang="en-US" smtClean="0"/>
-              <a:t>9/2/2025</a:t>
+              <a:t>9/4/2025</a:t>
             </a:fld>
             <a:endParaRPr lang="en-US" dirty="0"/>
           </a:p>
@@ -2225,7 +2770,7 @@
           <a:p>
             <a:fld id="{48A87A34-81AB-432B-8DAE-1953F412C126}" type="datetimeFigureOut">
               <a:rPr lang="en-US" smtClean="0"/>
-              <a:t>9/2/2025</a:t>
+              <a:t>9/4/2025</a:t>
             </a:fld>
             <a:endParaRPr lang="en-US" dirty="0"/>
           </a:p>
@@ -2667,7 +3212,7 @@
           <a:p>
             <a:fld id="{48A87A34-81AB-432B-8DAE-1953F412C126}" type="datetimeFigureOut">
               <a:rPr lang="en-US" smtClean="0"/>
-              <a:t>9/2/2025</a:t>
+              <a:t>9/4/2025</a:t>
             </a:fld>
             <a:endParaRPr lang="en-US" dirty="0"/>
           </a:p>
@@ -3007,7 +3552,7 @@
           <a:p>
             <a:fld id="{48A87A34-81AB-432B-8DAE-1953F412C126}" type="datetimeFigureOut">
               <a:rPr lang="en-US" smtClean="0"/>
-              <a:t>9/2/2025</a:t>
+              <a:t>9/4/2025</a:t>
             </a:fld>
             <a:endParaRPr lang="en-US" dirty="0"/>
           </a:p>
@@ -3276,7 +3821,7 @@
           <a:p>
             <a:fld id="{48A87A34-81AB-432B-8DAE-1953F412C126}" type="datetimeFigureOut">
               <a:rPr lang="en-US" smtClean="0"/>
-              <a:t>9/2/2025</a:t>
+              <a:t>9/4/2025</a:t>
             </a:fld>
             <a:endParaRPr lang="en-US" dirty="0"/>
           </a:p>
@@ -3693,7 +4238,7 @@
           <a:p>
             <a:fld id="{48A87A34-81AB-432B-8DAE-1953F412C126}" type="datetimeFigureOut">
               <a:rPr lang="en-US" smtClean="0"/>
-              <a:t>9/2/2025</a:t>
+              <a:t>9/4/2025</a:t>
             </a:fld>
             <a:endParaRPr lang="en-US" dirty="0"/>
           </a:p>
@@ -3843,7 +4388,7 @@
           <a:p>
             <a:fld id="{48A87A34-81AB-432B-8DAE-1953F412C126}" type="datetimeFigureOut">
               <a:rPr lang="en-US" smtClean="0"/>
-              <a:t>9/2/2025</a:t>
+              <a:t>9/4/2025</a:t>
             </a:fld>
             <a:endParaRPr lang="en-US" dirty="0"/>
           </a:p>
@@ -3970,7 +4515,7 @@
           <a:p>
             <a:fld id="{48A87A34-81AB-432B-8DAE-1953F412C126}" type="datetimeFigureOut">
               <a:rPr lang="en-US" smtClean="0"/>
-              <a:t>9/2/2025</a:t>
+              <a:t>9/4/2025</a:t>
             </a:fld>
             <a:endParaRPr lang="en-US" dirty="0"/>
           </a:p>
@@ -4222,7 +4767,7 @@
           <a:p>
             <a:fld id="{48A87A34-81AB-432B-8DAE-1953F412C126}" type="datetimeFigureOut">
               <a:rPr lang="en-US" smtClean="0"/>
-              <a:t>9/2/2025</a:t>
+              <a:t>9/4/2025</a:t>
             </a:fld>
             <a:endParaRPr lang="en-US" dirty="0"/>
           </a:p>
@@ -4669,7 +5214,7 @@
             <a:fld id="{48A87A34-81AB-432B-8DAE-1953F412C126}" type="datetimeFigureOut">
               <a:rPr lang="en-US" smtClean="0"/>
               <a:pPr/>
-              <a:t>9/2/2025</a:t>
+              <a:t>9/4/2025</a:t>
             </a:fld>
             <a:endParaRPr lang="en-US" dirty="0"/>
           </a:p>
@@ -4998,7 +5543,7 @@
             <a:fld id="{48A87A34-81AB-432B-8DAE-1953F412C126}" type="datetimeFigureOut">
               <a:rPr lang="en-US" smtClean="0"/>
               <a:pPr/>
-              <a:t>9/2/2025</a:t>
+              <a:t>9/4/2025</a:t>
             </a:fld>
             <a:endParaRPr lang="en-US" dirty="0"/>
           </a:p>
@@ -6612,8 +7157,8 @@
         </p:nvSpPr>
         <p:spPr>
           <a:xfrm>
-            <a:off x="213185" y="1628800"/>
-            <a:ext cx="2885314" cy="563285"/>
+            <a:off x="213184" y="1628800"/>
+            <a:ext cx="5974255" cy="1169419"/>
           </a:xfrm>
           <a:prstGeom prst="rect">
             <a:avLst/>
@@ -6640,7 +7185,26 @@
                 <a:ea typeface="Source Serif 4 Semi Bold" pitchFamily="34" charset="-122"/>
                 <a:cs typeface="Source Serif 4 Semi Bold" pitchFamily="34" charset="-120"/>
               </a:rPr>
-              <a:t>Resultados o Evidencia</a:t>
+              <a:t>Evidencia</a:t>
+            </a:r>
+          </a:p>
+          <a:p>
+            <a:pPr marL="0" indent="0" algn="l">
+              <a:lnSpc>
+                <a:spcPts val="4400"/>
+              </a:lnSpc>
+              <a:buNone/>
+            </a:pPr>
+            <a:r>
+              <a:rPr lang="es-419" sz="3500" noProof="0" dirty="0">
+                <a:solidFill>
+                  <a:srgbClr val="D73AD7"/>
+                </a:solidFill>
+                <a:latin typeface="Source Serif 4 Semi Bold" pitchFamily="34" charset="0"/>
+                <a:ea typeface="Source Serif 4 Semi Bold" pitchFamily="34" charset="-122"/>
+                <a:cs typeface="Source Serif 4 Semi Bold" pitchFamily="34" charset="-120"/>
+              </a:rPr>
+              <a:t> WEB</a:t>
             </a:r>
           </a:p>
         </p:txBody>
@@ -6746,7 +7310,7 @@
         <p:cNvPr id="1" name="">
           <a:extLst>
             <a:ext uri="{FF2B5EF4-FFF2-40B4-BE49-F238E27FC236}">
-              <a16:creationId xmlns:a16="http://schemas.microsoft.com/office/drawing/2014/main" id="{CE64F858-8FB1-82CF-7120-C6AC96B63A5A}"/>
+              <a16:creationId xmlns:a16="http://schemas.microsoft.com/office/drawing/2014/main" id="{64859EF0-6F5E-3B87-B194-3E67BFB9646A}"/>
             </a:ext>
           </a:extLst>
         </p:cNvPr>
@@ -6766,7 +7330,7 @@
           <p:cNvPr id="2" name="Text 0">
             <a:extLst>
               <a:ext uri="{FF2B5EF4-FFF2-40B4-BE49-F238E27FC236}">
-                <a16:creationId xmlns:a16="http://schemas.microsoft.com/office/drawing/2014/main" id="{0D1DE157-D2C1-6BE3-CA10-4561C9D8FC47}"/>
+                <a16:creationId xmlns:a16="http://schemas.microsoft.com/office/drawing/2014/main" id="{38FA19D8-2F1D-BBBF-A54E-DA29912FC426}"/>
               </a:ext>
             </a:extLst>
           </p:cNvPr>
@@ -6803,7 +7367,7 @@
                 <a:ea typeface="Source Serif 4 Semi Bold" pitchFamily="34" charset="-122"/>
                 <a:cs typeface="Source Serif 4 Semi Bold" pitchFamily="34" charset="-120"/>
               </a:rPr>
-              <a:t>Resultados o Evidencia</a:t>
+              <a:t>Resultados o Evidencia WEB</a:t>
             </a:r>
           </a:p>
         </p:txBody>
@@ -6813,7 +7377,7 @@
           <p:cNvPr id="20" name="Text 7">
             <a:extLst>
               <a:ext uri="{FF2B5EF4-FFF2-40B4-BE49-F238E27FC236}">
-                <a16:creationId xmlns:a16="http://schemas.microsoft.com/office/drawing/2014/main" id="{90BF5C02-8F93-5EB5-E038-3E7AED091402}"/>
+                <a16:creationId xmlns:a16="http://schemas.microsoft.com/office/drawing/2014/main" id="{566F8D25-D0F9-E138-043A-A58E9BC67563}"/>
               </a:ext>
             </a:extLst>
           </p:cNvPr>
@@ -6860,10 +7424,10 @@
       </p:sp>
       <p:pic>
         <p:nvPicPr>
-          <p:cNvPr id="5" name="Imagen 4" descr="Interfaz de usuario gráfica, Aplicación&#10;&#10;El contenido generado por IA puede ser incorrecto.">
+          <p:cNvPr id="5" name="Imagen 4">
             <a:extLst>
               <a:ext uri="{FF2B5EF4-FFF2-40B4-BE49-F238E27FC236}">
-                <a16:creationId xmlns:a16="http://schemas.microsoft.com/office/drawing/2014/main" id="{2DCE60E7-9F7E-9774-14BA-B10CC6905749}"/>
+                <a16:creationId xmlns:a16="http://schemas.microsoft.com/office/drawing/2014/main" id="{0C492F62-6458-342F-12D1-43E00D23CD0C}"/>
               </a:ext>
             </a:extLst>
           </p:cNvPr>
@@ -6880,8 +7444,209 @@
         </p:blipFill>
         <p:spPr>
           <a:xfrm>
-            <a:off x="232347" y="1026826"/>
-            <a:ext cx="14165705" cy="5312139"/>
+            <a:off x="989564" y="1585406"/>
+            <a:ext cx="5096586" cy="2219635"/>
+          </a:xfrm>
+          <a:prstGeom prst="rect">
+            <a:avLst/>
+          </a:prstGeom>
+        </p:spPr>
+      </p:pic>
+      <p:pic>
+        <p:nvPicPr>
+          <p:cNvPr id="7" name="Imagen 6">
+            <a:extLst>
+              <a:ext uri="{FF2B5EF4-FFF2-40B4-BE49-F238E27FC236}">
+                <a16:creationId xmlns:a16="http://schemas.microsoft.com/office/drawing/2014/main" id="{5E40C97D-1713-2F12-8672-27B20E8F5502}"/>
+              </a:ext>
+            </a:extLst>
+          </p:cNvPr>
+          <p:cNvPicPr>
+            <a:picLocks noChangeAspect="1"/>
+          </p:cNvPicPr>
+          <p:nvPr/>
+        </p:nvPicPr>
+        <p:blipFill>
+          <a:blip r:embed="rId4"/>
+          <a:stretch>
+            <a:fillRect/>
+          </a:stretch>
+        </p:blipFill>
+        <p:spPr>
+          <a:xfrm>
+            <a:off x="1088572" y="5252925"/>
+            <a:ext cx="12287250" cy="1622356"/>
+          </a:xfrm>
+          <a:prstGeom prst="rect">
+            <a:avLst/>
+          </a:prstGeom>
+        </p:spPr>
+      </p:pic>
+    </p:spTree>
+    <p:extLst>
+      <p:ext uri="{BB962C8B-B14F-4D97-AF65-F5344CB8AC3E}">
+        <p14:creationId xmlns:p14="http://schemas.microsoft.com/office/powerpoint/2010/main" val="1028728393"/>
+      </p:ext>
+    </p:extLst>
+  </p:cSld>
+  <p:clrMapOvr>
+    <a:masterClrMapping/>
+  </p:clrMapOvr>
+</p:sld>
+</file>
+
+<file path=ppt/slides/slide14.xml><?xml version="1.0" encoding="utf-8"?>
+<p:sld xmlns:a="http://schemas.openxmlformats.org/drawingml/2006/main" xmlns:r="http://schemas.openxmlformats.org/officeDocument/2006/relationships" xmlns:p="http://schemas.openxmlformats.org/presentationml/2006/main">
+  <p:cSld>
+    <p:spTree>
+      <p:nvGrpSpPr>
+        <p:cNvPr id="1" name="">
+          <a:extLst>
+            <a:ext uri="{FF2B5EF4-FFF2-40B4-BE49-F238E27FC236}">
+              <a16:creationId xmlns:a16="http://schemas.microsoft.com/office/drawing/2014/main" id="{CE64F858-8FB1-82CF-7120-C6AC96B63A5A}"/>
+            </a:ext>
+          </a:extLst>
+        </p:cNvPr>
+        <p:cNvGrpSpPr/>
+        <p:nvPr/>
+      </p:nvGrpSpPr>
+      <p:grpSpPr>
+        <a:xfrm>
+          <a:off x="0" y="0"/>
+          <a:ext cx="0" cy="0"/>
+          <a:chOff x="0" y="0"/>
+          <a:chExt cx="0" cy="0"/>
+        </a:xfrm>
+      </p:grpSpPr>
+      <p:sp>
+        <p:nvSpPr>
+          <p:cNvPr id="2" name="Text 0">
+            <a:extLst>
+              <a:ext uri="{FF2B5EF4-FFF2-40B4-BE49-F238E27FC236}">
+                <a16:creationId xmlns:a16="http://schemas.microsoft.com/office/drawing/2014/main" id="{0D1DE157-D2C1-6BE3-CA10-4561C9D8FC47}"/>
+              </a:ext>
+            </a:extLst>
+          </p:cNvPr>
+          <p:cNvSpPr/>
+          <p:nvPr/>
+        </p:nvSpPr>
+        <p:spPr>
+          <a:xfrm>
+            <a:off x="1382417" y="320289"/>
+            <a:ext cx="5063353" cy="505716"/>
+          </a:xfrm>
+          <a:prstGeom prst="rect">
+            <a:avLst/>
+          </a:prstGeom>
+          <a:noFill/>
+          <a:ln/>
+        </p:spPr>
+        <p:txBody>
+          <a:bodyPr wrap="none" lIns="0" tIns="0" rIns="0" bIns="0" rtlCol="0" anchor="t"/>
+          <a:lstStyle/>
+          <a:p>
+            <a:pPr marL="0" indent="0" algn="l">
+              <a:lnSpc>
+                <a:spcPts val="4400"/>
+              </a:lnSpc>
+              <a:buNone/>
+            </a:pPr>
+            <a:r>
+              <a:rPr lang="es-419" sz="3500" noProof="0" dirty="0" err="1">
+                <a:solidFill>
+                  <a:srgbClr val="D73AD7"/>
+                </a:solidFill>
+                <a:latin typeface="Source Serif 4 Semi Bold" pitchFamily="34" charset="0"/>
+                <a:ea typeface="Source Serif 4 Semi Bold" pitchFamily="34" charset="-122"/>
+                <a:cs typeface="Source Serif 4 Semi Bold" pitchFamily="34" charset="-120"/>
+              </a:rPr>
+              <a:t>Swagger</a:t>
+            </a:r>
+            <a:endParaRPr lang="es-419" sz="3500" noProof="0" dirty="0">
+              <a:solidFill>
+                <a:srgbClr val="D73AD7"/>
+              </a:solidFill>
+              <a:latin typeface="Source Serif 4 Semi Bold" pitchFamily="34" charset="0"/>
+              <a:ea typeface="Source Serif 4 Semi Bold" pitchFamily="34" charset="-122"/>
+              <a:cs typeface="Source Serif 4 Semi Bold" pitchFamily="34" charset="-120"/>
+            </a:endParaRPr>
+          </a:p>
+        </p:txBody>
+      </p:sp>
+      <p:sp>
+        <p:nvSpPr>
+          <p:cNvPr id="20" name="Text 7">
+            <a:extLst>
+              <a:ext uri="{FF2B5EF4-FFF2-40B4-BE49-F238E27FC236}">
+                <a16:creationId xmlns:a16="http://schemas.microsoft.com/office/drawing/2014/main" id="{90BF5C02-8F93-5EB5-E038-3E7AED091402}"/>
+              </a:ext>
+            </a:extLst>
+          </p:cNvPr>
+          <p:cNvSpPr/>
+          <p:nvPr/>
+        </p:nvSpPr>
+        <p:spPr>
+          <a:xfrm>
+            <a:off x="773495" y="1332548"/>
+            <a:ext cx="12287250" cy="505716"/>
+          </a:xfrm>
+          <a:prstGeom prst="rect">
+            <a:avLst/>
+          </a:prstGeom>
+          <a:noFill/>
+          <a:ln/>
+        </p:spPr>
+        <p:txBody>
+          <a:bodyPr vert="horz" wrap="square" lIns="0" tIns="0" rIns="0" bIns="0" rtlCol="0" anchor="t">
+            <a:spAutoFit/>
+          </a:bodyPr>
+          <a:lstStyle/>
+          <a:p>
+            <a:pPr marL="246063" lvl="1" defTabSz="404813">
+              <a:lnSpc>
+                <a:spcPct val="150000"/>
+              </a:lnSpc>
+              <a:tabLst>
+                <a:tab pos="16225838" algn="l"/>
+                <a:tab pos="16592550" algn="l"/>
+                <a:tab pos="17124363" algn="l"/>
+              </a:tabLst>
+            </a:pPr>
+            <a:endParaRPr lang="es-419" sz="2400" noProof="0" dirty="0">
+              <a:solidFill>
+                <a:srgbClr val="272525"/>
+              </a:solidFill>
+              <a:latin typeface="Source Serif 4 Semi Bold" pitchFamily="34" charset="0"/>
+              <a:ea typeface="Source Serif 4 Semi Bold" pitchFamily="34" charset="-122"/>
+              <a:cs typeface="Source Serif 4 Semi Bold" pitchFamily="34" charset="-120"/>
+            </a:endParaRPr>
+          </a:p>
+        </p:txBody>
+      </p:sp>
+      <p:pic>
+        <p:nvPicPr>
+          <p:cNvPr id="4" name="Imagen 3">
+            <a:extLst>
+              <a:ext uri="{FF2B5EF4-FFF2-40B4-BE49-F238E27FC236}">
+                <a16:creationId xmlns:a16="http://schemas.microsoft.com/office/drawing/2014/main" id="{CD7C7926-900C-E19C-5381-8DBBDC47184A}"/>
+              </a:ext>
+            </a:extLst>
+          </p:cNvPr>
+          <p:cNvPicPr>
+            <a:picLocks noChangeAspect="1"/>
+          </p:cNvPicPr>
+          <p:nvPr/>
+        </p:nvPicPr>
+        <p:blipFill>
+          <a:blip r:embed="rId3"/>
+          <a:stretch>
+            <a:fillRect/>
+          </a:stretch>
+        </p:blipFill>
+        <p:spPr>
+          <a:xfrm>
+            <a:off x="914400" y="1585406"/>
+            <a:ext cx="12801600" cy="6495727"/>
           </a:xfrm>
           <a:prstGeom prst="rect">
             <a:avLst/>
@@ -6901,7 +7666,1696 @@
 </p:sld>
 </file>
 
-<file path=ppt/slides/slide14.xml><?xml version="1.0" encoding="utf-8"?>
+<file path=ppt/slides/slide15.xml><?xml version="1.0" encoding="utf-8"?>
+<p:sld xmlns:a="http://schemas.openxmlformats.org/drawingml/2006/main" xmlns:r="http://schemas.openxmlformats.org/officeDocument/2006/relationships" xmlns:p="http://schemas.openxmlformats.org/presentationml/2006/main">
+  <p:cSld>
+    <p:spTree>
+      <p:nvGrpSpPr>
+        <p:cNvPr id="1" name="">
+          <a:extLst>
+            <a:ext uri="{FF2B5EF4-FFF2-40B4-BE49-F238E27FC236}">
+              <a16:creationId xmlns:a16="http://schemas.microsoft.com/office/drawing/2014/main" id="{37E34574-6616-0A11-FE2F-C0B204837947}"/>
+            </a:ext>
+          </a:extLst>
+        </p:cNvPr>
+        <p:cNvGrpSpPr/>
+        <p:nvPr/>
+      </p:nvGrpSpPr>
+      <p:grpSpPr>
+        <a:xfrm>
+          <a:off x="0" y="0"/>
+          <a:ext cx="0" cy="0"/>
+          <a:chOff x="0" y="0"/>
+          <a:chExt cx="0" cy="0"/>
+        </a:xfrm>
+      </p:grpSpPr>
+      <p:sp>
+        <p:nvSpPr>
+          <p:cNvPr id="2" name="Text 0">
+            <a:extLst>
+              <a:ext uri="{FF2B5EF4-FFF2-40B4-BE49-F238E27FC236}">
+                <a16:creationId xmlns:a16="http://schemas.microsoft.com/office/drawing/2014/main" id="{66DFADFC-C1D5-F0F5-461A-51B2BF43E272}"/>
+              </a:ext>
+            </a:extLst>
+          </p:cNvPr>
+          <p:cNvSpPr/>
+          <p:nvPr/>
+        </p:nvSpPr>
+        <p:spPr>
+          <a:xfrm>
+            <a:off x="1207001" y="326708"/>
+            <a:ext cx="7053143" cy="563285"/>
+          </a:xfrm>
+          <a:prstGeom prst="rect">
+            <a:avLst/>
+          </a:prstGeom>
+          <a:noFill/>
+          <a:ln/>
+        </p:spPr>
+        <p:txBody>
+          <a:bodyPr wrap="none" lIns="0" tIns="0" rIns="0" bIns="0" rtlCol="0" anchor="t"/>
+          <a:lstStyle/>
+          <a:p>
+            <a:pPr marL="0" indent="0" algn="l">
+              <a:lnSpc>
+                <a:spcPts val="4400"/>
+              </a:lnSpc>
+              <a:buNone/>
+            </a:pPr>
+            <a:r>
+              <a:rPr lang="es-419" sz="3500" noProof="0" dirty="0">
+                <a:solidFill>
+                  <a:srgbClr val="D73AD7"/>
+                </a:solidFill>
+                <a:latin typeface="Source Serif 4 Semi Bold" pitchFamily="34" charset="0"/>
+                <a:ea typeface="Source Serif 4 Semi Bold" pitchFamily="34" charset="-122"/>
+                <a:cs typeface="Source Serif 4 Semi Bold" pitchFamily="34" charset="-120"/>
+              </a:rPr>
+              <a:t>Política de Acceso </a:t>
+            </a:r>
+            <a:r>
+              <a:rPr lang="es-419" sz="3500" noProof="0" dirty="0" err="1">
+                <a:solidFill>
+                  <a:srgbClr val="D73AD7"/>
+                </a:solidFill>
+                <a:latin typeface="Source Serif 4 Semi Bold" pitchFamily="34" charset="0"/>
+                <a:ea typeface="Source Serif 4 Semi Bold" pitchFamily="34" charset="-122"/>
+                <a:cs typeface="Source Serif 4 Semi Bold" pitchFamily="34" charset="-120"/>
+              </a:rPr>
+              <a:t>APIs</a:t>
+            </a:r>
+            <a:endParaRPr lang="es-419" sz="3500" noProof="0" dirty="0">
+              <a:solidFill>
+                <a:srgbClr val="D73AD7"/>
+              </a:solidFill>
+              <a:latin typeface="Source Serif 4 Semi Bold" pitchFamily="34" charset="0"/>
+              <a:ea typeface="Source Serif 4 Semi Bold" pitchFamily="34" charset="-122"/>
+              <a:cs typeface="Source Serif 4 Semi Bold" pitchFamily="34" charset="-120"/>
+            </a:endParaRPr>
+          </a:p>
+        </p:txBody>
+      </p:sp>
+      <p:sp>
+        <p:nvSpPr>
+          <p:cNvPr id="20" name="Text 7">
+            <a:extLst>
+              <a:ext uri="{FF2B5EF4-FFF2-40B4-BE49-F238E27FC236}">
+                <a16:creationId xmlns:a16="http://schemas.microsoft.com/office/drawing/2014/main" id="{1B962B88-1A25-1788-196B-8B592E180962}"/>
+              </a:ext>
+            </a:extLst>
+          </p:cNvPr>
+          <p:cNvSpPr/>
+          <p:nvPr/>
+        </p:nvSpPr>
+        <p:spPr>
+          <a:xfrm>
+            <a:off x="5078522" y="3363038"/>
+            <a:ext cx="4303693" cy="2077492"/>
+          </a:xfrm>
+          <a:prstGeom prst="rect">
+            <a:avLst/>
+          </a:prstGeom>
+          <a:noFill/>
+          <a:ln/>
+        </p:spPr>
+        <p:txBody>
+          <a:bodyPr vert="horz" wrap="square" lIns="0" tIns="0" rIns="0" bIns="0" rtlCol="0" anchor="t">
+            <a:spAutoFit/>
+          </a:bodyPr>
+          <a:lstStyle/>
+          <a:p>
+            <a:pPr marL="285750" indent="-285750">
+              <a:buFont typeface="Arial" panose="020B0604020202020204" pitchFamily="34" charset="0"/>
+              <a:buChar char="•"/>
+            </a:pPr>
+            <a:r>
+              <a:rPr lang="es-CL" sz="1500" dirty="0"/>
+              <a:t>GET /api/</a:t>
+            </a:r>
+            <a:r>
+              <a:rPr lang="es-CL" sz="1500" dirty="0" err="1"/>
+              <a:t>appointments</a:t>
+            </a:r>
+            <a:r>
+              <a:rPr lang="es-CL" sz="1500" dirty="0"/>
+              <a:t>/{id</a:t>
+            </a:r>
+          </a:p>
+          <a:p>
+            <a:pPr marL="285750" indent="-285750">
+              <a:buFont typeface="Arial" panose="020B0604020202020204" pitchFamily="34" charset="0"/>
+              <a:buChar char="•"/>
+            </a:pPr>
+            <a:r>
+              <a:rPr lang="es-CL" sz="1500" dirty="0" err="1"/>
+              <a:t>Admin</a:t>
+            </a:r>
+            <a:r>
+              <a:rPr lang="es-CL" sz="1500" dirty="0"/>
+              <a:t>: cualquiera</a:t>
+            </a:r>
+          </a:p>
+          <a:p>
+            <a:pPr marL="285750" indent="-285750">
+              <a:buFont typeface="Arial" panose="020B0604020202020204" pitchFamily="34" charset="0"/>
+              <a:buChar char="•"/>
+            </a:pPr>
+            <a:r>
+              <a:rPr lang="es-CL" sz="1500" dirty="0"/>
+              <a:t>Doctor: solo si es su cita</a:t>
+            </a:r>
+          </a:p>
+          <a:p>
+            <a:pPr marL="285750" indent="-285750">
+              <a:buFont typeface="Arial" panose="020B0604020202020204" pitchFamily="34" charset="0"/>
+              <a:buChar char="•"/>
+            </a:pPr>
+            <a:r>
+              <a:rPr lang="es-CL" sz="1500" dirty="0" err="1"/>
+              <a:t>Patient</a:t>
+            </a:r>
+            <a:r>
+              <a:rPr lang="es-CL" sz="1500" dirty="0"/>
+              <a:t>: solo si es su cita</a:t>
+            </a:r>
+          </a:p>
+          <a:p>
+            <a:pPr marL="285750" indent="-285750">
+              <a:buFont typeface="Arial" panose="020B0604020202020204" pitchFamily="34" charset="0"/>
+              <a:buChar char="•"/>
+            </a:pPr>
+            <a:r>
+              <a:rPr lang="es-CL" sz="1500" dirty="0"/>
+              <a:t>POST /api/</a:t>
+            </a:r>
+            <a:r>
+              <a:rPr lang="es-CL" sz="1500" dirty="0" err="1"/>
+              <a:t>appointments</a:t>
+            </a:r>
+            <a:endParaRPr lang="es-CL" sz="1500" dirty="0"/>
+          </a:p>
+          <a:p>
+            <a:pPr marL="285750" indent="-285750">
+              <a:buFont typeface="Arial" panose="020B0604020202020204" pitchFamily="34" charset="0"/>
+              <a:buChar char="•"/>
+            </a:pPr>
+            <a:r>
+              <a:rPr lang="es-CL" sz="1500" dirty="0" err="1"/>
+              <a:t>Patient</a:t>
+            </a:r>
+            <a:r>
+              <a:rPr lang="es-CL" sz="1500" dirty="0"/>
+              <a:t> o </a:t>
+            </a:r>
+            <a:r>
+              <a:rPr lang="es-CL" sz="1500" dirty="0" err="1"/>
+              <a:t>Admin</a:t>
+            </a:r>
+            <a:r>
+              <a:rPr lang="es-CL" sz="1500" dirty="0"/>
+              <a:t>. Si es </a:t>
+            </a:r>
+            <a:r>
+              <a:rPr lang="es-CL" sz="1500" dirty="0" err="1"/>
+              <a:t>Patient</a:t>
+            </a:r>
+            <a:r>
+              <a:rPr lang="es-CL" sz="1500" dirty="0"/>
+              <a:t>, </a:t>
+            </a:r>
+          </a:p>
+          <a:p>
+            <a:pPr marL="285750" indent="-285750">
+              <a:buFont typeface="Arial" panose="020B0604020202020204" pitchFamily="34" charset="0"/>
+              <a:buChar char="•"/>
+            </a:pPr>
+            <a:r>
+              <a:rPr lang="es-CL" sz="1500" dirty="0"/>
+              <a:t>solo puede crear para su propio </a:t>
+            </a:r>
+            <a:r>
+              <a:rPr lang="es-CL" sz="1500" dirty="0" err="1"/>
+              <a:t>PatientId</a:t>
+            </a:r>
+            <a:r>
+              <a:rPr lang="es-CL" sz="1500" dirty="0"/>
+              <a:t>.</a:t>
+            </a:r>
+          </a:p>
+          <a:p>
+            <a:pPr marL="285750" indent="-285750">
+              <a:buFont typeface="Arial" panose="020B0604020202020204" pitchFamily="34" charset="0"/>
+              <a:buChar char="•"/>
+            </a:pPr>
+            <a:r>
+              <a:rPr lang="es-CL" sz="1500" dirty="0"/>
+              <a:t>PUT /api/</a:t>
+            </a:r>
+            <a:r>
+              <a:rPr lang="es-CL" sz="1500" dirty="0" err="1"/>
+              <a:t>appointments</a:t>
+            </a:r>
+            <a:r>
+              <a:rPr lang="es-CL" sz="1500" dirty="0"/>
+              <a:t>/{id}/</a:t>
+            </a:r>
+            <a:r>
+              <a:rPr lang="es-CL" sz="1500" dirty="0" err="1"/>
+              <a:t>reschedule</a:t>
+            </a:r>
+            <a:endParaRPr lang="es-CL" sz="1500" dirty="0"/>
+          </a:p>
+          <a:p>
+            <a:pPr marL="285750" indent="-285750">
+              <a:buFont typeface="Arial" panose="020B0604020202020204" pitchFamily="34" charset="0"/>
+              <a:buChar char="•"/>
+            </a:pPr>
+            <a:r>
+              <a:rPr lang="es-CL" sz="1500" dirty="0" err="1"/>
+              <a:t>Patient</a:t>
+            </a:r>
+            <a:r>
+              <a:rPr lang="es-CL" sz="1500" dirty="0"/>
+              <a:t> (solo su cita) o </a:t>
+            </a:r>
+            <a:r>
+              <a:rPr lang="es-CL" sz="1500" dirty="0" err="1"/>
+              <a:t>Admin</a:t>
+            </a:r>
+            <a:r>
+              <a:rPr lang="es-CL" sz="1500" dirty="0"/>
+              <a:t>.</a:t>
+            </a:r>
+          </a:p>
+        </p:txBody>
+      </p:sp>
+      <p:sp>
+        <p:nvSpPr>
+          <p:cNvPr id="4" name="Marcador de contenido 3">
+            <a:extLst>
+              <a:ext uri="{FF2B5EF4-FFF2-40B4-BE49-F238E27FC236}">
+                <a16:creationId xmlns:a16="http://schemas.microsoft.com/office/drawing/2014/main" id="{FBE6C852-7EB9-31C3-EEC4-95F0FF0A6E29}"/>
+              </a:ext>
+            </a:extLst>
+          </p:cNvPr>
+          <p:cNvSpPr>
+            <a:spLocks noGrp="1"/>
+          </p:cNvSpPr>
+          <p:nvPr>
+            <p:ph idx="1"/>
+          </p:nvPr>
+        </p:nvSpPr>
+        <p:spPr>
+          <a:xfrm>
+            <a:off x="217895" y="2418879"/>
+            <a:ext cx="5248185" cy="4140736"/>
+          </a:xfrm>
+        </p:spPr>
+        <p:txBody>
+          <a:bodyPr>
+            <a:normAutofit/>
+          </a:bodyPr>
+          <a:lstStyle/>
+          <a:p>
+            <a:pPr>
+              <a:lnSpc>
+                <a:spcPct val="100000"/>
+              </a:lnSpc>
+            </a:pPr>
+            <a:r>
+              <a:rPr lang="es-CL" sz="1500" dirty="0"/>
+              <a:t>POST /api/</a:t>
+            </a:r>
+            <a:r>
+              <a:rPr lang="es-CL" sz="1500" dirty="0" err="1"/>
+              <a:t>auth</a:t>
+            </a:r>
+            <a:r>
+              <a:rPr lang="es-CL" sz="1500" dirty="0"/>
+              <a:t>/</a:t>
+            </a:r>
+            <a:r>
+              <a:rPr lang="es-CL" sz="1500" dirty="0" err="1"/>
+              <a:t>register</a:t>
+            </a:r>
+            <a:r>
+              <a:rPr lang="es-CL" sz="1500" dirty="0"/>
+              <a:t>, POST /api/</a:t>
+            </a:r>
+            <a:r>
+              <a:rPr lang="es-CL" sz="1500" dirty="0" err="1"/>
+              <a:t>auth</a:t>
+            </a:r>
+            <a:r>
+              <a:rPr lang="es-CL" sz="1500" dirty="0"/>
+              <a:t>/</a:t>
+            </a:r>
+            <a:r>
+              <a:rPr lang="es-CL" sz="1500" dirty="0" err="1"/>
+              <a:t>login</a:t>
+            </a:r>
+            <a:r>
+              <a:rPr lang="es-CL" sz="1500" dirty="0"/>
+              <a:t> (ya OK).</a:t>
+            </a:r>
+          </a:p>
+          <a:p>
+            <a:pPr>
+              <a:lnSpc>
+                <a:spcPct val="100000"/>
+              </a:lnSpc>
+            </a:pPr>
+            <a:r>
+              <a:rPr lang="es-CL" sz="1500" dirty="0"/>
+              <a:t>GET /api/</a:t>
+            </a:r>
+            <a:r>
+              <a:rPr lang="es-CL" sz="1500" dirty="0" err="1"/>
+              <a:t>doctors</a:t>
+            </a:r>
+            <a:r>
+              <a:rPr lang="es-CL" sz="1500" dirty="0"/>
+              <a:t>, GET /api/</a:t>
+            </a:r>
+            <a:r>
+              <a:rPr lang="es-CL" sz="1500" dirty="0" err="1"/>
+              <a:t>doctors</a:t>
+            </a:r>
+            <a:r>
+              <a:rPr lang="es-CL" sz="1500" dirty="0"/>
+              <a:t>/{id} (catálogo visible sin </a:t>
+            </a:r>
+            <a:r>
+              <a:rPr lang="es-CL" sz="1500" dirty="0" err="1"/>
+              <a:t>login</a:t>
+            </a:r>
+            <a:r>
+              <a:rPr lang="es-CL" sz="1500" dirty="0"/>
+              <a:t>).</a:t>
+            </a:r>
+          </a:p>
+          <a:p>
+            <a:pPr>
+              <a:lnSpc>
+                <a:spcPct val="100000"/>
+              </a:lnSpc>
+            </a:pPr>
+            <a:r>
+              <a:rPr lang="es-CL" sz="1500" dirty="0"/>
+              <a:t>Con token (y dueño)</a:t>
+            </a:r>
+          </a:p>
+          <a:p>
+            <a:pPr>
+              <a:lnSpc>
+                <a:spcPct val="100000"/>
+              </a:lnSpc>
+            </a:pPr>
+            <a:r>
+              <a:rPr lang="es-CL" sz="1500" dirty="0" err="1"/>
+              <a:t>Appointments</a:t>
+            </a:r>
+            <a:endParaRPr lang="es-CL" sz="1500" dirty="0"/>
+          </a:p>
+          <a:p>
+            <a:pPr>
+              <a:lnSpc>
+                <a:spcPct val="100000"/>
+              </a:lnSpc>
+            </a:pPr>
+            <a:r>
+              <a:rPr lang="es-CL" sz="1500" dirty="0"/>
+              <a:t>GET /api/</a:t>
+            </a:r>
+            <a:r>
+              <a:rPr lang="es-CL" sz="1500" dirty="0" err="1"/>
+              <a:t>appointments</a:t>
+            </a:r>
+            <a:endParaRPr lang="es-CL" sz="1500" dirty="0"/>
+          </a:p>
+          <a:p>
+            <a:pPr>
+              <a:lnSpc>
+                <a:spcPct val="100000"/>
+              </a:lnSpc>
+            </a:pPr>
+            <a:r>
+              <a:rPr lang="es-CL" sz="1500" dirty="0" err="1"/>
+              <a:t>Admin</a:t>
+            </a:r>
+            <a:r>
+              <a:rPr lang="es-CL" sz="1500" dirty="0"/>
+              <a:t>: ve todas</a:t>
+            </a:r>
+          </a:p>
+          <a:p>
+            <a:pPr>
+              <a:lnSpc>
+                <a:spcPct val="100000"/>
+              </a:lnSpc>
+            </a:pPr>
+            <a:r>
+              <a:rPr lang="es-CL" sz="1500" dirty="0"/>
+              <a:t>Doctor: solo citas donde </a:t>
+            </a:r>
+            <a:r>
+              <a:rPr lang="es-CL" sz="1500" dirty="0" err="1"/>
+              <a:t>Doctor.UserId</a:t>
+            </a:r>
+            <a:r>
+              <a:rPr lang="es-CL" sz="1500" dirty="0"/>
+              <a:t> == </a:t>
+            </a:r>
+            <a:r>
+              <a:rPr lang="es-CL" sz="1500" dirty="0" err="1"/>
+              <a:t>userId</a:t>
+            </a:r>
+            <a:endParaRPr lang="es-CL" sz="1500" dirty="0"/>
+          </a:p>
+          <a:p>
+            <a:pPr>
+              <a:lnSpc>
+                <a:spcPct val="100000"/>
+              </a:lnSpc>
+            </a:pPr>
+            <a:r>
+              <a:rPr lang="es-CL" sz="1500" dirty="0" err="1"/>
+              <a:t>Patient</a:t>
+            </a:r>
+            <a:r>
+              <a:rPr lang="es-CL" sz="1500" dirty="0"/>
+              <a:t>: solo citas donde </a:t>
+            </a:r>
+            <a:r>
+              <a:rPr lang="es-CL" sz="1500" dirty="0" err="1"/>
+              <a:t>Patient.UserId</a:t>
+            </a:r>
+            <a:r>
+              <a:rPr lang="es-CL" sz="1500" dirty="0"/>
+              <a:t> == </a:t>
+            </a:r>
+            <a:r>
+              <a:rPr lang="es-CL" sz="1500" dirty="0" err="1"/>
+              <a:t>userId</a:t>
+            </a:r>
+            <a:endParaRPr lang="es-CL" sz="1500" dirty="0"/>
+          </a:p>
+          <a:p>
+            <a:endParaRPr lang="es-CL" sz="1500" dirty="0"/>
+          </a:p>
+        </p:txBody>
+      </p:sp>
+      <p:sp>
+        <p:nvSpPr>
+          <p:cNvPr id="5" name="Marcador de contenido 3">
+            <a:extLst>
+              <a:ext uri="{FF2B5EF4-FFF2-40B4-BE49-F238E27FC236}">
+                <a16:creationId xmlns:a16="http://schemas.microsoft.com/office/drawing/2014/main" id="{5D6C1945-AA0D-A642-1E3E-270DDBB6EB49}"/>
+              </a:ext>
+            </a:extLst>
+          </p:cNvPr>
+          <p:cNvSpPr txBox="1">
+            <a:spLocks/>
+          </p:cNvSpPr>
+          <p:nvPr/>
+        </p:nvSpPr>
+        <p:spPr>
+          <a:xfrm>
+            <a:off x="9382215" y="2418879"/>
+            <a:ext cx="5248185" cy="4140736"/>
+          </a:xfrm>
+          <a:prstGeom prst="rect">
+            <a:avLst/>
+          </a:prstGeom>
+        </p:spPr>
+        <p:txBody>
+          <a:bodyPr vert="horz" lIns="91440" tIns="45720" rIns="91440" bIns="45720" rtlCol="0" anchor="t">
+            <a:normAutofit fontScale="70000" lnSpcReduction="20000"/>
+          </a:bodyPr>
+          <a:lstStyle>
+            <a:lvl1pPr marL="274320" indent="-274320" algn="l" defTabSz="1097280" rtl="0" eaLnBrk="1" latinLnBrk="0" hangingPunct="1">
+              <a:lnSpc>
+                <a:spcPct val="120000"/>
+              </a:lnSpc>
+              <a:spcBef>
+                <a:spcPts val="1200"/>
+              </a:spcBef>
+              <a:buClr>
+                <a:schemeClr val="accent1"/>
+              </a:buClr>
+              <a:buSzPct val="100000"/>
+              <a:buFont typeface="Arial" panose="020B0604020202020204" pitchFamily="34" charset="0"/>
+              <a:buChar char="•"/>
+              <a:defRPr sz="2400" kern="1200">
+                <a:solidFill>
+                  <a:schemeClr val="tx1"/>
+                </a:solidFill>
+                <a:effectLst/>
+                <a:latin typeface="+mn-lt"/>
+                <a:ea typeface="+mn-ea"/>
+                <a:cs typeface="+mn-cs"/>
+              </a:defRPr>
+            </a:lvl1pPr>
+            <a:lvl2pPr marL="822960" indent="-274320" algn="l" defTabSz="1097280" rtl="0" eaLnBrk="1" latinLnBrk="0" hangingPunct="1">
+              <a:lnSpc>
+                <a:spcPct val="120000"/>
+              </a:lnSpc>
+              <a:spcBef>
+                <a:spcPts val="600"/>
+              </a:spcBef>
+              <a:buClr>
+                <a:schemeClr val="accent1"/>
+              </a:buClr>
+              <a:buSzPct val="100000"/>
+              <a:buFont typeface="Arial" panose="020B0604020202020204" pitchFamily="34" charset="0"/>
+              <a:buChar char="•"/>
+              <a:defRPr sz="2160" kern="1200" cap="none" baseline="0">
+                <a:solidFill>
+                  <a:schemeClr val="tx1"/>
+                </a:solidFill>
+                <a:effectLst/>
+                <a:latin typeface="+mn-lt"/>
+                <a:ea typeface="+mn-ea"/>
+                <a:cs typeface="+mn-cs"/>
+              </a:defRPr>
+            </a:lvl2pPr>
+            <a:lvl3pPr marL="1371600" indent="-274320" algn="l" defTabSz="1097280" rtl="0" eaLnBrk="1" latinLnBrk="0" hangingPunct="1">
+              <a:lnSpc>
+                <a:spcPct val="120000"/>
+              </a:lnSpc>
+              <a:spcBef>
+                <a:spcPts val="600"/>
+              </a:spcBef>
+              <a:buClr>
+                <a:schemeClr val="accent1"/>
+              </a:buClr>
+              <a:buSzPct val="100000"/>
+              <a:buFont typeface="Arial" panose="020B0604020202020204" pitchFamily="34" charset="0"/>
+              <a:buChar char="•"/>
+              <a:defRPr sz="1920" kern="1200">
+                <a:solidFill>
+                  <a:schemeClr val="tx1"/>
+                </a:solidFill>
+                <a:effectLst/>
+                <a:latin typeface="+mn-lt"/>
+                <a:ea typeface="+mn-ea"/>
+                <a:cs typeface="+mn-cs"/>
+              </a:defRPr>
+            </a:lvl3pPr>
+            <a:lvl4pPr marL="1920240" indent="-274320" algn="l" defTabSz="1097280" rtl="0" eaLnBrk="1" latinLnBrk="0" hangingPunct="1">
+              <a:lnSpc>
+                <a:spcPct val="120000"/>
+              </a:lnSpc>
+              <a:spcBef>
+                <a:spcPts val="600"/>
+              </a:spcBef>
+              <a:buClr>
+                <a:schemeClr val="accent1"/>
+              </a:buClr>
+              <a:buSzPct val="100000"/>
+              <a:buFont typeface="Arial" panose="020B0604020202020204" pitchFamily="34" charset="0"/>
+              <a:buChar char="•"/>
+              <a:defRPr sz="1680" kern="1200" cap="none" baseline="0">
+                <a:solidFill>
+                  <a:schemeClr val="tx1"/>
+                </a:solidFill>
+                <a:effectLst/>
+                <a:latin typeface="+mn-lt"/>
+                <a:ea typeface="+mn-ea"/>
+                <a:cs typeface="+mn-cs"/>
+              </a:defRPr>
+            </a:lvl4pPr>
+            <a:lvl5pPr marL="2468880" indent="-274320" algn="l" defTabSz="1097280" rtl="0" eaLnBrk="1" latinLnBrk="0" hangingPunct="1">
+              <a:lnSpc>
+                <a:spcPct val="120000"/>
+              </a:lnSpc>
+              <a:spcBef>
+                <a:spcPts val="600"/>
+              </a:spcBef>
+              <a:buClr>
+                <a:schemeClr val="accent1"/>
+              </a:buClr>
+              <a:buSzPct val="100000"/>
+              <a:buFont typeface="Arial" panose="020B0604020202020204" pitchFamily="34" charset="0"/>
+              <a:buChar char="•"/>
+              <a:defRPr sz="1440" kern="1200">
+                <a:solidFill>
+                  <a:schemeClr val="tx1"/>
+                </a:solidFill>
+                <a:effectLst/>
+                <a:latin typeface="+mn-lt"/>
+                <a:ea typeface="+mn-ea"/>
+                <a:cs typeface="+mn-cs"/>
+              </a:defRPr>
+            </a:lvl5pPr>
+            <a:lvl6pPr marL="3017520" indent="-274320" algn="l" defTabSz="1097280" rtl="0" eaLnBrk="1" latinLnBrk="0" hangingPunct="1">
+              <a:lnSpc>
+                <a:spcPct val="120000"/>
+              </a:lnSpc>
+              <a:spcBef>
+                <a:spcPts val="600"/>
+              </a:spcBef>
+              <a:buClr>
+                <a:schemeClr val="accent1"/>
+              </a:buClr>
+              <a:buSzPct val="100000"/>
+              <a:buFont typeface="Arial" panose="020B0604020202020204" pitchFamily="34" charset="0"/>
+              <a:buChar char="•"/>
+              <a:defRPr sz="1440" kern="1200">
+                <a:solidFill>
+                  <a:schemeClr val="tx1"/>
+                </a:solidFill>
+                <a:effectLst/>
+                <a:latin typeface="+mn-lt"/>
+                <a:ea typeface="+mn-ea"/>
+                <a:cs typeface="+mn-cs"/>
+              </a:defRPr>
+            </a:lvl6pPr>
+            <a:lvl7pPr marL="3566160" indent="-274320" algn="l" defTabSz="1097280" rtl="0" eaLnBrk="1" latinLnBrk="0" hangingPunct="1">
+              <a:lnSpc>
+                <a:spcPct val="120000"/>
+              </a:lnSpc>
+              <a:spcBef>
+                <a:spcPts val="600"/>
+              </a:spcBef>
+              <a:buClr>
+                <a:schemeClr val="accent1"/>
+              </a:buClr>
+              <a:buSzPct val="100000"/>
+              <a:buFont typeface="Arial" panose="020B0604020202020204" pitchFamily="34" charset="0"/>
+              <a:buChar char="•"/>
+              <a:defRPr sz="1440" kern="1200">
+                <a:solidFill>
+                  <a:schemeClr val="tx1"/>
+                </a:solidFill>
+                <a:effectLst/>
+                <a:latin typeface="+mn-lt"/>
+                <a:ea typeface="+mn-ea"/>
+                <a:cs typeface="+mn-cs"/>
+              </a:defRPr>
+            </a:lvl7pPr>
+            <a:lvl8pPr marL="4114800" indent="-274320" algn="l" defTabSz="1097280" rtl="0" eaLnBrk="1" latinLnBrk="0" hangingPunct="1">
+              <a:lnSpc>
+                <a:spcPct val="120000"/>
+              </a:lnSpc>
+              <a:spcBef>
+                <a:spcPts val="600"/>
+              </a:spcBef>
+              <a:buClr>
+                <a:schemeClr val="accent1"/>
+              </a:buClr>
+              <a:buSzPct val="100000"/>
+              <a:buFont typeface="Arial" panose="020B0604020202020204" pitchFamily="34" charset="0"/>
+              <a:buChar char="•"/>
+              <a:defRPr sz="1440" kern="1200" baseline="0">
+                <a:solidFill>
+                  <a:schemeClr val="tx1"/>
+                </a:solidFill>
+                <a:effectLst/>
+                <a:latin typeface="+mn-lt"/>
+                <a:ea typeface="+mn-ea"/>
+                <a:cs typeface="+mn-cs"/>
+              </a:defRPr>
+            </a:lvl8pPr>
+            <a:lvl9pPr marL="4663440" indent="-274320" algn="l" defTabSz="1097280" rtl="0" eaLnBrk="1" latinLnBrk="0" hangingPunct="1">
+              <a:lnSpc>
+                <a:spcPct val="120000"/>
+              </a:lnSpc>
+              <a:spcBef>
+                <a:spcPts val="600"/>
+              </a:spcBef>
+              <a:buClr>
+                <a:schemeClr val="accent1"/>
+              </a:buClr>
+              <a:buSzPct val="100000"/>
+              <a:buFont typeface="Arial" panose="020B0604020202020204" pitchFamily="34" charset="0"/>
+              <a:buChar char="•"/>
+              <a:defRPr sz="1440" kern="1200" baseline="0">
+                <a:solidFill>
+                  <a:schemeClr val="tx1"/>
+                </a:solidFill>
+                <a:effectLst/>
+                <a:latin typeface="+mn-lt"/>
+                <a:ea typeface="+mn-ea"/>
+                <a:cs typeface="+mn-cs"/>
+              </a:defRPr>
+            </a:lvl9pPr>
+          </a:lstStyle>
+          <a:p>
+            <a:r>
+              <a:rPr lang="es-CL" dirty="0"/>
+              <a:t>PATCH /api/</a:t>
+            </a:r>
+            <a:r>
+              <a:rPr lang="es-CL" dirty="0" err="1"/>
+              <a:t>appointments</a:t>
+            </a:r>
+            <a:r>
+              <a:rPr lang="es-CL" dirty="0"/>
+              <a:t>/{id}/status</a:t>
+            </a:r>
+          </a:p>
+          <a:p>
+            <a:r>
+              <a:rPr lang="es-CL" dirty="0"/>
+              <a:t>Doctor (solo su cita) o </a:t>
+            </a:r>
+            <a:r>
+              <a:rPr lang="es-CL" dirty="0" err="1"/>
+              <a:t>Admin</a:t>
+            </a:r>
+            <a:r>
+              <a:rPr lang="es-CL" dirty="0"/>
+              <a:t>.</a:t>
+            </a:r>
+            <a:br>
+              <a:rPr lang="es-CL" dirty="0"/>
+            </a:br>
+            <a:r>
+              <a:rPr lang="es-CL" dirty="0"/>
+              <a:t>(Partimos desde tu </a:t>
+            </a:r>
+            <a:r>
+              <a:rPr lang="es-CL" dirty="0" err="1"/>
+              <a:t>controller</a:t>
+            </a:r>
+            <a:r>
+              <a:rPr lang="es-CL" dirty="0"/>
+              <a:t> actual. )</a:t>
+            </a:r>
+          </a:p>
+          <a:p>
+            <a:r>
+              <a:rPr lang="es-CL" dirty="0" err="1"/>
+              <a:t>Patients</a:t>
+            </a:r>
+            <a:endParaRPr lang="es-CL" dirty="0"/>
+          </a:p>
+          <a:p>
+            <a:r>
+              <a:rPr lang="es-CL" dirty="0"/>
+              <a:t>Todo el </a:t>
+            </a:r>
+            <a:r>
+              <a:rPr lang="es-CL" dirty="0" err="1"/>
+              <a:t>controller</a:t>
+            </a:r>
+            <a:r>
+              <a:rPr lang="es-CL" dirty="0"/>
+              <a:t>: </a:t>
+            </a:r>
+            <a:r>
+              <a:rPr lang="es-CL" dirty="0" err="1"/>
+              <a:t>Doctor,Admin</a:t>
+            </a:r>
+            <a:r>
+              <a:rPr lang="es-CL" dirty="0"/>
+              <a:t> (datos sensibles).</a:t>
+            </a:r>
+          </a:p>
+          <a:p>
+            <a:r>
+              <a:rPr lang="es-CL" dirty="0"/>
+              <a:t>(Opcional) GET /api/</a:t>
+            </a:r>
+            <a:r>
+              <a:rPr lang="es-CL" dirty="0" err="1"/>
+              <a:t>patients</a:t>
+            </a:r>
+            <a:r>
+              <a:rPr lang="es-CL" dirty="0"/>
+              <a:t>/me: </a:t>
+            </a:r>
+            <a:r>
+              <a:rPr lang="es-CL" dirty="0" err="1"/>
+              <a:t>Patient</a:t>
+            </a:r>
+            <a:r>
+              <a:rPr lang="es-CL" dirty="0"/>
+              <a:t> ve solo su ficha.</a:t>
+            </a:r>
+          </a:p>
+          <a:p>
+            <a:r>
+              <a:rPr lang="es-CL" dirty="0" err="1"/>
+              <a:t>Doctors</a:t>
+            </a:r>
+            <a:endParaRPr lang="es-CL" dirty="0"/>
+          </a:p>
+          <a:p>
+            <a:r>
+              <a:rPr lang="es-CL" dirty="0"/>
+              <a:t>Listado/detalle: </a:t>
+            </a:r>
+            <a:r>
+              <a:rPr lang="es-CL" dirty="0" err="1"/>
+              <a:t>AllowAnonymous</a:t>
+            </a:r>
+            <a:r>
+              <a:rPr lang="es-CL" dirty="0"/>
+              <a:t> como ahora.</a:t>
+            </a:r>
+          </a:p>
+          <a:p>
+            <a:r>
+              <a:rPr lang="es-CL" dirty="0"/>
+              <a:t>(Opcional) GET /api/</a:t>
+            </a:r>
+            <a:r>
+              <a:rPr lang="es-CL" dirty="0" err="1"/>
+              <a:t>doctors</a:t>
+            </a:r>
+            <a:r>
+              <a:rPr lang="es-CL" dirty="0"/>
+              <a:t>/me: Doctor ve su perfil.</a:t>
+            </a:r>
+          </a:p>
+        </p:txBody>
+      </p:sp>
+    </p:spTree>
+    <p:extLst>
+      <p:ext uri="{BB962C8B-B14F-4D97-AF65-F5344CB8AC3E}">
+        <p14:creationId xmlns:p14="http://schemas.microsoft.com/office/powerpoint/2010/main" val="2642450934"/>
+      </p:ext>
+    </p:extLst>
+  </p:cSld>
+  <p:clrMapOvr>
+    <a:masterClrMapping/>
+  </p:clrMapOvr>
+</p:sld>
+</file>
+
+<file path=ppt/slides/slide16.xml><?xml version="1.0" encoding="utf-8"?>
+<p:sld xmlns:a="http://schemas.openxmlformats.org/drawingml/2006/main" xmlns:r="http://schemas.openxmlformats.org/officeDocument/2006/relationships" xmlns:p="http://schemas.openxmlformats.org/presentationml/2006/main">
+  <p:cSld>
+    <p:spTree>
+      <p:nvGrpSpPr>
+        <p:cNvPr id="1" name="">
+          <a:extLst>
+            <a:ext uri="{FF2B5EF4-FFF2-40B4-BE49-F238E27FC236}">
+              <a16:creationId xmlns:a16="http://schemas.microsoft.com/office/drawing/2014/main" id="{C83C45A9-3C1F-75B6-3440-0BA4368D2372}"/>
+            </a:ext>
+          </a:extLst>
+        </p:cNvPr>
+        <p:cNvGrpSpPr/>
+        <p:nvPr/>
+      </p:nvGrpSpPr>
+      <p:grpSpPr>
+        <a:xfrm>
+          <a:off x="0" y="0"/>
+          <a:ext cx="0" cy="0"/>
+          <a:chOff x="0" y="0"/>
+          <a:chExt cx="0" cy="0"/>
+        </a:xfrm>
+      </p:grpSpPr>
+      <p:sp>
+        <p:nvSpPr>
+          <p:cNvPr id="2" name="Text 0">
+            <a:extLst>
+              <a:ext uri="{FF2B5EF4-FFF2-40B4-BE49-F238E27FC236}">
+                <a16:creationId xmlns:a16="http://schemas.microsoft.com/office/drawing/2014/main" id="{DEA389BF-4EA5-F613-4727-8A5A02A84577}"/>
+              </a:ext>
+            </a:extLst>
+          </p:cNvPr>
+          <p:cNvSpPr/>
+          <p:nvPr/>
+        </p:nvSpPr>
+        <p:spPr>
+          <a:xfrm>
+            <a:off x="1382417" y="320289"/>
+            <a:ext cx="5063353" cy="505716"/>
+          </a:xfrm>
+          <a:prstGeom prst="rect">
+            <a:avLst/>
+          </a:prstGeom>
+          <a:noFill/>
+          <a:ln/>
+        </p:spPr>
+        <p:txBody>
+          <a:bodyPr wrap="none" lIns="0" tIns="0" rIns="0" bIns="0" rtlCol="0" anchor="t"/>
+          <a:lstStyle/>
+          <a:p>
+            <a:pPr marL="0" indent="0" algn="l">
+              <a:lnSpc>
+                <a:spcPts val="4400"/>
+              </a:lnSpc>
+              <a:buNone/>
+            </a:pPr>
+            <a:r>
+              <a:rPr lang="es-419" sz="3500" noProof="0" dirty="0">
+                <a:solidFill>
+                  <a:srgbClr val="D73AD7"/>
+                </a:solidFill>
+                <a:latin typeface="Source Serif 4 Semi Bold" pitchFamily="34" charset="0"/>
+                <a:ea typeface="Source Serif 4 Semi Bold" pitchFamily="34" charset="-122"/>
+                <a:cs typeface="Source Serif 4 Semi Bold" pitchFamily="34" charset="-120"/>
+              </a:rPr>
+              <a:t>Resultados o Evidencia</a:t>
+            </a:r>
+          </a:p>
+        </p:txBody>
+      </p:sp>
+      <p:sp>
+        <p:nvSpPr>
+          <p:cNvPr id="20" name="Text 7">
+            <a:extLst>
+              <a:ext uri="{FF2B5EF4-FFF2-40B4-BE49-F238E27FC236}">
+                <a16:creationId xmlns:a16="http://schemas.microsoft.com/office/drawing/2014/main" id="{54C77779-4B55-5375-4808-3AED0EB69148}"/>
+              </a:ext>
+            </a:extLst>
+          </p:cNvPr>
+          <p:cNvSpPr/>
+          <p:nvPr/>
+        </p:nvSpPr>
+        <p:spPr>
+          <a:xfrm>
+            <a:off x="773495" y="1332548"/>
+            <a:ext cx="12287250" cy="505716"/>
+          </a:xfrm>
+          <a:prstGeom prst="rect">
+            <a:avLst/>
+          </a:prstGeom>
+          <a:noFill/>
+          <a:ln/>
+        </p:spPr>
+        <p:txBody>
+          <a:bodyPr vert="horz" wrap="square" lIns="0" tIns="0" rIns="0" bIns="0" rtlCol="0" anchor="t">
+            <a:spAutoFit/>
+          </a:bodyPr>
+          <a:lstStyle/>
+          <a:p>
+            <a:pPr marL="246063" lvl="1" defTabSz="404813">
+              <a:lnSpc>
+                <a:spcPct val="150000"/>
+              </a:lnSpc>
+              <a:tabLst>
+                <a:tab pos="16225838" algn="l"/>
+                <a:tab pos="16592550" algn="l"/>
+                <a:tab pos="17124363" algn="l"/>
+              </a:tabLst>
+            </a:pPr>
+            <a:endParaRPr lang="es-419" sz="2400" noProof="0" dirty="0">
+              <a:solidFill>
+                <a:srgbClr val="272525"/>
+              </a:solidFill>
+              <a:latin typeface="Source Serif 4 Semi Bold" pitchFamily="34" charset="0"/>
+              <a:ea typeface="Source Serif 4 Semi Bold" pitchFamily="34" charset="-122"/>
+              <a:cs typeface="Source Serif 4 Semi Bold" pitchFamily="34" charset="-120"/>
+            </a:endParaRPr>
+          </a:p>
+        </p:txBody>
+      </p:sp>
+      <p:pic>
+        <p:nvPicPr>
+          <p:cNvPr id="5" name="Imagen 4">
+            <a:extLst>
+              <a:ext uri="{FF2B5EF4-FFF2-40B4-BE49-F238E27FC236}">
+                <a16:creationId xmlns:a16="http://schemas.microsoft.com/office/drawing/2014/main" id="{C75835E4-D460-0237-D82D-B75819684BFA}"/>
+              </a:ext>
+            </a:extLst>
+          </p:cNvPr>
+          <p:cNvPicPr>
+            <a:picLocks noChangeAspect="1"/>
+          </p:cNvPicPr>
+          <p:nvPr/>
+        </p:nvPicPr>
+        <p:blipFill>
+          <a:blip r:embed="rId3"/>
+          <a:stretch>
+            <a:fillRect/>
+          </a:stretch>
+        </p:blipFill>
+        <p:spPr>
+          <a:xfrm>
+            <a:off x="1244081" y="1103948"/>
+            <a:ext cx="11346077" cy="6897052"/>
+          </a:xfrm>
+          <a:prstGeom prst="rect">
+            <a:avLst/>
+          </a:prstGeom>
+        </p:spPr>
+      </p:pic>
+    </p:spTree>
+    <p:extLst>
+      <p:ext uri="{BB962C8B-B14F-4D97-AF65-F5344CB8AC3E}">
+        <p14:creationId xmlns:p14="http://schemas.microsoft.com/office/powerpoint/2010/main" val="888063565"/>
+      </p:ext>
+    </p:extLst>
+  </p:cSld>
+  <p:clrMapOvr>
+    <a:masterClrMapping/>
+  </p:clrMapOvr>
+</p:sld>
+</file>
+
+<file path=ppt/slides/slide17.xml><?xml version="1.0" encoding="utf-8"?>
+<p:sld xmlns:a="http://schemas.openxmlformats.org/drawingml/2006/main" xmlns:r="http://schemas.openxmlformats.org/officeDocument/2006/relationships" xmlns:p="http://schemas.openxmlformats.org/presentationml/2006/main">
+  <p:cSld>
+    <p:spTree>
+      <p:nvGrpSpPr>
+        <p:cNvPr id="1" name="">
+          <a:extLst>
+            <a:ext uri="{FF2B5EF4-FFF2-40B4-BE49-F238E27FC236}">
+              <a16:creationId xmlns:a16="http://schemas.microsoft.com/office/drawing/2014/main" id="{12DB9498-13B9-10A3-57B0-29D3E01FB8D8}"/>
+            </a:ext>
+          </a:extLst>
+        </p:cNvPr>
+        <p:cNvGrpSpPr/>
+        <p:nvPr/>
+      </p:nvGrpSpPr>
+      <p:grpSpPr>
+        <a:xfrm>
+          <a:off x="0" y="0"/>
+          <a:ext cx="0" cy="0"/>
+          <a:chOff x="0" y="0"/>
+          <a:chExt cx="0" cy="0"/>
+        </a:xfrm>
+      </p:grpSpPr>
+      <p:sp>
+        <p:nvSpPr>
+          <p:cNvPr id="2" name="Text 0">
+            <a:extLst>
+              <a:ext uri="{FF2B5EF4-FFF2-40B4-BE49-F238E27FC236}">
+                <a16:creationId xmlns:a16="http://schemas.microsoft.com/office/drawing/2014/main" id="{E051A928-6668-6D0D-9DB4-D4A73795EBEB}"/>
+              </a:ext>
+            </a:extLst>
+          </p:cNvPr>
+          <p:cNvSpPr/>
+          <p:nvPr/>
+        </p:nvSpPr>
+        <p:spPr>
+          <a:xfrm>
+            <a:off x="1382417" y="320289"/>
+            <a:ext cx="5063353" cy="505716"/>
+          </a:xfrm>
+          <a:prstGeom prst="rect">
+            <a:avLst/>
+          </a:prstGeom>
+          <a:noFill/>
+          <a:ln/>
+        </p:spPr>
+        <p:txBody>
+          <a:bodyPr wrap="none" lIns="0" tIns="0" rIns="0" bIns="0" rtlCol="0" anchor="t"/>
+          <a:lstStyle/>
+          <a:p>
+            <a:pPr marL="0" indent="0" algn="l">
+              <a:lnSpc>
+                <a:spcPts val="4400"/>
+              </a:lnSpc>
+              <a:buNone/>
+            </a:pPr>
+            <a:r>
+              <a:rPr lang="es-419" sz="3500" noProof="0" dirty="0">
+                <a:solidFill>
+                  <a:srgbClr val="D73AD7"/>
+                </a:solidFill>
+                <a:latin typeface="Source Serif 4 Semi Bold" pitchFamily="34" charset="0"/>
+                <a:ea typeface="Source Serif 4 Semi Bold" pitchFamily="34" charset="-122"/>
+                <a:cs typeface="Source Serif 4 Semi Bold" pitchFamily="34" charset="-120"/>
+              </a:rPr>
+              <a:t>Diagrama de Base de Datos</a:t>
+            </a:r>
+          </a:p>
+        </p:txBody>
+      </p:sp>
+      <p:sp>
+        <p:nvSpPr>
+          <p:cNvPr id="20" name="Text 7">
+            <a:extLst>
+              <a:ext uri="{FF2B5EF4-FFF2-40B4-BE49-F238E27FC236}">
+                <a16:creationId xmlns:a16="http://schemas.microsoft.com/office/drawing/2014/main" id="{DFB58816-F6C4-926D-2896-3426C29EB3E1}"/>
+              </a:ext>
+            </a:extLst>
+          </p:cNvPr>
+          <p:cNvSpPr/>
+          <p:nvPr/>
+        </p:nvSpPr>
+        <p:spPr>
+          <a:xfrm>
+            <a:off x="773495" y="1332548"/>
+            <a:ext cx="12287250" cy="505716"/>
+          </a:xfrm>
+          <a:prstGeom prst="rect">
+            <a:avLst/>
+          </a:prstGeom>
+          <a:noFill/>
+          <a:ln/>
+        </p:spPr>
+        <p:txBody>
+          <a:bodyPr vert="horz" wrap="square" lIns="0" tIns="0" rIns="0" bIns="0" rtlCol="0" anchor="t">
+            <a:spAutoFit/>
+          </a:bodyPr>
+          <a:lstStyle/>
+          <a:p>
+            <a:pPr marL="246063" lvl="1" defTabSz="404813">
+              <a:lnSpc>
+                <a:spcPct val="150000"/>
+              </a:lnSpc>
+              <a:tabLst>
+                <a:tab pos="16225838" algn="l"/>
+                <a:tab pos="16592550" algn="l"/>
+                <a:tab pos="17124363" algn="l"/>
+              </a:tabLst>
+            </a:pPr>
+            <a:endParaRPr lang="es-419" sz="2400" noProof="0" dirty="0">
+              <a:solidFill>
+                <a:srgbClr val="272525"/>
+              </a:solidFill>
+              <a:latin typeface="Source Serif 4 Semi Bold" pitchFamily="34" charset="0"/>
+              <a:ea typeface="Source Serif 4 Semi Bold" pitchFamily="34" charset="-122"/>
+              <a:cs typeface="Source Serif 4 Semi Bold" pitchFamily="34" charset="-120"/>
+            </a:endParaRPr>
+          </a:p>
+        </p:txBody>
+      </p:sp>
+      <p:pic>
+        <p:nvPicPr>
+          <p:cNvPr id="4" name="Imagen 3">
+            <a:extLst>
+              <a:ext uri="{FF2B5EF4-FFF2-40B4-BE49-F238E27FC236}">
+                <a16:creationId xmlns:a16="http://schemas.microsoft.com/office/drawing/2014/main" id="{E3071420-8B5A-BD9B-64DA-A1B090A54BF5}"/>
+              </a:ext>
+            </a:extLst>
+          </p:cNvPr>
+          <p:cNvPicPr>
+            <a:picLocks noChangeAspect="1"/>
+          </p:cNvPicPr>
+          <p:nvPr/>
+        </p:nvPicPr>
+        <p:blipFill>
+          <a:blip r:embed="rId3"/>
+          <a:stretch>
+            <a:fillRect/>
+          </a:stretch>
+        </p:blipFill>
+        <p:spPr>
+          <a:xfrm>
+            <a:off x="9108161" y="0"/>
+            <a:ext cx="4981934" cy="7403595"/>
+          </a:xfrm>
+          <a:prstGeom prst="rect">
+            <a:avLst/>
+          </a:prstGeom>
+        </p:spPr>
+      </p:pic>
+    </p:spTree>
+    <p:extLst>
+      <p:ext uri="{BB962C8B-B14F-4D97-AF65-F5344CB8AC3E}">
+        <p14:creationId xmlns:p14="http://schemas.microsoft.com/office/powerpoint/2010/main" val="2980798916"/>
+      </p:ext>
+    </p:extLst>
+  </p:cSld>
+  <p:clrMapOvr>
+    <a:masterClrMapping/>
+  </p:clrMapOvr>
+</p:sld>
+</file>
+
+<file path=ppt/slides/slide18.xml><?xml version="1.0" encoding="utf-8"?>
+<p:sld xmlns:a="http://schemas.openxmlformats.org/drawingml/2006/main" xmlns:r="http://schemas.openxmlformats.org/officeDocument/2006/relationships" xmlns:p="http://schemas.openxmlformats.org/presentationml/2006/main">
+  <p:cSld>
+    <p:spTree>
+      <p:nvGrpSpPr>
+        <p:cNvPr id="1" name="">
+          <a:extLst>
+            <a:ext uri="{FF2B5EF4-FFF2-40B4-BE49-F238E27FC236}">
+              <a16:creationId xmlns:a16="http://schemas.microsoft.com/office/drawing/2014/main" id="{4CA26CE9-3A22-BF8A-4C17-8B63D52D9907}"/>
+            </a:ext>
+          </a:extLst>
+        </p:cNvPr>
+        <p:cNvGrpSpPr/>
+        <p:nvPr/>
+      </p:nvGrpSpPr>
+      <p:grpSpPr>
+        <a:xfrm>
+          <a:off x="0" y="0"/>
+          <a:ext cx="0" cy="0"/>
+          <a:chOff x="0" y="0"/>
+          <a:chExt cx="0" cy="0"/>
+        </a:xfrm>
+      </p:grpSpPr>
+      <p:sp>
+        <p:nvSpPr>
+          <p:cNvPr id="2" name="Text 0">
+            <a:extLst>
+              <a:ext uri="{FF2B5EF4-FFF2-40B4-BE49-F238E27FC236}">
+                <a16:creationId xmlns:a16="http://schemas.microsoft.com/office/drawing/2014/main" id="{346EAC2C-18BB-204D-FB03-7EE53973B1D9}"/>
+              </a:ext>
+            </a:extLst>
+          </p:cNvPr>
+          <p:cNvSpPr/>
+          <p:nvPr/>
+        </p:nvSpPr>
+        <p:spPr>
+          <a:xfrm>
+            <a:off x="1207001" y="326708"/>
+            <a:ext cx="7053143" cy="563285"/>
+          </a:xfrm>
+          <a:prstGeom prst="rect">
+            <a:avLst/>
+          </a:prstGeom>
+          <a:noFill/>
+          <a:ln/>
+        </p:spPr>
+        <p:txBody>
+          <a:bodyPr wrap="none" lIns="0" tIns="0" rIns="0" bIns="0" rtlCol="0" anchor="t"/>
+          <a:lstStyle/>
+          <a:p>
+            <a:pPr marL="0" indent="0" algn="l">
+              <a:lnSpc>
+                <a:spcPts val="4400"/>
+              </a:lnSpc>
+              <a:buNone/>
+            </a:pPr>
+            <a:r>
+              <a:rPr lang="es-419" sz="3500" noProof="0" dirty="0" err="1">
+                <a:solidFill>
+                  <a:srgbClr val="D73AD7"/>
+                </a:solidFill>
+                <a:latin typeface="Source Serif 4 Semi Bold" pitchFamily="34" charset="0"/>
+                <a:ea typeface="Source Serif 4 Semi Bold" pitchFamily="34" charset="-122"/>
+                <a:cs typeface="Source Serif 4 Semi Bold" pitchFamily="34" charset="-120"/>
+              </a:rPr>
+              <a:t>Stack</a:t>
+            </a:r>
+            <a:r>
+              <a:rPr lang="es-419" sz="3500" noProof="0" dirty="0">
+                <a:solidFill>
+                  <a:srgbClr val="D73AD7"/>
+                </a:solidFill>
+                <a:latin typeface="Source Serif 4 Semi Bold" pitchFamily="34" charset="0"/>
+                <a:ea typeface="Source Serif 4 Semi Bold" pitchFamily="34" charset="-122"/>
+                <a:cs typeface="Source Serif 4 Semi Bold" pitchFamily="34" charset="-120"/>
+              </a:rPr>
+              <a:t> Técnico</a:t>
+            </a:r>
+          </a:p>
+        </p:txBody>
+      </p:sp>
+      <p:sp>
+        <p:nvSpPr>
+          <p:cNvPr id="8" name="Rectangle 2">
+            <a:extLst>
+              <a:ext uri="{FF2B5EF4-FFF2-40B4-BE49-F238E27FC236}">
+                <a16:creationId xmlns:a16="http://schemas.microsoft.com/office/drawing/2014/main" id="{9DF37546-4222-4C49-60B1-207E1AEEE201}"/>
+              </a:ext>
+            </a:extLst>
+          </p:cNvPr>
+          <p:cNvSpPr>
+            <a:spLocks noChangeArrowheads="1"/>
+          </p:cNvSpPr>
+          <p:nvPr/>
+        </p:nvSpPr>
+        <p:spPr bwMode="auto">
+          <a:xfrm>
+            <a:off x="1351280" y="3840480"/>
+            <a:ext cx="14630400" cy="0"/>
+          </a:xfrm>
+          <a:prstGeom prst="rect">
+            <a:avLst/>
+          </a:prstGeom>
+          <a:noFill/>
+          <a:ln>
+            <a:noFill/>
+          </a:ln>
+          <a:effectLst/>
+          <a:extLst>
+            <a:ext uri="{909E8E84-426E-40DD-AFC4-6F175D3DCCD1}">
+              <a14:hiddenFill xmlns:a14="http://schemas.microsoft.com/office/drawing/2010/main">
+                <a:solidFill>
+                  <a:schemeClr val="accent1"/>
+                </a:solidFill>
+              </a14:hiddenFill>
+            </a:ext>
+            <a:ext uri="{91240B29-F687-4F45-9708-019B960494DF}">
+              <a14:hiddenLine xmlns:a14="http://schemas.microsoft.com/office/drawing/2010/main" w="9525">
+                <a:solidFill>
+                  <a:schemeClr val="tx1"/>
+                </a:solidFill>
+                <a:miter lim="800000"/>
+                <a:headEnd/>
+                <a:tailEnd/>
+              </a14:hiddenLine>
+            </a:ext>
+            <a:ext uri="{AF507438-7753-43E0-B8FC-AC1667EBCBE1}">
+              <a14:hiddenEffects xmlns:a14="http://schemas.microsoft.com/office/drawing/2010/main">
+                <a:effectLst>
+                  <a:outerShdw dist="35921" dir="2700000" algn="ctr" rotWithShape="0">
+                    <a:schemeClr val="bg2"/>
+                  </a:outerShdw>
+                </a:effectLst>
+              </a14:hiddenEffects>
+            </a:ext>
+          </a:extLst>
+        </p:spPr>
+        <p:txBody>
+          <a:bodyPr vert="horz" wrap="none" lIns="91440" tIns="45720" rIns="91440" bIns="45720" numCol="1" anchor="ctr" anchorCtr="0" compatLnSpc="1">
+            <a:prstTxWarp prst="textNoShape">
+              <a:avLst/>
+            </a:prstTxWarp>
+            <a:spAutoFit/>
+          </a:bodyPr>
+          <a:lstStyle/>
+          <a:p>
+            <a:pPr marL="0" marR="0" lvl="0" indent="0" algn="l" defTabSz="914400" rtl="0" eaLnBrk="0" fontAlgn="base" latinLnBrk="0" hangingPunct="0">
+              <a:lnSpc>
+                <a:spcPct val="100000"/>
+              </a:lnSpc>
+              <a:spcBef>
+                <a:spcPct val="0"/>
+              </a:spcBef>
+              <a:spcAft>
+                <a:spcPct val="0"/>
+              </a:spcAft>
+              <a:buClrTx/>
+              <a:buSzTx/>
+              <a:buFontTx/>
+              <a:buChar char="•"/>
+              <a:tabLst/>
+            </a:pPr>
+            <a:r>
+              <a:rPr kumimoji="0" lang="es-CL" altLang="es-CL" sz="1800" b="0" i="0" u="none" strike="noStrike" cap="none" normalizeH="0" baseline="0" dirty="0" err="1">
+                <a:ln>
+                  <a:noFill/>
+                </a:ln>
+                <a:solidFill>
+                  <a:schemeClr val="tx1"/>
+                </a:solidFill>
+                <a:effectLst/>
+                <a:latin typeface="Arial" panose="020B0604020202020204" pitchFamily="34" charset="0"/>
+              </a:rPr>
+              <a:t>Backend</a:t>
+            </a:r>
+            <a:r>
+              <a:rPr kumimoji="0" lang="es-CL" altLang="es-CL" sz="1800" b="0" i="0" u="none" strike="noStrike" cap="none" normalizeH="0" baseline="0" dirty="0">
+                <a:ln>
+                  <a:noFill/>
+                </a:ln>
+                <a:solidFill>
+                  <a:schemeClr val="tx1"/>
+                </a:solidFill>
+                <a:effectLst/>
+                <a:latin typeface="Arial" panose="020B0604020202020204" pitchFamily="34" charset="0"/>
+              </a:rPr>
+              <a:t>: .NET 8 Web API (C#), </a:t>
+            </a:r>
+            <a:r>
+              <a:rPr kumimoji="0" lang="es-CL" altLang="es-CL" sz="1800" b="0" i="0" u="none" strike="noStrike" cap="none" normalizeH="0" baseline="0" dirty="0" err="1">
+                <a:ln>
+                  <a:noFill/>
+                </a:ln>
+                <a:solidFill>
+                  <a:schemeClr val="tx1"/>
+                </a:solidFill>
+                <a:effectLst/>
+                <a:latin typeface="Arial" panose="020B0604020202020204" pitchFamily="34" charset="0"/>
+              </a:rPr>
+              <a:t>Entity</a:t>
+            </a:r>
+            <a:r>
+              <a:rPr kumimoji="0" lang="es-CL" altLang="es-CL" sz="1800" b="0" i="0" u="none" strike="noStrike" cap="none" normalizeH="0" baseline="0" dirty="0">
+                <a:ln>
+                  <a:noFill/>
+                </a:ln>
+                <a:solidFill>
+                  <a:schemeClr val="tx1"/>
+                </a:solidFill>
+                <a:effectLst/>
+                <a:latin typeface="Arial" panose="020B0604020202020204" pitchFamily="34" charset="0"/>
+              </a:rPr>
+              <a:t> Framework Core, SQL Server</a:t>
+            </a:r>
+          </a:p>
+          <a:p>
+            <a:pPr marL="0" marR="0" lvl="0" indent="0" algn="l" defTabSz="914400" rtl="0" eaLnBrk="0" fontAlgn="base" latinLnBrk="0" hangingPunct="0">
+              <a:lnSpc>
+                <a:spcPct val="100000"/>
+              </a:lnSpc>
+              <a:spcBef>
+                <a:spcPct val="0"/>
+              </a:spcBef>
+              <a:spcAft>
+                <a:spcPct val="0"/>
+              </a:spcAft>
+              <a:buClrTx/>
+              <a:buSzTx/>
+              <a:buFontTx/>
+              <a:buChar char="•"/>
+              <a:tabLst/>
+            </a:pPr>
+            <a:r>
+              <a:rPr kumimoji="0" lang="es-CL" altLang="es-CL" sz="1800" b="0" i="0" u="none" strike="noStrike" cap="none" normalizeH="0" baseline="0" dirty="0" err="1">
+                <a:ln>
+                  <a:noFill/>
+                </a:ln>
+                <a:solidFill>
+                  <a:schemeClr val="tx1"/>
+                </a:solidFill>
+                <a:effectLst/>
+                <a:latin typeface="Arial" panose="020B0604020202020204" pitchFamily="34" charset="0"/>
+              </a:rPr>
+              <a:t>Frontend</a:t>
+            </a:r>
+            <a:r>
+              <a:rPr kumimoji="0" lang="es-CL" altLang="es-CL" sz="1800" b="0" i="0" u="none" strike="noStrike" cap="none" normalizeH="0" baseline="0" dirty="0">
+                <a:ln>
+                  <a:noFill/>
+                </a:ln>
+                <a:solidFill>
+                  <a:schemeClr val="tx1"/>
+                </a:solidFill>
+                <a:effectLst/>
+                <a:latin typeface="Arial" panose="020B0604020202020204" pitchFamily="34" charset="0"/>
+              </a:rPr>
+              <a:t>: </a:t>
+            </a:r>
+            <a:r>
+              <a:rPr kumimoji="0" lang="es-CL" altLang="es-CL" sz="1800" b="0" i="0" u="none" strike="noStrike" cap="none" normalizeH="0" baseline="0" dirty="0" err="1">
+                <a:ln>
+                  <a:noFill/>
+                </a:ln>
+                <a:solidFill>
+                  <a:schemeClr val="tx1"/>
+                </a:solidFill>
+                <a:effectLst/>
+                <a:latin typeface="Arial" panose="020B0604020202020204" pitchFamily="34" charset="0"/>
+              </a:rPr>
+              <a:t>React</a:t>
+            </a:r>
+            <a:r>
+              <a:rPr kumimoji="0" lang="es-CL" altLang="es-CL" sz="1800" b="0" i="0" u="none" strike="noStrike" cap="none" normalizeH="0" baseline="0" dirty="0">
+                <a:ln>
+                  <a:noFill/>
+                </a:ln>
+                <a:solidFill>
+                  <a:schemeClr val="tx1"/>
+                </a:solidFill>
+                <a:effectLst/>
+                <a:latin typeface="Arial" panose="020B0604020202020204" pitchFamily="34" charset="0"/>
+              </a:rPr>
+              <a:t> + Vite + </a:t>
+            </a:r>
+            <a:r>
+              <a:rPr kumimoji="0" lang="es-CL" altLang="es-CL" sz="1800" b="0" i="0" u="none" strike="noStrike" cap="none" normalizeH="0" baseline="0" dirty="0" err="1">
+                <a:ln>
+                  <a:noFill/>
+                </a:ln>
+                <a:solidFill>
+                  <a:schemeClr val="tx1"/>
+                </a:solidFill>
+                <a:effectLst/>
+                <a:latin typeface="Arial" panose="020B0604020202020204" pitchFamily="34" charset="0"/>
+              </a:rPr>
+              <a:t>TypeScript</a:t>
+            </a:r>
+            <a:r>
+              <a:rPr kumimoji="0" lang="es-CL" altLang="es-CL" sz="1800" b="0" i="0" u="none" strike="noStrike" cap="none" normalizeH="0" baseline="0" dirty="0">
+                <a:ln>
+                  <a:noFill/>
+                </a:ln>
+                <a:solidFill>
+                  <a:schemeClr val="tx1"/>
+                </a:solidFill>
+                <a:effectLst/>
+                <a:latin typeface="Arial" panose="020B0604020202020204" pitchFamily="34" charset="0"/>
+              </a:rPr>
+              <a:t> + </a:t>
+            </a:r>
+            <a:r>
+              <a:rPr kumimoji="0" lang="es-CL" altLang="es-CL" sz="1800" b="0" i="0" u="none" strike="noStrike" cap="none" normalizeH="0" baseline="0" dirty="0" err="1">
+                <a:ln>
+                  <a:noFill/>
+                </a:ln>
+                <a:solidFill>
+                  <a:schemeClr val="tx1"/>
+                </a:solidFill>
+                <a:effectLst/>
+                <a:latin typeface="Arial" panose="020B0604020202020204" pitchFamily="34" charset="0"/>
+              </a:rPr>
+              <a:t>Tailwind</a:t>
+            </a:r>
+            <a:r>
+              <a:rPr kumimoji="0" lang="es-CL" altLang="es-CL" sz="1800" b="0" i="0" u="none" strike="noStrike" cap="none" normalizeH="0" baseline="0" dirty="0">
+                <a:ln>
+                  <a:noFill/>
+                </a:ln>
+                <a:solidFill>
+                  <a:schemeClr val="tx1"/>
+                </a:solidFill>
+                <a:effectLst/>
+                <a:latin typeface="Arial" panose="020B0604020202020204" pitchFamily="34" charset="0"/>
+              </a:rPr>
+              <a:t> CSS</a:t>
+            </a:r>
+          </a:p>
+          <a:p>
+            <a:pPr marL="0" marR="0" lvl="0" indent="0" algn="l" defTabSz="914400" rtl="0" eaLnBrk="0" fontAlgn="base" latinLnBrk="0" hangingPunct="0">
+              <a:lnSpc>
+                <a:spcPct val="100000"/>
+              </a:lnSpc>
+              <a:spcBef>
+                <a:spcPct val="0"/>
+              </a:spcBef>
+              <a:spcAft>
+                <a:spcPct val="0"/>
+              </a:spcAft>
+              <a:buClrTx/>
+              <a:buSzTx/>
+              <a:buFontTx/>
+              <a:buChar char="•"/>
+              <a:tabLst/>
+            </a:pPr>
+            <a:r>
+              <a:rPr kumimoji="0" lang="es-CL" altLang="es-CL" sz="1800" b="0" i="0" u="none" strike="noStrike" cap="none" normalizeH="0" baseline="0" dirty="0">
+                <a:ln>
+                  <a:noFill/>
+                </a:ln>
+                <a:solidFill>
+                  <a:schemeClr val="tx1"/>
+                </a:solidFill>
+                <a:effectLst/>
+                <a:latin typeface="Arial" panose="020B0604020202020204" pitchFamily="34" charset="0"/>
+              </a:rPr>
+              <a:t>IA: </a:t>
+            </a:r>
+            <a:r>
+              <a:rPr kumimoji="0" lang="es-CL" altLang="es-CL" sz="1800" b="0" i="0" u="none" strike="noStrike" cap="none" normalizeH="0" baseline="0" dirty="0" err="1">
+                <a:ln>
+                  <a:noFill/>
+                </a:ln>
+                <a:solidFill>
+                  <a:schemeClr val="tx1"/>
+                </a:solidFill>
+                <a:effectLst/>
+                <a:latin typeface="Arial" panose="020B0604020202020204" pitchFamily="34" charset="0"/>
+              </a:rPr>
+              <a:t>OpenAI</a:t>
+            </a:r>
+            <a:r>
+              <a:rPr kumimoji="0" lang="es-CL" altLang="es-CL" sz="1800" b="0" i="0" u="none" strike="noStrike" cap="none" normalizeH="0" baseline="0" dirty="0">
+                <a:ln>
+                  <a:noFill/>
+                </a:ln>
+                <a:solidFill>
+                  <a:schemeClr val="tx1"/>
+                </a:solidFill>
+                <a:effectLst/>
+                <a:latin typeface="Arial" panose="020B0604020202020204" pitchFamily="34" charset="0"/>
+              </a:rPr>
+              <a:t> API (modelo GPT‑4o o GPT‑5, a definir en configuración)</a:t>
+            </a:r>
+          </a:p>
+          <a:p>
+            <a:pPr marL="0" marR="0" lvl="0" indent="0" algn="l" defTabSz="914400" rtl="0" eaLnBrk="0" fontAlgn="base" latinLnBrk="0" hangingPunct="0">
+              <a:lnSpc>
+                <a:spcPct val="100000"/>
+              </a:lnSpc>
+              <a:spcBef>
+                <a:spcPct val="0"/>
+              </a:spcBef>
+              <a:spcAft>
+                <a:spcPct val="0"/>
+              </a:spcAft>
+              <a:buClrTx/>
+              <a:buSzTx/>
+              <a:buFontTx/>
+              <a:buChar char="•"/>
+              <a:tabLst/>
+            </a:pPr>
+            <a:r>
+              <a:rPr kumimoji="0" lang="es-CL" altLang="es-CL" sz="1800" b="0" i="0" u="none" strike="noStrike" cap="none" normalizeH="0" baseline="0" dirty="0">
+                <a:ln>
+                  <a:noFill/>
+                </a:ln>
+                <a:solidFill>
+                  <a:schemeClr val="tx1"/>
+                </a:solidFill>
+                <a:effectLst/>
+                <a:latin typeface="Arial" panose="020B0604020202020204" pitchFamily="34" charset="0"/>
+              </a:rPr>
+              <a:t>Autenticación: JWT con roles (Paciente, Médico, Administrador)</a:t>
+            </a:r>
+          </a:p>
+          <a:p>
+            <a:pPr marL="0" marR="0" lvl="0" indent="0" algn="l" defTabSz="914400" rtl="0" eaLnBrk="0" fontAlgn="base" latinLnBrk="0" hangingPunct="0">
+              <a:lnSpc>
+                <a:spcPct val="100000"/>
+              </a:lnSpc>
+              <a:spcBef>
+                <a:spcPct val="0"/>
+              </a:spcBef>
+              <a:spcAft>
+                <a:spcPct val="0"/>
+              </a:spcAft>
+              <a:buClrTx/>
+              <a:buSzTx/>
+              <a:buFontTx/>
+              <a:buChar char="•"/>
+              <a:tabLst/>
+            </a:pPr>
+            <a:r>
+              <a:rPr kumimoji="0" lang="es-CL" altLang="es-CL" sz="1800" b="0" i="0" u="none" strike="noStrike" cap="none" normalizeH="0" baseline="0" dirty="0" err="1">
+                <a:ln>
+                  <a:noFill/>
+                </a:ln>
+                <a:solidFill>
+                  <a:schemeClr val="tx1"/>
+                </a:solidFill>
+                <a:effectLst/>
+                <a:latin typeface="Arial" panose="020B0604020202020204" pitchFamily="34" charset="0"/>
+              </a:rPr>
+              <a:t>Observabilidad</a:t>
+            </a:r>
+            <a:r>
+              <a:rPr kumimoji="0" lang="es-CL" altLang="es-CL" sz="1800" b="0" i="0" u="none" strike="noStrike" cap="none" normalizeH="0" baseline="0" dirty="0">
+                <a:ln>
+                  <a:noFill/>
+                </a:ln>
+                <a:solidFill>
+                  <a:schemeClr val="tx1"/>
+                </a:solidFill>
+                <a:effectLst/>
+                <a:latin typeface="Arial" panose="020B0604020202020204" pitchFamily="34" charset="0"/>
+              </a:rPr>
+              <a:t>: logs estructurados y métricas básicas</a:t>
+            </a:r>
+          </a:p>
+        </p:txBody>
+      </p:sp>
+    </p:spTree>
+    <p:extLst>
+      <p:ext uri="{BB962C8B-B14F-4D97-AF65-F5344CB8AC3E}">
+        <p14:creationId xmlns:p14="http://schemas.microsoft.com/office/powerpoint/2010/main" val="348460117"/>
+      </p:ext>
+    </p:extLst>
+  </p:cSld>
+  <p:clrMapOvr>
+    <a:masterClrMapping/>
+  </p:clrMapOvr>
+</p:sld>
+</file>
+
+<file path=ppt/slides/slide19.xml><?xml version="1.0" encoding="utf-8"?>
 <p:sld xmlns:a="http://schemas.openxmlformats.org/drawingml/2006/main" xmlns:r="http://schemas.openxmlformats.org/officeDocument/2006/relationships" xmlns:p="http://schemas.openxmlformats.org/presentationml/2006/main">
   <p:cSld>
     <p:spTree>
@@ -7131,89 +9585,6 @@
     <p:extLst>
       <p:ext uri="{BB962C8B-B14F-4D97-AF65-F5344CB8AC3E}">
         <p14:creationId xmlns:p14="http://schemas.microsoft.com/office/powerpoint/2010/main" val="2795812136"/>
-      </p:ext>
-    </p:extLst>
-  </p:cSld>
-  <p:clrMapOvr>
-    <a:masterClrMapping/>
-  </p:clrMapOvr>
-</p:sld>
-</file>
-
-<file path=ppt/slides/slide15.xml><?xml version="1.0" encoding="utf-8"?>
-<p:sld xmlns:a="http://schemas.openxmlformats.org/drawingml/2006/main" xmlns:r="http://schemas.openxmlformats.org/officeDocument/2006/relationships" xmlns:p="http://schemas.openxmlformats.org/presentationml/2006/main">
-  <p:cSld>
-    <p:spTree>
-      <p:nvGrpSpPr>
-        <p:cNvPr id="1" name="">
-          <a:extLst>
-            <a:ext uri="{FF2B5EF4-FFF2-40B4-BE49-F238E27FC236}">
-              <a16:creationId xmlns:a16="http://schemas.microsoft.com/office/drawing/2014/main" id="{8686BD5C-45C9-F1FE-5B2B-29665E9830B2}"/>
-            </a:ext>
-          </a:extLst>
-        </p:cNvPr>
-        <p:cNvGrpSpPr/>
-        <p:nvPr/>
-      </p:nvGrpSpPr>
-      <p:grpSpPr>
-        <a:xfrm>
-          <a:off x="0" y="0"/>
-          <a:ext cx="0" cy="0"/>
-          <a:chOff x="0" y="0"/>
-          <a:chExt cx="0" cy="0"/>
-        </a:xfrm>
-      </p:grpSpPr>
-      <p:sp>
-        <p:nvSpPr>
-          <p:cNvPr id="2" name="Text 0">
-            <a:extLst>
-              <a:ext uri="{FF2B5EF4-FFF2-40B4-BE49-F238E27FC236}">
-                <a16:creationId xmlns:a16="http://schemas.microsoft.com/office/drawing/2014/main" id="{23B898BD-CD4C-C20E-DD22-C201D3AA7B0E}"/>
-              </a:ext>
-            </a:extLst>
-          </p:cNvPr>
-          <p:cNvSpPr/>
-          <p:nvPr/>
-        </p:nvSpPr>
-        <p:spPr>
-          <a:xfrm>
-            <a:off x="2637986" y="3057993"/>
-            <a:ext cx="8604918" cy="1850863"/>
-          </a:xfrm>
-          <a:prstGeom prst="rect">
-            <a:avLst/>
-          </a:prstGeom>
-          <a:noFill/>
-          <a:ln/>
-        </p:spPr>
-        <p:txBody>
-          <a:bodyPr wrap="none" lIns="0" tIns="0" rIns="0" bIns="0" rtlCol="0" anchor="t"/>
-          <a:lstStyle/>
-          <a:p>
-            <a:pPr marL="0" indent="0" algn="ctr">
-              <a:lnSpc>
-                <a:spcPts val="4400"/>
-              </a:lnSpc>
-              <a:buNone/>
-            </a:pPr>
-            <a:r>
-              <a:rPr lang="es-419" sz="8000" noProof="0" dirty="0">
-                <a:solidFill>
-                  <a:srgbClr val="D73AD7"/>
-                </a:solidFill>
-                <a:latin typeface="Source Serif 4 Semi Bold" pitchFamily="34" charset="0"/>
-                <a:ea typeface="Source Serif 4 Semi Bold" pitchFamily="34" charset="-122"/>
-                <a:cs typeface="Source Serif 4 Semi Bold" pitchFamily="34" charset="-120"/>
-              </a:rPr>
-              <a:t>¿Preguntas?</a:t>
-            </a:r>
-          </a:p>
-        </p:txBody>
-      </p:sp>
-    </p:spTree>
-    <p:extLst>
-      <p:ext uri="{BB962C8B-B14F-4D97-AF65-F5344CB8AC3E}">
-        <p14:creationId xmlns:p14="http://schemas.microsoft.com/office/powerpoint/2010/main" val="2588198695"/>
       </p:ext>
     </p:extLst>
   </p:cSld>
@@ -7488,6 +9859,89 @@
         </p:txBody>
       </p:sp>
     </p:spTree>
+  </p:cSld>
+  <p:clrMapOvr>
+    <a:masterClrMapping/>
+  </p:clrMapOvr>
+</p:sld>
+</file>
+
+<file path=ppt/slides/slide20.xml><?xml version="1.0" encoding="utf-8"?>
+<p:sld xmlns:a="http://schemas.openxmlformats.org/drawingml/2006/main" xmlns:r="http://schemas.openxmlformats.org/officeDocument/2006/relationships" xmlns:p="http://schemas.openxmlformats.org/presentationml/2006/main">
+  <p:cSld>
+    <p:spTree>
+      <p:nvGrpSpPr>
+        <p:cNvPr id="1" name="">
+          <a:extLst>
+            <a:ext uri="{FF2B5EF4-FFF2-40B4-BE49-F238E27FC236}">
+              <a16:creationId xmlns:a16="http://schemas.microsoft.com/office/drawing/2014/main" id="{8686BD5C-45C9-F1FE-5B2B-29665E9830B2}"/>
+            </a:ext>
+          </a:extLst>
+        </p:cNvPr>
+        <p:cNvGrpSpPr/>
+        <p:nvPr/>
+      </p:nvGrpSpPr>
+      <p:grpSpPr>
+        <a:xfrm>
+          <a:off x="0" y="0"/>
+          <a:ext cx="0" cy="0"/>
+          <a:chOff x="0" y="0"/>
+          <a:chExt cx="0" cy="0"/>
+        </a:xfrm>
+      </p:grpSpPr>
+      <p:sp>
+        <p:nvSpPr>
+          <p:cNvPr id="2" name="Text 0">
+            <a:extLst>
+              <a:ext uri="{FF2B5EF4-FFF2-40B4-BE49-F238E27FC236}">
+                <a16:creationId xmlns:a16="http://schemas.microsoft.com/office/drawing/2014/main" id="{23B898BD-CD4C-C20E-DD22-C201D3AA7B0E}"/>
+              </a:ext>
+            </a:extLst>
+          </p:cNvPr>
+          <p:cNvSpPr/>
+          <p:nvPr/>
+        </p:nvSpPr>
+        <p:spPr>
+          <a:xfrm>
+            <a:off x="2637986" y="3057993"/>
+            <a:ext cx="8604918" cy="1850863"/>
+          </a:xfrm>
+          <a:prstGeom prst="rect">
+            <a:avLst/>
+          </a:prstGeom>
+          <a:noFill/>
+          <a:ln/>
+        </p:spPr>
+        <p:txBody>
+          <a:bodyPr wrap="none" lIns="0" tIns="0" rIns="0" bIns="0" rtlCol="0" anchor="t"/>
+          <a:lstStyle/>
+          <a:p>
+            <a:pPr marL="0" indent="0" algn="ctr">
+              <a:lnSpc>
+                <a:spcPts val="4400"/>
+              </a:lnSpc>
+              <a:buNone/>
+            </a:pPr>
+            <a:r>
+              <a:rPr lang="es-419" sz="8000" noProof="0" dirty="0">
+                <a:solidFill>
+                  <a:srgbClr val="D73AD7"/>
+                </a:solidFill>
+                <a:latin typeface="Source Serif 4 Semi Bold" pitchFamily="34" charset="0"/>
+                <a:ea typeface="Source Serif 4 Semi Bold" pitchFamily="34" charset="-122"/>
+                <a:cs typeface="Source Serif 4 Semi Bold" pitchFamily="34" charset="-120"/>
+              </a:rPr>
+              <a:t>¿Preguntas?</a:t>
+            </a:r>
+          </a:p>
+        </p:txBody>
+      </p:sp>
+    </p:spTree>
+    <p:extLst>
+      <p:ext uri="{BB962C8B-B14F-4D97-AF65-F5344CB8AC3E}">
+        <p14:creationId xmlns:p14="http://schemas.microsoft.com/office/powerpoint/2010/main" val="2588198695"/>
+      </p:ext>
+    </p:extLst>
   </p:cSld>
   <p:clrMapOvr>
     <a:masterClrMapping/>

--- a/Fase 1/Evidencias Grupales/MediTriage.pptx
+++ b/Fase 1/Evidencias Grupales/MediTriage.pptx
@@ -2342,7 +2342,7 @@
           <a:p>
             <a:fld id="{48A87A34-81AB-432B-8DAE-1953F412C126}" type="datetimeFigureOut">
               <a:rPr lang="en-US" smtClean="0"/>
-              <a:t>9/4/2025</a:t>
+              <a:t>9/11/2025</a:t>
             </a:fld>
             <a:endParaRPr lang="en-US" dirty="0"/>
           </a:p>
@@ -2554,7 +2554,7 @@
           <a:p>
             <a:fld id="{48A87A34-81AB-432B-8DAE-1953F412C126}" type="datetimeFigureOut">
               <a:rPr lang="en-US" smtClean="0"/>
-              <a:t>9/4/2025</a:t>
+              <a:t>9/11/2025</a:t>
             </a:fld>
             <a:endParaRPr lang="en-US" dirty="0"/>
           </a:p>
@@ -2770,7 +2770,7 @@
           <a:p>
             <a:fld id="{48A87A34-81AB-432B-8DAE-1953F412C126}" type="datetimeFigureOut">
               <a:rPr lang="en-US" smtClean="0"/>
-              <a:t>9/4/2025</a:t>
+              <a:t>9/11/2025</a:t>
             </a:fld>
             <a:endParaRPr lang="en-US" dirty="0"/>
           </a:p>
@@ -3212,7 +3212,7 @@
           <a:p>
             <a:fld id="{48A87A34-81AB-432B-8DAE-1953F412C126}" type="datetimeFigureOut">
               <a:rPr lang="en-US" smtClean="0"/>
-              <a:t>9/4/2025</a:t>
+              <a:t>9/11/2025</a:t>
             </a:fld>
             <a:endParaRPr lang="en-US" dirty="0"/>
           </a:p>
@@ -3552,7 +3552,7 @@
           <a:p>
             <a:fld id="{48A87A34-81AB-432B-8DAE-1953F412C126}" type="datetimeFigureOut">
               <a:rPr lang="en-US" smtClean="0"/>
-              <a:t>9/4/2025</a:t>
+              <a:t>9/11/2025</a:t>
             </a:fld>
             <a:endParaRPr lang="en-US" dirty="0"/>
           </a:p>
@@ -3821,7 +3821,7 @@
           <a:p>
             <a:fld id="{48A87A34-81AB-432B-8DAE-1953F412C126}" type="datetimeFigureOut">
               <a:rPr lang="en-US" smtClean="0"/>
-              <a:t>9/4/2025</a:t>
+              <a:t>9/11/2025</a:t>
             </a:fld>
             <a:endParaRPr lang="en-US" dirty="0"/>
           </a:p>
@@ -4238,7 +4238,7 @@
           <a:p>
             <a:fld id="{48A87A34-81AB-432B-8DAE-1953F412C126}" type="datetimeFigureOut">
               <a:rPr lang="en-US" smtClean="0"/>
-              <a:t>9/4/2025</a:t>
+              <a:t>9/11/2025</a:t>
             </a:fld>
             <a:endParaRPr lang="en-US" dirty="0"/>
           </a:p>
@@ -4388,7 +4388,7 @@
           <a:p>
             <a:fld id="{48A87A34-81AB-432B-8DAE-1953F412C126}" type="datetimeFigureOut">
               <a:rPr lang="en-US" smtClean="0"/>
-              <a:t>9/4/2025</a:t>
+              <a:t>9/11/2025</a:t>
             </a:fld>
             <a:endParaRPr lang="en-US" dirty="0"/>
           </a:p>
@@ -4515,7 +4515,7 @@
           <a:p>
             <a:fld id="{48A87A34-81AB-432B-8DAE-1953F412C126}" type="datetimeFigureOut">
               <a:rPr lang="en-US" smtClean="0"/>
-              <a:t>9/4/2025</a:t>
+              <a:t>9/11/2025</a:t>
             </a:fld>
             <a:endParaRPr lang="en-US" dirty="0"/>
           </a:p>
@@ -4767,7 +4767,7 @@
           <a:p>
             <a:fld id="{48A87A34-81AB-432B-8DAE-1953F412C126}" type="datetimeFigureOut">
               <a:rPr lang="en-US" smtClean="0"/>
-              <a:t>9/4/2025</a:t>
+              <a:t>9/11/2025</a:t>
             </a:fld>
             <a:endParaRPr lang="en-US" dirty="0"/>
           </a:p>
@@ -5214,7 +5214,7 @@
             <a:fld id="{48A87A34-81AB-432B-8DAE-1953F412C126}" type="datetimeFigureOut">
               <a:rPr lang="en-US" smtClean="0"/>
               <a:pPr/>
-              <a:t>9/4/2025</a:t>
+              <a:t>9/11/2025</a:t>
             </a:fld>
             <a:endParaRPr lang="en-US" dirty="0"/>
           </a:p>
@@ -5543,7 +5543,7 @@
             <a:fld id="{48A87A34-81AB-432B-8DAE-1953F412C126}" type="datetimeFigureOut">
               <a:rPr lang="en-US" smtClean="0"/>
               <a:pPr/>
-              <a:t>9/4/2025</a:t>
+              <a:t>9/11/2025</a:t>
             </a:fld>
             <a:endParaRPr lang="en-US" dirty="0"/>
           </a:p>
@@ -11730,7 +11730,7 @@
           <p:nvPr>
             <p:extLst>
               <p:ext uri="{D42A27DB-BD31-4B8C-83A1-F6EECF244321}">
-                <p14:modId xmlns:p14="http://schemas.microsoft.com/office/powerpoint/2010/main" val="1558104067"/>
+                <p14:modId xmlns:p14="http://schemas.microsoft.com/office/powerpoint/2010/main" val="805752228"/>
               </p:ext>
             </p:extLst>
           </p:nvPr>
@@ -12812,12 +12812,12 @@
                         <a:buNone/>
                       </a:pPr>
                       <a:r>
-                        <a:rPr lang="es-419" sz="2000" u="none" strike="noStrike">
+                        <a:rPr lang="es-419" sz="2000" u="none" strike="noStrike" dirty="0">
                           <a:effectLst/>
                         </a:rPr>
-                        <a:t>Semana 15</a:t>
+                        <a:t>Semana 13,14</a:t>
                       </a:r>
-                      <a:endParaRPr lang="es-419" sz="2000" b="0" i="0" u="none" strike="noStrike">
+                      <a:endParaRPr lang="es-419" sz="2000" b="0" i="0" u="none" strike="noStrike" dirty="0">
                         <a:solidFill>
                           <a:srgbClr val="000000"/>
                         </a:solidFill>
@@ -12894,12 +12894,12 @@
                         <a:buNone/>
                       </a:pPr>
                       <a:r>
-                        <a:rPr lang="es-419" sz="2000" u="none" strike="noStrike">
+                        <a:rPr lang="es-419" sz="2000" u="none" strike="noStrike" dirty="0">
                           <a:effectLst/>
                         </a:rPr>
-                        <a:t>Semana 16</a:t>
+                        <a:t>Semana 15</a:t>
                       </a:r>
-                      <a:endParaRPr lang="es-419" sz="2000" b="0" i="0" u="none" strike="noStrike">
+                      <a:endParaRPr lang="es-419" sz="2000" b="0" i="0" u="none" strike="noStrike" dirty="0">
                         <a:solidFill>
                           <a:srgbClr val="000000"/>
                         </a:solidFill>
@@ -12979,7 +12979,7 @@
                         <a:rPr lang="es-419" sz="2000" u="none" strike="noStrike" dirty="0">
                           <a:effectLst/>
                         </a:rPr>
-                        <a:t>Semanas 17, 18</a:t>
+                        <a:t>Semanas 15</a:t>
                       </a:r>
                       <a:endParaRPr lang="es-419" sz="2000" b="0" i="0" u="none" strike="noStrike" dirty="0">
                         <a:solidFill>
@@ -13035,7 +13035,7 @@
         </p:nvSpPr>
         <p:spPr>
           <a:xfrm>
-            <a:off x="837724" y="1130618"/>
+            <a:off x="767385" y="285868"/>
             <a:ext cx="5632490" cy="704017"/>
           </a:xfrm>
           <a:prstGeom prst="rect">
@@ -13088,7 +13088,7 @@
         </p:nvSpPr>
         <p:spPr>
           <a:xfrm>
-            <a:off x="837724" y="2313384"/>
+            <a:off x="674132" y="898858"/>
             <a:ext cx="12954952" cy="383024"/>
           </a:xfrm>
           <a:prstGeom prst="rect">
@@ -13152,7 +13152,7 @@
         </p:nvSpPr>
         <p:spPr>
           <a:xfrm>
-            <a:off x="837724" y="2965609"/>
+            <a:off x="427197" y="1476136"/>
             <a:ext cx="4158734" cy="2138482"/>
           </a:xfrm>
           <a:prstGeom prst="roundRect">
@@ -13186,7 +13186,7 @@
         </p:nvSpPr>
         <p:spPr>
           <a:xfrm>
-            <a:off x="1084659" y="3212544"/>
+            <a:off x="1001493" y="1576621"/>
             <a:ext cx="3015139" cy="351949"/>
           </a:xfrm>
           <a:prstGeom prst="rect">
@@ -13228,7 +13228,7 @@
         </p:nvSpPr>
         <p:spPr>
           <a:xfrm>
-            <a:off x="1084659" y="3708083"/>
+            <a:off x="674132" y="1991251"/>
             <a:ext cx="3664863" cy="1149072"/>
           </a:xfrm>
           <a:prstGeom prst="rect">
@@ -13270,7 +13270,7 @@
         </p:nvSpPr>
         <p:spPr>
           <a:xfrm>
-            <a:off x="5235773" y="2965609"/>
+            <a:off x="4663017" y="1429259"/>
             <a:ext cx="4158734" cy="2138482"/>
           </a:xfrm>
           <a:prstGeom prst="roundRect">
@@ -13304,7 +13304,7 @@
         </p:nvSpPr>
         <p:spPr>
           <a:xfrm>
-            <a:off x="5482709" y="3212544"/>
+            <a:off x="4909953" y="1676194"/>
             <a:ext cx="3015139" cy="351949"/>
           </a:xfrm>
           <a:prstGeom prst="rect">
@@ -13346,7 +13346,7 @@
         </p:nvSpPr>
         <p:spPr>
           <a:xfrm>
-            <a:off x="5482709" y="3708083"/>
+            <a:off x="4909953" y="2171733"/>
             <a:ext cx="3664863" cy="766048"/>
           </a:xfrm>
           <a:prstGeom prst="rect">
@@ -13388,7 +13388,7 @@
         </p:nvSpPr>
         <p:spPr>
           <a:xfrm>
-            <a:off x="9633823" y="2965609"/>
+            <a:off x="9061067" y="1429259"/>
             <a:ext cx="4158853" cy="2138482"/>
           </a:xfrm>
           <a:prstGeom prst="roundRect">
@@ -13422,7 +13422,7 @@
         </p:nvSpPr>
         <p:spPr>
           <a:xfrm>
-            <a:off x="9880759" y="3212544"/>
+            <a:off x="9308003" y="1676194"/>
             <a:ext cx="3015139" cy="351949"/>
           </a:xfrm>
           <a:prstGeom prst="rect">
@@ -13464,7 +13464,7 @@
         </p:nvSpPr>
         <p:spPr>
           <a:xfrm>
-            <a:off x="9880759" y="3708083"/>
+            <a:off x="9308003" y="2171733"/>
             <a:ext cx="3664982" cy="1149072"/>
           </a:xfrm>
           <a:prstGeom prst="rect">
@@ -13506,7 +13506,7 @@
         </p:nvSpPr>
         <p:spPr>
           <a:xfrm>
-            <a:off x="837724" y="5343406"/>
+            <a:off x="366344" y="3694999"/>
             <a:ext cx="6357818" cy="1755458"/>
           </a:xfrm>
           <a:prstGeom prst="roundRect">
@@ -13540,7 +13540,7 @@
         </p:nvSpPr>
         <p:spPr>
           <a:xfrm>
-            <a:off x="1084659" y="5590342"/>
+            <a:off x="613279" y="3941935"/>
             <a:ext cx="3015139" cy="351949"/>
           </a:xfrm>
           <a:prstGeom prst="rect">
@@ -13582,7 +13582,7 @@
         </p:nvSpPr>
         <p:spPr>
           <a:xfrm>
-            <a:off x="1084659" y="6085880"/>
+            <a:off x="613279" y="4437473"/>
             <a:ext cx="5863947" cy="766048"/>
           </a:xfrm>
           <a:prstGeom prst="rect">
@@ -13624,7 +13624,7 @@
         </p:nvSpPr>
         <p:spPr>
           <a:xfrm>
-            <a:off x="7434858" y="5343406"/>
+            <a:off x="6963478" y="3694999"/>
             <a:ext cx="6357818" cy="1755458"/>
           </a:xfrm>
           <a:prstGeom prst="roundRect">
@@ -13658,7 +13658,7 @@
         </p:nvSpPr>
         <p:spPr>
           <a:xfrm>
-            <a:off x="7681793" y="5590342"/>
+            <a:off x="7210413" y="3941935"/>
             <a:ext cx="3169087" cy="351949"/>
           </a:xfrm>
           <a:prstGeom prst="rect">
@@ -13700,7 +13700,7 @@
         </p:nvSpPr>
         <p:spPr>
           <a:xfrm>
-            <a:off x="7681793" y="6085880"/>
+            <a:off x="7210413" y="4373180"/>
             <a:ext cx="5863947" cy="766048"/>
           </a:xfrm>
           <a:prstGeom prst="rect">
@@ -13728,7 +13728,503 @@
                 <a:ea typeface="Source Sans 3" pitchFamily="34" charset="-122"/>
                 <a:cs typeface="Source Sans 3" pitchFamily="34" charset="-120"/>
               </a:rPr>
-              <a:t>Fase de pruebas exhaustivas, ajustes finales, documentación y la demo de MediTriage.</a:t>
+              <a:t>Pruebas iniciales, ajustes a módulos críticos, documentación preliminar.</a:t>
+            </a:r>
+            <a:endParaRPr lang="es-419" sz="1850" noProof="0" dirty="0"/>
+          </a:p>
+        </p:txBody>
+      </p:sp>
+      <p:sp>
+        <p:nvSpPr>
+          <p:cNvPr id="19" name="Shape 2">
+            <a:extLst>
+              <a:ext uri="{FF2B5EF4-FFF2-40B4-BE49-F238E27FC236}">
+                <a16:creationId xmlns:a16="http://schemas.microsoft.com/office/drawing/2014/main" id="{3D644982-357E-C6AC-C8A9-ADEE2EAD86BD}"/>
+              </a:ext>
+            </a:extLst>
+          </p:cNvPr>
+          <p:cNvSpPr/>
+          <p:nvPr/>
+        </p:nvSpPr>
+        <p:spPr>
+          <a:xfrm>
+            <a:off x="427197" y="5791550"/>
+            <a:ext cx="4158734" cy="2138482"/>
+          </a:xfrm>
+          <a:prstGeom prst="roundRect">
+            <a:avLst>
+              <a:gd name="adj" fmla="val 26865"/>
+            </a:avLst>
+          </a:prstGeom>
+          <a:solidFill>
+            <a:srgbClr val="F4D4F7"/>
+          </a:solidFill>
+          <a:ln w="7620">
+            <a:solidFill>
+              <a:srgbClr val="DABADD"/>
+            </a:solidFill>
+            <a:prstDash val="solid"/>
+          </a:ln>
+        </p:spPr>
+        <p:txBody>
+          <a:bodyPr/>
+          <a:lstStyle/>
+          <a:p>
+            <a:endParaRPr lang="es-419" noProof="0" dirty="0"/>
+          </a:p>
+        </p:txBody>
+      </p:sp>
+      <p:sp>
+        <p:nvSpPr>
+          <p:cNvPr id="20" name="Text 3">
+            <a:extLst>
+              <a:ext uri="{FF2B5EF4-FFF2-40B4-BE49-F238E27FC236}">
+                <a16:creationId xmlns:a16="http://schemas.microsoft.com/office/drawing/2014/main" id="{E9CA09F7-3C05-D062-D9FD-B184EBF938A8}"/>
+              </a:ext>
+            </a:extLst>
+          </p:cNvPr>
+          <p:cNvSpPr/>
+          <p:nvPr/>
+        </p:nvSpPr>
+        <p:spPr>
+          <a:xfrm>
+            <a:off x="1001493" y="5892035"/>
+            <a:ext cx="3015139" cy="351949"/>
+          </a:xfrm>
+          <a:prstGeom prst="rect">
+            <a:avLst/>
+          </a:prstGeom>
+          <a:noFill/>
+          <a:ln/>
+        </p:spPr>
+        <p:txBody>
+          <a:bodyPr wrap="none" lIns="0" tIns="0" rIns="0" bIns="0" rtlCol="0" anchor="t"/>
+          <a:lstStyle/>
+          <a:p>
+            <a:pPr marL="0" indent="0" algn="l">
+              <a:lnSpc>
+                <a:spcPts val="2750"/>
+              </a:lnSpc>
+              <a:buNone/>
+            </a:pPr>
+            <a:r>
+              <a:rPr lang="es-419" sz="2200" noProof="0" dirty="0">
+                <a:solidFill>
+                  <a:srgbClr val="272525"/>
+                </a:solidFill>
+                <a:latin typeface="Source Serif 4 Semi Bold" pitchFamily="34" charset="0"/>
+                <a:ea typeface="Source Serif 4 Semi Bold" pitchFamily="34" charset="-122"/>
+                <a:cs typeface="Source Serif 4 Semi Bold" pitchFamily="34" charset="-120"/>
+              </a:rPr>
+              <a:t>Sprint 6 (Semanas </a:t>
+            </a:r>
+            <a:r>
+              <a:rPr lang="es-419" sz="2200" dirty="0">
+                <a:solidFill>
+                  <a:srgbClr val="272525"/>
+                </a:solidFill>
+                <a:latin typeface="Source Serif 4 Semi Bold" pitchFamily="34" charset="0"/>
+                <a:ea typeface="Source Serif 4 Semi Bold" pitchFamily="34" charset="-122"/>
+                <a:cs typeface="Source Serif 4 Semi Bold" pitchFamily="34" charset="-120"/>
+              </a:rPr>
+              <a:t>11-12</a:t>
+            </a:r>
+            <a:r>
+              <a:rPr lang="es-419" sz="2200" noProof="0" dirty="0">
+                <a:solidFill>
+                  <a:srgbClr val="272525"/>
+                </a:solidFill>
+                <a:latin typeface="Source Serif 4 Semi Bold" pitchFamily="34" charset="0"/>
+                <a:ea typeface="Source Serif 4 Semi Bold" pitchFamily="34" charset="-122"/>
+                <a:cs typeface="Source Serif 4 Semi Bold" pitchFamily="34" charset="-120"/>
+              </a:rPr>
+              <a:t>)</a:t>
+            </a:r>
+            <a:endParaRPr lang="es-419" sz="2200" noProof="0" dirty="0"/>
+          </a:p>
+        </p:txBody>
+      </p:sp>
+      <p:sp>
+        <p:nvSpPr>
+          <p:cNvPr id="21" name="Text 4">
+            <a:extLst>
+              <a:ext uri="{FF2B5EF4-FFF2-40B4-BE49-F238E27FC236}">
+                <a16:creationId xmlns:a16="http://schemas.microsoft.com/office/drawing/2014/main" id="{0E7A348C-EB32-C00F-43AA-04EFD44D96F8}"/>
+              </a:ext>
+            </a:extLst>
+          </p:cNvPr>
+          <p:cNvSpPr/>
+          <p:nvPr/>
+        </p:nvSpPr>
+        <p:spPr>
+          <a:xfrm>
+            <a:off x="674132" y="6306665"/>
+            <a:ext cx="3664863" cy="1149072"/>
+          </a:xfrm>
+          <a:prstGeom prst="rect">
+            <a:avLst/>
+          </a:prstGeom>
+          <a:noFill/>
+          <a:ln/>
+        </p:spPr>
+        <p:txBody>
+          <a:bodyPr wrap="square" lIns="0" tIns="0" rIns="0" bIns="0" rtlCol="0" anchor="t"/>
+          <a:lstStyle/>
+          <a:p>
+            <a:pPr marL="0" indent="0" algn="l">
+              <a:lnSpc>
+                <a:spcPts val="3000"/>
+              </a:lnSpc>
+              <a:buNone/>
+            </a:pPr>
+            <a:r>
+              <a:rPr lang="es-419" sz="1850" noProof="0" dirty="0">
+                <a:solidFill>
+                  <a:srgbClr val="272525"/>
+                </a:solidFill>
+                <a:latin typeface="Source Sans 3" pitchFamily="34" charset="0"/>
+                <a:ea typeface="Source Sans 3" pitchFamily="34" charset="-122"/>
+                <a:cs typeface="Source Sans 3" pitchFamily="34" charset="-120"/>
+              </a:rPr>
+              <a:t>Optimización y mejoras UX/UI del </a:t>
+            </a:r>
+            <a:r>
+              <a:rPr lang="es-419" sz="1850" noProof="0" dirty="0" err="1">
+                <a:solidFill>
+                  <a:srgbClr val="272525"/>
+                </a:solidFill>
+                <a:latin typeface="Source Sans 3" pitchFamily="34" charset="0"/>
+                <a:ea typeface="Source Sans 3" pitchFamily="34" charset="-122"/>
+                <a:cs typeface="Source Sans 3" pitchFamily="34" charset="-120"/>
+              </a:rPr>
+              <a:t>frontend</a:t>
+            </a:r>
+            <a:r>
+              <a:rPr lang="es-419" sz="1850" noProof="0" dirty="0">
+                <a:solidFill>
+                  <a:srgbClr val="272525"/>
+                </a:solidFill>
+                <a:latin typeface="Source Sans 3" pitchFamily="34" charset="0"/>
+                <a:ea typeface="Source Sans 3" pitchFamily="34" charset="-122"/>
+                <a:cs typeface="Source Sans 3" pitchFamily="34" charset="-120"/>
+              </a:rPr>
+              <a:t>.</a:t>
+            </a:r>
+            <a:endParaRPr lang="es-419" sz="1850" noProof="0" dirty="0"/>
+          </a:p>
+        </p:txBody>
+      </p:sp>
+      <p:sp>
+        <p:nvSpPr>
+          <p:cNvPr id="22" name="Shape 5">
+            <a:extLst>
+              <a:ext uri="{FF2B5EF4-FFF2-40B4-BE49-F238E27FC236}">
+                <a16:creationId xmlns:a16="http://schemas.microsoft.com/office/drawing/2014/main" id="{EFD16B74-AD11-8620-AFBA-557F7EEC9788}"/>
+              </a:ext>
+            </a:extLst>
+          </p:cNvPr>
+          <p:cNvSpPr/>
+          <p:nvPr/>
+        </p:nvSpPr>
+        <p:spPr>
+          <a:xfrm>
+            <a:off x="4663017" y="5744673"/>
+            <a:ext cx="4158734" cy="2138482"/>
+          </a:xfrm>
+          <a:prstGeom prst="roundRect">
+            <a:avLst>
+              <a:gd name="adj" fmla="val 26865"/>
+            </a:avLst>
+          </a:prstGeom>
+          <a:solidFill>
+            <a:srgbClr val="F4D4F7"/>
+          </a:solidFill>
+          <a:ln w="7620">
+            <a:solidFill>
+              <a:srgbClr val="DABADD"/>
+            </a:solidFill>
+            <a:prstDash val="solid"/>
+          </a:ln>
+        </p:spPr>
+        <p:txBody>
+          <a:bodyPr/>
+          <a:lstStyle/>
+          <a:p>
+            <a:endParaRPr lang="es-419" noProof="0" dirty="0"/>
+          </a:p>
+        </p:txBody>
+      </p:sp>
+      <p:sp>
+        <p:nvSpPr>
+          <p:cNvPr id="23" name="Text 6">
+            <a:extLst>
+              <a:ext uri="{FF2B5EF4-FFF2-40B4-BE49-F238E27FC236}">
+                <a16:creationId xmlns:a16="http://schemas.microsoft.com/office/drawing/2014/main" id="{D17B3E04-4AF8-B1DA-3433-AE2F122156B8}"/>
+              </a:ext>
+            </a:extLst>
+          </p:cNvPr>
+          <p:cNvSpPr/>
+          <p:nvPr/>
+        </p:nvSpPr>
+        <p:spPr>
+          <a:xfrm>
+            <a:off x="4909953" y="5991608"/>
+            <a:ext cx="3015139" cy="351949"/>
+          </a:xfrm>
+          <a:prstGeom prst="rect">
+            <a:avLst/>
+          </a:prstGeom>
+          <a:noFill/>
+          <a:ln/>
+        </p:spPr>
+        <p:txBody>
+          <a:bodyPr wrap="none" lIns="0" tIns="0" rIns="0" bIns="0" rtlCol="0" anchor="t"/>
+          <a:lstStyle/>
+          <a:p>
+            <a:pPr marL="0" indent="0" algn="l">
+              <a:lnSpc>
+                <a:spcPts val="2750"/>
+              </a:lnSpc>
+              <a:buNone/>
+            </a:pPr>
+            <a:r>
+              <a:rPr lang="es-419" sz="2200" noProof="0" dirty="0">
+                <a:solidFill>
+                  <a:srgbClr val="272525"/>
+                </a:solidFill>
+                <a:latin typeface="Source Serif 4 Semi Bold" pitchFamily="34" charset="0"/>
+                <a:ea typeface="Source Serif 4 Semi Bold" pitchFamily="34" charset="-122"/>
+                <a:cs typeface="Source Serif 4 Semi Bold" pitchFamily="34" charset="-120"/>
+              </a:rPr>
+              <a:t>Sprint 6 (Semanas </a:t>
+            </a:r>
+            <a:r>
+              <a:rPr lang="es-419" sz="2200" dirty="0">
+                <a:solidFill>
+                  <a:srgbClr val="272525"/>
+                </a:solidFill>
+                <a:latin typeface="Source Serif 4 Semi Bold" pitchFamily="34" charset="0"/>
+                <a:ea typeface="Source Serif 4 Semi Bold" pitchFamily="34" charset="-122"/>
+                <a:cs typeface="Source Serif 4 Semi Bold" pitchFamily="34" charset="-120"/>
+              </a:rPr>
+              <a:t>13-14</a:t>
+            </a:r>
+            <a:r>
+              <a:rPr lang="es-419" sz="2200" noProof="0" dirty="0">
+                <a:solidFill>
+                  <a:srgbClr val="272525"/>
+                </a:solidFill>
+                <a:latin typeface="Source Serif 4 Semi Bold" pitchFamily="34" charset="0"/>
+                <a:ea typeface="Source Serif 4 Semi Bold" pitchFamily="34" charset="-122"/>
+                <a:cs typeface="Source Serif 4 Semi Bold" pitchFamily="34" charset="-120"/>
+              </a:rPr>
+              <a:t>)</a:t>
+            </a:r>
+            <a:endParaRPr lang="es-419" sz="2200" noProof="0" dirty="0"/>
+          </a:p>
+        </p:txBody>
+      </p:sp>
+      <p:sp>
+        <p:nvSpPr>
+          <p:cNvPr id="24" name="Text 7">
+            <a:extLst>
+              <a:ext uri="{FF2B5EF4-FFF2-40B4-BE49-F238E27FC236}">
+                <a16:creationId xmlns:a16="http://schemas.microsoft.com/office/drawing/2014/main" id="{EEAFFABD-C7F3-2097-966E-9BD994465AB6}"/>
+              </a:ext>
+            </a:extLst>
+          </p:cNvPr>
+          <p:cNvSpPr/>
+          <p:nvPr/>
+        </p:nvSpPr>
+        <p:spPr>
+          <a:xfrm>
+            <a:off x="4880162" y="6306665"/>
+            <a:ext cx="3886674" cy="1376427"/>
+          </a:xfrm>
+          <a:prstGeom prst="rect">
+            <a:avLst/>
+          </a:prstGeom>
+          <a:noFill/>
+          <a:ln/>
+        </p:spPr>
+        <p:txBody>
+          <a:bodyPr wrap="square" lIns="0" tIns="0" rIns="0" bIns="0" rtlCol="0" anchor="t"/>
+          <a:lstStyle/>
+          <a:p>
+            <a:pPr marL="0" indent="0" algn="l">
+              <a:lnSpc>
+                <a:spcPts val="3000"/>
+              </a:lnSpc>
+              <a:buNone/>
+            </a:pPr>
+            <a:r>
+              <a:rPr lang="es-419" sz="1850" noProof="0" dirty="0">
+                <a:solidFill>
+                  <a:srgbClr val="272525"/>
+                </a:solidFill>
+                <a:latin typeface="Source Sans 3" pitchFamily="34" charset="0"/>
+                <a:ea typeface="Source Sans 3" pitchFamily="34" charset="-122"/>
+                <a:cs typeface="Source Sans 3" pitchFamily="34" charset="-120"/>
+              </a:rPr>
+              <a:t>Pruebas de carga y seguridad. Corrección de bugs, mejoras de rendimiento. Documentación técnica completa.</a:t>
+            </a:r>
+            <a:endParaRPr lang="es-419" sz="1850" noProof="0" dirty="0"/>
+          </a:p>
+        </p:txBody>
+      </p:sp>
+      <p:sp>
+        <p:nvSpPr>
+          <p:cNvPr id="25" name="Shape 8">
+            <a:extLst>
+              <a:ext uri="{FF2B5EF4-FFF2-40B4-BE49-F238E27FC236}">
+                <a16:creationId xmlns:a16="http://schemas.microsoft.com/office/drawing/2014/main" id="{E9D9C1DF-B186-8D4E-BA10-296A9B69CDD5}"/>
+              </a:ext>
+            </a:extLst>
+          </p:cNvPr>
+          <p:cNvSpPr/>
+          <p:nvPr/>
+        </p:nvSpPr>
+        <p:spPr>
+          <a:xfrm>
+            <a:off x="9061067" y="5744673"/>
+            <a:ext cx="4158853" cy="2138482"/>
+          </a:xfrm>
+          <a:prstGeom prst="roundRect">
+            <a:avLst>
+              <a:gd name="adj" fmla="val 26865"/>
+            </a:avLst>
+          </a:prstGeom>
+          <a:solidFill>
+            <a:srgbClr val="F4D4F7"/>
+          </a:solidFill>
+          <a:ln w="7620">
+            <a:solidFill>
+              <a:srgbClr val="DABADD"/>
+            </a:solidFill>
+            <a:prstDash val="solid"/>
+          </a:ln>
+        </p:spPr>
+        <p:txBody>
+          <a:bodyPr/>
+          <a:lstStyle/>
+          <a:p>
+            <a:endParaRPr lang="es-419" noProof="0" dirty="0"/>
+          </a:p>
+        </p:txBody>
+      </p:sp>
+      <p:sp>
+        <p:nvSpPr>
+          <p:cNvPr id="26" name="Text 9">
+            <a:extLst>
+              <a:ext uri="{FF2B5EF4-FFF2-40B4-BE49-F238E27FC236}">
+                <a16:creationId xmlns:a16="http://schemas.microsoft.com/office/drawing/2014/main" id="{058DD391-0FAF-8F1D-7458-9DE65AB45A68}"/>
+              </a:ext>
+            </a:extLst>
+          </p:cNvPr>
+          <p:cNvSpPr/>
+          <p:nvPr/>
+        </p:nvSpPr>
+        <p:spPr>
+          <a:xfrm>
+            <a:off x="9308003" y="5991608"/>
+            <a:ext cx="3015139" cy="351949"/>
+          </a:xfrm>
+          <a:prstGeom prst="rect">
+            <a:avLst/>
+          </a:prstGeom>
+          <a:noFill/>
+          <a:ln/>
+        </p:spPr>
+        <p:txBody>
+          <a:bodyPr wrap="none" lIns="0" tIns="0" rIns="0" bIns="0" rtlCol="0" anchor="t"/>
+          <a:lstStyle/>
+          <a:p>
+            <a:pPr marL="0" indent="0" algn="l">
+              <a:lnSpc>
+                <a:spcPts val="2750"/>
+              </a:lnSpc>
+              <a:buNone/>
+            </a:pPr>
+            <a:r>
+              <a:rPr lang="es-419" sz="2200" noProof="0" dirty="0">
+                <a:solidFill>
+                  <a:srgbClr val="272525"/>
+                </a:solidFill>
+                <a:latin typeface="Source Serif 4 Semi Bold" pitchFamily="34" charset="0"/>
+                <a:ea typeface="Source Serif 4 Semi Bold" pitchFamily="34" charset="-122"/>
+                <a:cs typeface="Source Serif 4 Semi Bold" pitchFamily="34" charset="-120"/>
+              </a:rPr>
+              <a:t>Sprint 7 (Semanas </a:t>
+            </a:r>
+            <a:r>
+              <a:rPr lang="es-419" sz="2200" dirty="0">
+                <a:solidFill>
+                  <a:srgbClr val="272525"/>
+                </a:solidFill>
+                <a:latin typeface="Source Serif 4 Semi Bold" pitchFamily="34" charset="0"/>
+                <a:ea typeface="Source Serif 4 Semi Bold" pitchFamily="34" charset="-122"/>
+                <a:cs typeface="Source Serif 4 Semi Bold" pitchFamily="34" charset="-120"/>
+              </a:rPr>
+              <a:t>15</a:t>
+            </a:r>
+            <a:r>
+              <a:rPr lang="es-419" sz="2200" noProof="0" dirty="0">
+                <a:solidFill>
+                  <a:srgbClr val="272525"/>
+                </a:solidFill>
+                <a:latin typeface="Source Serif 4 Semi Bold" pitchFamily="34" charset="0"/>
+                <a:ea typeface="Source Serif 4 Semi Bold" pitchFamily="34" charset="-122"/>
+                <a:cs typeface="Source Serif 4 Semi Bold" pitchFamily="34" charset="-120"/>
+              </a:rPr>
+              <a:t>)</a:t>
+            </a:r>
+            <a:endParaRPr lang="es-419" sz="2200" noProof="0" dirty="0"/>
+          </a:p>
+        </p:txBody>
+      </p:sp>
+      <p:sp>
+        <p:nvSpPr>
+          <p:cNvPr id="27" name="Text 10">
+            <a:extLst>
+              <a:ext uri="{FF2B5EF4-FFF2-40B4-BE49-F238E27FC236}">
+                <a16:creationId xmlns:a16="http://schemas.microsoft.com/office/drawing/2014/main" id="{1D3FB32E-CCE2-1219-6296-8F612BE0314F}"/>
+              </a:ext>
+            </a:extLst>
+          </p:cNvPr>
+          <p:cNvSpPr/>
+          <p:nvPr/>
+        </p:nvSpPr>
+        <p:spPr>
+          <a:xfrm>
+            <a:off x="9438631" y="6520529"/>
+            <a:ext cx="3015139" cy="637134"/>
+          </a:xfrm>
+          <a:prstGeom prst="rect">
+            <a:avLst/>
+          </a:prstGeom>
+          <a:noFill/>
+          <a:ln/>
+        </p:spPr>
+        <p:txBody>
+          <a:bodyPr wrap="square" lIns="0" tIns="0" rIns="0" bIns="0" rtlCol="0" anchor="t"/>
+          <a:lstStyle/>
+          <a:p>
+            <a:pPr marL="0" indent="0" algn="l">
+              <a:lnSpc>
+                <a:spcPts val="3000"/>
+              </a:lnSpc>
+              <a:buNone/>
+            </a:pPr>
+            <a:r>
+              <a:rPr lang="es-419" sz="1850" noProof="0" dirty="0">
+                <a:solidFill>
+                  <a:srgbClr val="272525"/>
+                </a:solidFill>
+                <a:latin typeface="Source Sans 3" pitchFamily="34" charset="0"/>
+                <a:ea typeface="Source Sans 3" pitchFamily="34" charset="-122"/>
+                <a:cs typeface="Source Sans 3" pitchFamily="34" charset="-120"/>
+              </a:rPr>
+              <a:t>buffer/finalización</a:t>
             </a:r>
             <a:endParaRPr lang="es-419" sz="1850" noProof="0" dirty="0"/>
           </a:p>
